--- a/my_project.pptx
+++ b/my_project.pptx
@@ -3087,7 +3087,7 @@
     <p:bg>
       <p:bgPr>
         <a:solidFill>
-          <a:srgbClr val="142346"/>
+          <a:srgbClr val="F6F8F4"/>
         </a:solidFill>
         <a:effectLst/>
       </p:bgPr>
@@ -3107,14 +3107,14 @@
         </p:nvSpPr>
         <p:spPr>
           <a:xfrm>
-            <a:off x="0" y="0"/>
-            <a:ext cx="164592" cy="6858000"/>
+            <a:off x="7498079" y="0"/>
+            <a:ext cx="4690872" cy="6858000"/>
           </a:xfrm>
           <a:prstGeom prst="rect">
             <a:avLst/>
           </a:prstGeom>
           <a:solidFill>
-            <a:srgbClr val="5BC0BE"/>
+            <a:srgbClr val="244128"/>
           </a:solidFill>
           <a:ln>
             <a:noFill/>
@@ -3144,14 +3144,253 @@
       </p:sp>
       <p:sp>
         <p:nvSpPr>
-          <p:cNvPr id="3" name="TextBox 2"/>
+          <p:cNvPr id="3" name="Rectangle 2"/>
+          <p:cNvSpPr/>
+          <p:nvPr/>
+        </p:nvSpPr>
+        <p:spPr>
+          <a:xfrm>
+            <a:off x="7498079" y="0"/>
+            <a:ext cx="4690872" cy="1920240"/>
+          </a:xfrm>
+          <a:prstGeom prst="rect">
+            <a:avLst/>
+          </a:prstGeom>
+          <a:solidFill>
+            <a:srgbClr val="3AAA35"/>
+          </a:solidFill>
+          <a:ln>
+            <a:noFill/>
+          </a:ln>
+        </p:spPr>
+        <p:style>
+          <a:lnRef idx="1">
+            <a:schemeClr val="accent1"/>
+          </a:lnRef>
+          <a:fillRef idx="3">
+            <a:schemeClr val="accent1"/>
+          </a:fillRef>
+          <a:effectRef idx="2">
+            <a:schemeClr val="accent1"/>
+          </a:effectRef>
+          <a:fontRef idx="minor">
+            <a:schemeClr val="lt1"/>
+          </a:fontRef>
+        </p:style>
+        <p:txBody>
+          <a:bodyPr rtlCol="0" anchor="ctr"/>
+          <a:lstStyle/>
+          <a:p>
+            <a:pPr algn="ctr"/>
+          </a:p>
+        </p:txBody>
+      </p:sp>
+      <p:sp>
+        <p:nvSpPr>
+          <p:cNvPr id="4" name="Rectangle 3"/>
+          <p:cNvSpPr/>
+          <p:nvPr/>
+        </p:nvSpPr>
+        <p:spPr>
+          <a:xfrm>
+            <a:off x="7498079" y="1920240"/>
+            <a:ext cx="3063240" cy="1097280"/>
+          </a:xfrm>
+          <a:prstGeom prst="rect">
+            <a:avLst/>
+          </a:prstGeom>
+          <a:solidFill>
+            <a:srgbClr val="56975B"/>
+          </a:solidFill>
+          <a:ln>
+            <a:noFill/>
+          </a:ln>
+        </p:spPr>
+        <p:style>
+          <a:lnRef idx="1">
+            <a:schemeClr val="accent1"/>
+          </a:lnRef>
+          <a:fillRef idx="3">
+            <a:schemeClr val="accent1"/>
+          </a:fillRef>
+          <a:effectRef idx="2">
+            <a:schemeClr val="accent1"/>
+          </a:effectRef>
+          <a:fontRef idx="minor">
+            <a:schemeClr val="lt1"/>
+          </a:fontRef>
+        </p:style>
+        <p:txBody>
+          <a:bodyPr rtlCol="0" anchor="ctr"/>
+          <a:lstStyle/>
+          <a:p>
+            <a:pPr algn="ctr"/>
+          </a:p>
+        </p:txBody>
+      </p:sp>
+      <p:sp>
+        <p:nvSpPr>
+          <p:cNvPr id="5" name="Rectangle 4"/>
+          <p:cNvSpPr/>
+          <p:nvPr/>
+        </p:nvSpPr>
+        <p:spPr>
+          <a:xfrm>
+            <a:off x="10561320" y="1920240"/>
+            <a:ext cx="1627632" cy="1097280"/>
+          </a:xfrm>
+          <a:prstGeom prst="rect">
+            <a:avLst/>
+          </a:prstGeom>
+          <a:solidFill>
+            <a:srgbClr val="F39869"/>
+          </a:solidFill>
+          <a:ln>
+            <a:noFill/>
+          </a:ln>
+        </p:spPr>
+        <p:style>
+          <a:lnRef idx="1">
+            <a:schemeClr val="accent1"/>
+          </a:lnRef>
+          <a:fillRef idx="3">
+            <a:schemeClr val="accent1"/>
+          </a:fillRef>
+          <a:effectRef idx="2">
+            <a:schemeClr val="accent1"/>
+          </a:effectRef>
+          <a:fontRef idx="minor">
+            <a:schemeClr val="lt1"/>
+          </a:fontRef>
+        </p:style>
+        <p:txBody>
+          <a:bodyPr rtlCol="0" anchor="ctr"/>
+          <a:lstStyle/>
+          <a:p>
+            <a:pPr algn="ctr"/>
+          </a:p>
+        </p:txBody>
+      </p:sp>
+      <p:sp>
+        <p:nvSpPr>
+          <p:cNvPr id="6" name="Rectangle 5"/>
+          <p:cNvSpPr/>
+          <p:nvPr/>
+        </p:nvSpPr>
+        <p:spPr>
+          <a:xfrm>
+            <a:off x="7498079" y="3017520"/>
+            <a:ext cx="2011680" cy="3840480"/>
+          </a:xfrm>
+          <a:prstGeom prst="rect">
+            <a:avLst/>
+          </a:prstGeom>
+          <a:solidFill>
+            <a:srgbClr val="DB4928"/>
+          </a:solidFill>
+          <a:ln>
+            <a:noFill/>
+          </a:ln>
+        </p:spPr>
+        <p:style>
+          <a:lnRef idx="1">
+            <a:schemeClr val="accent1"/>
+          </a:lnRef>
+          <a:fillRef idx="3">
+            <a:schemeClr val="accent1"/>
+          </a:fillRef>
+          <a:effectRef idx="2">
+            <a:schemeClr val="accent1"/>
+          </a:effectRef>
+          <a:fontRef idx="minor">
+            <a:schemeClr val="lt1"/>
+          </a:fontRef>
+        </p:style>
+        <p:txBody>
+          <a:bodyPr rtlCol="0" anchor="ctr"/>
+          <a:lstStyle/>
+          <a:p>
+            <a:pPr algn="ctr"/>
+          </a:p>
+        </p:txBody>
+      </p:sp>
+      <p:sp>
+        <p:nvSpPr>
+          <p:cNvPr id="7" name="Rectangle 6"/>
+          <p:cNvSpPr/>
+          <p:nvPr/>
+        </p:nvSpPr>
+        <p:spPr>
+          <a:xfrm>
+            <a:off x="9509760" y="3017520"/>
+            <a:ext cx="2679192" cy="3840480"/>
+          </a:xfrm>
+          <a:prstGeom prst="rect">
+            <a:avLst/>
+          </a:prstGeom>
+          <a:solidFill>
+            <a:srgbClr val="244128"/>
+          </a:solidFill>
+          <a:ln>
+            <a:noFill/>
+          </a:ln>
+        </p:spPr>
+        <p:style>
+          <a:lnRef idx="1">
+            <a:schemeClr val="accent1"/>
+          </a:lnRef>
+          <a:fillRef idx="3">
+            <a:schemeClr val="accent1"/>
+          </a:fillRef>
+          <a:effectRef idx="2">
+            <a:schemeClr val="accent1"/>
+          </a:effectRef>
+          <a:fontRef idx="minor">
+            <a:schemeClr val="lt1"/>
+          </a:fontRef>
+        </p:style>
+        <p:txBody>
+          <a:bodyPr rtlCol="0" anchor="ctr"/>
+          <a:lstStyle/>
+          <a:p>
+            <a:pPr algn="ctr"/>
+          </a:p>
+        </p:txBody>
+      </p:sp>
+      <p:pic>
+        <p:nvPicPr>
+          <p:cNvPr id="8" name="Picture 7" descr="spbstu_logo_02.png"/>
+          <p:cNvPicPr>
+            <a:picLocks noChangeAspect="1"/>
+          </p:cNvPicPr>
+          <p:nvPr/>
+        </p:nvPicPr>
+        <p:blipFill>
+          <a:blip r:embed="rId2"/>
+          <a:stretch>
+            <a:fillRect/>
+          </a:stretch>
+        </p:blipFill>
+        <p:spPr>
+          <a:xfrm>
+            <a:off x="502920" y="310896"/>
+            <a:ext cx="1600200" cy="552069"/>
+          </a:xfrm>
+          <a:prstGeom prst="rect">
+            <a:avLst/>
+          </a:prstGeom>
+        </p:spPr>
+      </p:pic>
+      <p:sp>
+        <p:nvSpPr>
+          <p:cNvPr id="9" name="TextBox 8"/>
           <p:cNvSpPr txBox="1"/>
           <p:nvPr/>
         </p:nvSpPr>
         <p:spPr>
           <a:xfrm>
-            <a:off x="822960" y="2057400"/>
-            <a:ext cx="8686800" cy="822960"/>
+            <a:off x="566928" y="1225296"/>
+            <a:ext cx="6172200" cy="320040"/>
           </a:xfrm>
           <a:prstGeom prst="rect">
             <a:avLst/>
@@ -3159,88 +3398,198 @@
           <a:noFill/>
         </p:spPr>
         <p:txBody>
-          <a:bodyPr wrap="none">
+          <a:bodyPr wrap="square">
+            <a:noAutofit/>
+          </a:bodyPr>
+          <a:lstStyle/>
+          <a:p>
+            <a:pPr algn="l"/>
+            <a:r>
+              <a:rPr sz="1400" b="0">
+                <a:solidFill>
+                  <a:srgbClr val="5C675F"/>
+                </a:solidFill>
+                <a:latin typeface="Onest"/>
+              </a:rPr>
+              <a:t>Курсовая работа · выступление 5–7 минут</a:t>
+            </a:r>
+          </a:p>
+        </p:txBody>
+      </p:sp>
+      <p:sp>
+        <p:nvSpPr>
+          <p:cNvPr id="10" name="TextBox 9"/>
+          <p:cNvSpPr txBox="1"/>
+          <p:nvPr/>
+        </p:nvSpPr>
+        <p:spPr>
+          <a:xfrm>
+            <a:off x="530352" y="1737360"/>
+            <a:ext cx="6629400" cy="1508760"/>
+          </a:xfrm>
+          <a:prstGeom prst="rect">
+            <a:avLst/>
+          </a:prstGeom>
+          <a:noFill/>
+        </p:spPr>
+        <p:txBody>
+          <a:bodyPr wrap="square">
+            <a:noAutofit/>
+          </a:bodyPr>
+          <a:lstStyle/>
+          <a:p>
+            <a:pPr algn="l"/>
+            <a:r>
+              <a:rPr sz="3400" b="1">
+                <a:solidFill>
+                  <a:srgbClr val="244128"/>
+                </a:solidFill>
+                <a:latin typeface="Onest"/>
+              </a:rPr>
+              <a:t>Топонимы Санкт-Петербурга</a:t>
+            </a:r>
+            <a:br/>
+            <a:r>
+              <a:t>в лексиконе носителя русского языка</a:t>
+            </a:r>
+          </a:p>
+        </p:txBody>
+      </p:sp>
+      <p:sp>
+        <p:nvSpPr>
+          <p:cNvPr id="11" name="TextBox 10"/>
+          <p:cNvSpPr txBox="1"/>
+          <p:nvPr/>
+        </p:nvSpPr>
+        <p:spPr>
+          <a:xfrm>
+            <a:off x="566928" y="3566160"/>
+            <a:ext cx="6217920" cy="594360"/>
+          </a:xfrm>
+          <a:prstGeom prst="rect">
+            <a:avLst/>
+          </a:prstGeom>
+          <a:noFill/>
+        </p:spPr>
+        <p:txBody>
+          <a:bodyPr wrap="square">
+            <a:noAutofit/>
+          </a:bodyPr>
+          <a:lstStyle/>
+          <a:p>
+            <a:pPr algn="l"/>
+            <a:r>
+              <a:rPr sz="1800" b="0">
+                <a:solidFill>
+                  <a:srgbClr val="000000"/>
+                </a:solidFill>
+                <a:latin typeface="Onest"/>
+              </a:rPr>
+              <a:t>Как официальные, разговорные и исторические названия распределяются между активным и пассивным запасом речи</a:t>
+            </a:r>
+          </a:p>
+        </p:txBody>
+      </p:sp>
+      <p:sp>
+        <p:nvSpPr>
+          <p:cNvPr id="12" name="TextBox 11"/>
+          <p:cNvSpPr txBox="1"/>
+          <p:nvPr/>
+        </p:nvSpPr>
+        <p:spPr>
+          <a:xfrm>
+            <a:off x="566928" y="4983480"/>
+            <a:ext cx="5852160" cy="1005840"/>
+          </a:xfrm>
+          <a:prstGeom prst="rect">
+            <a:avLst/>
+          </a:prstGeom>
+          <a:noFill/>
+        </p:spPr>
+        <p:txBody>
+          <a:bodyPr wrap="square">
             <a:spAutoFit/>
           </a:bodyPr>
           <a:lstStyle/>
           <a:p>
-            <a:pPr algn="l"/>
-            <a:r>
-              <a:rPr sz="5200" b="1">
+            <a:pPr>
+              <a:spcAft>
+                <a:spcPts val="800"/>
+              </a:spcAft>
+            </a:pPr>
+            <a:r>
+              <a:rPr sz="1200" b="0">
+                <a:solidFill>
+                  <a:srgbClr val="5C675F"/>
+                </a:solidFill>
+                <a:latin typeface="Onest"/>
+              </a:rPr>
+              <a:t>Гуманитарный институт · Высшая школа лингвистики и педагогики</a:t>
+            </a:r>
+          </a:p>
+          <a:p>
+            <a:pPr>
+              <a:spcAft>
+                <a:spcPts val="800"/>
+              </a:spcAft>
+            </a:pPr>
+            <a:r>
+              <a:rPr sz="1200" b="0">
+                <a:solidFill>
+                  <a:srgbClr val="5C675F"/>
+                </a:solidFill>
+                <a:latin typeface="Onest"/>
+              </a:rPr>
+              <a:t>Выполнил: К.А. Шин · Руководитель: В.А. Белов</a:t>
+            </a:r>
+          </a:p>
+          <a:p>
+            <a:pPr>
+              <a:spcAft>
+                <a:spcPts val="800"/>
+              </a:spcAft>
+            </a:pPr>
+            <a:r>
+              <a:rPr sz="1200" b="0">
+                <a:solidFill>
+                  <a:srgbClr val="5C675F"/>
+                </a:solidFill>
+                <a:latin typeface="Onest"/>
+              </a:rPr>
+              <a:t>Санкт-Петербург, 2026</a:t>
+            </a:r>
+          </a:p>
+        </p:txBody>
+      </p:sp>
+      <p:sp>
+        <p:nvSpPr>
+          <p:cNvPr id="13" name="TextBox 12"/>
+          <p:cNvSpPr txBox="1"/>
+          <p:nvPr/>
+        </p:nvSpPr>
+        <p:spPr>
+          <a:xfrm>
+            <a:off x="10744200" y="6355080"/>
+            <a:ext cx="822960" cy="228600"/>
+          </a:xfrm>
+          <a:prstGeom prst="rect">
+            <a:avLst/>
+          </a:prstGeom>
+          <a:noFill/>
+        </p:spPr>
+        <p:txBody>
+          <a:bodyPr wrap="square">
+            <a:noAutofit/>
+          </a:bodyPr>
+          <a:lstStyle/>
+          <a:p>
+            <a:pPr algn="r"/>
+            <a:r>
+              <a:rPr sz="1000" b="0">
                 <a:solidFill>
                   <a:srgbClr val="FFFFFF"/>
                 </a:solidFill>
-                <a:latin typeface="Arial"/>
-              </a:rPr>
-              <a:t>Мой проект</a:t>
-            </a:r>
-          </a:p>
-        </p:txBody>
-      </p:sp>
-      <p:sp>
-        <p:nvSpPr>
-          <p:cNvPr id="4" name="TextBox 3"/>
-          <p:cNvSpPr txBox="1"/>
-          <p:nvPr/>
-        </p:nvSpPr>
-        <p:spPr>
-          <a:xfrm>
-            <a:off x="868680" y="3017520"/>
-            <a:ext cx="7863840" cy="640080"/>
-          </a:xfrm>
-          <a:prstGeom prst="rect">
-            <a:avLst/>
-          </a:prstGeom>
-          <a:noFill/>
-        </p:spPr>
-        <p:txBody>
-          <a:bodyPr wrap="none">
-            <a:spAutoFit/>
-          </a:bodyPr>
-          <a:lstStyle/>
-          <a:p>
-            <a:pPr algn="l"/>
-            <a:r>
-              <a:rPr sz="2400" b="0">
-                <a:solidFill>
-                  <a:srgbClr val="DAE8FC"/>
-                </a:solidFill>
-                <a:latin typeface="Arial"/>
-              </a:rPr>
-              <a:t>Краткая презентация идеи, ценности и плана развития</a:t>
-            </a:r>
-          </a:p>
-        </p:txBody>
-      </p:sp>
-      <p:sp>
-        <p:nvSpPr>
-          <p:cNvPr id="5" name="TextBox 4"/>
-          <p:cNvSpPr txBox="1"/>
-          <p:nvPr/>
-        </p:nvSpPr>
-        <p:spPr>
-          <a:xfrm>
-            <a:off x="10789920" y="6400800"/>
-            <a:ext cx="1005840" cy="274320"/>
-          </a:xfrm>
-          <a:prstGeom prst="rect">
-            <a:avLst/>
-          </a:prstGeom>
-          <a:noFill/>
-        </p:spPr>
-        <p:txBody>
-          <a:bodyPr wrap="none">
-            <a:spAutoFit/>
-          </a:bodyPr>
-          <a:lstStyle/>
-          <a:p>
-            <a:pPr algn="r"/>
-            <a:r>
-              <a:rPr sz="1200" b="0">
-                <a:solidFill>
-                  <a:srgbClr val="C3D2EB"/>
-                </a:solidFill>
-                <a:latin typeface="Arial"/>
+                <a:latin typeface="Onest"/>
               </a:rPr>
               <a:t>1/4</a:t>
             </a:r>
@@ -3261,7 +3610,7 @@
     <p:bg>
       <p:bgPr>
         <a:solidFill>
-          <a:srgbClr val="1C305C"/>
+          <a:srgbClr val="F6F8F4"/>
         </a:solidFill>
         <a:effectLst/>
       </p:bgPr>
@@ -3273,22 +3622,116 @@
         <p:nvPr/>
       </p:nvGrpSpPr>
       <p:grpSpPr/>
-      <p:sp>
-        <p:nvSpPr>
-          <p:cNvPr id="2" name="Rectangle 1"/>
+      <p:pic>
+        <p:nvPicPr>
+          <p:cNvPr id="2" name="Picture 1" descr="spbstu_logo_02.png"/>
+          <p:cNvPicPr>
+            <a:picLocks noChangeAspect="1"/>
+          </p:cNvPicPr>
+          <p:nvPr/>
+        </p:nvPicPr>
+        <p:blipFill>
+          <a:blip r:embed="rId2"/>
+          <a:stretch>
+            <a:fillRect/>
+          </a:stretch>
+        </p:blipFill>
+        <p:spPr>
+          <a:xfrm>
+            <a:off x="502920" y="310896"/>
+            <a:ext cx="1600200" cy="552069"/>
+          </a:xfrm>
+          <a:prstGeom prst="rect">
+            <a:avLst/>
+          </a:prstGeom>
+        </p:spPr>
+      </p:pic>
+      <p:sp>
+        <p:nvSpPr>
+          <p:cNvPr id="3" name="TextBox 2"/>
+          <p:cNvSpPr txBox="1"/>
+          <p:nvPr/>
+        </p:nvSpPr>
+        <p:spPr>
+          <a:xfrm>
+            <a:off x="2743200" y="320040"/>
+            <a:ext cx="6217920" cy="310896"/>
+          </a:xfrm>
+          <a:prstGeom prst="rect">
+            <a:avLst/>
+          </a:prstGeom>
+          <a:noFill/>
+        </p:spPr>
+        <p:txBody>
+          <a:bodyPr wrap="square">
+            <a:noAutofit/>
+          </a:bodyPr>
+          <a:lstStyle/>
+          <a:p>
+            <a:pPr algn="l"/>
+            <a:r>
+              <a:rPr sz="1000" b="0">
+                <a:solidFill>
+                  <a:srgbClr val="5C675F"/>
+                </a:solidFill>
+                <a:latin typeface="Onest"/>
+              </a:rPr>
+              <a:t>Тема, материал и методика</a:t>
+            </a:r>
+          </a:p>
+        </p:txBody>
+      </p:sp>
+      <p:sp>
+        <p:nvSpPr>
+          <p:cNvPr id="4" name="TextBox 3"/>
+          <p:cNvSpPr txBox="1"/>
+          <p:nvPr/>
+        </p:nvSpPr>
+        <p:spPr>
+          <a:xfrm>
+            <a:off x="2743200" y="630936"/>
+            <a:ext cx="7132320" cy="475488"/>
+          </a:xfrm>
+          <a:prstGeom prst="rect">
+            <a:avLst/>
+          </a:prstGeom>
+          <a:noFill/>
+        </p:spPr>
+        <p:txBody>
+          <a:bodyPr wrap="square">
+            <a:noAutofit/>
+          </a:bodyPr>
+          <a:lstStyle/>
+          <a:p>
+            <a:pPr algn="l"/>
+            <a:r>
+              <a:rPr sz="2400" b="1">
+                <a:solidFill>
+                  <a:srgbClr val="244128"/>
+                </a:solidFill>
+                <a:latin typeface="Onest"/>
+              </a:rPr>
+              <a:t>Исследовательская рамка</a:t>
+            </a:r>
+          </a:p>
+        </p:txBody>
+      </p:sp>
+      <p:sp>
+        <p:nvSpPr>
+          <p:cNvPr id="5" name="Rectangle 4"/>
           <p:cNvSpPr/>
           <p:nvPr/>
         </p:nvSpPr>
         <p:spPr>
           <a:xfrm>
-            <a:off x="0" y="0"/>
-            <a:ext cx="164592" cy="6858000"/>
+            <a:off x="502920" y="1170432"/>
+            <a:ext cx="11155680" cy="32004"/>
           </a:xfrm>
           <a:prstGeom prst="rect">
             <a:avLst/>
           </a:prstGeom>
           <a:solidFill>
-            <a:srgbClr val="FFB95F"/>
+            <a:srgbClr val="3AAA35"/>
           </a:solidFill>
           <a:ln>
             <a:noFill/>
@@ -3318,14 +3761,14 @@
       </p:sp>
       <p:sp>
         <p:nvSpPr>
-          <p:cNvPr id="3" name="TextBox 2"/>
+          <p:cNvPr id="6" name="TextBox 5"/>
           <p:cNvSpPr txBox="1"/>
           <p:nvPr/>
         </p:nvSpPr>
         <p:spPr>
           <a:xfrm>
-            <a:off x="822960" y="1051560"/>
-            <a:ext cx="10241280" cy="457200"/>
+            <a:off x="9464040" y="411480"/>
+            <a:ext cx="2194560" cy="310896"/>
           </a:xfrm>
           <a:prstGeom prst="rect">
             <a:avLst/>
@@ -3333,34 +3776,798 @@
           <a:noFill/>
         </p:spPr>
         <p:txBody>
-          <a:bodyPr wrap="none">
+          <a:bodyPr wrap="square">
+            <a:noAutofit/>
+          </a:bodyPr>
+          <a:lstStyle/>
+          <a:p>
+            <a:pPr algn="r"/>
+            <a:r>
+              <a:rPr sz="1000" b="0">
+                <a:solidFill>
+                  <a:srgbClr val="5C675F"/>
+                </a:solidFill>
+                <a:latin typeface="Onest"/>
+              </a:rPr>
+              <a:t>1:00–2:30</a:t>
+            </a:r>
+          </a:p>
+        </p:txBody>
+      </p:sp>
+      <p:sp>
+        <p:nvSpPr>
+          <p:cNvPr id="7" name="TextBox 6"/>
+          <p:cNvSpPr txBox="1"/>
+          <p:nvPr/>
+        </p:nvSpPr>
+        <p:spPr>
+          <a:xfrm>
+            <a:off x="11018520" y="6355080"/>
+            <a:ext cx="640080" cy="228600"/>
+          </a:xfrm>
+          <a:prstGeom prst="rect">
+            <a:avLst/>
+          </a:prstGeom>
+          <a:noFill/>
+        </p:spPr>
+        <p:txBody>
+          <a:bodyPr wrap="square">
+            <a:noAutofit/>
+          </a:bodyPr>
+          <a:lstStyle/>
+          <a:p>
+            <a:pPr algn="r"/>
+            <a:r>
+              <a:rPr sz="1000" b="0">
+                <a:solidFill>
+                  <a:srgbClr val="5C675F"/>
+                </a:solidFill>
+                <a:latin typeface="Onest"/>
+              </a:rPr>
+              <a:t>2/4</a:t>
+            </a:r>
+          </a:p>
+        </p:txBody>
+      </p:sp>
+      <p:sp>
+        <p:nvSpPr>
+          <p:cNvPr id="8" name="Rectangle 7"/>
+          <p:cNvSpPr/>
+          <p:nvPr/>
+        </p:nvSpPr>
+        <p:spPr>
+          <a:xfrm>
+            <a:off x="685800" y="1600200"/>
+            <a:ext cx="3383280" cy="1417320"/>
+          </a:xfrm>
+          <a:prstGeom prst="rect">
+            <a:avLst/>
+          </a:prstGeom>
+          <a:solidFill>
+            <a:srgbClr val="FFFFFF"/>
+          </a:solidFill>
+          <a:ln>
+            <a:noFill/>
+          </a:ln>
+        </p:spPr>
+        <p:style>
+          <a:lnRef idx="1">
+            <a:schemeClr val="accent1"/>
+          </a:lnRef>
+          <a:fillRef idx="3">
+            <a:schemeClr val="accent1"/>
+          </a:fillRef>
+          <a:effectRef idx="2">
+            <a:schemeClr val="accent1"/>
+          </a:effectRef>
+          <a:fontRef idx="minor">
+            <a:schemeClr val="lt1"/>
+          </a:fontRef>
+        </p:style>
+        <p:txBody>
+          <a:bodyPr rtlCol="0" anchor="ctr"/>
+          <a:lstStyle/>
+          <a:p>
+            <a:pPr algn="ctr"/>
+          </a:p>
+        </p:txBody>
+      </p:sp>
+      <p:sp>
+        <p:nvSpPr>
+          <p:cNvPr id="9" name="Rectangle 8"/>
+          <p:cNvSpPr/>
+          <p:nvPr/>
+        </p:nvSpPr>
+        <p:spPr>
+          <a:xfrm>
+            <a:off x="685800" y="1600200"/>
+            <a:ext cx="109728" cy="1417320"/>
+          </a:xfrm>
+          <a:prstGeom prst="rect">
+            <a:avLst/>
+          </a:prstGeom>
+          <a:solidFill>
+            <a:srgbClr val="3AAA35"/>
+          </a:solidFill>
+          <a:ln>
+            <a:noFill/>
+          </a:ln>
+        </p:spPr>
+        <p:style>
+          <a:lnRef idx="1">
+            <a:schemeClr val="accent1"/>
+          </a:lnRef>
+          <a:fillRef idx="3">
+            <a:schemeClr val="accent1"/>
+          </a:fillRef>
+          <a:effectRef idx="2">
+            <a:schemeClr val="accent1"/>
+          </a:effectRef>
+          <a:fontRef idx="minor">
+            <a:schemeClr val="lt1"/>
+          </a:fontRef>
+        </p:style>
+        <p:txBody>
+          <a:bodyPr rtlCol="0" anchor="ctr"/>
+          <a:lstStyle/>
+          <a:p>
+            <a:pPr algn="ctr"/>
+          </a:p>
+        </p:txBody>
+      </p:sp>
+      <p:sp>
+        <p:nvSpPr>
+          <p:cNvPr id="10" name="TextBox 9"/>
+          <p:cNvSpPr txBox="1"/>
+          <p:nvPr/>
+        </p:nvSpPr>
+        <p:spPr>
+          <a:xfrm>
+            <a:off x="941832" y="1810512"/>
+            <a:ext cx="2971800" cy="320040"/>
+          </a:xfrm>
+          <a:prstGeom prst="rect">
+            <a:avLst/>
+          </a:prstGeom>
+          <a:noFill/>
+        </p:spPr>
+        <p:txBody>
+          <a:bodyPr wrap="square">
+            <a:noAutofit/>
+          </a:bodyPr>
+          <a:lstStyle/>
+          <a:p>
+            <a:pPr algn="l"/>
+            <a:r>
+              <a:rPr sz="1500" b="1">
+                <a:solidFill>
+                  <a:srgbClr val="244128"/>
+                </a:solidFill>
+                <a:latin typeface="Onest"/>
+              </a:rPr>
+              <a:t>Цель</a:t>
+            </a:r>
+          </a:p>
+        </p:txBody>
+      </p:sp>
+      <p:sp>
+        <p:nvSpPr>
+          <p:cNvPr id="11" name="TextBox 10"/>
+          <p:cNvSpPr txBox="1"/>
+          <p:nvPr/>
+        </p:nvSpPr>
+        <p:spPr>
+          <a:xfrm>
+            <a:off x="941832" y="2258568"/>
+            <a:ext cx="2971800" cy="630936"/>
+          </a:xfrm>
+          <a:prstGeom prst="rect">
+            <a:avLst/>
+          </a:prstGeom>
+          <a:noFill/>
+        </p:spPr>
+        <p:txBody>
+          <a:bodyPr wrap="square">
+            <a:noAutofit/>
+          </a:bodyPr>
+          <a:lstStyle/>
+          <a:p>
+            <a:pPr algn="l"/>
+            <a:r>
+              <a:rPr sz="1700" b="0">
+                <a:solidFill>
+                  <a:srgbClr val="000000"/>
+                </a:solidFill>
+                <a:latin typeface="Onest"/>
+              </a:rPr>
+              <a:t>Описать, как петербургские топонимы представлены в лексиконе современных носителей русского языка.</a:t>
+            </a:r>
+          </a:p>
+        </p:txBody>
+      </p:sp>
+      <p:sp>
+        <p:nvSpPr>
+          <p:cNvPr id="12" name="Rectangle 11"/>
+          <p:cNvSpPr/>
+          <p:nvPr/>
+        </p:nvSpPr>
+        <p:spPr>
+          <a:xfrm>
+            <a:off x="4389120" y="1600200"/>
+            <a:ext cx="3383280" cy="1417320"/>
+          </a:xfrm>
+          <a:prstGeom prst="rect">
+            <a:avLst/>
+          </a:prstGeom>
+          <a:solidFill>
+            <a:srgbClr val="FFFFFF"/>
+          </a:solidFill>
+          <a:ln>
+            <a:noFill/>
+          </a:ln>
+        </p:spPr>
+        <p:style>
+          <a:lnRef idx="1">
+            <a:schemeClr val="accent1"/>
+          </a:lnRef>
+          <a:fillRef idx="3">
+            <a:schemeClr val="accent1"/>
+          </a:fillRef>
+          <a:effectRef idx="2">
+            <a:schemeClr val="accent1"/>
+          </a:effectRef>
+          <a:fontRef idx="minor">
+            <a:schemeClr val="lt1"/>
+          </a:fontRef>
+        </p:style>
+        <p:txBody>
+          <a:bodyPr rtlCol="0" anchor="ctr"/>
+          <a:lstStyle/>
+          <a:p>
+            <a:pPr algn="ctr"/>
+          </a:p>
+        </p:txBody>
+      </p:sp>
+      <p:sp>
+        <p:nvSpPr>
+          <p:cNvPr id="13" name="Rectangle 12"/>
+          <p:cNvSpPr/>
+          <p:nvPr/>
+        </p:nvSpPr>
+        <p:spPr>
+          <a:xfrm>
+            <a:off x="4389120" y="1600200"/>
+            <a:ext cx="109728" cy="1417320"/>
+          </a:xfrm>
+          <a:prstGeom prst="rect">
+            <a:avLst/>
+          </a:prstGeom>
+          <a:solidFill>
+            <a:srgbClr val="DB4928"/>
+          </a:solidFill>
+          <a:ln>
+            <a:noFill/>
+          </a:ln>
+        </p:spPr>
+        <p:style>
+          <a:lnRef idx="1">
+            <a:schemeClr val="accent1"/>
+          </a:lnRef>
+          <a:fillRef idx="3">
+            <a:schemeClr val="accent1"/>
+          </a:fillRef>
+          <a:effectRef idx="2">
+            <a:schemeClr val="accent1"/>
+          </a:effectRef>
+          <a:fontRef idx="minor">
+            <a:schemeClr val="lt1"/>
+          </a:fontRef>
+        </p:style>
+        <p:txBody>
+          <a:bodyPr rtlCol="0" anchor="ctr"/>
+          <a:lstStyle/>
+          <a:p>
+            <a:pPr algn="ctr"/>
+          </a:p>
+        </p:txBody>
+      </p:sp>
+      <p:sp>
+        <p:nvSpPr>
+          <p:cNvPr id="14" name="TextBox 13"/>
+          <p:cNvSpPr txBox="1"/>
+          <p:nvPr/>
+        </p:nvSpPr>
+        <p:spPr>
+          <a:xfrm>
+            <a:off x="4645152" y="1810512"/>
+            <a:ext cx="2971800" cy="320040"/>
+          </a:xfrm>
+          <a:prstGeom prst="rect">
+            <a:avLst/>
+          </a:prstGeom>
+          <a:noFill/>
+        </p:spPr>
+        <p:txBody>
+          <a:bodyPr wrap="square">
+            <a:noAutofit/>
+          </a:bodyPr>
+          <a:lstStyle/>
+          <a:p>
+            <a:pPr algn="l"/>
+            <a:r>
+              <a:rPr sz="1500" b="1">
+                <a:solidFill>
+                  <a:srgbClr val="244128"/>
+                </a:solidFill>
+                <a:latin typeface="Onest"/>
+              </a:rPr>
+              <a:t>Гипотеза</a:t>
+            </a:r>
+          </a:p>
+        </p:txBody>
+      </p:sp>
+      <p:sp>
+        <p:nvSpPr>
+          <p:cNvPr id="15" name="TextBox 14"/>
+          <p:cNvSpPr txBox="1"/>
+          <p:nvPr/>
+        </p:nvSpPr>
+        <p:spPr>
+          <a:xfrm>
+            <a:off x="4645152" y="2258568"/>
+            <a:ext cx="2971800" cy="630936"/>
+          </a:xfrm>
+          <a:prstGeom prst="rect">
+            <a:avLst/>
+          </a:prstGeom>
+          <a:noFill/>
+        </p:spPr>
+        <p:txBody>
+          <a:bodyPr wrap="square">
+            <a:noAutofit/>
+          </a:bodyPr>
+          <a:lstStyle/>
+          <a:p>
+            <a:pPr algn="l"/>
+            <a:r>
+              <a:rPr sz="1700" b="0">
+                <a:solidFill>
+                  <a:srgbClr val="000000"/>
+                </a:solidFill>
+                <a:latin typeface="Onest"/>
+              </a:rPr>
+              <a:t>Официальные, разговорные и исторические названия работают в разных функциональных зонах.</a:t>
+            </a:r>
+          </a:p>
+        </p:txBody>
+      </p:sp>
+      <p:sp>
+        <p:nvSpPr>
+          <p:cNvPr id="16" name="Rectangle 15"/>
+          <p:cNvSpPr/>
+          <p:nvPr/>
+        </p:nvSpPr>
+        <p:spPr>
+          <a:xfrm>
+            <a:off x="8092440" y="1600200"/>
+            <a:ext cx="3383280" cy="1417320"/>
+          </a:xfrm>
+          <a:prstGeom prst="rect">
+            <a:avLst/>
+          </a:prstGeom>
+          <a:solidFill>
+            <a:srgbClr val="FFFFFF"/>
+          </a:solidFill>
+          <a:ln>
+            <a:noFill/>
+          </a:ln>
+        </p:spPr>
+        <p:style>
+          <a:lnRef idx="1">
+            <a:schemeClr val="accent1"/>
+          </a:lnRef>
+          <a:fillRef idx="3">
+            <a:schemeClr val="accent1"/>
+          </a:fillRef>
+          <a:effectRef idx="2">
+            <a:schemeClr val="accent1"/>
+          </a:effectRef>
+          <a:fontRef idx="minor">
+            <a:schemeClr val="lt1"/>
+          </a:fontRef>
+        </p:style>
+        <p:txBody>
+          <a:bodyPr rtlCol="0" anchor="ctr"/>
+          <a:lstStyle/>
+          <a:p>
+            <a:pPr algn="ctr"/>
+          </a:p>
+        </p:txBody>
+      </p:sp>
+      <p:sp>
+        <p:nvSpPr>
+          <p:cNvPr id="17" name="Rectangle 16"/>
+          <p:cNvSpPr/>
+          <p:nvPr/>
+        </p:nvSpPr>
+        <p:spPr>
+          <a:xfrm>
+            <a:off x="8092440" y="1600200"/>
+            <a:ext cx="109728" cy="1417320"/>
+          </a:xfrm>
+          <a:prstGeom prst="rect">
+            <a:avLst/>
+          </a:prstGeom>
+          <a:solidFill>
+            <a:srgbClr val="3AAA35"/>
+          </a:solidFill>
+          <a:ln>
+            <a:noFill/>
+          </a:ln>
+        </p:spPr>
+        <p:style>
+          <a:lnRef idx="1">
+            <a:schemeClr val="accent1"/>
+          </a:lnRef>
+          <a:fillRef idx="3">
+            <a:schemeClr val="accent1"/>
+          </a:fillRef>
+          <a:effectRef idx="2">
+            <a:schemeClr val="accent1"/>
+          </a:effectRef>
+          <a:fontRef idx="minor">
+            <a:schemeClr val="lt1"/>
+          </a:fontRef>
+        </p:style>
+        <p:txBody>
+          <a:bodyPr rtlCol="0" anchor="ctr"/>
+          <a:lstStyle/>
+          <a:p>
+            <a:pPr algn="ctr"/>
+          </a:p>
+        </p:txBody>
+      </p:sp>
+      <p:sp>
+        <p:nvSpPr>
+          <p:cNvPr id="18" name="TextBox 17"/>
+          <p:cNvSpPr txBox="1"/>
+          <p:nvPr/>
+        </p:nvSpPr>
+        <p:spPr>
+          <a:xfrm>
+            <a:off x="8348472" y="1810512"/>
+            <a:ext cx="2971800" cy="320040"/>
+          </a:xfrm>
+          <a:prstGeom prst="rect">
+            <a:avLst/>
+          </a:prstGeom>
+          <a:noFill/>
+        </p:spPr>
+        <p:txBody>
+          <a:bodyPr wrap="square">
+            <a:noAutofit/>
+          </a:bodyPr>
+          <a:lstStyle/>
+          <a:p>
+            <a:pPr algn="l"/>
+            <a:r>
+              <a:rPr sz="1500" b="1">
+                <a:solidFill>
+                  <a:srgbClr val="244128"/>
+                </a:solidFill>
+                <a:latin typeface="Onest"/>
+              </a:rPr>
+              <a:t>Материал</a:t>
+            </a:r>
+          </a:p>
+        </p:txBody>
+      </p:sp>
+      <p:sp>
+        <p:nvSpPr>
+          <p:cNvPr id="19" name="TextBox 18"/>
+          <p:cNvSpPr txBox="1"/>
+          <p:nvPr/>
+        </p:nvSpPr>
+        <p:spPr>
+          <a:xfrm>
+            <a:off x="8348472" y="2258568"/>
+            <a:ext cx="2971800" cy="630936"/>
+          </a:xfrm>
+          <a:prstGeom prst="rect">
+            <a:avLst/>
+          </a:prstGeom>
+          <a:noFill/>
+        </p:spPr>
+        <p:txBody>
+          <a:bodyPr wrap="square">
+            <a:noAutofit/>
+          </a:bodyPr>
+          <a:lstStyle/>
+          <a:p>
+            <a:pPr algn="l"/>
+            <a:r>
+              <a:rPr sz="1700" b="0">
+                <a:solidFill>
+                  <a:srgbClr val="000000"/>
+                </a:solidFill>
+                <a:latin typeface="Onest"/>
+              </a:rPr>
+              <a:t>Онлайн-анкета Google Forms: 54 полных ответа, 12 топонимов, множественный выбор контекстов.</a:t>
+            </a:r>
+          </a:p>
+        </p:txBody>
+      </p:sp>
+      <p:sp>
+        <p:nvSpPr>
+          <p:cNvPr id="20" name="Rectangle 19"/>
+          <p:cNvSpPr/>
+          <p:nvPr/>
+        </p:nvSpPr>
+        <p:spPr>
+          <a:xfrm>
+            <a:off x="685800" y="3520440"/>
+            <a:ext cx="10789920" cy="2194560"/>
+          </a:xfrm>
+          <a:prstGeom prst="rect">
+            <a:avLst/>
+          </a:prstGeom>
+          <a:solidFill>
+            <a:srgbClr val="FFFFFF"/>
+          </a:solidFill>
+          <a:ln>
+            <a:noFill/>
+          </a:ln>
+        </p:spPr>
+        <p:style>
+          <a:lnRef idx="1">
+            <a:schemeClr val="accent1"/>
+          </a:lnRef>
+          <a:fillRef idx="3">
+            <a:schemeClr val="accent1"/>
+          </a:fillRef>
+          <a:effectRef idx="2">
+            <a:schemeClr val="accent1"/>
+          </a:effectRef>
+          <a:fontRef idx="minor">
+            <a:schemeClr val="lt1"/>
+          </a:fontRef>
+        </p:style>
+        <p:txBody>
+          <a:bodyPr rtlCol="0" anchor="ctr"/>
+          <a:lstStyle/>
+          <a:p>
+            <a:pPr algn="ctr"/>
+          </a:p>
+        </p:txBody>
+      </p:sp>
+      <p:sp>
+        <p:nvSpPr>
+          <p:cNvPr id="21" name="TextBox 20"/>
+          <p:cNvSpPr txBox="1"/>
+          <p:nvPr/>
+        </p:nvSpPr>
+        <p:spPr>
+          <a:xfrm>
+            <a:off x="960120" y="3749039"/>
+            <a:ext cx="4297680" cy="320040"/>
+          </a:xfrm>
+          <a:prstGeom prst="rect">
+            <a:avLst/>
+          </a:prstGeom>
+          <a:noFill/>
+        </p:spPr>
+        <p:txBody>
+          <a:bodyPr wrap="square">
+            <a:noAutofit/>
+          </a:bodyPr>
+          <a:lstStyle/>
+          <a:p>
+            <a:pPr algn="l"/>
+            <a:r>
+              <a:rPr sz="1800" b="1">
+                <a:solidFill>
+                  <a:srgbClr val="244128"/>
+                </a:solidFill>
+                <a:latin typeface="Onest"/>
+              </a:rPr>
+              <a:t>Как фиксировалось употребление</a:t>
+            </a:r>
+          </a:p>
+        </p:txBody>
+      </p:sp>
+      <p:sp>
+        <p:nvSpPr>
+          <p:cNvPr id="22" name="TextBox 21"/>
+          <p:cNvSpPr txBox="1"/>
+          <p:nvPr/>
+        </p:nvSpPr>
+        <p:spPr>
+          <a:xfrm>
+            <a:off x="960120" y="4187952"/>
+            <a:ext cx="4800600" cy="1051560"/>
+          </a:xfrm>
+          <a:prstGeom prst="rect">
+            <a:avLst/>
+          </a:prstGeom>
+          <a:noFill/>
+        </p:spPr>
+        <p:txBody>
+          <a:bodyPr wrap="square">
             <a:spAutoFit/>
           </a:bodyPr>
           <a:lstStyle/>
           <a:p>
+            <a:pPr>
+              <a:spcAft>
+                <a:spcPts val="900"/>
+              </a:spcAft>
+            </a:pPr>
+            <a:r>
+              <a:rPr sz="1400" b="1">
+                <a:solidFill>
+                  <a:srgbClr val="3AAA35"/>
+                </a:solidFill>
+                <a:latin typeface="Onest"/>
+              </a:rPr>
+              <a:t>■ </a:t>
+            </a:r>
+            <a:r>
+              <a:rPr sz="1400" b="0">
+                <a:solidFill>
+                  <a:srgbClr val="000000"/>
+                </a:solidFill>
+                <a:latin typeface="Onest"/>
+              </a:rPr>
+              <a:t>семья и близкие</a:t>
+            </a:r>
+          </a:p>
+          <a:p>
+            <a:pPr>
+              <a:spcAft>
+                <a:spcPts val="900"/>
+              </a:spcAft>
+            </a:pPr>
+            <a:r>
+              <a:rPr sz="1400" b="1">
+                <a:solidFill>
+                  <a:srgbClr val="3AAA35"/>
+                </a:solidFill>
+                <a:latin typeface="Onest"/>
+              </a:rPr>
+              <a:t>■ </a:t>
+            </a:r>
+            <a:r>
+              <a:rPr sz="1400" b="0">
+                <a:solidFill>
+                  <a:srgbClr val="000000"/>
+                </a:solidFill>
+                <a:latin typeface="Onest"/>
+              </a:rPr>
+              <a:t>друзья / приятели</a:t>
+            </a:r>
+          </a:p>
+          <a:p>
+            <a:pPr>
+              <a:spcAft>
+                <a:spcPts val="900"/>
+              </a:spcAft>
+            </a:pPr>
+            <a:r>
+              <a:rPr sz="1400" b="1">
+                <a:solidFill>
+                  <a:srgbClr val="3AAA35"/>
+                </a:solidFill>
+                <a:latin typeface="Onest"/>
+              </a:rPr>
+              <a:t>■ </a:t>
+            </a:r>
+            <a:r>
+              <a:rPr sz="1400" b="0">
+                <a:solidFill>
+                  <a:srgbClr val="000000"/>
+                </a:solidFill>
+                <a:latin typeface="Onest"/>
+              </a:rPr>
+              <a:t>работа или учёба</a:t>
+            </a:r>
+          </a:p>
+          <a:p>
+            <a:pPr>
+              <a:spcAft>
+                <a:spcPts val="900"/>
+              </a:spcAft>
+            </a:pPr>
+            <a:r>
+              <a:rPr sz="1400" b="1">
+                <a:solidFill>
+                  <a:srgbClr val="3AAA35"/>
+                </a:solidFill>
+                <a:latin typeface="Onest"/>
+              </a:rPr>
+              <a:t>■ </a:t>
+            </a:r>
+            <a:r>
+              <a:rPr sz="1400" b="0">
+                <a:solidFill>
+                  <a:srgbClr val="000000"/>
+                </a:solidFill>
+                <a:latin typeface="Onest"/>
+              </a:rPr>
+              <a:t>соцсети и мессенджеры</a:t>
+            </a:r>
+          </a:p>
+          <a:p>
+            <a:pPr>
+              <a:spcAft>
+                <a:spcPts val="900"/>
+              </a:spcAft>
+            </a:pPr>
+            <a:r>
+              <a:rPr sz="1400" b="1">
+                <a:solidFill>
+                  <a:srgbClr val="3AAA35"/>
+                </a:solidFill>
+                <a:latin typeface="Onest"/>
+              </a:rPr>
+              <a:t>■ </a:t>
+            </a:r>
+            <a:r>
+              <a:rPr sz="1400" b="0">
+                <a:solidFill>
+                  <a:srgbClr val="000000"/>
+                </a:solidFill>
+                <a:latin typeface="Onest"/>
+              </a:rPr>
+              <a:t>пассивное знание / незнание</a:t>
+            </a:r>
+          </a:p>
+        </p:txBody>
+      </p:sp>
+      <p:sp>
+        <p:nvSpPr>
+          <p:cNvPr id="23" name="TextBox 22"/>
+          <p:cNvSpPr txBox="1"/>
+          <p:nvPr/>
+        </p:nvSpPr>
+        <p:spPr>
+          <a:xfrm>
+            <a:off x="6400800" y="3730752"/>
+            <a:ext cx="4389120" cy="320040"/>
+          </a:xfrm>
+          <a:prstGeom prst="rect">
+            <a:avLst/>
+          </a:prstGeom>
+          <a:noFill/>
+        </p:spPr>
+        <p:txBody>
+          <a:bodyPr wrap="square">
+            <a:noAutofit/>
+          </a:bodyPr>
+          <a:lstStyle/>
+          <a:p>
             <a:pPr algn="l"/>
             <a:r>
-              <a:rPr sz="2800" b="1">
-                <a:solidFill>
-                  <a:srgbClr val="FFFFFF"/>
-                </a:solidFill>
-                <a:latin typeface="Arial"/>
+              <a:rPr sz="1800" b="1">
+                <a:solidFill>
+                  <a:srgbClr val="244128"/>
+                </a:solidFill>
+                <a:latin typeface="Onest"/>
               </a:rPr>
-              <a:t>Идея и цель</a:t>
-            </a:r>
-          </a:p>
-        </p:txBody>
-      </p:sp>
-      <p:sp>
-        <p:nvSpPr>
-          <p:cNvPr id="4" name="TextBox 3"/>
+              <a:t>Фокус интерпретации</a:t>
+            </a:r>
+          </a:p>
+        </p:txBody>
+      </p:sp>
+      <p:sp>
+        <p:nvSpPr>
+          <p:cNvPr id="24" name="TextBox 23"/>
           <p:cNvSpPr txBox="1"/>
           <p:nvPr/>
         </p:nvSpPr>
         <p:spPr>
           <a:xfrm>
-            <a:off x="822960" y="1691640"/>
-            <a:ext cx="10241280" cy="3749040"/>
+            <a:off x="6400800" y="4187952"/>
+            <a:ext cx="4434840" cy="1051560"/>
           </a:xfrm>
           <a:prstGeom prst="rect">
             <a:avLst/>
@@ -3368,83 +4575,107 @@
           <a:noFill/>
         </p:spPr>
         <p:txBody>
-          <a:bodyPr wrap="none">
-            <a:spAutoFit/>
+          <a:bodyPr wrap="square">
+            <a:noAutofit/>
           </a:bodyPr>
           <a:lstStyle/>
           <a:p>
-            <a:pPr>
-              <a:defRPr sz="2100">
-                <a:solidFill>
-                  <a:srgbClr val="EBF1FF"/>
-                </a:solidFill>
-                <a:latin typeface="Arial"/>
-              </a:defRPr>
-            </a:pPr>
-            <a:r>
-              <a:t>Создать понятное и полезное решение для выбранной аудитории</a:t>
-            </a:r>
-          </a:p>
-          <a:p>
-            <a:pPr>
-              <a:defRPr sz="2100">
-                <a:solidFill>
-                  <a:srgbClr val="EBF1FF"/>
-                </a:solidFill>
-                <a:latin typeface="Arial"/>
-              </a:defRPr>
-            </a:pPr>
-            <a:r>
-              <a:t>Сократить ручные действия и упростить ежедневные процессы</a:t>
-            </a:r>
-          </a:p>
-          <a:p>
-            <a:pPr>
-              <a:defRPr sz="2100">
-                <a:solidFill>
-                  <a:srgbClr val="EBF1FF"/>
-                </a:solidFill>
-                <a:latin typeface="Arial"/>
-              </a:defRPr>
-            </a:pPr>
-            <a:r>
-              <a:t>Собрать обратную связь и быстро улучшать продукт</a:t>
-            </a:r>
-          </a:p>
-        </p:txBody>
-      </p:sp>
-      <p:sp>
-        <p:nvSpPr>
-          <p:cNvPr id="5" name="TextBox 4"/>
-          <p:cNvSpPr txBox="1"/>
-          <p:nvPr/>
-        </p:nvSpPr>
-        <p:spPr>
-          <a:xfrm>
-            <a:off x="10789920" y="6400800"/>
-            <a:ext cx="1005840" cy="274320"/>
-          </a:xfrm>
-          <a:prstGeom prst="rect">
-            <a:avLst/>
-          </a:prstGeom>
-          <a:noFill/>
-        </p:spPr>
-        <p:txBody>
-          <a:bodyPr wrap="none">
-            <a:spAutoFit/>
-          </a:bodyPr>
-          <a:lstStyle/>
-          <a:p>
-            <a:pPr algn="r"/>
-            <a:r>
-              <a:rPr sz="1200" b="0">
-                <a:solidFill>
-                  <a:srgbClr val="C3D2EB"/>
-                </a:solidFill>
-                <a:latin typeface="Arial"/>
+            <a:pPr algn="l"/>
+            <a:r>
+              <a:rPr sz="1600" b="0">
+                <a:solidFill>
+                  <a:srgbClr val="000000"/>
+                </a:solidFill>
+                <a:latin typeface="Onest"/>
               </a:rPr>
-              <a:t>2/4</a:t>
-            </a:r>
+              <a:t>Выборка в основном отражает речевую практику молодых городских носителей и приезжих студентов, поэтому результаты читаются как модель молодежного топонимикона.</a:t>
+            </a:r>
+          </a:p>
+        </p:txBody>
+      </p:sp>
+      <p:sp>
+        <p:nvSpPr>
+          <p:cNvPr id="25" name="Rectangle 24"/>
+          <p:cNvSpPr/>
+          <p:nvPr/>
+        </p:nvSpPr>
+        <p:spPr>
+          <a:xfrm>
+            <a:off x="685800" y="5989320"/>
+            <a:ext cx="6583680" cy="164592"/>
+          </a:xfrm>
+          <a:prstGeom prst="rect">
+            <a:avLst/>
+          </a:prstGeom>
+          <a:solidFill>
+            <a:srgbClr val="3AAA35"/>
+          </a:solidFill>
+          <a:ln>
+            <a:noFill/>
+          </a:ln>
+        </p:spPr>
+        <p:style>
+          <a:lnRef idx="1">
+            <a:schemeClr val="accent1"/>
+          </a:lnRef>
+          <a:fillRef idx="3">
+            <a:schemeClr val="accent1"/>
+          </a:fillRef>
+          <a:effectRef idx="2">
+            <a:schemeClr val="accent1"/>
+          </a:effectRef>
+          <a:fontRef idx="minor">
+            <a:schemeClr val="lt1"/>
+          </a:fontRef>
+        </p:style>
+        <p:txBody>
+          <a:bodyPr rtlCol="0" anchor="ctr"/>
+          <a:lstStyle/>
+          <a:p>
+            <a:pPr algn="ctr"/>
+          </a:p>
+        </p:txBody>
+      </p:sp>
+      <p:sp>
+        <p:nvSpPr>
+          <p:cNvPr id="26" name="Rectangle 25"/>
+          <p:cNvSpPr/>
+          <p:nvPr/>
+        </p:nvSpPr>
+        <p:spPr>
+          <a:xfrm>
+            <a:off x="7269480" y="5989320"/>
+            <a:ext cx="4206240" cy="164592"/>
+          </a:xfrm>
+          <a:prstGeom prst="rect">
+            <a:avLst/>
+          </a:prstGeom>
+          <a:solidFill>
+            <a:srgbClr val="DB4928"/>
+          </a:solidFill>
+          <a:ln>
+            <a:noFill/>
+          </a:ln>
+        </p:spPr>
+        <p:style>
+          <a:lnRef idx="1">
+            <a:schemeClr val="accent1"/>
+          </a:lnRef>
+          <a:fillRef idx="3">
+            <a:schemeClr val="accent1"/>
+          </a:fillRef>
+          <a:effectRef idx="2">
+            <a:schemeClr val="accent1"/>
+          </a:effectRef>
+          <a:fontRef idx="minor">
+            <a:schemeClr val="lt1"/>
+          </a:fontRef>
+        </p:style>
+        <p:txBody>
+          <a:bodyPr rtlCol="0" anchor="ctr"/>
+          <a:lstStyle/>
+          <a:p>
+            <a:pPr algn="ctr"/>
           </a:p>
         </p:txBody>
       </p:sp>
@@ -3462,7 +4693,7 @@
     <p:bg>
       <p:bgPr>
         <a:solidFill>
-          <a:srgbClr val="203A43"/>
+          <a:srgbClr val="F6F8F4"/>
         </a:solidFill>
         <a:effectLst/>
       </p:bgPr>
@@ -3474,22 +4705,116 @@
         <p:nvPr/>
       </p:nvGrpSpPr>
       <p:grpSpPr/>
-      <p:sp>
-        <p:nvSpPr>
-          <p:cNvPr id="2" name="Rectangle 1"/>
+      <p:pic>
+        <p:nvPicPr>
+          <p:cNvPr id="2" name="Picture 1" descr="spbstu_logo_02.png"/>
+          <p:cNvPicPr>
+            <a:picLocks noChangeAspect="1"/>
+          </p:cNvPicPr>
+          <p:nvPr/>
+        </p:nvPicPr>
+        <p:blipFill>
+          <a:blip r:embed="rId2"/>
+          <a:stretch>
+            <a:fillRect/>
+          </a:stretch>
+        </p:blipFill>
+        <p:spPr>
+          <a:xfrm>
+            <a:off x="502920" y="310896"/>
+            <a:ext cx="1600200" cy="552069"/>
+          </a:xfrm>
+          <a:prstGeom prst="rect">
+            <a:avLst/>
+          </a:prstGeom>
+        </p:spPr>
+      </p:pic>
+      <p:sp>
+        <p:nvSpPr>
+          <p:cNvPr id="3" name="TextBox 2"/>
+          <p:cNvSpPr txBox="1"/>
+          <p:nvPr/>
+        </p:nvSpPr>
+        <p:spPr>
+          <a:xfrm>
+            <a:off x="2743200" y="320040"/>
+            <a:ext cx="6217920" cy="310896"/>
+          </a:xfrm>
+          <a:prstGeom prst="rect">
+            <a:avLst/>
+          </a:prstGeom>
+          <a:noFill/>
+        </p:spPr>
+        <p:txBody>
+          <a:bodyPr wrap="square">
+            <a:noAutofit/>
+          </a:bodyPr>
+          <a:lstStyle/>
+          <a:p>
+            <a:pPr algn="l"/>
+            <a:r>
+              <a:rPr sz="1000" b="0">
+                <a:solidFill>
+                  <a:srgbClr val="5C675F"/>
+                </a:solidFill>
+                <a:latin typeface="Onest"/>
+              </a:rPr>
+              <a:t>N = 54 · проценты от числа респондентов</a:t>
+            </a:r>
+          </a:p>
+        </p:txBody>
+      </p:sp>
+      <p:sp>
+        <p:nvSpPr>
+          <p:cNvPr id="4" name="TextBox 3"/>
+          <p:cNvSpPr txBox="1"/>
+          <p:nvPr/>
+        </p:nvSpPr>
+        <p:spPr>
+          <a:xfrm>
+            <a:off x="2743200" y="630936"/>
+            <a:ext cx="7132320" cy="475488"/>
+          </a:xfrm>
+          <a:prstGeom prst="rect">
+            <a:avLst/>
+          </a:prstGeom>
+          <a:noFill/>
+        </p:spPr>
+        <p:txBody>
+          <a:bodyPr wrap="square">
+            <a:noAutofit/>
+          </a:bodyPr>
+          <a:lstStyle/>
+          <a:p>
+            <a:pPr algn="l"/>
+            <a:r>
+              <a:rPr sz="2400" b="1">
+                <a:solidFill>
+                  <a:srgbClr val="244128"/>
+                </a:solidFill>
+                <a:latin typeface="Onest"/>
+              </a:rPr>
+              <a:t>Ключевые результаты анкетирования</a:t>
+            </a:r>
+          </a:p>
+        </p:txBody>
+      </p:sp>
+      <p:sp>
+        <p:nvSpPr>
+          <p:cNvPr id="5" name="Rectangle 4"/>
           <p:cNvSpPr/>
           <p:nvPr/>
         </p:nvSpPr>
         <p:spPr>
           <a:xfrm>
-            <a:off x="0" y="0"/>
-            <a:ext cx="164592" cy="6858000"/>
+            <a:off x="502920" y="1170432"/>
+            <a:ext cx="11155680" cy="32004"/>
           </a:xfrm>
           <a:prstGeom prst="rect">
             <a:avLst/>
           </a:prstGeom>
           <a:solidFill>
-            <a:srgbClr val="73DBB4"/>
+            <a:srgbClr val="3AAA35"/>
           </a:solidFill>
           <a:ln>
             <a:noFill/>
@@ -3519,14 +4844,14 @@
       </p:sp>
       <p:sp>
         <p:nvSpPr>
-          <p:cNvPr id="3" name="TextBox 2"/>
+          <p:cNvPr id="6" name="TextBox 5"/>
           <p:cNvSpPr txBox="1"/>
           <p:nvPr/>
         </p:nvSpPr>
         <p:spPr>
           <a:xfrm>
-            <a:off x="822960" y="1051560"/>
-            <a:ext cx="10241280" cy="457200"/>
+            <a:off x="9464040" y="411480"/>
+            <a:ext cx="2194560" cy="310896"/>
           </a:xfrm>
           <a:prstGeom prst="rect">
             <a:avLst/>
@@ -3534,118 +4859,1160 @@
           <a:noFill/>
         </p:spPr>
         <p:txBody>
-          <a:bodyPr wrap="none">
+          <a:bodyPr wrap="square">
+            <a:noAutofit/>
+          </a:bodyPr>
+          <a:lstStyle/>
+          <a:p>
+            <a:pPr algn="r"/>
+            <a:r>
+              <a:rPr sz="1000" b="0">
+                <a:solidFill>
+                  <a:srgbClr val="5C675F"/>
+                </a:solidFill>
+                <a:latin typeface="Onest"/>
+              </a:rPr>
+              <a:t>2:30–5:00</a:t>
+            </a:r>
+          </a:p>
+        </p:txBody>
+      </p:sp>
+      <p:sp>
+        <p:nvSpPr>
+          <p:cNvPr id="7" name="TextBox 6"/>
+          <p:cNvSpPr txBox="1"/>
+          <p:nvPr/>
+        </p:nvSpPr>
+        <p:spPr>
+          <a:xfrm>
+            <a:off x="11018520" y="6355080"/>
+            <a:ext cx="640080" cy="228600"/>
+          </a:xfrm>
+          <a:prstGeom prst="rect">
+            <a:avLst/>
+          </a:prstGeom>
+          <a:noFill/>
+        </p:spPr>
+        <p:txBody>
+          <a:bodyPr wrap="square">
+            <a:noAutofit/>
+          </a:bodyPr>
+          <a:lstStyle/>
+          <a:p>
+            <a:pPr algn="r"/>
+            <a:r>
+              <a:rPr sz="1000" b="0">
+                <a:solidFill>
+                  <a:srgbClr val="5C675F"/>
+                </a:solidFill>
+                <a:latin typeface="Onest"/>
+              </a:rPr>
+              <a:t>3/4</a:t>
+            </a:r>
+          </a:p>
+        </p:txBody>
+      </p:sp>
+      <p:sp>
+        <p:nvSpPr>
+          <p:cNvPr id="8" name="Rectangle 7"/>
+          <p:cNvSpPr/>
+          <p:nvPr/>
+        </p:nvSpPr>
+        <p:spPr>
+          <a:xfrm>
+            <a:off x="658368" y="1508760"/>
+            <a:ext cx="6400800" cy="4389120"/>
+          </a:xfrm>
+          <a:prstGeom prst="rect">
+            <a:avLst/>
+          </a:prstGeom>
+          <a:solidFill>
+            <a:srgbClr val="FFFFFF"/>
+          </a:solidFill>
+          <a:ln>
+            <a:noFill/>
+          </a:ln>
+        </p:spPr>
+        <p:style>
+          <a:lnRef idx="1">
+            <a:schemeClr val="accent1"/>
+          </a:lnRef>
+          <a:fillRef idx="3">
+            <a:schemeClr val="accent1"/>
+          </a:fillRef>
+          <a:effectRef idx="2">
+            <a:schemeClr val="accent1"/>
+          </a:effectRef>
+          <a:fontRef idx="minor">
+            <a:schemeClr val="lt1"/>
+          </a:fontRef>
+        </p:style>
+        <p:txBody>
+          <a:bodyPr rtlCol="0" anchor="ctr"/>
+          <a:lstStyle/>
+          <a:p>
+            <a:pPr algn="ctr"/>
+          </a:p>
+        </p:txBody>
+      </p:sp>
+      <p:sp>
+        <p:nvSpPr>
+          <p:cNvPr id="9" name="TextBox 8"/>
+          <p:cNvSpPr txBox="1"/>
+          <p:nvPr/>
+        </p:nvSpPr>
+        <p:spPr>
+          <a:xfrm>
+            <a:off x="914400" y="1783080"/>
+            <a:ext cx="5760720" cy="320040"/>
+          </a:xfrm>
+          <a:prstGeom prst="rect">
+            <a:avLst/>
+          </a:prstGeom>
+          <a:noFill/>
+        </p:spPr>
+        <p:txBody>
+          <a:bodyPr wrap="square">
+            <a:noAutofit/>
+          </a:bodyPr>
+          <a:lstStyle/>
+          <a:p>
+            <a:pPr algn="l"/>
+            <a:r>
+              <a:rPr sz="1800" b="1">
+                <a:solidFill>
+                  <a:srgbClr val="244128"/>
+                </a:solidFill>
+                <a:latin typeface="Onest"/>
+              </a:rPr>
+              <a:t>Активность и пассивность топонимов</a:t>
+            </a:r>
+          </a:p>
+        </p:txBody>
+      </p:sp>
+      <p:sp>
+        <p:nvSpPr>
+          <p:cNvPr id="10" name="TextBox 9"/>
+          <p:cNvSpPr txBox="1"/>
+          <p:nvPr/>
+        </p:nvSpPr>
+        <p:spPr>
+          <a:xfrm>
+            <a:off x="914400" y="2331720"/>
+            <a:ext cx="5303520" cy="228600"/>
+          </a:xfrm>
+          <a:prstGeom prst="rect">
+            <a:avLst/>
+          </a:prstGeom>
+          <a:noFill/>
+        </p:spPr>
+        <p:txBody>
+          <a:bodyPr wrap="square">
+            <a:noAutofit/>
+          </a:bodyPr>
+          <a:lstStyle/>
+          <a:p>
+            <a:pPr algn="l"/>
+            <a:r>
+              <a:rPr sz="1400" b="1">
+                <a:solidFill>
+                  <a:srgbClr val="000000"/>
+                </a:solidFill>
+                <a:latin typeface="Onest"/>
+              </a:rPr>
+              <a:t>Питер · общение с друзьями</a:t>
+            </a:r>
+          </a:p>
+        </p:txBody>
+      </p:sp>
+      <p:sp>
+        <p:nvSpPr>
+          <p:cNvPr id="11" name="Rectangle 10"/>
+          <p:cNvSpPr/>
+          <p:nvPr/>
+        </p:nvSpPr>
+        <p:spPr>
+          <a:xfrm>
+            <a:off x="914400" y="2651760"/>
+            <a:ext cx="5303520" cy="164592"/>
+          </a:xfrm>
+          <a:prstGeom prst="rect">
+            <a:avLst/>
+          </a:prstGeom>
+          <a:solidFill>
+            <a:srgbClr val="DAE2D8"/>
+          </a:solidFill>
+          <a:ln>
+            <a:noFill/>
+          </a:ln>
+        </p:spPr>
+        <p:style>
+          <a:lnRef idx="1">
+            <a:schemeClr val="accent1"/>
+          </a:lnRef>
+          <a:fillRef idx="3">
+            <a:schemeClr val="accent1"/>
+          </a:fillRef>
+          <a:effectRef idx="2">
+            <a:schemeClr val="accent1"/>
+          </a:effectRef>
+          <a:fontRef idx="minor">
+            <a:schemeClr val="lt1"/>
+          </a:fontRef>
+        </p:style>
+        <p:txBody>
+          <a:bodyPr rtlCol="0" anchor="ctr"/>
+          <a:lstStyle/>
+          <a:p>
+            <a:pPr algn="ctr"/>
+          </a:p>
+        </p:txBody>
+      </p:sp>
+      <p:sp>
+        <p:nvSpPr>
+          <p:cNvPr id="12" name="Rectangle 11"/>
+          <p:cNvSpPr/>
+          <p:nvPr/>
+        </p:nvSpPr>
+        <p:spPr>
+          <a:xfrm>
+            <a:off x="914400" y="2651760"/>
+            <a:ext cx="4911059" cy="164592"/>
+          </a:xfrm>
+          <a:prstGeom prst="rect">
+            <a:avLst/>
+          </a:prstGeom>
+          <a:solidFill>
+            <a:srgbClr val="3AAA35"/>
+          </a:solidFill>
+          <a:ln>
+            <a:noFill/>
+          </a:ln>
+        </p:spPr>
+        <p:style>
+          <a:lnRef idx="1">
+            <a:schemeClr val="accent1"/>
+          </a:lnRef>
+          <a:fillRef idx="3">
+            <a:schemeClr val="accent1"/>
+          </a:fillRef>
+          <a:effectRef idx="2">
+            <a:schemeClr val="accent1"/>
+          </a:effectRef>
+          <a:fontRef idx="minor">
+            <a:schemeClr val="lt1"/>
+          </a:fontRef>
+        </p:style>
+        <p:txBody>
+          <a:bodyPr rtlCol="0" anchor="ctr"/>
+          <a:lstStyle/>
+          <a:p>
+            <a:pPr algn="ctr"/>
+          </a:p>
+        </p:txBody>
+      </p:sp>
+      <p:sp>
+        <p:nvSpPr>
+          <p:cNvPr id="13" name="TextBox 12"/>
+          <p:cNvSpPr txBox="1"/>
+          <p:nvPr/>
+        </p:nvSpPr>
+        <p:spPr>
+          <a:xfrm>
+            <a:off x="5532120" y="2514600"/>
+            <a:ext cx="685800" cy="228600"/>
+          </a:xfrm>
+          <a:prstGeom prst="rect">
+            <a:avLst/>
+          </a:prstGeom>
+          <a:noFill/>
+        </p:spPr>
+        <p:txBody>
+          <a:bodyPr wrap="square">
+            <a:noAutofit/>
+          </a:bodyPr>
+          <a:lstStyle/>
+          <a:p>
+            <a:pPr algn="r"/>
+            <a:r>
+              <a:rPr sz="1300" b="1">
+                <a:solidFill>
+                  <a:srgbClr val="3AAA35"/>
+                </a:solidFill>
+                <a:latin typeface="Onest"/>
+              </a:rPr>
+              <a:t>92.6%</a:t>
+            </a:r>
+          </a:p>
+        </p:txBody>
+      </p:sp>
+      <p:sp>
+        <p:nvSpPr>
+          <p:cNvPr id="14" name="TextBox 13"/>
+          <p:cNvSpPr txBox="1"/>
+          <p:nvPr/>
+        </p:nvSpPr>
+        <p:spPr>
+          <a:xfrm>
+            <a:off x="914400" y="2898648"/>
+            <a:ext cx="5303520" cy="256032"/>
+          </a:xfrm>
+          <a:prstGeom prst="rect">
+            <a:avLst/>
+          </a:prstGeom>
+          <a:noFill/>
+        </p:spPr>
+        <p:txBody>
+          <a:bodyPr wrap="square">
+            <a:noAutofit/>
+          </a:bodyPr>
+          <a:lstStyle/>
+          <a:p>
+            <a:pPr algn="l"/>
+            <a:r>
+              <a:rPr sz="1000" b="0">
+                <a:solidFill>
+                  <a:srgbClr val="5C675F"/>
+                </a:solidFill>
+                <a:latin typeface="Onest"/>
+              </a:rPr>
+              <a:t>ядро неформального городского лексикона</a:t>
+            </a:r>
+          </a:p>
+        </p:txBody>
+      </p:sp>
+      <p:sp>
+        <p:nvSpPr>
+          <p:cNvPr id="15" name="TextBox 14"/>
+          <p:cNvSpPr txBox="1"/>
+          <p:nvPr/>
+        </p:nvSpPr>
+        <p:spPr>
+          <a:xfrm>
+            <a:off x="914400" y="3154680"/>
+            <a:ext cx="5303520" cy="228600"/>
+          </a:xfrm>
+          <a:prstGeom prst="rect">
+            <a:avLst/>
+          </a:prstGeom>
+          <a:noFill/>
+        </p:spPr>
+        <p:txBody>
+          <a:bodyPr wrap="square">
+            <a:noAutofit/>
+          </a:bodyPr>
+          <a:lstStyle/>
+          <a:p>
+            <a:pPr algn="l"/>
+            <a:r>
+              <a:rPr sz="1400" b="1">
+                <a:solidFill>
+                  <a:srgbClr val="000000"/>
+                </a:solidFill>
+                <a:latin typeface="Onest"/>
+              </a:rPr>
+              <a:t>Невский · общение с друзьями</a:t>
+            </a:r>
+          </a:p>
+        </p:txBody>
+      </p:sp>
+      <p:sp>
+        <p:nvSpPr>
+          <p:cNvPr id="16" name="Rectangle 15"/>
+          <p:cNvSpPr/>
+          <p:nvPr/>
+        </p:nvSpPr>
+        <p:spPr>
+          <a:xfrm>
+            <a:off x="914400" y="3474720"/>
+            <a:ext cx="5303520" cy="164592"/>
+          </a:xfrm>
+          <a:prstGeom prst="rect">
+            <a:avLst/>
+          </a:prstGeom>
+          <a:solidFill>
+            <a:srgbClr val="DAE2D8"/>
+          </a:solidFill>
+          <a:ln>
+            <a:noFill/>
+          </a:ln>
+        </p:spPr>
+        <p:style>
+          <a:lnRef idx="1">
+            <a:schemeClr val="accent1"/>
+          </a:lnRef>
+          <a:fillRef idx="3">
+            <a:schemeClr val="accent1"/>
+          </a:fillRef>
+          <a:effectRef idx="2">
+            <a:schemeClr val="accent1"/>
+          </a:effectRef>
+          <a:fontRef idx="minor">
+            <a:schemeClr val="lt1"/>
+          </a:fontRef>
+        </p:style>
+        <p:txBody>
+          <a:bodyPr rtlCol="0" anchor="ctr"/>
+          <a:lstStyle/>
+          <a:p>
+            <a:pPr algn="ctr"/>
+          </a:p>
+        </p:txBody>
+      </p:sp>
+      <p:sp>
+        <p:nvSpPr>
+          <p:cNvPr id="17" name="Rectangle 16"/>
+          <p:cNvSpPr/>
+          <p:nvPr/>
+        </p:nvSpPr>
+        <p:spPr>
+          <a:xfrm>
+            <a:off x="914400" y="3474720"/>
+            <a:ext cx="4417832" cy="164592"/>
+          </a:xfrm>
+          <a:prstGeom prst="rect">
+            <a:avLst/>
+          </a:prstGeom>
+          <a:solidFill>
+            <a:srgbClr val="3AAA35"/>
+          </a:solidFill>
+          <a:ln>
+            <a:noFill/>
+          </a:ln>
+        </p:spPr>
+        <p:style>
+          <a:lnRef idx="1">
+            <a:schemeClr val="accent1"/>
+          </a:lnRef>
+          <a:fillRef idx="3">
+            <a:schemeClr val="accent1"/>
+          </a:fillRef>
+          <a:effectRef idx="2">
+            <a:schemeClr val="accent1"/>
+          </a:effectRef>
+          <a:fontRef idx="minor">
+            <a:schemeClr val="lt1"/>
+          </a:fontRef>
+        </p:style>
+        <p:txBody>
+          <a:bodyPr rtlCol="0" anchor="ctr"/>
+          <a:lstStyle/>
+          <a:p>
+            <a:pPr algn="ctr"/>
+          </a:p>
+        </p:txBody>
+      </p:sp>
+      <p:sp>
+        <p:nvSpPr>
+          <p:cNvPr id="18" name="TextBox 17"/>
+          <p:cNvSpPr txBox="1"/>
+          <p:nvPr/>
+        </p:nvSpPr>
+        <p:spPr>
+          <a:xfrm>
+            <a:off x="5532120" y="3337560"/>
+            <a:ext cx="685800" cy="228600"/>
+          </a:xfrm>
+          <a:prstGeom prst="rect">
+            <a:avLst/>
+          </a:prstGeom>
+          <a:noFill/>
+        </p:spPr>
+        <p:txBody>
+          <a:bodyPr wrap="square">
+            <a:noAutofit/>
+          </a:bodyPr>
+          <a:lstStyle/>
+          <a:p>
+            <a:pPr algn="r"/>
+            <a:r>
+              <a:rPr sz="1300" b="1">
+                <a:solidFill>
+                  <a:srgbClr val="3AAA35"/>
+                </a:solidFill>
+                <a:latin typeface="Onest"/>
+              </a:rPr>
+              <a:t>83.3%</a:t>
+            </a:r>
+          </a:p>
+        </p:txBody>
+      </p:sp>
+      <p:sp>
+        <p:nvSpPr>
+          <p:cNvPr id="19" name="TextBox 18"/>
+          <p:cNvSpPr txBox="1"/>
+          <p:nvPr/>
+        </p:nvSpPr>
+        <p:spPr>
+          <a:xfrm>
+            <a:off x="914400" y="3721608"/>
+            <a:ext cx="5303520" cy="256032"/>
+          </a:xfrm>
+          <a:prstGeom prst="rect">
+            <a:avLst/>
+          </a:prstGeom>
+          <a:noFill/>
+        </p:spPr>
+        <p:txBody>
+          <a:bodyPr wrap="square">
+            <a:noAutofit/>
+          </a:bodyPr>
+          <a:lstStyle/>
+          <a:p>
+            <a:pPr algn="l"/>
+            <a:r>
+              <a:rPr sz="1000" b="0">
+                <a:solidFill>
+                  <a:srgbClr val="5C675F"/>
+                </a:solidFill>
+                <a:latin typeface="Onest"/>
+              </a:rPr>
+              <a:t>универсальный центральный навигатор</a:t>
+            </a:r>
+          </a:p>
+        </p:txBody>
+      </p:sp>
+      <p:sp>
+        <p:nvSpPr>
+          <p:cNvPr id="20" name="TextBox 19"/>
+          <p:cNvSpPr txBox="1"/>
+          <p:nvPr/>
+        </p:nvSpPr>
+        <p:spPr>
+          <a:xfrm>
+            <a:off x="914400" y="3977639"/>
+            <a:ext cx="5303520" cy="228600"/>
+          </a:xfrm>
+          <a:prstGeom prst="rect">
+            <a:avLst/>
+          </a:prstGeom>
+          <a:noFill/>
+        </p:spPr>
+        <p:txBody>
+          <a:bodyPr wrap="square">
+            <a:noAutofit/>
+          </a:bodyPr>
+          <a:lstStyle/>
+          <a:p>
+            <a:pPr algn="l"/>
+            <a:r>
+              <a:rPr sz="1400" b="1">
+                <a:solidFill>
+                  <a:srgbClr val="000000"/>
+                </a:solidFill>
+                <a:latin typeface="Onest"/>
+              </a:rPr>
+              <a:t>Ленинград · «знаю, но не использую»</a:t>
+            </a:r>
+          </a:p>
+        </p:txBody>
+      </p:sp>
+      <p:sp>
+        <p:nvSpPr>
+          <p:cNvPr id="21" name="Rectangle 20"/>
+          <p:cNvSpPr/>
+          <p:nvPr/>
+        </p:nvSpPr>
+        <p:spPr>
+          <a:xfrm>
+            <a:off x="914400" y="4297679"/>
+            <a:ext cx="5303520" cy="164592"/>
+          </a:xfrm>
+          <a:prstGeom prst="rect">
+            <a:avLst/>
+          </a:prstGeom>
+          <a:solidFill>
+            <a:srgbClr val="DAE2D8"/>
+          </a:solidFill>
+          <a:ln>
+            <a:noFill/>
+          </a:ln>
+        </p:spPr>
+        <p:style>
+          <a:lnRef idx="1">
+            <a:schemeClr val="accent1"/>
+          </a:lnRef>
+          <a:fillRef idx="3">
+            <a:schemeClr val="accent1"/>
+          </a:fillRef>
+          <a:effectRef idx="2">
+            <a:schemeClr val="accent1"/>
+          </a:effectRef>
+          <a:fontRef idx="minor">
+            <a:schemeClr val="lt1"/>
+          </a:fontRef>
+        </p:style>
+        <p:txBody>
+          <a:bodyPr rtlCol="0" anchor="ctr"/>
+          <a:lstStyle/>
+          <a:p>
+            <a:pPr algn="ctr"/>
+          </a:p>
+        </p:txBody>
+      </p:sp>
+      <p:sp>
+        <p:nvSpPr>
+          <p:cNvPr id="22" name="Rectangle 21"/>
+          <p:cNvSpPr/>
+          <p:nvPr/>
+        </p:nvSpPr>
+        <p:spPr>
+          <a:xfrm>
+            <a:off x="914400" y="4297679"/>
+            <a:ext cx="2752526" cy="164592"/>
+          </a:xfrm>
+          <a:prstGeom prst="rect">
+            <a:avLst/>
+          </a:prstGeom>
+          <a:solidFill>
+            <a:srgbClr val="DB4928"/>
+          </a:solidFill>
+          <a:ln>
+            <a:noFill/>
+          </a:ln>
+        </p:spPr>
+        <p:style>
+          <a:lnRef idx="1">
+            <a:schemeClr val="accent1"/>
+          </a:lnRef>
+          <a:fillRef idx="3">
+            <a:schemeClr val="accent1"/>
+          </a:fillRef>
+          <a:effectRef idx="2">
+            <a:schemeClr val="accent1"/>
+          </a:effectRef>
+          <a:fontRef idx="minor">
+            <a:schemeClr val="lt1"/>
+          </a:fontRef>
+        </p:style>
+        <p:txBody>
+          <a:bodyPr rtlCol="0" anchor="ctr"/>
+          <a:lstStyle/>
+          <a:p>
+            <a:pPr algn="ctr"/>
+          </a:p>
+        </p:txBody>
+      </p:sp>
+      <p:sp>
+        <p:nvSpPr>
+          <p:cNvPr id="23" name="TextBox 22"/>
+          <p:cNvSpPr txBox="1"/>
+          <p:nvPr/>
+        </p:nvSpPr>
+        <p:spPr>
+          <a:xfrm>
+            <a:off x="5532120" y="4160519"/>
+            <a:ext cx="685800" cy="228600"/>
+          </a:xfrm>
+          <a:prstGeom prst="rect">
+            <a:avLst/>
+          </a:prstGeom>
+          <a:noFill/>
+        </p:spPr>
+        <p:txBody>
+          <a:bodyPr wrap="square">
+            <a:noAutofit/>
+          </a:bodyPr>
+          <a:lstStyle/>
+          <a:p>
+            <a:pPr algn="r"/>
+            <a:r>
+              <a:rPr sz="1300" b="1">
+                <a:solidFill>
+                  <a:srgbClr val="DB4928"/>
+                </a:solidFill>
+                <a:latin typeface="Onest"/>
+              </a:rPr>
+              <a:t>51.9%</a:t>
+            </a:r>
+          </a:p>
+        </p:txBody>
+      </p:sp>
+      <p:sp>
+        <p:nvSpPr>
+          <p:cNvPr id="24" name="TextBox 23"/>
+          <p:cNvSpPr txBox="1"/>
+          <p:nvPr/>
+        </p:nvSpPr>
+        <p:spPr>
+          <a:xfrm>
+            <a:off x="914400" y="4544567"/>
+            <a:ext cx="5303520" cy="256032"/>
+          </a:xfrm>
+          <a:prstGeom prst="rect">
+            <a:avLst/>
+          </a:prstGeom>
+          <a:noFill/>
+        </p:spPr>
+        <p:txBody>
+          <a:bodyPr wrap="square">
+            <a:noAutofit/>
+          </a:bodyPr>
+          <a:lstStyle/>
+          <a:p>
+            <a:pPr algn="l"/>
+            <a:r>
+              <a:rPr sz="1000" b="0">
+                <a:solidFill>
+                  <a:srgbClr val="5C675F"/>
+                </a:solidFill>
+                <a:latin typeface="Onest"/>
+              </a:rPr>
+              <a:t>историческое название у молодёжи уходит в пассив</a:t>
+            </a:r>
+          </a:p>
+        </p:txBody>
+      </p:sp>
+      <p:sp>
+        <p:nvSpPr>
+          <p:cNvPr id="25" name="TextBox 24"/>
+          <p:cNvSpPr txBox="1"/>
+          <p:nvPr/>
+        </p:nvSpPr>
+        <p:spPr>
+          <a:xfrm>
+            <a:off x="914400" y="4800600"/>
+            <a:ext cx="5303520" cy="228600"/>
+          </a:xfrm>
+          <a:prstGeom prst="rect">
+            <a:avLst/>
+          </a:prstGeom>
+          <a:noFill/>
+        </p:spPr>
+        <p:txBody>
+          <a:bodyPr wrap="square">
+            <a:noAutofit/>
+          </a:bodyPr>
+          <a:lstStyle/>
+          <a:p>
+            <a:pPr algn="l"/>
+            <a:r>
+              <a:rPr sz="1400" b="1">
+                <a:solidFill>
+                  <a:srgbClr val="000000"/>
+                </a:solidFill>
+                <a:latin typeface="Onest"/>
+              </a:rPr>
+              <a:t>Рыбацкое · «знаю, но не использую»</a:t>
+            </a:r>
+          </a:p>
+        </p:txBody>
+      </p:sp>
+      <p:sp>
+        <p:nvSpPr>
+          <p:cNvPr id="26" name="Rectangle 25"/>
+          <p:cNvSpPr/>
+          <p:nvPr/>
+        </p:nvSpPr>
+        <p:spPr>
+          <a:xfrm>
+            <a:off x="914400" y="5120640"/>
+            <a:ext cx="5303520" cy="164592"/>
+          </a:xfrm>
+          <a:prstGeom prst="rect">
+            <a:avLst/>
+          </a:prstGeom>
+          <a:solidFill>
+            <a:srgbClr val="DAE2D8"/>
+          </a:solidFill>
+          <a:ln>
+            <a:noFill/>
+          </a:ln>
+        </p:spPr>
+        <p:style>
+          <a:lnRef idx="1">
+            <a:schemeClr val="accent1"/>
+          </a:lnRef>
+          <a:fillRef idx="3">
+            <a:schemeClr val="accent1"/>
+          </a:fillRef>
+          <a:effectRef idx="2">
+            <a:schemeClr val="accent1"/>
+          </a:effectRef>
+          <a:fontRef idx="minor">
+            <a:schemeClr val="lt1"/>
+          </a:fontRef>
+        </p:style>
+        <p:txBody>
+          <a:bodyPr rtlCol="0" anchor="ctr"/>
+          <a:lstStyle/>
+          <a:p>
+            <a:pPr algn="ctr"/>
+          </a:p>
+        </p:txBody>
+      </p:sp>
+      <p:sp>
+        <p:nvSpPr>
+          <p:cNvPr id="27" name="Rectangle 26"/>
+          <p:cNvSpPr/>
+          <p:nvPr/>
+        </p:nvSpPr>
+        <p:spPr>
+          <a:xfrm>
+            <a:off x="914400" y="5120640"/>
+            <a:ext cx="2354762" cy="164592"/>
+          </a:xfrm>
+          <a:prstGeom prst="rect">
+            <a:avLst/>
+          </a:prstGeom>
+          <a:solidFill>
+            <a:srgbClr val="DB4928"/>
+          </a:solidFill>
+          <a:ln>
+            <a:noFill/>
+          </a:ln>
+        </p:spPr>
+        <p:style>
+          <a:lnRef idx="1">
+            <a:schemeClr val="accent1"/>
+          </a:lnRef>
+          <a:fillRef idx="3">
+            <a:schemeClr val="accent1"/>
+          </a:fillRef>
+          <a:effectRef idx="2">
+            <a:schemeClr val="accent1"/>
+          </a:effectRef>
+          <a:fontRef idx="minor">
+            <a:schemeClr val="lt1"/>
+          </a:fontRef>
+        </p:style>
+        <p:txBody>
+          <a:bodyPr rtlCol="0" anchor="ctr"/>
+          <a:lstStyle/>
+          <a:p>
+            <a:pPr algn="ctr"/>
+          </a:p>
+        </p:txBody>
+      </p:sp>
+      <p:sp>
+        <p:nvSpPr>
+          <p:cNvPr id="28" name="TextBox 27"/>
+          <p:cNvSpPr txBox="1"/>
+          <p:nvPr/>
+        </p:nvSpPr>
+        <p:spPr>
+          <a:xfrm>
+            <a:off x="5532120" y="4983480"/>
+            <a:ext cx="685800" cy="228600"/>
+          </a:xfrm>
+          <a:prstGeom prst="rect">
+            <a:avLst/>
+          </a:prstGeom>
+          <a:noFill/>
+        </p:spPr>
+        <p:txBody>
+          <a:bodyPr wrap="square">
+            <a:noAutofit/>
+          </a:bodyPr>
+          <a:lstStyle/>
+          <a:p>
+            <a:pPr algn="r"/>
+            <a:r>
+              <a:rPr sz="1300" b="1">
+                <a:solidFill>
+                  <a:srgbClr val="DB4928"/>
+                </a:solidFill>
+                <a:latin typeface="Onest"/>
+              </a:rPr>
+              <a:t>44.4%</a:t>
+            </a:r>
+          </a:p>
+        </p:txBody>
+      </p:sp>
+      <p:sp>
+        <p:nvSpPr>
+          <p:cNvPr id="29" name="TextBox 28"/>
+          <p:cNvSpPr txBox="1"/>
+          <p:nvPr/>
+        </p:nvSpPr>
+        <p:spPr>
+          <a:xfrm>
+            <a:off x="914400" y="5367528"/>
+            <a:ext cx="5303520" cy="256032"/>
+          </a:xfrm>
+          <a:prstGeom prst="rect">
+            <a:avLst/>
+          </a:prstGeom>
+          <a:noFill/>
+        </p:spPr>
+        <p:txBody>
+          <a:bodyPr wrap="square">
+            <a:noAutofit/>
+          </a:bodyPr>
+          <a:lstStyle/>
+          <a:p>
+            <a:pPr algn="l"/>
+            <a:r>
+              <a:rPr sz="1000" b="0">
+                <a:solidFill>
+                  <a:srgbClr val="5C675F"/>
+                </a:solidFill>
+                <a:latin typeface="Onest"/>
+              </a:rPr>
+              <a:t>локальная периферия без личного маршрута</a:t>
+            </a:r>
+          </a:p>
+        </p:txBody>
+      </p:sp>
+      <p:sp>
+        <p:nvSpPr>
+          <p:cNvPr id="30" name="Rectangle 29"/>
+          <p:cNvSpPr/>
+          <p:nvPr/>
+        </p:nvSpPr>
+        <p:spPr>
+          <a:xfrm>
+            <a:off x="7360920" y="1508760"/>
+            <a:ext cx="4160520" cy="4389120"/>
+          </a:xfrm>
+          <a:prstGeom prst="rect">
+            <a:avLst/>
+          </a:prstGeom>
+          <a:solidFill>
+            <a:srgbClr val="244128"/>
+          </a:solidFill>
+          <a:ln>
+            <a:noFill/>
+          </a:ln>
+        </p:spPr>
+        <p:style>
+          <a:lnRef idx="1">
+            <a:schemeClr val="accent1"/>
+          </a:lnRef>
+          <a:fillRef idx="3">
+            <a:schemeClr val="accent1"/>
+          </a:fillRef>
+          <a:effectRef idx="2">
+            <a:schemeClr val="accent1"/>
+          </a:effectRef>
+          <a:fontRef idx="minor">
+            <a:schemeClr val="lt1"/>
+          </a:fontRef>
+        </p:style>
+        <p:txBody>
+          <a:bodyPr rtlCol="0" anchor="ctr"/>
+          <a:lstStyle/>
+          <a:p>
+            <a:pPr algn="ctr"/>
+          </a:p>
+        </p:txBody>
+      </p:sp>
+      <p:sp>
+        <p:nvSpPr>
+          <p:cNvPr id="31" name="TextBox 30"/>
+          <p:cNvSpPr txBox="1"/>
+          <p:nvPr/>
+        </p:nvSpPr>
+        <p:spPr>
+          <a:xfrm>
+            <a:off x="7726679" y="1810512"/>
+            <a:ext cx="3429000" cy="347472"/>
+          </a:xfrm>
+          <a:prstGeom prst="rect">
+            <a:avLst/>
+          </a:prstGeom>
+          <a:noFill/>
+        </p:spPr>
+        <p:txBody>
+          <a:bodyPr wrap="square">
+            <a:noAutofit/>
+          </a:bodyPr>
+          <a:lstStyle/>
+          <a:p>
+            <a:pPr algn="l"/>
+            <a:r>
+              <a:rPr sz="1800" b="1">
+                <a:solidFill>
+                  <a:srgbClr val="FFFFFF"/>
+                </a:solidFill>
+                <a:latin typeface="Onest"/>
+              </a:rPr>
+              <a:t>Что важно проговорить</a:t>
+            </a:r>
+          </a:p>
+        </p:txBody>
+      </p:sp>
+      <p:sp>
+        <p:nvSpPr>
+          <p:cNvPr id="32" name="TextBox 31"/>
+          <p:cNvSpPr txBox="1"/>
+          <p:nvPr/>
+        </p:nvSpPr>
+        <p:spPr>
+          <a:xfrm>
+            <a:off x="7726679" y="2331720"/>
+            <a:ext cx="3429000" cy="2926080"/>
+          </a:xfrm>
+          <a:prstGeom prst="rect">
+            <a:avLst/>
+          </a:prstGeom>
+          <a:noFill/>
+        </p:spPr>
+        <p:txBody>
+          <a:bodyPr wrap="square">
             <a:spAutoFit/>
           </a:bodyPr>
           <a:lstStyle/>
           <a:p>
-            <a:pPr algn="l"/>
-            <a:r>
-              <a:rPr sz="2800" b="1">
+            <a:pPr>
+              <a:spcAft>
+                <a:spcPts val="900"/>
+              </a:spcAft>
+            </a:pPr>
+            <a:r>
+              <a:rPr sz="1500" b="1">
+                <a:solidFill>
+                  <a:srgbClr val="F39869"/>
+                </a:solidFill>
+                <a:latin typeface="Onest"/>
+              </a:rPr>
+              <a:t>■ </a:t>
+            </a:r>
+            <a:r>
+              <a:rPr sz="1500" b="0">
                 <a:solidFill>
                   <a:srgbClr val="FFFFFF"/>
                 </a:solidFill>
-                <a:latin typeface="Arial"/>
+                <a:latin typeface="Onest"/>
               </a:rPr>
-              <a:t>Ключевые компоненты</a:t>
-            </a:r>
-          </a:p>
-        </p:txBody>
-      </p:sp>
-      <p:sp>
-        <p:nvSpPr>
-          <p:cNvPr id="4" name="TextBox 3"/>
-          <p:cNvSpPr txBox="1"/>
-          <p:nvPr/>
-        </p:nvSpPr>
-        <p:spPr>
-          <a:xfrm>
-            <a:off x="822960" y="1691640"/>
-            <a:ext cx="10241280" cy="3749040"/>
-          </a:xfrm>
-          <a:prstGeom prst="rect">
-            <a:avLst/>
-          </a:prstGeom>
-          <a:noFill/>
-        </p:spPr>
-        <p:txBody>
-          <a:bodyPr wrap="none">
-            <a:spAutoFit/>
-          </a:bodyPr>
-          <a:lstStyle/>
+              <a:t>«Питер» и «Невский» проходят через почти все сферы общения.</a:t>
+            </a:r>
+          </a:p>
           <a:p>
             <a:pPr>
-              <a:defRPr sz="2100">
-                <a:solidFill>
-                  <a:srgbClr val="EBF1FF"/>
-                </a:solidFill>
-                <a:latin typeface="Arial"/>
-              </a:defRPr>
+              <a:spcAft>
+                <a:spcPts val="900"/>
+              </a:spcAft>
             </a:pPr>
             <a:r>
-              <a:t>Интерфейс: простой пользовательский сценарий</a:t>
+              <a:rPr sz="1500" b="1">
+                <a:solidFill>
+                  <a:srgbClr val="F39869"/>
+                </a:solidFill>
+                <a:latin typeface="Onest"/>
+              </a:rPr>
+              <a:t>■ </a:t>
+            </a:r>
+            <a:r>
+              <a:rPr sz="1500" b="0">
+                <a:solidFill>
+                  <a:srgbClr val="FFFFFF"/>
+                </a:solidFill>
+                <a:latin typeface="Onest"/>
+              </a:rPr>
+              <a:t>Культурные символы известны, но не всегда нужны в ежедневной навигации.</a:t>
             </a:r>
           </a:p>
           <a:p>
             <a:pPr>
-              <a:defRPr sz="2100">
-                <a:solidFill>
-                  <a:srgbClr val="EBF1FF"/>
-                </a:solidFill>
-                <a:latin typeface="Arial"/>
-              </a:defRPr>
+              <a:spcAft>
+                <a:spcPts val="900"/>
+              </a:spcAft>
             </a:pPr>
             <a:r>
-              <a:t>Логика: обработка данных и автоматизация задач</a:t>
-            </a:r>
-          </a:p>
-          <a:p>
-            <a:pPr>
-              <a:defRPr sz="2100">
-                <a:solidFill>
-                  <a:srgbClr val="EBF1FF"/>
-                </a:solidFill>
-                <a:latin typeface="Arial"/>
-              </a:defRPr>
-            </a:pPr>
-            <a:r>
-              <a:t>Результат: измеримые показатели пользы и качества</a:t>
-            </a:r>
-          </a:p>
-        </p:txBody>
-      </p:sp>
-      <p:sp>
-        <p:nvSpPr>
-          <p:cNvPr id="5" name="TextBox 4"/>
-          <p:cNvSpPr txBox="1"/>
-          <p:nvPr/>
-        </p:nvSpPr>
-        <p:spPr>
-          <a:xfrm>
-            <a:off x="10789920" y="6400800"/>
-            <a:ext cx="1005840" cy="274320"/>
-          </a:xfrm>
-          <a:prstGeom prst="rect">
-            <a:avLst/>
-          </a:prstGeom>
-          <a:noFill/>
-        </p:spPr>
-        <p:txBody>
-          <a:bodyPr wrap="none">
-            <a:spAutoFit/>
-          </a:bodyPr>
-          <a:lstStyle/>
-          <a:p>
-            <a:pPr algn="r"/>
-            <a:r>
-              <a:rPr sz="1200" b="0">
-                <a:solidFill>
-                  <a:srgbClr val="C3D2EB"/>
-                </a:solidFill>
-                <a:latin typeface="Arial"/>
+              <a:rPr sz="1500" b="1">
+                <a:solidFill>
+                  <a:srgbClr val="F39869"/>
+                </a:solidFill>
+                <a:latin typeface="Onest"/>
               </a:rPr>
-              <a:t>3/4</a:t>
-            </a:r>
+              <a:t>■ </a:t>
+            </a:r>
+            <a:r>
+              <a:rPr sz="1500" b="0">
+                <a:solidFill>
+                  <a:srgbClr val="FFFFFF"/>
+                </a:solidFill>
+                <a:latin typeface="Onest"/>
+              </a:rPr>
+              <a:t>Разговорные и районные названия зависят от маршрутов, возраста и круга общения.</a:t>
+            </a:r>
+          </a:p>
+        </p:txBody>
+      </p:sp>
+      <p:sp>
+        <p:nvSpPr>
+          <p:cNvPr id="33" name="Rectangle 32"/>
+          <p:cNvSpPr/>
+          <p:nvPr/>
+        </p:nvSpPr>
+        <p:spPr>
+          <a:xfrm>
+            <a:off x="7360920" y="5577840"/>
+            <a:ext cx="2834640" cy="164592"/>
+          </a:xfrm>
+          <a:prstGeom prst="rect">
+            <a:avLst/>
+          </a:prstGeom>
+          <a:solidFill>
+            <a:srgbClr val="3AAA35"/>
+          </a:solidFill>
+          <a:ln>
+            <a:noFill/>
+          </a:ln>
+        </p:spPr>
+        <p:style>
+          <a:lnRef idx="1">
+            <a:schemeClr val="accent1"/>
+          </a:lnRef>
+          <a:fillRef idx="3">
+            <a:schemeClr val="accent1"/>
+          </a:fillRef>
+          <a:effectRef idx="2">
+            <a:schemeClr val="accent1"/>
+          </a:effectRef>
+          <a:fontRef idx="minor">
+            <a:schemeClr val="lt1"/>
+          </a:fontRef>
+        </p:style>
+        <p:txBody>
+          <a:bodyPr rtlCol="0" anchor="ctr"/>
+          <a:lstStyle/>
+          <a:p>
+            <a:pPr algn="ctr"/>
+          </a:p>
+        </p:txBody>
+      </p:sp>
+      <p:sp>
+        <p:nvSpPr>
+          <p:cNvPr id="34" name="Rectangle 33"/>
+          <p:cNvSpPr/>
+          <p:nvPr/>
+        </p:nvSpPr>
+        <p:spPr>
+          <a:xfrm>
+            <a:off x="10195560" y="5577840"/>
+            <a:ext cx="1325880" cy="164592"/>
+          </a:xfrm>
+          <a:prstGeom prst="rect">
+            <a:avLst/>
+          </a:prstGeom>
+          <a:solidFill>
+            <a:srgbClr val="DB4928"/>
+          </a:solidFill>
+          <a:ln>
+            <a:noFill/>
+          </a:ln>
+        </p:spPr>
+        <p:style>
+          <a:lnRef idx="1">
+            <a:schemeClr val="accent1"/>
+          </a:lnRef>
+          <a:fillRef idx="3">
+            <a:schemeClr val="accent1"/>
+          </a:fillRef>
+          <a:effectRef idx="2">
+            <a:schemeClr val="accent1"/>
+          </a:effectRef>
+          <a:fontRef idx="minor">
+            <a:schemeClr val="lt1"/>
+          </a:fontRef>
+        </p:style>
+        <p:txBody>
+          <a:bodyPr rtlCol="0" anchor="ctr"/>
+          <a:lstStyle/>
+          <a:p>
+            <a:pPr algn="ctr"/>
           </a:p>
         </p:txBody>
       </p:sp>
@@ -3663,7 +6030,7 @@
     <p:bg>
       <p:bgPr>
         <a:solidFill>
-          <a:srgbClr val="2C264E"/>
+          <a:srgbClr val="F6F8F4"/>
         </a:solidFill>
         <a:effectLst/>
       </p:bgPr>
@@ -3675,22 +6042,116 @@
         <p:nvPr/>
       </p:nvGrpSpPr>
       <p:grpSpPr/>
-      <p:sp>
-        <p:nvSpPr>
-          <p:cNvPr id="2" name="Rectangle 1"/>
+      <p:pic>
+        <p:nvPicPr>
+          <p:cNvPr id="2" name="Picture 1" descr="spbstu_logo_02.png"/>
+          <p:cNvPicPr>
+            <a:picLocks noChangeAspect="1"/>
+          </p:cNvPicPr>
+          <p:nvPr/>
+        </p:nvPicPr>
+        <p:blipFill>
+          <a:blip r:embed="rId2"/>
+          <a:stretch>
+            <a:fillRect/>
+          </a:stretch>
+        </p:blipFill>
+        <p:spPr>
+          <a:xfrm>
+            <a:off x="502920" y="310896"/>
+            <a:ext cx="1600200" cy="552069"/>
+          </a:xfrm>
+          <a:prstGeom prst="rect">
+            <a:avLst/>
+          </a:prstGeom>
+        </p:spPr>
+      </p:pic>
+      <p:sp>
+        <p:nvSpPr>
+          <p:cNvPr id="3" name="TextBox 2"/>
+          <p:cNvSpPr txBox="1"/>
+          <p:nvPr/>
+        </p:nvSpPr>
+        <p:spPr>
+          <a:xfrm>
+            <a:off x="2743200" y="320040"/>
+            <a:ext cx="6217920" cy="310896"/>
+          </a:xfrm>
+          <a:prstGeom prst="rect">
+            <a:avLst/>
+          </a:prstGeom>
+          <a:noFill/>
+        </p:spPr>
+        <p:txBody>
+          <a:bodyPr wrap="square">
+            <a:noAutofit/>
+          </a:bodyPr>
+          <a:lstStyle/>
+          <a:p>
+            <a:pPr algn="l"/>
+            <a:r>
+              <a:rPr sz="1000" b="0">
+                <a:solidFill>
+                  <a:srgbClr val="5C675F"/>
+                </a:solidFill>
+                <a:latin typeface="Onest"/>
+              </a:rPr>
+              <a:t>Итоговая модель и перспективы</a:t>
+            </a:r>
+          </a:p>
+        </p:txBody>
+      </p:sp>
+      <p:sp>
+        <p:nvSpPr>
+          <p:cNvPr id="4" name="TextBox 3"/>
+          <p:cNvSpPr txBox="1"/>
+          <p:nvPr/>
+        </p:nvSpPr>
+        <p:spPr>
+          <a:xfrm>
+            <a:off x="2743200" y="630936"/>
+            <a:ext cx="7132320" cy="475488"/>
+          </a:xfrm>
+          <a:prstGeom prst="rect">
+            <a:avLst/>
+          </a:prstGeom>
+          <a:noFill/>
+        </p:spPr>
+        <p:txBody>
+          <a:bodyPr wrap="square">
+            <a:noAutofit/>
+          </a:bodyPr>
+          <a:lstStyle/>
+          <a:p>
+            <a:pPr algn="l"/>
+            <a:r>
+              <a:rPr sz="2400" b="1">
+                <a:solidFill>
+                  <a:srgbClr val="244128"/>
+                </a:solidFill>
+                <a:latin typeface="Onest"/>
+              </a:rPr>
+              <a:t>Вывод: лексикон горожанина многослоен</a:t>
+            </a:r>
+          </a:p>
+        </p:txBody>
+      </p:sp>
+      <p:sp>
+        <p:nvSpPr>
+          <p:cNvPr id="5" name="Rectangle 4"/>
           <p:cNvSpPr/>
           <p:nvPr/>
         </p:nvSpPr>
         <p:spPr>
           <a:xfrm>
-            <a:off x="0" y="0"/>
-            <a:ext cx="164592" cy="6858000"/>
+            <a:off x="502920" y="1170432"/>
+            <a:ext cx="11155680" cy="32004"/>
           </a:xfrm>
           <a:prstGeom prst="rect">
             <a:avLst/>
           </a:prstGeom>
           <a:solidFill>
-            <a:srgbClr val="F47575"/>
+            <a:srgbClr val="3AAA35"/>
           </a:solidFill>
           <a:ln>
             <a:noFill/>
@@ -3720,14 +6181,14 @@
       </p:sp>
       <p:sp>
         <p:nvSpPr>
-          <p:cNvPr id="3" name="TextBox 2"/>
+          <p:cNvPr id="6" name="TextBox 5"/>
           <p:cNvSpPr txBox="1"/>
           <p:nvPr/>
         </p:nvSpPr>
         <p:spPr>
           <a:xfrm>
-            <a:off x="822960" y="1051560"/>
-            <a:ext cx="10241280" cy="457200"/>
+            <a:off x="9464040" y="411480"/>
+            <a:ext cx="2194560" cy="310896"/>
           </a:xfrm>
           <a:prstGeom prst="rect">
             <a:avLst/>
@@ -3735,34 +6196,34 @@
           <a:noFill/>
         </p:spPr>
         <p:txBody>
-          <a:bodyPr wrap="none">
-            <a:spAutoFit/>
+          <a:bodyPr wrap="square">
+            <a:noAutofit/>
           </a:bodyPr>
           <a:lstStyle/>
           <a:p>
-            <a:pPr algn="l"/>
-            <a:r>
-              <a:rPr sz="2800" b="1">
-                <a:solidFill>
-                  <a:srgbClr val="FFFFFF"/>
-                </a:solidFill>
-                <a:latin typeface="Arial"/>
+            <a:pPr algn="r"/>
+            <a:r>
+              <a:rPr sz="1000" b="0">
+                <a:solidFill>
+                  <a:srgbClr val="5C675F"/>
+                </a:solidFill>
+                <a:latin typeface="Onest"/>
               </a:rPr>
-              <a:t>Следующие шаги</a:t>
-            </a:r>
-          </a:p>
-        </p:txBody>
-      </p:sp>
-      <p:sp>
-        <p:nvSpPr>
-          <p:cNvPr id="4" name="TextBox 3"/>
+              <a:t>5:00–7:00</a:t>
+            </a:r>
+          </a:p>
+        </p:txBody>
+      </p:sp>
+      <p:sp>
+        <p:nvSpPr>
+          <p:cNvPr id="7" name="TextBox 6"/>
           <p:cNvSpPr txBox="1"/>
           <p:nvPr/>
         </p:nvSpPr>
         <p:spPr>
           <a:xfrm>
-            <a:off x="822960" y="1691640"/>
-            <a:ext cx="10241280" cy="3749040"/>
+            <a:off x="11018520" y="6355080"/>
+            <a:ext cx="640080" cy="228600"/>
           </a:xfrm>
           <a:prstGeom prst="rect">
             <a:avLst/>
@@ -3770,82 +6231,507 @@
           <a:noFill/>
         </p:spPr>
         <p:txBody>
-          <a:bodyPr wrap="none">
-            <a:spAutoFit/>
+          <a:bodyPr wrap="square">
+            <a:noAutofit/>
           </a:bodyPr>
           <a:lstStyle/>
           <a:p>
-            <a:pPr>
-              <a:defRPr sz="2100">
-                <a:solidFill>
-                  <a:srgbClr val="EBF1FF"/>
-                </a:solidFill>
-                <a:latin typeface="Arial"/>
-              </a:defRPr>
-            </a:pPr>
-            <a:r>
-              <a:t>Подготовить прототип и показать его первым пользователям</a:t>
-            </a:r>
-          </a:p>
-          <a:p>
-            <a:pPr>
-              <a:defRPr sz="2100">
-                <a:solidFill>
-                  <a:srgbClr val="EBF1FF"/>
-                </a:solidFill>
-                <a:latin typeface="Arial"/>
-              </a:defRPr>
-            </a:pPr>
-            <a:r>
-              <a:t>Определить метрики успеха и критерии готовности</a:t>
-            </a:r>
-          </a:p>
-          <a:p>
-            <a:pPr>
-              <a:defRPr sz="2100">
-                <a:solidFill>
-                  <a:srgbClr val="EBF1FF"/>
-                </a:solidFill>
-                <a:latin typeface="Arial"/>
-              </a:defRPr>
-            </a:pPr>
-            <a:r>
-              <a:t>Запланировать улучшения на основе реальных отзывов</a:t>
-            </a:r>
-          </a:p>
-        </p:txBody>
-      </p:sp>
-      <p:sp>
-        <p:nvSpPr>
-          <p:cNvPr id="5" name="TextBox 4"/>
-          <p:cNvSpPr txBox="1"/>
-          <p:nvPr/>
-        </p:nvSpPr>
-        <p:spPr>
-          <a:xfrm>
-            <a:off x="10789920" y="6400800"/>
-            <a:ext cx="1005840" cy="274320"/>
-          </a:xfrm>
-          <a:prstGeom prst="rect">
-            <a:avLst/>
-          </a:prstGeom>
-          <a:noFill/>
-        </p:spPr>
-        <p:txBody>
-          <a:bodyPr wrap="none">
-            <a:spAutoFit/>
-          </a:bodyPr>
-          <a:lstStyle/>
-          <a:p>
             <a:pPr algn="r"/>
             <a:r>
-              <a:rPr sz="1200" b="0">
-                <a:solidFill>
-                  <a:srgbClr val="C3D2EB"/>
-                </a:solidFill>
-                <a:latin typeface="Arial"/>
+              <a:rPr sz="1000" b="0">
+                <a:solidFill>
+                  <a:srgbClr val="5C675F"/>
+                </a:solidFill>
+                <a:latin typeface="Onest"/>
               </a:rPr>
               <a:t>4/4</a:t>
+            </a:r>
+          </a:p>
+        </p:txBody>
+      </p:sp>
+      <p:sp>
+        <p:nvSpPr>
+          <p:cNvPr id="8" name="Rectangle 7"/>
+          <p:cNvSpPr/>
+          <p:nvPr/>
+        </p:nvSpPr>
+        <p:spPr>
+          <a:xfrm>
+            <a:off x="685800" y="1536192"/>
+            <a:ext cx="3291840" cy="3246120"/>
+          </a:xfrm>
+          <a:prstGeom prst="rect">
+            <a:avLst/>
+          </a:prstGeom>
+          <a:solidFill>
+            <a:srgbClr val="3AAA35"/>
+          </a:solidFill>
+          <a:ln>
+            <a:noFill/>
+          </a:ln>
+        </p:spPr>
+        <p:style>
+          <a:lnRef idx="1">
+            <a:schemeClr val="accent1"/>
+          </a:lnRef>
+          <a:fillRef idx="3">
+            <a:schemeClr val="accent1"/>
+          </a:fillRef>
+          <a:effectRef idx="2">
+            <a:schemeClr val="accent1"/>
+          </a:effectRef>
+          <a:fontRef idx="minor">
+            <a:schemeClr val="lt1"/>
+          </a:fontRef>
+        </p:style>
+        <p:txBody>
+          <a:bodyPr rtlCol="0" anchor="ctr"/>
+          <a:lstStyle/>
+          <a:p>
+            <a:pPr algn="ctr"/>
+          </a:p>
+        </p:txBody>
+      </p:sp>
+      <p:sp>
+        <p:nvSpPr>
+          <p:cNvPr id="9" name="Rectangle 8"/>
+          <p:cNvSpPr/>
+          <p:nvPr/>
+        </p:nvSpPr>
+        <p:spPr>
+          <a:xfrm>
+            <a:off x="4160520" y="1536192"/>
+            <a:ext cx="3291840" cy="3246120"/>
+          </a:xfrm>
+          <a:prstGeom prst="rect">
+            <a:avLst/>
+          </a:prstGeom>
+          <a:solidFill>
+            <a:srgbClr val="56975B"/>
+          </a:solidFill>
+          <a:ln>
+            <a:noFill/>
+          </a:ln>
+        </p:spPr>
+        <p:style>
+          <a:lnRef idx="1">
+            <a:schemeClr val="accent1"/>
+          </a:lnRef>
+          <a:fillRef idx="3">
+            <a:schemeClr val="accent1"/>
+          </a:fillRef>
+          <a:effectRef idx="2">
+            <a:schemeClr val="accent1"/>
+          </a:effectRef>
+          <a:fontRef idx="minor">
+            <a:schemeClr val="lt1"/>
+          </a:fontRef>
+        </p:style>
+        <p:txBody>
+          <a:bodyPr rtlCol="0" anchor="ctr"/>
+          <a:lstStyle/>
+          <a:p>
+            <a:pPr algn="ctr"/>
+          </a:p>
+        </p:txBody>
+      </p:sp>
+      <p:sp>
+        <p:nvSpPr>
+          <p:cNvPr id="10" name="Rectangle 9"/>
+          <p:cNvSpPr/>
+          <p:nvPr/>
+        </p:nvSpPr>
+        <p:spPr>
+          <a:xfrm>
+            <a:off x="7635240" y="1536192"/>
+            <a:ext cx="3291840" cy="3246120"/>
+          </a:xfrm>
+          <a:prstGeom prst="rect">
+            <a:avLst/>
+          </a:prstGeom>
+          <a:solidFill>
+            <a:srgbClr val="DB4928"/>
+          </a:solidFill>
+          <a:ln>
+            <a:noFill/>
+          </a:ln>
+        </p:spPr>
+        <p:style>
+          <a:lnRef idx="1">
+            <a:schemeClr val="accent1"/>
+          </a:lnRef>
+          <a:fillRef idx="3">
+            <a:schemeClr val="accent1"/>
+          </a:fillRef>
+          <a:effectRef idx="2">
+            <a:schemeClr val="accent1"/>
+          </a:effectRef>
+          <a:fontRef idx="minor">
+            <a:schemeClr val="lt1"/>
+          </a:fontRef>
+        </p:style>
+        <p:txBody>
+          <a:bodyPr rtlCol="0" anchor="ctr"/>
+          <a:lstStyle/>
+          <a:p>
+            <a:pPr algn="ctr"/>
+          </a:p>
+        </p:txBody>
+      </p:sp>
+      <p:sp>
+        <p:nvSpPr>
+          <p:cNvPr id="11" name="TextBox 10"/>
+          <p:cNvSpPr txBox="1"/>
+          <p:nvPr/>
+        </p:nvSpPr>
+        <p:spPr>
+          <a:xfrm>
+            <a:off x="960120" y="1828800"/>
+            <a:ext cx="2743200" cy="411480"/>
+          </a:xfrm>
+          <a:prstGeom prst="rect">
+            <a:avLst/>
+          </a:prstGeom>
+          <a:noFill/>
+        </p:spPr>
+        <p:txBody>
+          <a:bodyPr wrap="square">
+            <a:noAutofit/>
+          </a:bodyPr>
+          <a:lstStyle/>
+          <a:p>
+            <a:pPr algn="l"/>
+            <a:r>
+              <a:rPr sz="2000" b="1">
+                <a:solidFill>
+                  <a:srgbClr val="FFFFFF"/>
+                </a:solidFill>
+                <a:latin typeface="Onest"/>
+              </a:rPr>
+              <a:t>1. Официальное</a:t>
+            </a:r>
+          </a:p>
+        </p:txBody>
+      </p:sp>
+      <p:sp>
+        <p:nvSpPr>
+          <p:cNvPr id="12" name="TextBox 11"/>
+          <p:cNvSpPr txBox="1"/>
+          <p:nvPr/>
+        </p:nvSpPr>
+        <p:spPr>
+          <a:xfrm>
+            <a:off x="960120" y="2395728"/>
+            <a:ext cx="2743200" cy="1554480"/>
+          </a:xfrm>
+          <a:prstGeom prst="rect">
+            <a:avLst/>
+          </a:prstGeom>
+          <a:noFill/>
+        </p:spPr>
+        <p:txBody>
+          <a:bodyPr wrap="square">
+            <a:noAutofit/>
+          </a:bodyPr>
+          <a:lstStyle/>
+          <a:p>
+            <a:pPr algn="l"/>
+            <a:r>
+              <a:rPr sz="1700" b="0">
+                <a:solidFill>
+                  <a:srgbClr val="FFFFFF"/>
+                </a:solidFill>
+                <a:latin typeface="Onest"/>
+              </a:rPr>
+              <a:t>Дворцовая площадь, Эрмитаж, Исаакиевский собор: высокая узнаваемость и культурный слой.</a:t>
+            </a:r>
+          </a:p>
+        </p:txBody>
+      </p:sp>
+      <p:sp>
+        <p:nvSpPr>
+          <p:cNvPr id="13" name="TextBox 12"/>
+          <p:cNvSpPr txBox="1"/>
+          <p:nvPr/>
+        </p:nvSpPr>
+        <p:spPr>
+          <a:xfrm>
+            <a:off x="4434840" y="1828800"/>
+            <a:ext cx="2743200" cy="411480"/>
+          </a:xfrm>
+          <a:prstGeom prst="rect">
+            <a:avLst/>
+          </a:prstGeom>
+          <a:noFill/>
+        </p:spPr>
+        <p:txBody>
+          <a:bodyPr wrap="square">
+            <a:noAutofit/>
+          </a:bodyPr>
+          <a:lstStyle/>
+          <a:p>
+            <a:pPr algn="l"/>
+            <a:r>
+              <a:rPr sz="2000" b="1">
+                <a:solidFill>
+                  <a:srgbClr val="FFFFFF"/>
+                </a:solidFill>
+                <a:latin typeface="Onest"/>
+              </a:rPr>
+              <a:t>2. Разговорное</a:t>
+            </a:r>
+          </a:p>
+        </p:txBody>
+      </p:sp>
+      <p:sp>
+        <p:nvSpPr>
+          <p:cNvPr id="14" name="TextBox 13"/>
+          <p:cNvSpPr txBox="1"/>
+          <p:nvPr/>
+        </p:nvSpPr>
+        <p:spPr>
+          <a:xfrm>
+            <a:off x="4434840" y="2395728"/>
+            <a:ext cx="2743200" cy="1554480"/>
+          </a:xfrm>
+          <a:prstGeom prst="rect">
+            <a:avLst/>
+          </a:prstGeom>
+          <a:noFill/>
+        </p:spPr>
+        <p:txBody>
+          <a:bodyPr wrap="square">
+            <a:noAutofit/>
+          </a:bodyPr>
+          <a:lstStyle/>
+          <a:p>
+            <a:pPr algn="l"/>
+            <a:r>
+              <a:rPr sz="1700" b="0">
+                <a:solidFill>
+                  <a:srgbClr val="FFFFFF"/>
+                </a:solidFill>
+                <a:latin typeface="Onest"/>
+              </a:rPr>
+              <a:t>Питер, Невский, Лиговка: активная навигация, друзья, соцсети, повседневные маршруты.</a:t>
+            </a:r>
+          </a:p>
+        </p:txBody>
+      </p:sp>
+      <p:sp>
+        <p:nvSpPr>
+          <p:cNvPr id="15" name="TextBox 14"/>
+          <p:cNvSpPr txBox="1"/>
+          <p:nvPr/>
+        </p:nvSpPr>
+        <p:spPr>
+          <a:xfrm>
+            <a:off x="7909560" y="1828800"/>
+            <a:ext cx="2743200" cy="411480"/>
+          </a:xfrm>
+          <a:prstGeom prst="rect">
+            <a:avLst/>
+          </a:prstGeom>
+          <a:noFill/>
+        </p:spPr>
+        <p:txBody>
+          <a:bodyPr wrap="square">
+            <a:noAutofit/>
+          </a:bodyPr>
+          <a:lstStyle/>
+          <a:p>
+            <a:pPr algn="l"/>
+            <a:r>
+              <a:rPr sz="2000" b="1">
+                <a:solidFill>
+                  <a:srgbClr val="FFFFFF"/>
+                </a:solidFill>
+                <a:latin typeface="Onest"/>
+              </a:rPr>
+              <a:t>3. Историческое</a:t>
+            </a:r>
+          </a:p>
+        </p:txBody>
+      </p:sp>
+      <p:sp>
+        <p:nvSpPr>
+          <p:cNvPr id="16" name="TextBox 15"/>
+          <p:cNvSpPr txBox="1"/>
+          <p:nvPr/>
+        </p:nvSpPr>
+        <p:spPr>
+          <a:xfrm>
+            <a:off x="7909560" y="2395728"/>
+            <a:ext cx="2743200" cy="1554480"/>
+          </a:xfrm>
+          <a:prstGeom prst="rect">
+            <a:avLst/>
+          </a:prstGeom>
+          <a:noFill/>
+        </p:spPr>
+        <p:txBody>
+          <a:bodyPr wrap="square">
+            <a:noAutofit/>
+          </a:bodyPr>
+          <a:lstStyle/>
+          <a:p>
+            <a:pPr algn="l"/>
+            <a:r>
+              <a:rPr sz="1700" b="0">
+                <a:solidFill>
+                  <a:srgbClr val="FFFFFF"/>
+                </a:solidFill>
+                <a:latin typeface="Onest"/>
+              </a:rPr>
+              <a:t>Ленинград: почти всем знаком, но у молодых респондентов чаще находится в пассиве.</a:t>
+            </a:r>
+          </a:p>
+        </p:txBody>
+      </p:sp>
+      <p:sp>
+        <p:nvSpPr>
+          <p:cNvPr id="17" name="Rectangle 16"/>
+          <p:cNvSpPr/>
+          <p:nvPr/>
+        </p:nvSpPr>
+        <p:spPr>
+          <a:xfrm>
+            <a:off x="685800" y="5166360"/>
+            <a:ext cx="10241280" cy="868680"/>
+          </a:xfrm>
+          <a:prstGeom prst="rect">
+            <a:avLst/>
+          </a:prstGeom>
+          <a:solidFill>
+            <a:srgbClr val="FFFFFF"/>
+          </a:solidFill>
+          <a:ln>
+            <a:noFill/>
+          </a:ln>
+        </p:spPr>
+        <p:style>
+          <a:lnRef idx="1">
+            <a:schemeClr val="accent1"/>
+          </a:lnRef>
+          <a:fillRef idx="3">
+            <a:schemeClr val="accent1"/>
+          </a:fillRef>
+          <a:effectRef idx="2">
+            <a:schemeClr val="accent1"/>
+          </a:effectRef>
+          <a:fontRef idx="minor">
+            <a:schemeClr val="lt1"/>
+          </a:fontRef>
+        </p:style>
+        <p:txBody>
+          <a:bodyPr rtlCol="0" anchor="ctr"/>
+          <a:lstStyle/>
+          <a:p>
+            <a:pPr algn="ctr"/>
+          </a:p>
+        </p:txBody>
+      </p:sp>
+      <p:sp>
+        <p:nvSpPr>
+          <p:cNvPr id="18" name="TextBox 17"/>
+          <p:cNvSpPr txBox="1"/>
+          <p:nvPr/>
+        </p:nvSpPr>
+        <p:spPr>
+          <a:xfrm>
+            <a:off x="960120" y="5385816"/>
+            <a:ext cx="9646920" cy="365760"/>
+          </a:xfrm>
+          <a:prstGeom prst="rect">
+            <a:avLst/>
+          </a:prstGeom>
+          <a:noFill/>
+        </p:spPr>
+        <p:txBody>
+          <a:bodyPr wrap="square">
+            <a:noAutofit/>
+          </a:bodyPr>
+          <a:lstStyle/>
+          <a:p>
+            <a:pPr algn="l"/>
+            <a:r>
+              <a:rPr sz="1700" b="1">
+                <a:solidFill>
+                  <a:srgbClr val="244128"/>
+                </a:solidFill>
+                <a:latin typeface="Onest"/>
+              </a:rPr>
+              <a:t>Защитный тезис</a:t>
+            </a:r>
+          </a:p>
+        </p:txBody>
+      </p:sp>
+      <p:sp>
+        <p:nvSpPr>
+          <p:cNvPr id="19" name="TextBox 18"/>
+          <p:cNvSpPr txBox="1"/>
+          <p:nvPr/>
+        </p:nvSpPr>
+        <p:spPr>
+          <a:xfrm>
+            <a:off x="2788920" y="5376672"/>
+            <a:ext cx="7818120" cy="420624"/>
+          </a:xfrm>
+          <a:prstGeom prst="rect">
+            <a:avLst/>
+          </a:prstGeom>
+          <a:noFill/>
+        </p:spPr>
+        <p:txBody>
+          <a:bodyPr wrap="square">
+            <a:noAutofit/>
+          </a:bodyPr>
+          <a:lstStyle/>
+          <a:p>
+            <a:pPr algn="l"/>
+            <a:r>
+              <a:rPr sz="1500" b="0">
+                <a:solidFill>
+                  <a:srgbClr val="000000"/>
+                </a:solidFill>
+                <a:latin typeface="Onest"/>
+              </a:rPr>
+              <a:t>Границы между активным и пассивным топонимиконом задаются не грамматикой, а возрастом, опытом города, кругом общения и цифровыми практиками.</a:t>
+            </a:r>
+          </a:p>
+        </p:txBody>
+      </p:sp>
+      <p:sp>
+        <p:nvSpPr>
+          <p:cNvPr id="20" name="TextBox 19"/>
+          <p:cNvSpPr txBox="1"/>
+          <p:nvPr/>
+        </p:nvSpPr>
+        <p:spPr>
+          <a:xfrm>
+            <a:off x="713232" y="6199632"/>
+            <a:ext cx="9144000" cy="256032"/>
+          </a:xfrm>
+          <a:prstGeom prst="rect">
+            <a:avLst/>
+          </a:prstGeom>
+          <a:noFill/>
+        </p:spPr>
+        <p:txBody>
+          <a:bodyPr wrap="square">
+            <a:noAutofit/>
+          </a:bodyPr>
+          <a:lstStyle/>
+          <a:p>
+            <a:pPr algn="l"/>
+            <a:r>
+              <a:rPr sz="1100" b="0">
+                <a:solidFill>
+                  <a:srgbClr val="5C675F"/>
+                </a:solidFill>
+                <a:latin typeface="Onest"/>
+              </a:rPr>
+              <a:t>Дальше: расширить выборку, добавить старшее поколение и сравнить Петербург с другими миллионниками.</a:t>
             </a:r>
           </a:p>
         </p:txBody>

--- a/my_project.pptx
+++ b/my_project.pptx
@@ -9,6 +9,12 @@
     <p:sldId id="257" r:id="rId8"/>
     <p:sldId id="258" r:id="rId9"/>
     <p:sldId id="259" r:id="rId10"/>
+    <p:sldId id="260" r:id="rId11"/>
+    <p:sldId id="261" r:id="rId12"/>
+    <p:sldId id="262" r:id="rId13"/>
+    <p:sldId id="263" r:id="rId14"/>
+    <p:sldId id="264" r:id="rId15"/>
+    <p:sldId id="265" r:id="rId16"/>
   </p:sldIdLst>
   <p:sldSz cx="12191695" cy="6858000" type="screen4x3"/>
   <p:notesSz cx="6858000" cy="9144000"/>
@@ -3409,7 +3415,7 @@
                 <a:solidFill>
                   <a:srgbClr val="5C675F"/>
                 </a:solidFill>
-                <a:latin typeface="Onest"/>
+                <a:latin typeface="Arial"/>
               </a:rPr>
               <a:t>Курсовая работа · выступление 5–7 минут</a:t>
             </a:r>
@@ -3444,7 +3450,7 @@
                 <a:solidFill>
                   <a:srgbClr val="244128"/>
                 </a:solidFill>
-                <a:latin typeface="Onest"/>
+                <a:latin typeface="Arial"/>
               </a:rPr>
               <a:t>Топонимы Санкт-Петербурга</a:t>
             </a:r>
@@ -3483,7 +3489,7 @@
                 <a:solidFill>
                   <a:srgbClr val="000000"/>
                 </a:solidFill>
-                <a:latin typeface="Onest"/>
+                <a:latin typeface="Arial"/>
               </a:rPr>
               <a:t>Как официальные, разговорные и исторические названия распределяются между активным и пассивным запасом речи</a:t>
             </a:r>
@@ -3522,7 +3528,7 @@
                 <a:solidFill>
                   <a:srgbClr val="5C675F"/>
                 </a:solidFill>
-                <a:latin typeface="Onest"/>
+                <a:latin typeface="Arial"/>
               </a:rPr>
               <a:t>Гуманитарный институт · Высшая школа лингвистики и педагогики</a:t>
             </a:r>
@@ -3538,7 +3544,7 @@
                 <a:solidFill>
                   <a:srgbClr val="5C675F"/>
                 </a:solidFill>
-                <a:latin typeface="Onest"/>
+                <a:latin typeface="Arial"/>
               </a:rPr>
               <a:t>Выполнил: К.А. Шин · Руководитель: В.А. Белов</a:t>
             </a:r>
@@ -3554,7 +3560,7 @@
                 <a:solidFill>
                   <a:srgbClr val="5C675F"/>
                 </a:solidFill>
-                <a:latin typeface="Onest"/>
+                <a:latin typeface="Arial"/>
               </a:rPr>
               <a:t>Санкт-Петербург, 2026</a:t>
             </a:r>
@@ -3589,9 +3595,371 @@
                 <a:solidFill>
                   <a:srgbClr val="FFFFFF"/>
                 </a:solidFill>
-                <a:latin typeface="Onest"/>
-              </a:rPr>
-              <a:t>1/4</a:t>
+                <a:latin typeface="Arial"/>
+              </a:rPr>
+              <a:t>1/10</a:t>
+            </a:r>
+          </a:p>
+        </p:txBody>
+      </p:sp>
+    </p:spTree>
+  </p:cSld>
+  <p:clrMapOvr>
+    <a:masterClrMapping/>
+  </p:clrMapOvr>
+</p:sld>
+</file>
+
+<file path=ppt/slides/slide10.xml><?xml version="1.0" encoding="utf-8"?>
+<p:sld xmlns:a="http://schemas.openxmlformats.org/drawingml/2006/main" xmlns:p="http://schemas.openxmlformats.org/presentationml/2006/main" xmlns:r="http://schemas.openxmlformats.org/officeDocument/2006/relationships">
+  <p:cSld>
+    <p:bg>
+      <p:bgPr>
+        <a:solidFill>
+          <a:srgbClr val="F6F8F4"/>
+        </a:solidFill>
+        <a:effectLst/>
+      </p:bgPr>
+    </p:bg>
+    <p:spTree>
+      <p:nvGrpSpPr>
+        <p:cNvPr id="1" name=""/>
+        <p:cNvGrpSpPr/>
+        <p:nvPr/>
+      </p:nvGrpSpPr>
+      <p:grpSpPr/>
+      <p:sp>
+        <p:nvSpPr>
+          <p:cNvPr id="2" name="Rectangle 1"/>
+          <p:cNvSpPr/>
+          <p:nvPr/>
+        </p:nvSpPr>
+        <p:spPr>
+          <a:xfrm>
+            <a:off x="0" y="0"/>
+            <a:ext cx="12191695" cy="6858000"/>
+          </a:xfrm>
+          <a:prstGeom prst="rect">
+            <a:avLst/>
+          </a:prstGeom>
+          <a:solidFill>
+            <a:srgbClr val="244128"/>
+          </a:solidFill>
+          <a:ln>
+            <a:noFill/>
+          </a:ln>
+        </p:spPr>
+        <p:style>
+          <a:lnRef idx="1">
+            <a:schemeClr val="accent1"/>
+          </a:lnRef>
+          <a:fillRef idx="3">
+            <a:schemeClr val="accent1"/>
+          </a:fillRef>
+          <a:effectRef idx="2">
+            <a:schemeClr val="accent1"/>
+          </a:effectRef>
+          <a:fontRef idx="minor">
+            <a:schemeClr val="lt1"/>
+          </a:fontRef>
+        </p:style>
+        <p:txBody>
+          <a:bodyPr rtlCol="0" anchor="ctr"/>
+          <a:lstStyle/>
+          <a:p>
+            <a:pPr algn="ctr"/>
+          </a:p>
+        </p:txBody>
+      </p:sp>
+      <p:sp>
+        <p:nvSpPr>
+          <p:cNvPr id="3" name="Rectangle 2"/>
+          <p:cNvSpPr/>
+          <p:nvPr/>
+        </p:nvSpPr>
+        <p:spPr>
+          <a:xfrm>
+            <a:off x="0" y="0"/>
+            <a:ext cx="3794760" cy="6858000"/>
+          </a:xfrm>
+          <a:prstGeom prst="rect">
+            <a:avLst/>
+          </a:prstGeom>
+          <a:solidFill>
+            <a:srgbClr val="3AAA35"/>
+          </a:solidFill>
+          <a:ln>
+            <a:noFill/>
+          </a:ln>
+        </p:spPr>
+        <p:style>
+          <a:lnRef idx="1">
+            <a:schemeClr val="accent1"/>
+          </a:lnRef>
+          <a:fillRef idx="3">
+            <a:schemeClr val="accent1"/>
+          </a:fillRef>
+          <a:effectRef idx="2">
+            <a:schemeClr val="accent1"/>
+          </a:effectRef>
+          <a:fontRef idx="minor">
+            <a:schemeClr val="lt1"/>
+          </a:fontRef>
+        </p:style>
+        <p:txBody>
+          <a:bodyPr rtlCol="0" anchor="ctr"/>
+          <a:lstStyle/>
+          <a:p>
+            <a:pPr algn="ctr"/>
+          </a:p>
+        </p:txBody>
+      </p:sp>
+      <p:sp>
+        <p:nvSpPr>
+          <p:cNvPr id="4" name="Rectangle 3"/>
+          <p:cNvSpPr/>
+          <p:nvPr/>
+        </p:nvSpPr>
+        <p:spPr>
+          <a:xfrm>
+            <a:off x="3794760" y="0"/>
+            <a:ext cx="1874519" cy="3429000"/>
+          </a:xfrm>
+          <a:prstGeom prst="rect">
+            <a:avLst/>
+          </a:prstGeom>
+          <a:solidFill>
+            <a:srgbClr val="56975B"/>
+          </a:solidFill>
+          <a:ln>
+            <a:noFill/>
+          </a:ln>
+        </p:spPr>
+        <p:style>
+          <a:lnRef idx="1">
+            <a:schemeClr val="accent1"/>
+          </a:lnRef>
+          <a:fillRef idx="3">
+            <a:schemeClr val="accent1"/>
+          </a:fillRef>
+          <a:effectRef idx="2">
+            <a:schemeClr val="accent1"/>
+          </a:effectRef>
+          <a:fontRef idx="minor">
+            <a:schemeClr val="lt1"/>
+          </a:fontRef>
+        </p:style>
+        <p:txBody>
+          <a:bodyPr rtlCol="0" anchor="ctr"/>
+          <a:lstStyle/>
+          <a:p>
+            <a:pPr algn="ctr"/>
+          </a:p>
+        </p:txBody>
+      </p:sp>
+      <p:sp>
+        <p:nvSpPr>
+          <p:cNvPr id="5" name="Rectangle 4"/>
+          <p:cNvSpPr/>
+          <p:nvPr/>
+        </p:nvSpPr>
+        <p:spPr>
+          <a:xfrm>
+            <a:off x="3794760" y="3429000"/>
+            <a:ext cx="1874519" cy="3429000"/>
+          </a:xfrm>
+          <a:prstGeom prst="rect">
+            <a:avLst/>
+          </a:prstGeom>
+          <a:solidFill>
+            <a:srgbClr val="DB4928"/>
+          </a:solidFill>
+          <a:ln>
+            <a:noFill/>
+          </a:ln>
+        </p:spPr>
+        <p:style>
+          <a:lnRef idx="1">
+            <a:schemeClr val="accent1"/>
+          </a:lnRef>
+          <a:fillRef idx="3">
+            <a:schemeClr val="accent1"/>
+          </a:fillRef>
+          <a:effectRef idx="2">
+            <a:schemeClr val="accent1"/>
+          </a:effectRef>
+          <a:fontRef idx="minor">
+            <a:schemeClr val="lt1"/>
+          </a:fontRef>
+        </p:style>
+        <p:txBody>
+          <a:bodyPr rtlCol="0" anchor="ctr"/>
+          <a:lstStyle/>
+          <a:p>
+            <a:pPr algn="ctr"/>
+          </a:p>
+        </p:txBody>
+      </p:sp>
+      <p:pic>
+        <p:nvPicPr>
+          <p:cNvPr id="6" name="Picture 5" descr="spbstu_logo_02.png"/>
+          <p:cNvPicPr>
+            <a:picLocks noChangeAspect="1"/>
+          </p:cNvPicPr>
+          <p:nvPr/>
+        </p:nvPicPr>
+        <p:blipFill>
+          <a:blip r:embed="rId2"/>
+          <a:stretch>
+            <a:fillRect/>
+          </a:stretch>
+        </p:blipFill>
+        <p:spPr>
+          <a:xfrm>
+            <a:off x="502920" y="310896"/>
+            <a:ext cx="1600200" cy="552069"/>
+          </a:xfrm>
+          <a:prstGeom prst="rect">
+            <a:avLst/>
+          </a:prstGeom>
+        </p:spPr>
+      </p:pic>
+      <p:sp>
+        <p:nvSpPr>
+          <p:cNvPr id="7" name="TextBox 6"/>
+          <p:cNvSpPr txBox="1"/>
+          <p:nvPr/>
+        </p:nvSpPr>
+        <p:spPr>
+          <a:xfrm>
+            <a:off x="6217920" y="2148840"/>
+            <a:ext cx="4846320" cy="777240"/>
+          </a:xfrm>
+          <a:prstGeom prst="rect">
+            <a:avLst/>
+          </a:prstGeom>
+          <a:noFill/>
+        </p:spPr>
+        <p:txBody>
+          <a:bodyPr wrap="square">
+            <a:noAutofit/>
+          </a:bodyPr>
+          <a:lstStyle/>
+          <a:p>
+            <a:pPr algn="l"/>
+            <a:r>
+              <a:rPr sz="3800" b="1">
+                <a:solidFill>
+                  <a:srgbClr val="FFFFFF"/>
+                </a:solidFill>
+                <a:latin typeface="Arial"/>
+              </a:rPr>
+              <a:t>Спасибо за внимание!</a:t>
+            </a:r>
+          </a:p>
+        </p:txBody>
+      </p:sp>
+      <p:sp>
+        <p:nvSpPr>
+          <p:cNvPr id="8" name="TextBox 7"/>
+          <p:cNvSpPr txBox="1"/>
+          <p:nvPr/>
+        </p:nvSpPr>
+        <p:spPr>
+          <a:xfrm>
+            <a:off x="6263640" y="3063240"/>
+            <a:ext cx="4526280" cy="502920"/>
+          </a:xfrm>
+          <a:prstGeom prst="rect">
+            <a:avLst/>
+          </a:prstGeom>
+          <a:noFill/>
+        </p:spPr>
+        <p:txBody>
+          <a:bodyPr wrap="square">
+            <a:noAutofit/>
+          </a:bodyPr>
+          <a:lstStyle/>
+          <a:p>
+            <a:pPr algn="l"/>
+            <a:r>
+              <a:rPr sz="2200" b="0">
+                <a:solidFill>
+                  <a:srgbClr val="FFFFFF"/>
+                </a:solidFill>
+                <a:latin typeface="Arial"/>
+              </a:rPr>
+              <a:t>Готов ответить на вопросы</a:t>
+            </a:r>
+          </a:p>
+        </p:txBody>
+      </p:sp>
+      <p:sp>
+        <p:nvSpPr>
+          <p:cNvPr id="9" name="TextBox 8"/>
+          <p:cNvSpPr txBox="1"/>
+          <p:nvPr/>
+        </p:nvSpPr>
+        <p:spPr>
+          <a:xfrm>
+            <a:off x="6263640" y="5074920"/>
+            <a:ext cx="4754880" cy="320040"/>
+          </a:xfrm>
+          <a:prstGeom prst="rect">
+            <a:avLst/>
+          </a:prstGeom>
+          <a:noFill/>
+        </p:spPr>
+        <p:txBody>
+          <a:bodyPr wrap="square">
+            <a:noAutofit/>
+          </a:bodyPr>
+          <a:lstStyle/>
+          <a:p>
+            <a:pPr algn="l"/>
+            <a:r>
+              <a:rPr sz="1200" b="0">
+                <a:solidFill>
+                  <a:srgbClr val="DFEDDE"/>
+                </a:solidFill>
+                <a:latin typeface="Arial"/>
+              </a:rPr>
+              <a:t>Курсовая работа · Топонимы Санкт-Петербурга</a:t>
+            </a:r>
+          </a:p>
+        </p:txBody>
+      </p:sp>
+      <p:sp>
+        <p:nvSpPr>
+          <p:cNvPr id="10" name="TextBox 9"/>
+          <p:cNvSpPr txBox="1"/>
+          <p:nvPr/>
+        </p:nvSpPr>
+        <p:spPr>
+          <a:xfrm>
+            <a:off x="10744200" y="6355080"/>
+            <a:ext cx="822960" cy="228600"/>
+          </a:xfrm>
+          <a:prstGeom prst="rect">
+            <a:avLst/>
+          </a:prstGeom>
+          <a:noFill/>
+        </p:spPr>
+        <p:txBody>
+          <a:bodyPr wrap="square">
+            <a:noAutofit/>
+          </a:bodyPr>
+          <a:lstStyle/>
+          <a:p>
+            <a:pPr algn="r"/>
+            <a:r>
+              <a:rPr sz="1000" b="0">
+                <a:solidFill>
+                  <a:srgbClr val="FFFFFF"/>
+                </a:solidFill>
+                <a:latin typeface="Arial"/>
+              </a:rPr>
+              <a:t>10/10</a:t>
             </a:r>
           </a:p>
         </p:txBody>
@@ -3674,9 +4042,9 @@
                 <a:solidFill>
                   <a:srgbClr val="5C675F"/>
                 </a:solidFill>
-                <a:latin typeface="Onest"/>
-              </a:rPr>
-              <a:t>Тема, материал и методика</a:t>
+                <a:latin typeface="Arial"/>
+              </a:rPr>
+              <a:t>Актуальность и объект исследования</a:t>
             </a:r>
           </a:p>
         </p:txBody>
@@ -3709,9 +4077,9 @@
                 <a:solidFill>
                   <a:srgbClr val="244128"/>
                 </a:solidFill>
-                <a:latin typeface="Onest"/>
-              </a:rPr>
-              <a:t>Исследовательская рамка</a:t>
+                <a:latin typeface="Arial"/>
+              </a:rPr>
+              <a:t>Введение</a:t>
             </a:r>
           </a:p>
         </p:txBody>
@@ -3787,9 +4155,9 @@
                 <a:solidFill>
                   <a:srgbClr val="5C675F"/>
                 </a:solidFill>
-                <a:latin typeface="Onest"/>
-              </a:rPr>
-              <a:t>1:00–2:30</a:t>
+                <a:latin typeface="Arial"/>
+              </a:rPr>
+              <a:t>0:30–1:15</a:t>
             </a:r>
           </a:p>
         </p:txBody>
@@ -3822,9 +4190,9 @@
                 <a:solidFill>
                   <a:srgbClr val="5C675F"/>
                 </a:solidFill>
-                <a:latin typeface="Onest"/>
-              </a:rPr>
-              <a:t>2/4</a:t>
+                <a:latin typeface="Arial"/>
+              </a:rPr>
+              <a:t>2/10</a:t>
             </a:r>
           </a:p>
         </p:txBody>
@@ -3837,8 +4205,8 @@
         </p:nvSpPr>
         <p:spPr>
           <a:xfrm>
-            <a:off x="685800" y="1600200"/>
-            <a:ext cx="3383280" cy="1417320"/>
+            <a:off x="685800" y="1508760"/>
+            <a:ext cx="6537960" cy="4343400"/>
           </a:xfrm>
           <a:prstGeom prst="rect">
             <a:avLst/>
@@ -3874,20 +4242,223 @@
       </p:sp>
       <p:sp>
         <p:nvSpPr>
-          <p:cNvPr id="9" name="Rectangle 8"/>
+          <p:cNvPr id="9" name="TextBox 8"/>
+          <p:cNvSpPr txBox="1"/>
+          <p:nvPr/>
+        </p:nvSpPr>
+        <p:spPr>
+          <a:xfrm>
+            <a:off x="987552" y="1783080"/>
+            <a:ext cx="5760720" cy="365760"/>
+          </a:xfrm>
+          <a:prstGeom prst="rect">
+            <a:avLst/>
+          </a:prstGeom>
+          <a:noFill/>
+        </p:spPr>
+        <p:txBody>
+          <a:bodyPr wrap="square">
+            <a:noAutofit/>
+          </a:bodyPr>
+          <a:lstStyle/>
+          <a:p>
+            <a:pPr algn="l"/>
+            <a:r>
+              <a:rPr sz="2000" b="1">
+                <a:solidFill>
+                  <a:srgbClr val="244128"/>
+                </a:solidFill>
+                <a:latin typeface="Arial"/>
+              </a:rPr>
+              <a:t>Почему тема важна</a:t>
+            </a:r>
+          </a:p>
+        </p:txBody>
+      </p:sp>
+      <p:sp>
+        <p:nvSpPr>
+          <p:cNvPr id="10" name="TextBox 9"/>
+          <p:cNvSpPr txBox="1"/>
+          <p:nvPr/>
+        </p:nvSpPr>
+        <p:spPr>
+          <a:xfrm>
+            <a:off x="987552" y="2331720"/>
+            <a:ext cx="5715000" cy="2377440"/>
+          </a:xfrm>
+          <a:prstGeom prst="rect">
+            <a:avLst/>
+          </a:prstGeom>
+          <a:noFill/>
+        </p:spPr>
+        <p:txBody>
+          <a:bodyPr wrap="square">
+            <a:spAutoFit/>
+          </a:bodyPr>
+          <a:lstStyle/>
+          <a:p>
+            <a:pPr>
+              <a:spcAft>
+                <a:spcPts val="900"/>
+              </a:spcAft>
+            </a:pPr>
+            <a:r>
+              <a:rPr sz="1700" b="1">
+                <a:solidFill>
+                  <a:srgbClr val="3AAA35"/>
+                </a:solidFill>
+                <a:latin typeface="Arial"/>
+              </a:rPr>
+              <a:t>■ </a:t>
+            </a:r>
+            <a:r>
+              <a:rPr sz="1700" b="0">
+                <a:solidFill>
+                  <a:srgbClr val="000000"/>
+                </a:solidFill>
+                <a:latin typeface="Arial"/>
+              </a:rPr>
+              <a:t>Санкт-Петербург воспринимается через сеть городских названий: улиц, площадей, районов, станций метро.</a:t>
+            </a:r>
+          </a:p>
+          <a:p>
+            <a:pPr>
+              <a:spcAft>
+                <a:spcPts val="900"/>
+              </a:spcAft>
+            </a:pPr>
+            <a:r>
+              <a:rPr sz="1700" b="1">
+                <a:solidFill>
+                  <a:srgbClr val="3AAA35"/>
+                </a:solidFill>
+                <a:latin typeface="Arial"/>
+              </a:rPr>
+              <a:t>■ </a:t>
+            </a:r>
+            <a:r>
+              <a:rPr sz="1700" b="0">
+                <a:solidFill>
+                  <a:srgbClr val="000000"/>
+                </a:solidFill>
+                <a:latin typeface="Arial"/>
+              </a:rPr>
+              <a:t>Один объект может иметь официальное, разговорное и историческое имя.</a:t>
+            </a:r>
+          </a:p>
+          <a:p>
+            <a:pPr>
+              <a:spcAft>
+                <a:spcPts val="900"/>
+              </a:spcAft>
+            </a:pPr>
+            <a:r>
+              <a:rPr sz="1700" b="1">
+                <a:solidFill>
+                  <a:srgbClr val="3AAA35"/>
+                </a:solidFill>
+                <a:latin typeface="Arial"/>
+              </a:rPr>
+              <a:t>■ </a:t>
+            </a:r>
+            <a:r>
+              <a:rPr sz="1700" b="0">
+                <a:solidFill>
+                  <a:srgbClr val="000000"/>
+                </a:solidFill>
+                <a:latin typeface="Arial"/>
+              </a:rPr>
+              <a:t>Для лингвистики важно понять, какие названия реально живут в речи, а какие остаются культурной отсылкой.</a:t>
+            </a:r>
+          </a:p>
+        </p:txBody>
+      </p:sp>
+      <p:sp>
+        <p:nvSpPr>
+          <p:cNvPr id="11" name="TextBox 10"/>
+          <p:cNvSpPr txBox="1"/>
+          <p:nvPr/>
+        </p:nvSpPr>
+        <p:spPr>
+          <a:xfrm>
+            <a:off x="1005840" y="5166360"/>
+            <a:ext cx="5806440" cy="320040"/>
+          </a:xfrm>
+          <a:prstGeom prst="rect">
+            <a:avLst/>
+          </a:prstGeom>
+          <a:noFill/>
+        </p:spPr>
+        <p:txBody>
+          <a:bodyPr wrap="square">
+            <a:noAutofit/>
+          </a:bodyPr>
+          <a:lstStyle/>
+          <a:p>
+            <a:pPr algn="l"/>
+            <a:r>
+              <a:rPr sz="1600" b="1">
+                <a:solidFill>
+                  <a:srgbClr val="DB4928"/>
+                </a:solidFill>
+                <a:latin typeface="Arial"/>
+              </a:rPr>
+              <a:t>Проблемный вопрос</a:t>
+            </a:r>
+          </a:p>
+        </p:txBody>
+      </p:sp>
+      <p:sp>
+        <p:nvSpPr>
+          <p:cNvPr id="12" name="TextBox 11"/>
+          <p:cNvSpPr txBox="1"/>
+          <p:nvPr/>
+        </p:nvSpPr>
+        <p:spPr>
+          <a:xfrm>
+            <a:off x="1005840" y="5468112"/>
+            <a:ext cx="5806440" cy="320040"/>
+          </a:xfrm>
+          <a:prstGeom prst="rect">
+            <a:avLst/>
+          </a:prstGeom>
+          <a:noFill/>
+        </p:spPr>
+        <p:txBody>
+          <a:bodyPr wrap="square">
+            <a:noAutofit/>
+          </a:bodyPr>
+          <a:lstStyle/>
+          <a:p>
+            <a:pPr algn="l"/>
+            <a:r>
+              <a:rPr sz="1400" b="0">
+                <a:solidFill>
+                  <a:srgbClr val="000000"/>
+                </a:solidFill>
+                <a:latin typeface="Arial"/>
+              </a:rPr>
+              <a:t>Почему одни говорят «Питер» и «Лиговка», а другие — «Санкт-Петербург» и «Лиговский проспект»?</a:t>
+            </a:r>
+          </a:p>
+        </p:txBody>
+      </p:sp>
+      <p:sp>
+        <p:nvSpPr>
+          <p:cNvPr id="13" name="Rectangle 12"/>
           <p:cNvSpPr/>
           <p:nvPr/>
         </p:nvSpPr>
         <p:spPr>
           <a:xfrm>
-            <a:off x="685800" y="1600200"/>
-            <a:ext cx="109728" cy="1417320"/>
+            <a:off x="7543800" y="1508760"/>
+            <a:ext cx="3886200" cy="4343400"/>
           </a:xfrm>
           <a:prstGeom prst="rect">
             <a:avLst/>
           </a:prstGeom>
           <a:solidFill>
-            <a:srgbClr val="3AAA35"/>
+            <a:srgbClr val="244128"/>
           </a:solidFill>
           <a:ln>
             <a:noFill/>
@@ -3917,14 +4488,14 @@
       </p:sp>
       <p:sp>
         <p:nvSpPr>
-          <p:cNvPr id="10" name="TextBox 9"/>
+          <p:cNvPr id="14" name="TextBox 13"/>
           <p:cNvSpPr txBox="1"/>
           <p:nvPr/>
         </p:nvSpPr>
         <p:spPr>
           <a:xfrm>
-            <a:off x="941832" y="1810512"/>
-            <a:ext cx="2971800" cy="320040"/>
+            <a:off x="7909560" y="1828800"/>
+            <a:ext cx="3154680" cy="320040"/>
           </a:xfrm>
           <a:prstGeom prst="rect">
             <a:avLst/>
@@ -3939,27 +4510,27 @@
           <a:p>
             <a:pPr algn="l"/>
             <a:r>
-              <a:rPr sz="1500" b="1">
-                <a:solidFill>
-                  <a:srgbClr val="244128"/>
-                </a:solidFill>
-                <a:latin typeface="Onest"/>
-              </a:rPr>
-              <a:t>Цель</a:t>
-            </a:r>
-          </a:p>
-        </p:txBody>
-      </p:sp>
-      <p:sp>
-        <p:nvSpPr>
-          <p:cNvPr id="11" name="TextBox 10"/>
+              <a:rPr sz="1800" b="1">
+                <a:solidFill>
+                  <a:srgbClr val="FFFFFF"/>
+                </a:solidFill>
+                <a:latin typeface="Arial"/>
+              </a:rPr>
+              <a:t>Объект</a:t>
+            </a:r>
+          </a:p>
+        </p:txBody>
+      </p:sp>
+      <p:sp>
+        <p:nvSpPr>
+          <p:cNvPr id="15" name="TextBox 14"/>
           <p:cNvSpPr txBox="1"/>
           <p:nvPr/>
         </p:nvSpPr>
         <p:spPr>
           <a:xfrm>
-            <a:off x="941832" y="2258568"/>
-            <a:ext cx="2971800" cy="630936"/>
+            <a:off x="7909560" y="2240280"/>
+            <a:ext cx="3154680" cy="777240"/>
           </a:xfrm>
           <a:prstGeom prst="rect">
             <a:avLst/>
@@ -3974,33 +4545,33 @@
           <a:p>
             <a:pPr algn="l"/>
             <a:r>
-              <a:rPr sz="1700" b="0">
-                <a:solidFill>
-                  <a:srgbClr val="000000"/>
-                </a:solidFill>
-                <a:latin typeface="Onest"/>
-              </a:rPr>
-              <a:t>Описать, как петербургские топонимы представлены в лексиконе современных носителей русского языка.</a:t>
-            </a:r>
-          </a:p>
-        </p:txBody>
-      </p:sp>
-      <p:sp>
-        <p:nvSpPr>
-          <p:cNvPr id="12" name="Rectangle 11"/>
+              <a:rPr sz="1600" b="0">
+                <a:solidFill>
+                  <a:srgbClr val="FFFFFF"/>
+                </a:solidFill>
+                <a:latin typeface="Arial"/>
+              </a:rPr>
+              <a:t>топонимическая лексика в речи носителей русского языка</a:t>
+            </a:r>
+          </a:p>
+        </p:txBody>
+      </p:sp>
+      <p:sp>
+        <p:nvSpPr>
+          <p:cNvPr id="16" name="Rectangle 15"/>
           <p:cNvSpPr/>
           <p:nvPr/>
         </p:nvSpPr>
         <p:spPr>
           <a:xfrm>
-            <a:off x="4389120" y="1600200"/>
-            <a:ext cx="3383280" cy="1417320"/>
+            <a:off x="7909560" y="3246120"/>
+            <a:ext cx="3063240" cy="45720"/>
           </a:xfrm>
           <a:prstGeom prst="rect">
             <a:avLst/>
           </a:prstGeom>
           <a:solidFill>
-            <a:srgbClr val="FFFFFF"/>
+            <a:srgbClr val="F39869"/>
           </a:solidFill>
           <a:ln>
             <a:noFill/>
@@ -4030,57 +4601,14 @@
       </p:sp>
       <p:sp>
         <p:nvSpPr>
-          <p:cNvPr id="13" name="Rectangle 12"/>
-          <p:cNvSpPr/>
-          <p:nvPr/>
-        </p:nvSpPr>
-        <p:spPr>
-          <a:xfrm>
-            <a:off x="4389120" y="1600200"/>
-            <a:ext cx="109728" cy="1417320"/>
-          </a:xfrm>
-          <a:prstGeom prst="rect">
-            <a:avLst/>
-          </a:prstGeom>
-          <a:solidFill>
-            <a:srgbClr val="DB4928"/>
-          </a:solidFill>
-          <a:ln>
-            <a:noFill/>
-          </a:ln>
-        </p:spPr>
-        <p:style>
-          <a:lnRef idx="1">
-            <a:schemeClr val="accent1"/>
-          </a:lnRef>
-          <a:fillRef idx="3">
-            <a:schemeClr val="accent1"/>
-          </a:fillRef>
-          <a:effectRef idx="2">
-            <a:schemeClr val="accent1"/>
-          </a:effectRef>
-          <a:fontRef idx="minor">
-            <a:schemeClr val="lt1"/>
-          </a:fontRef>
-        </p:style>
-        <p:txBody>
-          <a:bodyPr rtlCol="0" anchor="ctr"/>
-          <a:lstStyle/>
-          <a:p>
-            <a:pPr algn="ctr"/>
-          </a:p>
-        </p:txBody>
-      </p:sp>
-      <p:sp>
-        <p:nvSpPr>
-          <p:cNvPr id="14" name="TextBox 13"/>
+          <p:cNvPr id="17" name="TextBox 16"/>
           <p:cNvSpPr txBox="1"/>
           <p:nvPr/>
         </p:nvSpPr>
         <p:spPr>
           <a:xfrm>
-            <a:off x="4645152" y="1810512"/>
-            <a:ext cx="2971800" cy="320040"/>
+            <a:off x="7909560" y="3566160"/>
+            <a:ext cx="3154680" cy="320040"/>
           </a:xfrm>
           <a:prstGeom prst="rect">
             <a:avLst/>
@@ -4095,27 +4623,27 @@
           <a:p>
             <a:pPr algn="l"/>
             <a:r>
-              <a:rPr sz="1500" b="1">
-                <a:solidFill>
-                  <a:srgbClr val="244128"/>
-                </a:solidFill>
-                <a:latin typeface="Onest"/>
-              </a:rPr>
-              <a:t>Гипотеза</a:t>
-            </a:r>
-          </a:p>
-        </p:txBody>
-      </p:sp>
-      <p:sp>
-        <p:nvSpPr>
-          <p:cNvPr id="15" name="TextBox 14"/>
+              <a:rPr sz="1800" b="1">
+                <a:solidFill>
+                  <a:srgbClr val="FFFFFF"/>
+                </a:solidFill>
+                <a:latin typeface="Arial"/>
+              </a:rPr>
+              <a:t>Предмет</a:t>
+            </a:r>
+          </a:p>
+        </p:txBody>
+      </p:sp>
+      <p:sp>
+        <p:nvSpPr>
+          <p:cNvPr id="18" name="TextBox 17"/>
           <p:cNvSpPr txBox="1"/>
           <p:nvPr/>
         </p:nvSpPr>
         <p:spPr>
           <a:xfrm>
-            <a:off x="4645152" y="2258568"/>
-            <a:ext cx="2971800" cy="630936"/>
+            <a:off x="7909560" y="3977639"/>
+            <a:ext cx="3154680" cy="914400"/>
           </a:xfrm>
           <a:prstGeom prst="rect">
             <a:avLst/>
@@ -4130,552 +4658,14 @@
           <a:p>
             <a:pPr algn="l"/>
             <a:r>
-              <a:rPr sz="1700" b="0">
-                <a:solidFill>
-                  <a:srgbClr val="000000"/>
-                </a:solidFill>
-                <a:latin typeface="Onest"/>
-              </a:rPr>
-              <a:t>Официальные, разговорные и исторические названия работают в разных функциональных зонах.</a:t>
-            </a:r>
-          </a:p>
-        </p:txBody>
-      </p:sp>
-      <p:sp>
-        <p:nvSpPr>
-          <p:cNvPr id="16" name="Rectangle 15"/>
-          <p:cNvSpPr/>
-          <p:nvPr/>
-        </p:nvSpPr>
-        <p:spPr>
-          <a:xfrm>
-            <a:off x="8092440" y="1600200"/>
-            <a:ext cx="3383280" cy="1417320"/>
-          </a:xfrm>
-          <a:prstGeom prst="rect">
-            <a:avLst/>
-          </a:prstGeom>
-          <a:solidFill>
-            <a:srgbClr val="FFFFFF"/>
-          </a:solidFill>
-          <a:ln>
-            <a:noFill/>
-          </a:ln>
-        </p:spPr>
-        <p:style>
-          <a:lnRef idx="1">
-            <a:schemeClr val="accent1"/>
-          </a:lnRef>
-          <a:fillRef idx="3">
-            <a:schemeClr val="accent1"/>
-          </a:fillRef>
-          <a:effectRef idx="2">
-            <a:schemeClr val="accent1"/>
-          </a:effectRef>
-          <a:fontRef idx="minor">
-            <a:schemeClr val="lt1"/>
-          </a:fontRef>
-        </p:style>
-        <p:txBody>
-          <a:bodyPr rtlCol="0" anchor="ctr"/>
-          <a:lstStyle/>
-          <a:p>
-            <a:pPr algn="ctr"/>
-          </a:p>
-        </p:txBody>
-      </p:sp>
-      <p:sp>
-        <p:nvSpPr>
-          <p:cNvPr id="17" name="Rectangle 16"/>
-          <p:cNvSpPr/>
-          <p:nvPr/>
-        </p:nvSpPr>
-        <p:spPr>
-          <a:xfrm>
-            <a:off x="8092440" y="1600200"/>
-            <a:ext cx="109728" cy="1417320"/>
-          </a:xfrm>
-          <a:prstGeom prst="rect">
-            <a:avLst/>
-          </a:prstGeom>
-          <a:solidFill>
-            <a:srgbClr val="3AAA35"/>
-          </a:solidFill>
-          <a:ln>
-            <a:noFill/>
-          </a:ln>
-        </p:spPr>
-        <p:style>
-          <a:lnRef idx="1">
-            <a:schemeClr val="accent1"/>
-          </a:lnRef>
-          <a:fillRef idx="3">
-            <a:schemeClr val="accent1"/>
-          </a:fillRef>
-          <a:effectRef idx="2">
-            <a:schemeClr val="accent1"/>
-          </a:effectRef>
-          <a:fontRef idx="minor">
-            <a:schemeClr val="lt1"/>
-          </a:fontRef>
-        </p:style>
-        <p:txBody>
-          <a:bodyPr rtlCol="0" anchor="ctr"/>
-          <a:lstStyle/>
-          <a:p>
-            <a:pPr algn="ctr"/>
-          </a:p>
-        </p:txBody>
-      </p:sp>
-      <p:sp>
-        <p:nvSpPr>
-          <p:cNvPr id="18" name="TextBox 17"/>
-          <p:cNvSpPr txBox="1"/>
-          <p:nvPr/>
-        </p:nvSpPr>
-        <p:spPr>
-          <a:xfrm>
-            <a:off x="8348472" y="1810512"/>
-            <a:ext cx="2971800" cy="320040"/>
-          </a:xfrm>
-          <a:prstGeom prst="rect">
-            <a:avLst/>
-          </a:prstGeom>
-          <a:noFill/>
-        </p:spPr>
-        <p:txBody>
-          <a:bodyPr wrap="square">
-            <a:noAutofit/>
-          </a:bodyPr>
-          <a:lstStyle/>
-          <a:p>
-            <a:pPr algn="l"/>
-            <a:r>
-              <a:rPr sz="1500" b="1">
-                <a:solidFill>
-                  <a:srgbClr val="244128"/>
-                </a:solidFill>
-                <a:latin typeface="Onest"/>
-              </a:rPr>
-              <a:t>Материал</a:t>
-            </a:r>
-          </a:p>
-        </p:txBody>
-      </p:sp>
-      <p:sp>
-        <p:nvSpPr>
-          <p:cNvPr id="19" name="TextBox 18"/>
-          <p:cNvSpPr txBox="1"/>
-          <p:nvPr/>
-        </p:nvSpPr>
-        <p:spPr>
-          <a:xfrm>
-            <a:off x="8348472" y="2258568"/>
-            <a:ext cx="2971800" cy="630936"/>
-          </a:xfrm>
-          <a:prstGeom prst="rect">
-            <a:avLst/>
-          </a:prstGeom>
-          <a:noFill/>
-        </p:spPr>
-        <p:txBody>
-          <a:bodyPr wrap="square">
-            <a:noAutofit/>
-          </a:bodyPr>
-          <a:lstStyle/>
-          <a:p>
-            <a:pPr algn="l"/>
-            <a:r>
-              <a:rPr sz="1700" b="0">
-                <a:solidFill>
-                  <a:srgbClr val="000000"/>
-                </a:solidFill>
-                <a:latin typeface="Onest"/>
-              </a:rPr>
-              <a:t>Онлайн-анкета Google Forms: 54 полных ответа, 12 топонимов, множественный выбор контекстов.</a:t>
-            </a:r>
-          </a:p>
-        </p:txBody>
-      </p:sp>
-      <p:sp>
-        <p:nvSpPr>
-          <p:cNvPr id="20" name="Rectangle 19"/>
-          <p:cNvSpPr/>
-          <p:nvPr/>
-        </p:nvSpPr>
-        <p:spPr>
-          <a:xfrm>
-            <a:off x="685800" y="3520440"/>
-            <a:ext cx="10789920" cy="2194560"/>
-          </a:xfrm>
-          <a:prstGeom prst="rect">
-            <a:avLst/>
-          </a:prstGeom>
-          <a:solidFill>
-            <a:srgbClr val="FFFFFF"/>
-          </a:solidFill>
-          <a:ln>
-            <a:noFill/>
-          </a:ln>
-        </p:spPr>
-        <p:style>
-          <a:lnRef idx="1">
-            <a:schemeClr val="accent1"/>
-          </a:lnRef>
-          <a:fillRef idx="3">
-            <a:schemeClr val="accent1"/>
-          </a:fillRef>
-          <a:effectRef idx="2">
-            <a:schemeClr val="accent1"/>
-          </a:effectRef>
-          <a:fontRef idx="minor">
-            <a:schemeClr val="lt1"/>
-          </a:fontRef>
-        </p:style>
-        <p:txBody>
-          <a:bodyPr rtlCol="0" anchor="ctr"/>
-          <a:lstStyle/>
-          <a:p>
-            <a:pPr algn="ctr"/>
-          </a:p>
-        </p:txBody>
-      </p:sp>
-      <p:sp>
-        <p:nvSpPr>
-          <p:cNvPr id="21" name="TextBox 20"/>
-          <p:cNvSpPr txBox="1"/>
-          <p:nvPr/>
-        </p:nvSpPr>
-        <p:spPr>
-          <a:xfrm>
-            <a:off x="960120" y="3749039"/>
-            <a:ext cx="4297680" cy="320040"/>
-          </a:xfrm>
-          <a:prstGeom prst="rect">
-            <a:avLst/>
-          </a:prstGeom>
-          <a:noFill/>
-        </p:spPr>
-        <p:txBody>
-          <a:bodyPr wrap="square">
-            <a:noAutofit/>
-          </a:bodyPr>
-          <a:lstStyle/>
-          <a:p>
-            <a:pPr algn="l"/>
-            <a:r>
-              <a:rPr sz="1800" b="1">
-                <a:solidFill>
-                  <a:srgbClr val="244128"/>
-                </a:solidFill>
-                <a:latin typeface="Onest"/>
-              </a:rPr>
-              <a:t>Как фиксировалось употребление</a:t>
-            </a:r>
-          </a:p>
-        </p:txBody>
-      </p:sp>
-      <p:sp>
-        <p:nvSpPr>
-          <p:cNvPr id="22" name="TextBox 21"/>
-          <p:cNvSpPr txBox="1"/>
-          <p:nvPr/>
-        </p:nvSpPr>
-        <p:spPr>
-          <a:xfrm>
-            <a:off x="960120" y="4187952"/>
-            <a:ext cx="4800600" cy="1051560"/>
-          </a:xfrm>
-          <a:prstGeom prst="rect">
-            <a:avLst/>
-          </a:prstGeom>
-          <a:noFill/>
-        </p:spPr>
-        <p:txBody>
-          <a:bodyPr wrap="square">
-            <a:spAutoFit/>
-          </a:bodyPr>
-          <a:lstStyle/>
-          <a:p>
-            <a:pPr>
-              <a:spcAft>
-                <a:spcPts val="900"/>
-              </a:spcAft>
-            </a:pPr>
-            <a:r>
-              <a:rPr sz="1400" b="1">
-                <a:solidFill>
-                  <a:srgbClr val="3AAA35"/>
-                </a:solidFill>
-                <a:latin typeface="Onest"/>
-              </a:rPr>
-              <a:t>■ </a:t>
-            </a:r>
-            <a:r>
-              <a:rPr sz="1400" b="0">
-                <a:solidFill>
-                  <a:srgbClr val="000000"/>
-                </a:solidFill>
-                <a:latin typeface="Onest"/>
-              </a:rPr>
-              <a:t>семья и близкие</a:t>
-            </a:r>
-          </a:p>
-          <a:p>
-            <a:pPr>
-              <a:spcAft>
-                <a:spcPts val="900"/>
-              </a:spcAft>
-            </a:pPr>
-            <a:r>
-              <a:rPr sz="1400" b="1">
-                <a:solidFill>
-                  <a:srgbClr val="3AAA35"/>
-                </a:solidFill>
-                <a:latin typeface="Onest"/>
-              </a:rPr>
-              <a:t>■ </a:t>
-            </a:r>
-            <a:r>
-              <a:rPr sz="1400" b="0">
-                <a:solidFill>
-                  <a:srgbClr val="000000"/>
-                </a:solidFill>
-                <a:latin typeface="Onest"/>
-              </a:rPr>
-              <a:t>друзья / приятели</a:t>
-            </a:r>
-          </a:p>
-          <a:p>
-            <a:pPr>
-              <a:spcAft>
-                <a:spcPts val="900"/>
-              </a:spcAft>
-            </a:pPr>
-            <a:r>
-              <a:rPr sz="1400" b="1">
-                <a:solidFill>
-                  <a:srgbClr val="3AAA35"/>
-                </a:solidFill>
-                <a:latin typeface="Onest"/>
-              </a:rPr>
-              <a:t>■ </a:t>
-            </a:r>
-            <a:r>
-              <a:rPr sz="1400" b="0">
-                <a:solidFill>
-                  <a:srgbClr val="000000"/>
-                </a:solidFill>
-                <a:latin typeface="Onest"/>
-              </a:rPr>
-              <a:t>работа или учёба</a:t>
-            </a:r>
-          </a:p>
-          <a:p>
-            <a:pPr>
-              <a:spcAft>
-                <a:spcPts val="900"/>
-              </a:spcAft>
-            </a:pPr>
-            <a:r>
-              <a:rPr sz="1400" b="1">
-                <a:solidFill>
-                  <a:srgbClr val="3AAA35"/>
-                </a:solidFill>
-                <a:latin typeface="Onest"/>
-              </a:rPr>
-              <a:t>■ </a:t>
-            </a:r>
-            <a:r>
-              <a:rPr sz="1400" b="0">
-                <a:solidFill>
-                  <a:srgbClr val="000000"/>
-                </a:solidFill>
-                <a:latin typeface="Onest"/>
-              </a:rPr>
-              <a:t>соцсети и мессенджеры</a:t>
-            </a:r>
-          </a:p>
-          <a:p>
-            <a:pPr>
-              <a:spcAft>
-                <a:spcPts val="900"/>
-              </a:spcAft>
-            </a:pPr>
-            <a:r>
-              <a:rPr sz="1400" b="1">
-                <a:solidFill>
-                  <a:srgbClr val="3AAA35"/>
-                </a:solidFill>
-                <a:latin typeface="Onest"/>
-              </a:rPr>
-              <a:t>■ </a:t>
-            </a:r>
-            <a:r>
-              <a:rPr sz="1400" b="0">
-                <a:solidFill>
-                  <a:srgbClr val="000000"/>
-                </a:solidFill>
-                <a:latin typeface="Onest"/>
-              </a:rPr>
-              <a:t>пассивное знание / незнание</a:t>
-            </a:r>
-          </a:p>
-        </p:txBody>
-      </p:sp>
-      <p:sp>
-        <p:nvSpPr>
-          <p:cNvPr id="23" name="TextBox 22"/>
-          <p:cNvSpPr txBox="1"/>
-          <p:nvPr/>
-        </p:nvSpPr>
-        <p:spPr>
-          <a:xfrm>
-            <a:off x="6400800" y="3730752"/>
-            <a:ext cx="4389120" cy="320040"/>
-          </a:xfrm>
-          <a:prstGeom prst="rect">
-            <a:avLst/>
-          </a:prstGeom>
-          <a:noFill/>
-        </p:spPr>
-        <p:txBody>
-          <a:bodyPr wrap="square">
-            <a:noAutofit/>
-          </a:bodyPr>
-          <a:lstStyle/>
-          <a:p>
-            <a:pPr algn="l"/>
-            <a:r>
-              <a:rPr sz="1800" b="1">
-                <a:solidFill>
-                  <a:srgbClr val="244128"/>
-                </a:solidFill>
-                <a:latin typeface="Onest"/>
-              </a:rPr>
-              <a:t>Фокус интерпретации</a:t>
-            </a:r>
-          </a:p>
-        </p:txBody>
-      </p:sp>
-      <p:sp>
-        <p:nvSpPr>
-          <p:cNvPr id="24" name="TextBox 23"/>
-          <p:cNvSpPr txBox="1"/>
-          <p:nvPr/>
-        </p:nvSpPr>
-        <p:spPr>
-          <a:xfrm>
-            <a:off x="6400800" y="4187952"/>
-            <a:ext cx="4434840" cy="1051560"/>
-          </a:xfrm>
-          <a:prstGeom prst="rect">
-            <a:avLst/>
-          </a:prstGeom>
-          <a:noFill/>
-        </p:spPr>
-        <p:txBody>
-          <a:bodyPr wrap="square">
-            <a:noAutofit/>
-          </a:bodyPr>
-          <a:lstStyle/>
-          <a:p>
-            <a:pPr algn="l"/>
-            <a:r>
               <a:rPr sz="1600" b="0">
                 <a:solidFill>
-                  <a:srgbClr val="000000"/>
-                </a:solidFill>
-                <a:latin typeface="Onest"/>
-              </a:rPr>
-              <a:t>Выборка в основном отражает речевую практику молодых городских носителей и приезжих студентов, поэтому результаты читаются как модель молодежного топонимикона.</a:t>
-            </a:r>
-          </a:p>
-        </p:txBody>
-      </p:sp>
-      <p:sp>
-        <p:nvSpPr>
-          <p:cNvPr id="25" name="Rectangle 24"/>
-          <p:cNvSpPr/>
-          <p:nvPr/>
-        </p:nvSpPr>
-        <p:spPr>
-          <a:xfrm>
-            <a:off x="685800" y="5989320"/>
-            <a:ext cx="6583680" cy="164592"/>
-          </a:xfrm>
-          <a:prstGeom prst="rect">
-            <a:avLst/>
-          </a:prstGeom>
-          <a:solidFill>
-            <a:srgbClr val="3AAA35"/>
-          </a:solidFill>
-          <a:ln>
-            <a:noFill/>
-          </a:ln>
-        </p:spPr>
-        <p:style>
-          <a:lnRef idx="1">
-            <a:schemeClr val="accent1"/>
-          </a:lnRef>
-          <a:fillRef idx="3">
-            <a:schemeClr val="accent1"/>
-          </a:fillRef>
-          <a:effectRef idx="2">
-            <a:schemeClr val="accent1"/>
-          </a:effectRef>
-          <a:fontRef idx="minor">
-            <a:schemeClr val="lt1"/>
-          </a:fontRef>
-        </p:style>
-        <p:txBody>
-          <a:bodyPr rtlCol="0" anchor="ctr"/>
-          <a:lstStyle/>
-          <a:p>
-            <a:pPr algn="ctr"/>
-          </a:p>
-        </p:txBody>
-      </p:sp>
-      <p:sp>
-        <p:nvSpPr>
-          <p:cNvPr id="26" name="Rectangle 25"/>
-          <p:cNvSpPr/>
-          <p:nvPr/>
-        </p:nvSpPr>
-        <p:spPr>
-          <a:xfrm>
-            <a:off x="7269480" y="5989320"/>
-            <a:ext cx="4206240" cy="164592"/>
-          </a:xfrm>
-          <a:prstGeom prst="rect">
-            <a:avLst/>
-          </a:prstGeom>
-          <a:solidFill>
-            <a:srgbClr val="DB4928"/>
-          </a:solidFill>
-          <a:ln>
-            <a:noFill/>
-          </a:ln>
-        </p:spPr>
-        <p:style>
-          <a:lnRef idx="1">
-            <a:schemeClr val="accent1"/>
-          </a:lnRef>
-          <a:fillRef idx="3">
-            <a:schemeClr val="accent1"/>
-          </a:fillRef>
-          <a:effectRef idx="2">
-            <a:schemeClr val="accent1"/>
-          </a:effectRef>
-          <a:fontRef idx="minor">
-            <a:schemeClr val="lt1"/>
-          </a:fontRef>
-        </p:style>
-        <p:txBody>
-          <a:bodyPr rtlCol="0" anchor="ctr"/>
-          <a:lstStyle/>
-          <a:p>
-            <a:pPr algn="ctr"/>
+                  <a:srgbClr val="FFFFFF"/>
+                </a:solidFill>
+                <a:latin typeface="Arial"/>
+              </a:rPr>
+              <a:t>включение петербургских топонимов в активный и пассивный компоненты лексикона</a:t>
+            </a:r>
           </a:p>
         </p:txBody>
       </p:sp>
@@ -4757,9 +4747,9 @@
                 <a:solidFill>
                   <a:srgbClr val="5C675F"/>
                 </a:solidFill>
-                <a:latin typeface="Onest"/>
-              </a:rPr>
-              <a:t>N = 54 · проценты от числа респондентов</a:t>
+                <a:latin typeface="Arial"/>
+              </a:rPr>
+              <a:t>Логика исследования</a:t>
             </a:r>
           </a:p>
         </p:txBody>
@@ -4792,9 +4782,9 @@
                 <a:solidFill>
                   <a:srgbClr val="244128"/>
                 </a:solidFill>
-                <a:latin typeface="Onest"/>
-              </a:rPr>
-              <a:t>Ключевые результаты анкетирования</a:t>
+                <a:latin typeface="Arial"/>
+              </a:rPr>
+              <a:t>Цель, задачи и гипотеза</a:t>
             </a:r>
           </a:p>
         </p:txBody>
@@ -4870,9 +4860,9 @@
                 <a:solidFill>
                   <a:srgbClr val="5C675F"/>
                 </a:solidFill>
-                <a:latin typeface="Onest"/>
-              </a:rPr>
-              <a:t>2:30–5:00</a:t>
+                <a:latin typeface="Arial"/>
+              </a:rPr>
+              <a:t>1:15–2:00</a:t>
             </a:r>
           </a:p>
         </p:txBody>
@@ -4905,9 +4895,9 @@
                 <a:solidFill>
                   <a:srgbClr val="5C675F"/>
                 </a:solidFill>
-                <a:latin typeface="Onest"/>
-              </a:rPr>
-              <a:t>3/4</a:t>
+                <a:latin typeface="Arial"/>
+              </a:rPr>
+              <a:t>3/10</a:t>
             </a:r>
           </a:p>
         </p:txBody>
@@ -4920,8 +4910,8 @@
         </p:nvSpPr>
         <p:spPr>
           <a:xfrm>
-            <a:off x="658368" y="1508760"/>
-            <a:ext cx="6400800" cy="4389120"/>
+            <a:off x="685800" y="1508760"/>
+            <a:ext cx="4892040" cy="1051560"/>
           </a:xfrm>
           <a:prstGeom prst="rect">
             <a:avLst/>
@@ -4957,127 +4947,14 @@
       </p:sp>
       <p:sp>
         <p:nvSpPr>
-          <p:cNvPr id="9" name="TextBox 8"/>
-          <p:cNvSpPr txBox="1"/>
-          <p:nvPr/>
-        </p:nvSpPr>
-        <p:spPr>
-          <a:xfrm>
-            <a:off x="914400" y="1783080"/>
-            <a:ext cx="5760720" cy="320040"/>
-          </a:xfrm>
-          <a:prstGeom prst="rect">
-            <a:avLst/>
-          </a:prstGeom>
-          <a:noFill/>
-        </p:spPr>
-        <p:txBody>
-          <a:bodyPr wrap="square">
-            <a:noAutofit/>
-          </a:bodyPr>
-          <a:lstStyle/>
-          <a:p>
-            <a:pPr algn="l"/>
-            <a:r>
-              <a:rPr sz="1800" b="1">
-                <a:solidFill>
-                  <a:srgbClr val="244128"/>
-                </a:solidFill>
-                <a:latin typeface="Onest"/>
-              </a:rPr>
-              <a:t>Активность и пассивность топонимов</a:t>
-            </a:r>
-          </a:p>
-        </p:txBody>
-      </p:sp>
-      <p:sp>
-        <p:nvSpPr>
-          <p:cNvPr id="10" name="TextBox 9"/>
-          <p:cNvSpPr txBox="1"/>
-          <p:nvPr/>
-        </p:nvSpPr>
-        <p:spPr>
-          <a:xfrm>
-            <a:off x="914400" y="2331720"/>
-            <a:ext cx="5303520" cy="228600"/>
-          </a:xfrm>
-          <a:prstGeom prst="rect">
-            <a:avLst/>
-          </a:prstGeom>
-          <a:noFill/>
-        </p:spPr>
-        <p:txBody>
-          <a:bodyPr wrap="square">
-            <a:noAutofit/>
-          </a:bodyPr>
-          <a:lstStyle/>
-          <a:p>
-            <a:pPr algn="l"/>
-            <a:r>
-              <a:rPr sz="1400" b="1">
-                <a:solidFill>
-                  <a:srgbClr val="000000"/>
-                </a:solidFill>
-                <a:latin typeface="Onest"/>
-              </a:rPr>
-              <a:t>Питер · общение с друзьями</a:t>
-            </a:r>
-          </a:p>
-        </p:txBody>
-      </p:sp>
-      <p:sp>
-        <p:nvSpPr>
-          <p:cNvPr id="11" name="Rectangle 10"/>
+          <p:cNvPr id="9" name="Rectangle 8"/>
           <p:cNvSpPr/>
           <p:nvPr/>
         </p:nvSpPr>
         <p:spPr>
           <a:xfrm>
-            <a:off x="914400" y="2651760"/>
-            <a:ext cx="5303520" cy="164592"/>
-          </a:xfrm>
-          <a:prstGeom prst="rect">
-            <a:avLst/>
-          </a:prstGeom>
-          <a:solidFill>
-            <a:srgbClr val="DAE2D8"/>
-          </a:solidFill>
-          <a:ln>
-            <a:noFill/>
-          </a:ln>
-        </p:spPr>
-        <p:style>
-          <a:lnRef idx="1">
-            <a:schemeClr val="accent1"/>
-          </a:lnRef>
-          <a:fillRef idx="3">
-            <a:schemeClr val="accent1"/>
-          </a:fillRef>
-          <a:effectRef idx="2">
-            <a:schemeClr val="accent1"/>
-          </a:effectRef>
-          <a:fontRef idx="minor">
-            <a:schemeClr val="lt1"/>
-          </a:fontRef>
-        </p:style>
-        <p:txBody>
-          <a:bodyPr rtlCol="0" anchor="ctr"/>
-          <a:lstStyle/>
-          <a:p>
-            <a:pPr algn="ctr"/>
-          </a:p>
-        </p:txBody>
-      </p:sp>
-      <p:sp>
-        <p:nvSpPr>
-          <p:cNvPr id="12" name="Rectangle 11"/>
-          <p:cNvSpPr/>
-          <p:nvPr/>
-        </p:nvSpPr>
-        <p:spPr>
-          <a:xfrm>
-            <a:off x="914400" y="2651760"/>
-            <a:ext cx="4911059" cy="164592"/>
+            <a:off x="685800" y="1508760"/>
+            <a:ext cx="109728" cy="1051560"/>
           </a:xfrm>
           <a:prstGeom prst="rect">
             <a:avLst/>
@@ -5113,14 +4990,14 @@
       </p:sp>
       <p:sp>
         <p:nvSpPr>
-          <p:cNvPr id="13" name="TextBox 12"/>
+          <p:cNvPr id="10" name="TextBox 9"/>
           <p:cNvSpPr txBox="1"/>
           <p:nvPr/>
         </p:nvSpPr>
         <p:spPr>
           <a:xfrm>
-            <a:off x="5532120" y="2514600"/>
-            <a:ext cx="685800" cy="228600"/>
+            <a:off x="941832" y="1719072"/>
+            <a:ext cx="4480560" cy="320040"/>
           </a:xfrm>
           <a:prstGeom prst="rect">
             <a:avLst/>
@@ -5133,29 +5010,29 @@
           </a:bodyPr>
           <a:lstStyle/>
           <a:p>
-            <a:pPr algn="r"/>
-            <a:r>
-              <a:rPr sz="1300" b="1">
-                <a:solidFill>
-                  <a:srgbClr val="3AAA35"/>
-                </a:solidFill>
-                <a:latin typeface="Onest"/>
-              </a:rPr>
-              <a:t>92.6%</a:t>
-            </a:r>
-          </a:p>
-        </p:txBody>
-      </p:sp>
-      <p:sp>
-        <p:nvSpPr>
-          <p:cNvPr id="14" name="TextBox 13"/>
+            <a:pPr algn="l"/>
+            <a:r>
+              <a:rPr sz="1500" b="1">
+                <a:solidFill>
+                  <a:srgbClr val="244128"/>
+                </a:solidFill>
+                <a:latin typeface="Arial"/>
+              </a:rPr>
+              <a:t>Цель</a:t>
+            </a:r>
+          </a:p>
+        </p:txBody>
+      </p:sp>
+      <p:sp>
+        <p:nvSpPr>
+          <p:cNvPr id="11" name="TextBox 10"/>
           <p:cNvSpPr txBox="1"/>
           <p:nvPr/>
         </p:nvSpPr>
         <p:spPr>
           <a:xfrm>
-            <a:off x="914400" y="2898648"/>
-            <a:ext cx="5303520" cy="256032"/>
+            <a:off x="941832" y="2167128"/>
+            <a:ext cx="4480560" cy="265176"/>
           </a:xfrm>
           <a:prstGeom prst="rect">
             <a:avLst/>
@@ -5170,68 +5047,33 @@
           <a:p>
             <a:pPr algn="l"/>
             <a:r>
-              <a:rPr sz="1000" b="0">
-                <a:solidFill>
-                  <a:srgbClr val="5C675F"/>
-                </a:solidFill>
-                <a:latin typeface="Onest"/>
-              </a:rPr>
-              <a:t>ядро неформального городского лексикона</a:t>
-            </a:r>
-          </a:p>
-        </p:txBody>
-      </p:sp>
-      <p:sp>
-        <p:nvSpPr>
-          <p:cNvPr id="15" name="TextBox 14"/>
-          <p:cNvSpPr txBox="1"/>
-          <p:nvPr/>
-        </p:nvSpPr>
-        <p:spPr>
-          <a:xfrm>
-            <a:off x="914400" y="3154680"/>
-            <a:ext cx="5303520" cy="228600"/>
-          </a:xfrm>
-          <a:prstGeom prst="rect">
-            <a:avLst/>
-          </a:prstGeom>
-          <a:noFill/>
-        </p:spPr>
-        <p:txBody>
-          <a:bodyPr wrap="square">
-            <a:noAutofit/>
-          </a:bodyPr>
-          <a:lstStyle/>
-          <a:p>
-            <a:pPr algn="l"/>
-            <a:r>
-              <a:rPr sz="1400" b="1">
+              <a:rPr sz="1700" b="0">
                 <a:solidFill>
                   <a:srgbClr val="000000"/>
                 </a:solidFill>
-                <a:latin typeface="Onest"/>
-              </a:rPr>
-              <a:t>Невский · общение с друзьями</a:t>
-            </a:r>
-          </a:p>
-        </p:txBody>
-      </p:sp>
-      <p:sp>
-        <p:nvSpPr>
-          <p:cNvPr id="16" name="Rectangle 15"/>
+                <a:latin typeface="Arial"/>
+              </a:rPr>
+              <a:t>Описать, как петербургские топонимы представлены в лексиконе современных носителей русского языка.</a:t>
+            </a:r>
+          </a:p>
+        </p:txBody>
+      </p:sp>
+      <p:sp>
+        <p:nvSpPr>
+          <p:cNvPr id="12" name="Rectangle 11"/>
           <p:cNvSpPr/>
           <p:nvPr/>
         </p:nvSpPr>
         <p:spPr>
           <a:xfrm>
-            <a:off x="914400" y="3474720"/>
-            <a:ext cx="5303520" cy="164592"/>
+            <a:off x="5897880" y="1508760"/>
+            <a:ext cx="4892040" cy="1051560"/>
           </a:xfrm>
           <a:prstGeom prst="rect">
             <a:avLst/>
           </a:prstGeom>
           <a:solidFill>
-            <a:srgbClr val="DAE2D8"/>
+            <a:srgbClr val="FFFFFF"/>
           </a:solidFill>
           <a:ln>
             <a:noFill/>
@@ -5261,205 +5103,14 @@
       </p:sp>
       <p:sp>
         <p:nvSpPr>
-          <p:cNvPr id="17" name="Rectangle 16"/>
+          <p:cNvPr id="13" name="Rectangle 12"/>
           <p:cNvSpPr/>
           <p:nvPr/>
         </p:nvSpPr>
         <p:spPr>
           <a:xfrm>
-            <a:off x="914400" y="3474720"/>
-            <a:ext cx="4417832" cy="164592"/>
-          </a:xfrm>
-          <a:prstGeom prst="rect">
-            <a:avLst/>
-          </a:prstGeom>
-          <a:solidFill>
-            <a:srgbClr val="3AAA35"/>
-          </a:solidFill>
-          <a:ln>
-            <a:noFill/>
-          </a:ln>
-        </p:spPr>
-        <p:style>
-          <a:lnRef idx="1">
-            <a:schemeClr val="accent1"/>
-          </a:lnRef>
-          <a:fillRef idx="3">
-            <a:schemeClr val="accent1"/>
-          </a:fillRef>
-          <a:effectRef idx="2">
-            <a:schemeClr val="accent1"/>
-          </a:effectRef>
-          <a:fontRef idx="minor">
-            <a:schemeClr val="lt1"/>
-          </a:fontRef>
-        </p:style>
-        <p:txBody>
-          <a:bodyPr rtlCol="0" anchor="ctr"/>
-          <a:lstStyle/>
-          <a:p>
-            <a:pPr algn="ctr"/>
-          </a:p>
-        </p:txBody>
-      </p:sp>
-      <p:sp>
-        <p:nvSpPr>
-          <p:cNvPr id="18" name="TextBox 17"/>
-          <p:cNvSpPr txBox="1"/>
-          <p:nvPr/>
-        </p:nvSpPr>
-        <p:spPr>
-          <a:xfrm>
-            <a:off x="5532120" y="3337560"/>
-            <a:ext cx="685800" cy="228600"/>
-          </a:xfrm>
-          <a:prstGeom prst="rect">
-            <a:avLst/>
-          </a:prstGeom>
-          <a:noFill/>
-        </p:spPr>
-        <p:txBody>
-          <a:bodyPr wrap="square">
-            <a:noAutofit/>
-          </a:bodyPr>
-          <a:lstStyle/>
-          <a:p>
-            <a:pPr algn="r"/>
-            <a:r>
-              <a:rPr sz="1300" b="1">
-                <a:solidFill>
-                  <a:srgbClr val="3AAA35"/>
-                </a:solidFill>
-                <a:latin typeface="Onest"/>
-              </a:rPr>
-              <a:t>83.3%</a:t>
-            </a:r>
-          </a:p>
-        </p:txBody>
-      </p:sp>
-      <p:sp>
-        <p:nvSpPr>
-          <p:cNvPr id="19" name="TextBox 18"/>
-          <p:cNvSpPr txBox="1"/>
-          <p:nvPr/>
-        </p:nvSpPr>
-        <p:spPr>
-          <a:xfrm>
-            <a:off x="914400" y="3721608"/>
-            <a:ext cx="5303520" cy="256032"/>
-          </a:xfrm>
-          <a:prstGeom prst="rect">
-            <a:avLst/>
-          </a:prstGeom>
-          <a:noFill/>
-        </p:spPr>
-        <p:txBody>
-          <a:bodyPr wrap="square">
-            <a:noAutofit/>
-          </a:bodyPr>
-          <a:lstStyle/>
-          <a:p>
-            <a:pPr algn="l"/>
-            <a:r>
-              <a:rPr sz="1000" b="0">
-                <a:solidFill>
-                  <a:srgbClr val="5C675F"/>
-                </a:solidFill>
-                <a:latin typeface="Onest"/>
-              </a:rPr>
-              <a:t>универсальный центральный навигатор</a:t>
-            </a:r>
-          </a:p>
-        </p:txBody>
-      </p:sp>
-      <p:sp>
-        <p:nvSpPr>
-          <p:cNvPr id="20" name="TextBox 19"/>
-          <p:cNvSpPr txBox="1"/>
-          <p:nvPr/>
-        </p:nvSpPr>
-        <p:spPr>
-          <a:xfrm>
-            <a:off x="914400" y="3977639"/>
-            <a:ext cx="5303520" cy="228600"/>
-          </a:xfrm>
-          <a:prstGeom prst="rect">
-            <a:avLst/>
-          </a:prstGeom>
-          <a:noFill/>
-        </p:spPr>
-        <p:txBody>
-          <a:bodyPr wrap="square">
-            <a:noAutofit/>
-          </a:bodyPr>
-          <a:lstStyle/>
-          <a:p>
-            <a:pPr algn="l"/>
-            <a:r>
-              <a:rPr sz="1400" b="1">
-                <a:solidFill>
-                  <a:srgbClr val="000000"/>
-                </a:solidFill>
-                <a:latin typeface="Onest"/>
-              </a:rPr>
-              <a:t>Ленинград · «знаю, но не использую»</a:t>
-            </a:r>
-          </a:p>
-        </p:txBody>
-      </p:sp>
-      <p:sp>
-        <p:nvSpPr>
-          <p:cNvPr id="21" name="Rectangle 20"/>
-          <p:cNvSpPr/>
-          <p:nvPr/>
-        </p:nvSpPr>
-        <p:spPr>
-          <a:xfrm>
-            <a:off x="914400" y="4297679"/>
-            <a:ext cx="5303520" cy="164592"/>
-          </a:xfrm>
-          <a:prstGeom prst="rect">
-            <a:avLst/>
-          </a:prstGeom>
-          <a:solidFill>
-            <a:srgbClr val="DAE2D8"/>
-          </a:solidFill>
-          <a:ln>
-            <a:noFill/>
-          </a:ln>
-        </p:spPr>
-        <p:style>
-          <a:lnRef idx="1">
-            <a:schemeClr val="accent1"/>
-          </a:lnRef>
-          <a:fillRef idx="3">
-            <a:schemeClr val="accent1"/>
-          </a:fillRef>
-          <a:effectRef idx="2">
-            <a:schemeClr val="accent1"/>
-          </a:effectRef>
-          <a:fontRef idx="minor">
-            <a:schemeClr val="lt1"/>
-          </a:fontRef>
-        </p:style>
-        <p:txBody>
-          <a:bodyPr rtlCol="0" anchor="ctr"/>
-          <a:lstStyle/>
-          <a:p>
-            <a:pPr algn="ctr"/>
-          </a:p>
-        </p:txBody>
-      </p:sp>
-      <p:sp>
-        <p:nvSpPr>
-          <p:cNvPr id="22" name="Rectangle 21"/>
-          <p:cNvSpPr/>
-          <p:nvPr/>
-        </p:nvSpPr>
-        <p:spPr>
-          <a:xfrm>
-            <a:off x="914400" y="4297679"/>
-            <a:ext cx="2752526" cy="164592"/>
+            <a:off x="5897880" y="1508760"/>
+            <a:ext cx="109728" cy="1051560"/>
           </a:xfrm>
           <a:prstGeom prst="rect">
             <a:avLst/>
@@ -5495,14 +5146,14 @@
       </p:sp>
       <p:sp>
         <p:nvSpPr>
-          <p:cNvPr id="23" name="TextBox 22"/>
+          <p:cNvPr id="14" name="TextBox 13"/>
           <p:cNvSpPr txBox="1"/>
           <p:nvPr/>
         </p:nvSpPr>
         <p:spPr>
           <a:xfrm>
-            <a:off x="5532120" y="4160519"/>
-            <a:ext cx="685800" cy="228600"/>
+            <a:off x="6153912" y="1719072"/>
+            <a:ext cx="4480560" cy="320040"/>
           </a:xfrm>
           <a:prstGeom prst="rect">
             <a:avLst/>
@@ -5515,29 +5166,29 @@
           </a:bodyPr>
           <a:lstStyle/>
           <a:p>
-            <a:pPr algn="r"/>
-            <a:r>
-              <a:rPr sz="1300" b="1">
-                <a:solidFill>
-                  <a:srgbClr val="DB4928"/>
-                </a:solidFill>
-                <a:latin typeface="Onest"/>
-              </a:rPr>
-              <a:t>51.9%</a:t>
-            </a:r>
-          </a:p>
-        </p:txBody>
-      </p:sp>
-      <p:sp>
-        <p:nvSpPr>
-          <p:cNvPr id="24" name="TextBox 23"/>
+            <a:pPr algn="l"/>
+            <a:r>
+              <a:rPr sz="1500" b="1">
+                <a:solidFill>
+                  <a:srgbClr val="244128"/>
+                </a:solidFill>
+                <a:latin typeface="Arial"/>
+              </a:rPr>
+              <a:t>Гипотеза</a:t>
+            </a:r>
+          </a:p>
+        </p:txBody>
+      </p:sp>
+      <p:sp>
+        <p:nvSpPr>
+          <p:cNvPr id="15" name="TextBox 14"/>
           <p:cNvSpPr txBox="1"/>
           <p:nvPr/>
         </p:nvSpPr>
         <p:spPr>
           <a:xfrm>
-            <a:off x="914400" y="4544567"/>
-            <a:ext cx="5303520" cy="256032"/>
+            <a:off x="6153912" y="2167128"/>
+            <a:ext cx="4480560" cy="265176"/>
           </a:xfrm>
           <a:prstGeom prst="rect">
             <a:avLst/>
@@ -5552,68 +5203,33 @@
           <a:p>
             <a:pPr algn="l"/>
             <a:r>
-              <a:rPr sz="1000" b="0">
-                <a:solidFill>
-                  <a:srgbClr val="5C675F"/>
-                </a:solidFill>
-                <a:latin typeface="Onest"/>
-              </a:rPr>
-              <a:t>историческое название у молодёжи уходит в пассив</a:t>
-            </a:r>
-          </a:p>
-        </p:txBody>
-      </p:sp>
-      <p:sp>
-        <p:nvSpPr>
-          <p:cNvPr id="25" name="TextBox 24"/>
-          <p:cNvSpPr txBox="1"/>
-          <p:nvPr/>
-        </p:nvSpPr>
-        <p:spPr>
-          <a:xfrm>
-            <a:off x="914400" y="4800600"/>
-            <a:ext cx="5303520" cy="228600"/>
-          </a:xfrm>
-          <a:prstGeom prst="rect">
-            <a:avLst/>
-          </a:prstGeom>
-          <a:noFill/>
-        </p:spPr>
-        <p:txBody>
-          <a:bodyPr wrap="square">
-            <a:noAutofit/>
-          </a:bodyPr>
-          <a:lstStyle/>
-          <a:p>
-            <a:pPr algn="l"/>
-            <a:r>
-              <a:rPr sz="1400" b="1">
+              <a:rPr sz="1700" b="0">
                 <a:solidFill>
                   <a:srgbClr val="000000"/>
                 </a:solidFill>
-                <a:latin typeface="Onest"/>
-              </a:rPr>
-              <a:t>Рыбацкое · «знаю, но не использую»</a:t>
-            </a:r>
-          </a:p>
-        </p:txBody>
-      </p:sp>
-      <p:sp>
-        <p:nvSpPr>
-          <p:cNvPr id="26" name="Rectangle 25"/>
+                <a:latin typeface="Arial"/>
+              </a:rPr>
+              <a:t>Топонимы Санкт-Петербурга образуют многослойную систему: официальные, разговорные и исторические названия распределены по разным сферам общения.</a:t>
+            </a:r>
+          </a:p>
+        </p:txBody>
+      </p:sp>
+      <p:sp>
+        <p:nvSpPr>
+          <p:cNvPr id="16" name="Rectangle 15"/>
           <p:cNvSpPr/>
           <p:nvPr/>
         </p:nvSpPr>
         <p:spPr>
           <a:xfrm>
-            <a:off x="914400" y="5120640"/>
-            <a:ext cx="5303520" cy="164592"/>
+            <a:off x="685800" y="2971800"/>
+            <a:ext cx="10104120" cy="2377440"/>
           </a:xfrm>
           <a:prstGeom prst="rect">
             <a:avLst/>
           </a:prstGeom>
           <a:solidFill>
-            <a:srgbClr val="DAE2D8"/>
+            <a:srgbClr val="FFFFFF"/>
           </a:solidFill>
           <a:ln>
             <a:noFill/>
@@ -5643,57 +5259,14 @@
       </p:sp>
       <p:sp>
         <p:nvSpPr>
-          <p:cNvPr id="27" name="Rectangle 26"/>
-          <p:cNvSpPr/>
-          <p:nvPr/>
-        </p:nvSpPr>
-        <p:spPr>
-          <a:xfrm>
-            <a:off x="914400" y="5120640"/>
-            <a:ext cx="2354762" cy="164592"/>
-          </a:xfrm>
-          <a:prstGeom prst="rect">
-            <a:avLst/>
-          </a:prstGeom>
-          <a:solidFill>
-            <a:srgbClr val="DB4928"/>
-          </a:solidFill>
-          <a:ln>
-            <a:noFill/>
-          </a:ln>
-        </p:spPr>
-        <p:style>
-          <a:lnRef idx="1">
-            <a:schemeClr val="accent1"/>
-          </a:lnRef>
-          <a:fillRef idx="3">
-            <a:schemeClr val="accent1"/>
-          </a:fillRef>
-          <a:effectRef idx="2">
-            <a:schemeClr val="accent1"/>
-          </a:effectRef>
-          <a:fontRef idx="minor">
-            <a:schemeClr val="lt1"/>
-          </a:fontRef>
-        </p:style>
-        <p:txBody>
-          <a:bodyPr rtlCol="0" anchor="ctr"/>
-          <a:lstStyle/>
-          <a:p>
-            <a:pPr algn="ctr"/>
-          </a:p>
-        </p:txBody>
-      </p:sp>
-      <p:sp>
-        <p:nvSpPr>
-          <p:cNvPr id="28" name="TextBox 27"/>
+          <p:cNvPr id="17" name="TextBox 16"/>
           <p:cNvSpPr txBox="1"/>
           <p:nvPr/>
         </p:nvSpPr>
         <p:spPr>
           <a:xfrm>
-            <a:off x="5532120" y="4983480"/>
-            <a:ext cx="685800" cy="228600"/>
+            <a:off x="987552" y="3246120"/>
+            <a:ext cx="9418320" cy="320040"/>
           </a:xfrm>
           <a:prstGeom prst="rect">
             <a:avLst/>
@@ -5706,142 +5279,29 @@
           </a:bodyPr>
           <a:lstStyle/>
           <a:p>
-            <a:pPr algn="r"/>
-            <a:r>
-              <a:rPr sz="1300" b="1">
-                <a:solidFill>
-                  <a:srgbClr val="DB4928"/>
-                </a:solidFill>
-                <a:latin typeface="Onest"/>
-              </a:rPr>
-              <a:t>44.4%</a:t>
-            </a:r>
-          </a:p>
-        </p:txBody>
-      </p:sp>
-      <p:sp>
-        <p:nvSpPr>
-          <p:cNvPr id="29" name="TextBox 28"/>
+            <a:pPr algn="l"/>
+            <a:r>
+              <a:rPr sz="1900" b="1">
+                <a:solidFill>
+                  <a:srgbClr val="244128"/>
+                </a:solidFill>
+                <a:latin typeface="Arial"/>
+              </a:rPr>
+              <a:t>Основные задачи</a:t>
+            </a:r>
+          </a:p>
+        </p:txBody>
+      </p:sp>
+      <p:sp>
+        <p:nvSpPr>
+          <p:cNvPr id="18" name="TextBox 17"/>
           <p:cNvSpPr txBox="1"/>
           <p:nvPr/>
         </p:nvSpPr>
         <p:spPr>
           <a:xfrm>
-            <a:off x="914400" y="5367528"/>
-            <a:ext cx="5303520" cy="256032"/>
-          </a:xfrm>
-          <a:prstGeom prst="rect">
-            <a:avLst/>
-          </a:prstGeom>
-          <a:noFill/>
-        </p:spPr>
-        <p:txBody>
-          <a:bodyPr wrap="square">
-            <a:noAutofit/>
-          </a:bodyPr>
-          <a:lstStyle/>
-          <a:p>
-            <a:pPr algn="l"/>
-            <a:r>
-              <a:rPr sz="1000" b="0">
-                <a:solidFill>
-                  <a:srgbClr val="5C675F"/>
-                </a:solidFill>
-                <a:latin typeface="Onest"/>
-              </a:rPr>
-              <a:t>локальная периферия без личного маршрута</a:t>
-            </a:r>
-          </a:p>
-        </p:txBody>
-      </p:sp>
-      <p:sp>
-        <p:nvSpPr>
-          <p:cNvPr id="30" name="Rectangle 29"/>
-          <p:cNvSpPr/>
-          <p:nvPr/>
-        </p:nvSpPr>
-        <p:spPr>
-          <a:xfrm>
-            <a:off x="7360920" y="1508760"/>
-            <a:ext cx="4160520" cy="4389120"/>
-          </a:xfrm>
-          <a:prstGeom prst="rect">
-            <a:avLst/>
-          </a:prstGeom>
-          <a:solidFill>
-            <a:srgbClr val="244128"/>
-          </a:solidFill>
-          <a:ln>
-            <a:noFill/>
-          </a:ln>
-        </p:spPr>
-        <p:style>
-          <a:lnRef idx="1">
-            <a:schemeClr val="accent1"/>
-          </a:lnRef>
-          <a:fillRef idx="3">
-            <a:schemeClr val="accent1"/>
-          </a:fillRef>
-          <a:effectRef idx="2">
-            <a:schemeClr val="accent1"/>
-          </a:effectRef>
-          <a:fontRef idx="minor">
-            <a:schemeClr val="lt1"/>
-          </a:fontRef>
-        </p:style>
-        <p:txBody>
-          <a:bodyPr rtlCol="0" anchor="ctr"/>
-          <a:lstStyle/>
-          <a:p>
-            <a:pPr algn="ctr"/>
-          </a:p>
-        </p:txBody>
-      </p:sp>
-      <p:sp>
-        <p:nvSpPr>
-          <p:cNvPr id="31" name="TextBox 30"/>
-          <p:cNvSpPr txBox="1"/>
-          <p:nvPr/>
-        </p:nvSpPr>
-        <p:spPr>
-          <a:xfrm>
-            <a:off x="7726679" y="1810512"/>
-            <a:ext cx="3429000" cy="347472"/>
-          </a:xfrm>
-          <a:prstGeom prst="rect">
-            <a:avLst/>
-          </a:prstGeom>
-          <a:noFill/>
-        </p:spPr>
-        <p:txBody>
-          <a:bodyPr wrap="square">
-            <a:noAutofit/>
-          </a:bodyPr>
-          <a:lstStyle/>
-          <a:p>
-            <a:pPr algn="l"/>
-            <a:r>
-              <a:rPr sz="1800" b="1">
-                <a:solidFill>
-                  <a:srgbClr val="FFFFFF"/>
-                </a:solidFill>
-                <a:latin typeface="Onest"/>
-              </a:rPr>
-              <a:t>Что важно проговорить</a:t>
-            </a:r>
-          </a:p>
-        </p:txBody>
-      </p:sp>
-      <p:sp>
-        <p:nvSpPr>
-          <p:cNvPr id="32" name="TextBox 31"/>
-          <p:cNvSpPr txBox="1"/>
-          <p:nvPr/>
-        </p:nvSpPr>
-        <p:spPr>
-          <a:xfrm>
-            <a:off x="7726679" y="2331720"/>
-            <a:ext cx="3429000" cy="2926080"/>
+            <a:off x="987552" y="3703320"/>
+            <a:ext cx="9235440" cy="1188720"/>
           </a:xfrm>
           <a:prstGeom prst="rect">
             <a:avLst/>
@@ -5862,20 +5322,20 @@
             <a:r>
               <a:rPr sz="1500" b="1">
                 <a:solidFill>
-                  <a:srgbClr val="F39869"/>
-                </a:solidFill>
-                <a:latin typeface="Onest"/>
+                  <a:srgbClr val="3AAA35"/>
+                </a:solidFill>
+                <a:latin typeface="Arial"/>
               </a:rPr>
               <a:t>■ </a:t>
             </a:r>
             <a:r>
               <a:rPr sz="1500" b="0">
                 <a:solidFill>
-                  <a:srgbClr val="FFFFFF"/>
-                </a:solidFill>
-                <a:latin typeface="Onest"/>
-              </a:rPr>
-              <a:t>«Питер» и «Невский» проходят через почти все сферы общения.</a:t>
+                  <a:srgbClr val="000000"/>
+                </a:solidFill>
+                <a:latin typeface="Arial"/>
+              </a:rPr>
+              <a:t>рассмотреть подходы к изучению топонимов в отечественной лингвистике;</a:t>
             </a:r>
           </a:p>
           <a:p>
@@ -5887,20 +5347,20 @@
             <a:r>
               <a:rPr sz="1500" b="1">
                 <a:solidFill>
-                  <a:srgbClr val="F39869"/>
-                </a:solidFill>
-                <a:latin typeface="Onest"/>
+                  <a:srgbClr val="3AAA35"/>
+                </a:solidFill>
+                <a:latin typeface="Arial"/>
               </a:rPr>
               <a:t>■ </a:t>
             </a:r>
             <a:r>
               <a:rPr sz="1500" b="0">
                 <a:solidFill>
-                  <a:srgbClr val="FFFFFF"/>
-                </a:solidFill>
-                <a:latin typeface="Onest"/>
-              </a:rPr>
-              <a:t>Культурные символы известны, но не всегда нужны в ежедневной навигации.</a:t>
+                  <a:srgbClr val="000000"/>
+                </a:solidFill>
+                <a:latin typeface="Arial"/>
+              </a:rPr>
+              <a:t>обосновать методику эмпирического исследования;</a:t>
             </a:r>
           </a:p>
           <a:p>
@@ -5912,107 +5372,46 @@
             <a:r>
               <a:rPr sz="1500" b="1">
                 <a:solidFill>
-                  <a:srgbClr val="F39869"/>
-                </a:solidFill>
-                <a:latin typeface="Onest"/>
+                  <a:srgbClr val="3AAA35"/>
+                </a:solidFill>
+                <a:latin typeface="Arial"/>
               </a:rPr>
               <a:t>■ </a:t>
             </a:r>
             <a:r>
               <a:rPr sz="1500" b="0">
                 <a:solidFill>
-                  <a:srgbClr val="FFFFFF"/>
-                </a:solidFill>
-                <a:latin typeface="Onest"/>
-              </a:rPr>
-              <a:t>Разговорные и районные названия зависят от маршрутов, возраста и круга общения.</a:t>
-            </a:r>
-          </a:p>
-        </p:txBody>
-      </p:sp>
-      <p:sp>
-        <p:nvSpPr>
-          <p:cNvPr id="33" name="Rectangle 32"/>
-          <p:cNvSpPr/>
-          <p:nvPr/>
-        </p:nvSpPr>
-        <p:spPr>
-          <a:xfrm>
-            <a:off x="7360920" y="5577840"/>
-            <a:ext cx="2834640" cy="164592"/>
-          </a:xfrm>
-          <a:prstGeom prst="rect">
-            <a:avLst/>
-          </a:prstGeom>
-          <a:solidFill>
-            <a:srgbClr val="3AAA35"/>
-          </a:solidFill>
-          <a:ln>
-            <a:noFill/>
-          </a:ln>
-        </p:spPr>
-        <p:style>
-          <a:lnRef idx="1">
-            <a:schemeClr val="accent1"/>
-          </a:lnRef>
-          <a:fillRef idx="3">
-            <a:schemeClr val="accent1"/>
-          </a:fillRef>
-          <a:effectRef idx="2">
-            <a:schemeClr val="accent1"/>
-          </a:effectRef>
-          <a:fontRef idx="minor">
-            <a:schemeClr val="lt1"/>
-          </a:fontRef>
-        </p:style>
-        <p:txBody>
-          <a:bodyPr rtlCol="0" anchor="ctr"/>
-          <a:lstStyle/>
-          <a:p>
-            <a:pPr algn="ctr"/>
-          </a:p>
-        </p:txBody>
-      </p:sp>
-      <p:sp>
-        <p:nvSpPr>
-          <p:cNvPr id="34" name="Rectangle 33"/>
-          <p:cNvSpPr/>
-          <p:nvPr/>
-        </p:nvSpPr>
-        <p:spPr>
-          <a:xfrm>
-            <a:off x="10195560" y="5577840"/>
-            <a:ext cx="1325880" cy="164592"/>
-          </a:xfrm>
-          <a:prstGeom prst="rect">
-            <a:avLst/>
-          </a:prstGeom>
-          <a:solidFill>
-            <a:srgbClr val="DB4928"/>
-          </a:solidFill>
-          <a:ln>
-            <a:noFill/>
-          </a:ln>
-        </p:spPr>
-        <p:style>
-          <a:lnRef idx="1">
-            <a:schemeClr val="accent1"/>
-          </a:lnRef>
-          <a:fillRef idx="3">
-            <a:schemeClr val="accent1"/>
-          </a:fillRef>
-          <a:effectRef idx="2">
-            <a:schemeClr val="accent1"/>
-          </a:effectRef>
-          <a:fontRef idx="minor">
-            <a:schemeClr val="lt1"/>
-          </a:fontRef>
-        </p:style>
-        <p:txBody>
-          <a:bodyPr rtlCol="0" anchor="ctr"/>
-          <a:lstStyle/>
-          <a:p>
-            <a:pPr algn="ctr"/>
+                  <a:srgbClr val="000000"/>
+                </a:solidFill>
+                <a:latin typeface="Arial"/>
+              </a:rPr>
+              <a:t>провести анкетирование и интерпретировать полученные данные;</a:t>
+            </a:r>
+          </a:p>
+          <a:p>
+            <a:pPr>
+              <a:spcAft>
+                <a:spcPts val="900"/>
+              </a:spcAft>
+            </a:pPr>
+            <a:r>
+              <a:rPr sz="1500" b="1">
+                <a:solidFill>
+                  <a:srgbClr val="3AAA35"/>
+                </a:solidFill>
+                <a:latin typeface="Arial"/>
+              </a:rPr>
+              <a:t>■ </a:t>
+            </a:r>
+            <a:r>
+              <a:rPr sz="1500" b="0">
+                <a:solidFill>
+                  <a:srgbClr val="000000"/>
+                </a:solidFill>
+                <a:latin typeface="Arial"/>
+              </a:rPr>
+              <a:t>сформулировать выводы о связи топонимов с возрастом, опытом города и сферой общения.</a:t>
+            </a:r>
           </a:p>
         </p:txBody>
       </p:sp>
@@ -6094,9 +5493,9 @@
                 <a:solidFill>
                   <a:srgbClr val="5C675F"/>
                 </a:solidFill>
-                <a:latin typeface="Onest"/>
-              </a:rPr>
-              <a:t>Итоговая модель и перспективы</a:t>
+                <a:latin typeface="Arial"/>
+              </a:rPr>
+              <a:t>Ключевые понятия</a:t>
             </a:r>
           </a:p>
         </p:txBody>
@@ -6129,9 +5528,9 @@
                 <a:solidFill>
                   <a:srgbClr val="244128"/>
                 </a:solidFill>
-                <a:latin typeface="Onest"/>
-              </a:rPr>
-              <a:t>Вывод: лексикон горожанина многослоен</a:t>
+                <a:latin typeface="Arial"/>
+              </a:rPr>
+              <a:t>Теоретическая база</a:t>
             </a:r>
           </a:p>
         </p:txBody>
@@ -6207,9 +5606,9 @@
                 <a:solidFill>
                   <a:srgbClr val="5C675F"/>
                 </a:solidFill>
-                <a:latin typeface="Onest"/>
-              </a:rPr>
-              <a:t>5:00–7:00</a:t>
+                <a:latin typeface="Arial"/>
+              </a:rPr>
+              <a:t>2:00–2:45</a:t>
             </a:r>
           </a:p>
         </p:txBody>
@@ -6242,9 +5641,9 @@
                 <a:solidFill>
                   <a:srgbClr val="5C675F"/>
                 </a:solidFill>
-                <a:latin typeface="Onest"/>
-              </a:rPr>
-              <a:t>4/4</a:t>
+                <a:latin typeface="Arial"/>
+              </a:rPr>
+              <a:t>4/10</a:t>
             </a:r>
           </a:p>
         </p:txBody>
@@ -6257,8 +5656,51 @@
         </p:nvSpPr>
         <p:spPr>
           <a:xfrm>
-            <a:off x="685800" y="1536192"/>
-            <a:ext cx="3291840" cy="3246120"/>
+            <a:off x="685800" y="1508760"/>
+            <a:ext cx="3337560" cy="1828800"/>
+          </a:xfrm>
+          <a:prstGeom prst="rect">
+            <a:avLst/>
+          </a:prstGeom>
+          <a:solidFill>
+            <a:srgbClr val="FFFFFF"/>
+          </a:solidFill>
+          <a:ln>
+            <a:noFill/>
+          </a:ln>
+        </p:spPr>
+        <p:style>
+          <a:lnRef idx="1">
+            <a:schemeClr val="accent1"/>
+          </a:lnRef>
+          <a:fillRef idx="3">
+            <a:schemeClr val="accent1"/>
+          </a:fillRef>
+          <a:effectRef idx="2">
+            <a:schemeClr val="accent1"/>
+          </a:effectRef>
+          <a:fontRef idx="minor">
+            <a:schemeClr val="lt1"/>
+          </a:fontRef>
+        </p:style>
+        <p:txBody>
+          <a:bodyPr rtlCol="0" anchor="ctr"/>
+          <a:lstStyle/>
+          <a:p>
+            <a:pPr algn="ctr"/>
+          </a:p>
+        </p:txBody>
+      </p:sp>
+      <p:sp>
+        <p:nvSpPr>
+          <p:cNvPr id="9" name="Rectangle 8"/>
+          <p:cNvSpPr/>
+          <p:nvPr/>
+        </p:nvSpPr>
+        <p:spPr>
+          <a:xfrm>
+            <a:off x="685800" y="1508760"/>
+            <a:ext cx="109728" cy="1828800"/>
           </a:xfrm>
           <a:prstGeom prst="rect">
             <a:avLst/>
@@ -6294,14 +5736,127 @@
       </p:sp>
       <p:sp>
         <p:nvSpPr>
-          <p:cNvPr id="9" name="Rectangle 8"/>
+          <p:cNvPr id="10" name="TextBox 9"/>
+          <p:cNvSpPr txBox="1"/>
+          <p:nvPr/>
+        </p:nvSpPr>
+        <p:spPr>
+          <a:xfrm>
+            <a:off x="941832" y="1719072"/>
+            <a:ext cx="2926080" cy="320040"/>
+          </a:xfrm>
+          <a:prstGeom prst="rect">
+            <a:avLst/>
+          </a:prstGeom>
+          <a:noFill/>
+        </p:spPr>
+        <p:txBody>
+          <a:bodyPr wrap="square">
+            <a:noAutofit/>
+          </a:bodyPr>
+          <a:lstStyle/>
+          <a:p>
+            <a:pPr algn="l"/>
+            <a:r>
+              <a:rPr sz="1500" b="1">
+                <a:solidFill>
+                  <a:srgbClr val="244128"/>
+                </a:solidFill>
+                <a:latin typeface="Arial"/>
+              </a:rPr>
+              <a:t>Урбаноним</a:t>
+            </a:r>
+          </a:p>
+        </p:txBody>
+      </p:sp>
+      <p:sp>
+        <p:nvSpPr>
+          <p:cNvPr id="11" name="TextBox 10"/>
+          <p:cNvSpPr txBox="1"/>
+          <p:nvPr/>
+        </p:nvSpPr>
+        <p:spPr>
+          <a:xfrm>
+            <a:off x="941832" y="2167128"/>
+            <a:ext cx="2926080" cy="1042416"/>
+          </a:xfrm>
+          <a:prstGeom prst="rect">
+            <a:avLst/>
+          </a:prstGeom>
+          <a:noFill/>
+        </p:spPr>
+        <p:txBody>
+          <a:bodyPr wrap="square">
+            <a:noAutofit/>
+          </a:bodyPr>
+          <a:lstStyle/>
+          <a:p>
+            <a:pPr algn="l"/>
+            <a:r>
+              <a:rPr sz="1700" b="0">
+                <a:solidFill>
+                  <a:srgbClr val="000000"/>
+                </a:solidFill>
+                <a:latin typeface="Arial"/>
+              </a:rPr>
+              <a:t>Название внутригородского объекта: улицы, площади, моста, станции метро или района.</a:t>
+            </a:r>
+          </a:p>
+        </p:txBody>
+      </p:sp>
+      <p:sp>
+        <p:nvSpPr>
+          <p:cNvPr id="12" name="Rectangle 11"/>
           <p:cNvSpPr/>
           <p:nvPr/>
         </p:nvSpPr>
         <p:spPr>
           <a:xfrm>
-            <a:off x="4160520" y="1536192"/>
-            <a:ext cx="3291840" cy="3246120"/>
+            <a:off x="4434840" y="1508760"/>
+            <a:ext cx="3337560" cy="1828800"/>
+          </a:xfrm>
+          <a:prstGeom prst="rect">
+            <a:avLst/>
+          </a:prstGeom>
+          <a:solidFill>
+            <a:srgbClr val="FFFFFF"/>
+          </a:solidFill>
+          <a:ln>
+            <a:noFill/>
+          </a:ln>
+        </p:spPr>
+        <p:style>
+          <a:lnRef idx="1">
+            <a:schemeClr val="accent1"/>
+          </a:lnRef>
+          <a:fillRef idx="3">
+            <a:schemeClr val="accent1"/>
+          </a:fillRef>
+          <a:effectRef idx="2">
+            <a:schemeClr val="accent1"/>
+          </a:effectRef>
+          <a:fontRef idx="minor">
+            <a:schemeClr val="lt1"/>
+          </a:fontRef>
+        </p:style>
+        <p:txBody>
+          <a:bodyPr rtlCol="0" anchor="ctr"/>
+          <a:lstStyle/>
+          <a:p>
+            <a:pPr algn="ctr"/>
+          </a:p>
+        </p:txBody>
+      </p:sp>
+      <p:sp>
+        <p:nvSpPr>
+          <p:cNvPr id="13" name="Rectangle 12"/>
+          <p:cNvSpPr/>
+          <p:nvPr/>
+        </p:nvSpPr>
+        <p:spPr>
+          <a:xfrm>
+            <a:off x="4434840" y="1508760"/>
+            <a:ext cx="109728" cy="1828800"/>
           </a:xfrm>
           <a:prstGeom prst="rect">
             <a:avLst/>
@@ -6337,14 +5892,127 @@
       </p:sp>
       <p:sp>
         <p:nvSpPr>
-          <p:cNvPr id="10" name="Rectangle 9"/>
+          <p:cNvPr id="14" name="TextBox 13"/>
+          <p:cNvSpPr txBox="1"/>
+          <p:nvPr/>
+        </p:nvSpPr>
+        <p:spPr>
+          <a:xfrm>
+            <a:off x="4690872" y="1719072"/>
+            <a:ext cx="2926080" cy="320040"/>
+          </a:xfrm>
+          <a:prstGeom prst="rect">
+            <a:avLst/>
+          </a:prstGeom>
+          <a:noFill/>
+        </p:spPr>
+        <p:txBody>
+          <a:bodyPr wrap="square">
+            <a:noAutofit/>
+          </a:bodyPr>
+          <a:lstStyle/>
+          <a:p>
+            <a:pPr algn="l"/>
+            <a:r>
+              <a:rPr sz="1500" b="1">
+                <a:solidFill>
+                  <a:srgbClr val="244128"/>
+                </a:solidFill>
+                <a:latin typeface="Arial"/>
+              </a:rPr>
+              <a:t>Активный топонимикон</a:t>
+            </a:r>
+          </a:p>
+        </p:txBody>
+      </p:sp>
+      <p:sp>
+        <p:nvSpPr>
+          <p:cNvPr id="15" name="TextBox 14"/>
+          <p:cNvSpPr txBox="1"/>
+          <p:nvPr/>
+        </p:nvSpPr>
+        <p:spPr>
+          <a:xfrm>
+            <a:off x="4690872" y="2167128"/>
+            <a:ext cx="2926080" cy="1042416"/>
+          </a:xfrm>
+          <a:prstGeom prst="rect">
+            <a:avLst/>
+          </a:prstGeom>
+          <a:noFill/>
+        </p:spPr>
+        <p:txBody>
+          <a:bodyPr wrap="square">
+            <a:noAutofit/>
+          </a:bodyPr>
+          <a:lstStyle/>
+          <a:p>
+            <a:pPr algn="l"/>
+            <a:r>
+              <a:rPr sz="1700" b="0">
+                <a:solidFill>
+                  <a:srgbClr val="000000"/>
+                </a:solidFill>
+                <a:latin typeface="Arial"/>
+              </a:rPr>
+              <a:t>Названия, которые человек спонтанно употребляет в речи и переписке.</a:t>
+            </a:r>
+          </a:p>
+        </p:txBody>
+      </p:sp>
+      <p:sp>
+        <p:nvSpPr>
+          <p:cNvPr id="16" name="Rectangle 15"/>
           <p:cNvSpPr/>
           <p:nvPr/>
         </p:nvSpPr>
         <p:spPr>
           <a:xfrm>
-            <a:off x="7635240" y="1536192"/>
-            <a:ext cx="3291840" cy="3246120"/>
+            <a:off x="8183879" y="1508760"/>
+            <a:ext cx="3337560" cy="1828800"/>
+          </a:xfrm>
+          <a:prstGeom prst="rect">
+            <a:avLst/>
+          </a:prstGeom>
+          <a:solidFill>
+            <a:srgbClr val="FFFFFF"/>
+          </a:solidFill>
+          <a:ln>
+            <a:noFill/>
+          </a:ln>
+        </p:spPr>
+        <p:style>
+          <a:lnRef idx="1">
+            <a:schemeClr val="accent1"/>
+          </a:lnRef>
+          <a:fillRef idx="3">
+            <a:schemeClr val="accent1"/>
+          </a:fillRef>
+          <a:effectRef idx="2">
+            <a:schemeClr val="accent1"/>
+          </a:effectRef>
+          <a:fontRef idx="minor">
+            <a:schemeClr val="lt1"/>
+          </a:fontRef>
+        </p:style>
+        <p:txBody>
+          <a:bodyPr rtlCol="0" anchor="ctr"/>
+          <a:lstStyle/>
+          <a:p>
+            <a:pPr algn="ctr"/>
+          </a:p>
+        </p:txBody>
+      </p:sp>
+      <p:sp>
+        <p:nvSpPr>
+          <p:cNvPr id="17" name="Rectangle 16"/>
+          <p:cNvSpPr/>
+          <p:nvPr/>
+        </p:nvSpPr>
+        <p:spPr>
+          <a:xfrm>
+            <a:off x="8183879" y="1508760"/>
+            <a:ext cx="109728" cy="1828800"/>
           </a:xfrm>
           <a:prstGeom prst="rect">
             <a:avLst/>
@@ -6380,14 +6048,14 @@
       </p:sp>
       <p:sp>
         <p:nvSpPr>
-          <p:cNvPr id="11" name="TextBox 10"/>
+          <p:cNvPr id="18" name="TextBox 17"/>
           <p:cNvSpPr txBox="1"/>
           <p:nvPr/>
         </p:nvSpPr>
         <p:spPr>
           <a:xfrm>
-            <a:off x="960120" y="1828800"/>
-            <a:ext cx="2743200" cy="411480"/>
+            <a:off x="8439911" y="1719072"/>
+            <a:ext cx="2926080" cy="320040"/>
           </a:xfrm>
           <a:prstGeom prst="rect">
             <a:avLst/>
@@ -6402,27 +6070,27 @@
           <a:p>
             <a:pPr algn="l"/>
             <a:r>
-              <a:rPr sz="2000" b="1">
-                <a:solidFill>
-                  <a:srgbClr val="FFFFFF"/>
-                </a:solidFill>
-                <a:latin typeface="Onest"/>
-              </a:rPr>
-              <a:t>1. Официальное</a:t>
-            </a:r>
-          </a:p>
-        </p:txBody>
-      </p:sp>
-      <p:sp>
-        <p:nvSpPr>
-          <p:cNvPr id="12" name="TextBox 11"/>
+              <a:rPr sz="1500" b="1">
+                <a:solidFill>
+                  <a:srgbClr val="244128"/>
+                </a:solidFill>
+                <a:latin typeface="Arial"/>
+              </a:rPr>
+              <a:t>Пассивный топонимикон</a:t>
+            </a:r>
+          </a:p>
+        </p:txBody>
+      </p:sp>
+      <p:sp>
+        <p:nvSpPr>
+          <p:cNvPr id="19" name="TextBox 18"/>
           <p:cNvSpPr txBox="1"/>
           <p:nvPr/>
         </p:nvSpPr>
         <p:spPr>
           <a:xfrm>
-            <a:off x="960120" y="2395728"/>
-            <a:ext cx="2743200" cy="1554480"/>
+            <a:off x="8439911" y="2167128"/>
+            <a:ext cx="2926080" cy="1042416"/>
           </a:xfrm>
           <a:prstGeom prst="rect">
             <a:avLst/>
@@ -6439,165 +6107,25 @@
             <a:r>
               <a:rPr sz="1700" b="0">
                 <a:solidFill>
-                  <a:srgbClr val="FFFFFF"/>
-                </a:solidFill>
-                <a:latin typeface="Onest"/>
-              </a:rPr>
-              <a:t>Дворцовая площадь, Эрмитаж, Исаакиевский собор: высокая узнаваемость и культурный слой.</a:t>
-            </a:r>
-          </a:p>
-        </p:txBody>
-      </p:sp>
-      <p:sp>
-        <p:nvSpPr>
-          <p:cNvPr id="13" name="TextBox 12"/>
-          <p:cNvSpPr txBox="1"/>
-          <p:nvPr/>
-        </p:nvSpPr>
-        <p:spPr>
-          <a:xfrm>
-            <a:off x="4434840" y="1828800"/>
-            <a:ext cx="2743200" cy="411480"/>
-          </a:xfrm>
-          <a:prstGeom prst="rect">
-            <a:avLst/>
-          </a:prstGeom>
-          <a:noFill/>
-        </p:spPr>
-        <p:txBody>
-          <a:bodyPr wrap="square">
-            <a:noAutofit/>
-          </a:bodyPr>
-          <a:lstStyle/>
-          <a:p>
-            <a:pPr algn="l"/>
-            <a:r>
-              <a:rPr sz="2000" b="1">
-                <a:solidFill>
-                  <a:srgbClr val="FFFFFF"/>
-                </a:solidFill>
-                <a:latin typeface="Onest"/>
-              </a:rPr>
-              <a:t>2. Разговорное</a:t>
-            </a:r>
-          </a:p>
-        </p:txBody>
-      </p:sp>
-      <p:sp>
-        <p:nvSpPr>
-          <p:cNvPr id="14" name="TextBox 13"/>
-          <p:cNvSpPr txBox="1"/>
-          <p:nvPr/>
-        </p:nvSpPr>
-        <p:spPr>
-          <a:xfrm>
-            <a:off x="4434840" y="2395728"/>
-            <a:ext cx="2743200" cy="1554480"/>
-          </a:xfrm>
-          <a:prstGeom prst="rect">
-            <a:avLst/>
-          </a:prstGeom>
-          <a:noFill/>
-        </p:spPr>
-        <p:txBody>
-          <a:bodyPr wrap="square">
-            <a:noAutofit/>
-          </a:bodyPr>
-          <a:lstStyle/>
-          <a:p>
-            <a:pPr algn="l"/>
-            <a:r>
-              <a:rPr sz="1700" b="0">
-                <a:solidFill>
-                  <a:srgbClr val="FFFFFF"/>
-                </a:solidFill>
-                <a:latin typeface="Onest"/>
-              </a:rPr>
-              <a:t>Питер, Невский, Лиговка: активная навигация, друзья, соцсети, повседневные маршруты.</a:t>
-            </a:r>
-          </a:p>
-        </p:txBody>
-      </p:sp>
-      <p:sp>
-        <p:nvSpPr>
-          <p:cNvPr id="15" name="TextBox 14"/>
-          <p:cNvSpPr txBox="1"/>
-          <p:nvPr/>
-        </p:nvSpPr>
-        <p:spPr>
-          <a:xfrm>
-            <a:off x="7909560" y="1828800"/>
-            <a:ext cx="2743200" cy="411480"/>
-          </a:xfrm>
-          <a:prstGeom prst="rect">
-            <a:avLst/>
-          </a:prstGeom>
-          <a:noFill/>
-        </p:spPr>
-        <p:txBody>
-          <a:bodyPr wrap="square">
-            <a:noAutofit/>
-          </a:bodyPr>
-          <a:lstStyle/>
-          <a:p>
-            <a:pPr algn="l"/>
-            <a:r>
-              <a:rPr sz="2000" b="1">
-                <a:solidFill>
-                  <a:srgbClr val="FFFFFF"/>
-                </a:solidFill>
-                <a:latin typeface="Onest"/>
-              </a:rPr>
-              <a:t>3. Историческое</a:t>
-            </a:r>
-          </a:p>
-        </p:txBody>
-      </p:sp>
-      <p:sp>
-        <p:nvSpPr>
-          <p:cNvPr id="16" name="TextBox 15"/>
-          <p:cNvSpPr txBox="1"/>
-          <p:nvPr/>
-        </p:nvSpPr>
-        <p:spPr>
-          <a:xfrm>
-            <a:off x="7909560" y="2395728"/>
-            <a:ext cx="2743200" cy="1554480"/>
-          </a:xfrm>
-          <a:prstGeom prst="rect">
-            <a:avLst/>
-          </a:prstGeom>
-          <a:noFill/>
-        </p:spPr>
-        <p:txBody>
-          <a:bodyPr wrap="square">
-            <a:noAutofit/>
-          </a:bodyPr>
-          <a:lstStyle/>
-          <a:p>
-            <a:pPr algn="l"/>
-            <a:r>
-              <a:rPr sz="1700" b="0">
-                <a:solidFill>
-                  <a:srgbClr val="FFFFFF"/>
-                </a:solidFill>
-                <a:latin typeface="Onest"/>
-              </a:rPr>
-              <a:t>Ленинград: почти всем знаком, но у молодых респондентов чаще находится в пассиве.</a:t>
-            </a:r>
-          </a:p>
-        </p:txBody>
-      </p:sp>
-      <p:sp>
-        <p:nvSpPr>
-          <p:cNvPr id="17" name="Rectangle 16"/>
+                  <a:srgbClr val="000000"/>
+                </a:solidFill>
+                <a:latin typeface="Arial"/>
+              </a:rPr>
+              <a:t>Названия, которые человек узнаёт, но почти не использует самостоятельно.</a:t>
+            </a:r>
+          </a:p>
+        </p:txBody>
+      </p:sp>
+      <p:sp>
+        <p:nvSpPr>
+          <p:cNvPr id="20" name="Rectangle 19"/>
           <p:cNvSpPr/>
           <p:nvPr/>
         </p:nvSpPr>
         <p:spPr>
           <a:xfrm>
-            <a:off x="685800" y="5166360"/>
-            <a:ext cx="10241280" cy="868680"/>
+            <a:off x="685800" y="3794760"/>
+            <a:ext cx="10835640" cy="1508760"/>
           </a:xfrm>
           <a:prstGeom prst="rect">
             <a:avLst/>
@@ -6633,14 +6161,14 @@
       </p:sp>
       <p:sp>
         <p:nvSpPr>
-          <p:cNvPr id="18" name="TextBox 17"/>
+          <p:cNvPr id="21" name="TextBox 20"/>
           <p:cNvSpPr txBox="1"/>
           <p:nvPr/>
         </p:nvSpPr>
         <p:spPr>
           <a:xfrm>
-            <a:off x="960120" y="5385816"/>
-            <a:ext cx="9646920" cy="365760"/>
+            <a:off x="960120" y="4050791"/>
+            <a:ext cx="9966960" cy="320040"/>
           </a:xfrm>
           <a:prstGeom prst="rect">
             <a:avLst/>
@@ -6655,27 +6183,175 @@
           <a:p>
             <a:pPr algn="l"/>
             <a:r>
-              <a:rPr sz="1700" b="1">
+              <a:rPr sz="1800" b="1">
                 <a:solidFill>
                   <a:srgbClr val="244128"/>
                 </a:solidFill>
-                <a:latin typeface="Onest"/>
-              </a:rPr>
-              <a:t>Защитный тезис</a:t>
-            </a:r>
-          </a:p>
-        </p:txBody>
-      </p:sp>
-      <p:sp>
-        <p:nvSpPr>
-          <p:cNvPr id="19" name="TextBox 18"/>
+                <a:latin typeface="Arial"/>
+              </a:rPr>
+              <a:t>Научная опора</a:t>
+            </a:r>
+          </a:p>
+        </p:txBody>
+      </p:sp>
+      <p:sp>
+        <p:nvSpPr>
+          <p:cNvPr id="22" name="TextBox 21"/>
           <p:cNvSpPr txBox="1"/>
           <p:nvPr/>
         </p:nvSpPr>
         <p:spPr>
           <a:xfrm>
-            <a:off x="2788920" y="5376672"/>
-            <a:ext cx="7818120" cy="420624"/>
+            <a:off x="960120" y="4462272"/>
+            <a:ext cx="9875520" cy="685800"/>
+          </a:xfrm>
+          <a:prstGeom prst="rect">
+            <a:avLst/>
+          </a:prstGeom>
+          <a:noFill/>
+        </p:spPr>
+        <p:txBody>
+          <a:bodyPr wrap="square">
+            <a:spAutoFit/>
+          </a:bodyPr>
+          <a:lstStyle/>
+          <a:p>
+            <a:pPr>
+              <a:spcAft>
+                <a:spcPts val="900"/>
+              </a:spcAft>
+            </a:pPr>
+            <a:r>
+              <a:rPr sz="1300" b="1">
+                <a:solidFill>
+                  <a:srgbClr val="3AAA35"/>
+                </a:solidFill>
+                <a:latin typeface="Arial"/>
+              </a:rPr>
+              <a:t>■ </a:t>
+            </a:r>
+            <a:r>
+              <a:rPr sz="1300" b="0">
+                <a:solidFill>
+                  <a:srgbClr val="000000"/>
+                </a:solidFill>
+                <a:latin typeface="Arial"/>
+              </a:rPr>
+              <a:t>А.В. Суперанская: имена собственные включены в общую систему языка и получают коннотации.</a:t>
+            </a:r>
+          </a:p>
+          <a:p>
+            <a:pPr>
+              <a:spcAft>
+                <a:spcPts val="900"/>
+              </a:spcAft>
+            </a:pPr>
+            <a:r>
+              <a:rPr sz="1300" b="1">
+                <a:solidFill>
+                  <a:srgbClr val="3AAA35"/>
+                </a:solidFill>
+                <a:latin typeface="Arial"/>
+              </a:rPr>
+              <a:t>■ </a:t>
+            </a:r>
+            <a:r>
+              <a:rPr sz="1300" b="0">
+                <a:solidFill>
+                  <a:srgbClr val="000000"/>
+                </a:solidFill>
+                <a:latin typeface="Arial"/>
+              </a:rPr>
+              <a:t>Е.В. Иванцова: количество узнаваемых топонимов часто больше числа активно используемых.</a:t>
+            </a:r>
+          </a:p>
+          <a:p>
+            <a:pPr>
+              <a:spcAft>
+                <a:spcPts val="900"/>
+              </a:spcAft>
+            </a:pPr>
+            <a:r>
+              <a:rPr sz="1300" b="1">
+                <a:solidFill>
+                  <a:srgbClr val="3AAA35"/>
+                </a:solidFill>
+                <a:latin typeface="Arial"/>
+              </a:rPr>
+              <a:t>■ </a:t>
+            </a:r>
+            <a:r>
+              <a:rPr sz="1300" b="0">
+                <a:solidFill>
+                  <a:srgbClr val="000000"/>
+                </a:solidFill>
+                <a:latin typeface="Arial"/>
+              </a:rPr>
+              <a:t>О.Н. Минюшова: топонимы могут быть логоэпистемами — носителями культурно-исторического знания.</a:t>
+            </a:r>
+          </a:p>
+        </p:txBody>
+      </p:sp>
+    </p:spTree>
+  </p:cSld>
+  <p:clrMapOvr>
+    <a:masterClrMapping/>
+  </p:clrMapOvr>
+</p:sld>
+</file>
+
+<file path=ppt/slides/slide5.xml><?xml version="1.0" encoding="utf-8"?>
+<p:sld xmlns:a="http://schemas.openxmlformats.org/drawingml/2006/main" xmlns:p="http://schemas.openxmlformats.org/presentationml/2006/main" xmlns:r="http://schemas.openxmlformats.org/officeDocument/2006/relationships">
+  <p:cSld>
+    <p:bg>
+      <p:bgPr>
+        <a:solidFill>
+          <a:srgbClr val="F6F8F4"/>
+        </a:solidFill>
+        <a:effectLst/>
+      </p:bgPr>
+    </p:bg>
+    <p:spTree>
+      <p:nvGrpSpPr>
+        <p:cNvPr id="1" name=""/>
+        <p:cNvGrpSpPr/>
+        <p:nvPr/>
+      </p:nvGrpSpPr>
+      <p:grpSpPr/>
+      <p:pic>
+        <p:nvPicPr>
+          <p:cNvPr id="2" name="Picture 1" descr="spbstu_logo_02.png"/>
+          <p:cNvPicPr>
+            <a:picLocks noChangeAspect="1"/>
+          </p:cNvPicPr>
+          <p:nvPr/>
+        </p:nvPicPr>
+        <p:blipFill>
+          <a:blip r:embed="rId2"/>
+          <a:stretch>
+            <a:fillRect/>
+          </a:stretch>
+        </p:blipFill>
+        <p:spPr>
+          <a:xfrm>
+            <a:off x="502920" y="310896"/>
+            <a:ext cx="1600200" cy="552069"/>
+          </a:xfrm>
+          <a:prstGeom prst="rect">
+            <a:avLst/>
+          </a:prstGeom>
+        </p:spPr>
+      </p:pic>
+      <p:sp>
+        <p:nvSpPr>
+          <p:cNvPr id="3" name="TextBox 2"/>
+          <p:cNvSpPr txBox="1"/>
+          <p:nvPr/>
+        </p:nvSpPr>
+        <p:spPr>
+          <a:xfrm>
+            <a:off x="2743200" y="320040"/>
+            <a:ext cx="6217920" cy="310896"/>
           </a:xfrm>
           <a:prstGeom prst="rect">
             <a:avLst/>
@@ -6690,27 +6366,27 @@
           <a:p>
             <a:pPr algn="l"/>
             <a:r>
-              <a:rPr sz="1500" b="0">
-                <a:solidFill>
-                  <a:srgbClr val="000000"/>
-                </a:solidFill>
-                <a:latin typeface="Onest"/>
-              </a:rPr>
-              <a:t>Границы между активным и пассивным топонимиконом задаются не грамматикой, а возрастом, опытом города, кругом общения и цифровыми практиками.</a:t>
-            </a:r>
-          </a:p>
-        </p:txBody>
-      </p:sp>
-      <p:sp>
-        <p:nvSpPr>
-          <p:cNvPr id="20" name="TextBox 19"/>
+              <a:rPr sz="1000" b="0">
+                <a:solidFill>
+                  <a:srgbClr val="5C675F"/>
+                </a:solidFill>
+                <a:latin typeface="Arial"/>
+              </a:rPr>
+              <a:t>Как собирались данные</a:t>
+            </a:r>
+          </a:p>
+        </p:txBody>
+      </p:sp>
+      <p:sp>
+        <p:nvSpPr>
+          <p:cNvPr id="4" name="TextBox 3"/>
           <p:cNvSpPr txBox="1"/>
           <p:nvPr/>
         </p:nvSpPr>
         <p:spPr>
           <a:xfrm>
-            <a:off x="713232" y="6199632"/>
-            <a:ext cx="9144000" cy="256032"/>
+            <a:off x="2743200" y="630936"/>
+            <a:ext cx="7132320" cy="475488"/>
           </a:xfrm>
           <a:prstGeom prst="rect">
             <a:avLst/>
@@ -6725,13 +6401,4818 @@
           <a:p>
             <a:pPr algn="l"/>
             <a:r>
+              <a:rPr sz="2400" b="1">
+                <a:solidFill>
+                  <a:srgbClr val="244128"/>
+                </a:solidFill>
+                <a:latin typeface="Arial"/>
+              </a:rPr>
+              <a:t>Методика и материал</a:t>
+            </a:r>
+          </a:p>
+        </p:txBody>
+      </p:sp>
+      <p:sp>
+        <p:nvSpPr>
+          <p:cNvPr id="5" name="Rectangle 4"/>
+          <p:cNvSpPr/>
+          <p:nvPr/>
+        </p:nvSpPr>
+        <p:spPr>
+          <a:xfrm>
+            <a:off x="502920" y="1170432"/>
+            <a:ext cx="11155680" cy="32004"/>
+          </a:xfrm>
+          <a:prstGeom prst="rect">
+            <a:avLst/>
+          </a:prstGeom>
+          <a:solidFill>
+            <a:srgbClr val="3AAA35"/>
+          </a:solidFill>
+          <a:ln>
+            <a:noFill/>
+          </a:ln>
+        </p:spPr>
+        <p:style>
+          <a:lnRef idx="1">
+            <a:schemeClr val="accent1"/>
+          </a:lnRef>
+          <a:fillRef idx="3">
+            <a:schemeClr val="accent1"/>
+          </a:fillRef>
+          <a:effectRef idx="2">
+            <a:schemeClr val="accent1"/>
+          </a:effectRef>
+          <a:fontRef idx="minor">
+            <a:schemeClr val="lt1"/>
+          </a:fontRef>
+        </p:style>
+        <p:txBody>
+          <a:bodyPr rtlCol="0" anchor="ctr"/>
+          <a:lstStyle/>
+          <a:p>
+            <a:pPr algn="ctr"/>
+          </a:p>
+        </p:txBody>
+      </p:sp>
+      <p:sp>
+        <p:nvSpPr>
+          <p:cNvPr id="6" name="TextBox 5"/>
+          <p:cNvSpPr txBox="1"/>
+          <p:nvPr/>
+        </p:nvSpPr>
+        <p:spPr>
+          <a:xfrm>
+            <a:off x="9464040" y="411480"/>
+            <a:ext cx="2194560" cy="310896"/>
+          </a:xfrm>
+          <a:prstGeom prst="rect">
+            <a:avLst/>
+          </a:prstGeom>
+          <a:noFill/>
+        </p:spPr>
+        <p:txBody>
+          <a:bodyPr wrap="square">
+            <a:noAutofit/>
+          </a:bodyPr>
+          <a:lstStyle/>
+          <a:p>
+            <a:pPr algn="r"/>
+            <a:r>
+              <a:rPr sz="1000" b="0">
+                <a:solidFill>
+                  <a:srgbClr val="5C675F"/>
+                </a:solidFill>
+                <a:latin typeface="Arial"/>
+              </a:rPr>
+              <a:t>2:45–3:30</a:t>
+            </a:r>
+          </a:p>
+        </p:txBody>
+      </p:sp>
+      <p:sp>
+        <p:nvSpPr>
+          <p:cNvPr id="7" name="TextBox 6"/>
+          <p:cNvSpPr txBox="1"/>
+          <p:nvPr/>
+        </p:nvSpPr>
+        <p:spPr>
+          <a:xfrm>
+            <a:off x="11018520" y="6355080"/>
+            <a:ext cx="640080" cy="228600"/>
+          </a:xfrm>
+          <a:prstGeom prst="rect">
+            <a:avLst/>
+          </a:prstGeom>
+          <a:noFill/>
+        </p:spPr>
+        <p:txBody>
+          <a:bodyPr wrap="square">
+            <a:noAutofit/>
+          </a:bodyPr>
+          <a:lstStyle/>
+          <a:p>
+            <a:pPr algn="r"/>
+            <a:r>
+              <a:rPr sz="1000" b="0">
+                <a:solidFill>
+                  <a:srgbClr val="5C675F"/>
+                </a:solidFill>
+                <a:latin typeface="Arial"/>
+              </a:rPr>
+              <a:t>5/10</a:t>
+            </a:r>
+          </a:p>
+        </p:txBody>
+      </p:sp>
+      <p:sp>
+        <p:nvSpPr>
+          <p:cNvPr id="8" name="Rectangle 7"/>
+          <p:cNvSpPr/>
+          <p:nvPr/>
+        </p:nvSpPr>
+        <p:spPr>
+          <a:xfrm>
+            <a:off x="685800" y="1508760"/>
+            <a:ext cx="3383280" cy="1417320"/>
+          </a:xfrm>
+          <a:prstGeom prst="rect">
+            <a:avLst/>
+          </a:prstGeom>
+          <a:solidFill>
+            <a:srgbClr val="FFFFFF"/>
+          </a:solidFill>
+          <a:ln>
+            <a:noFill/>
+          </a:ln>
+        </p:spPr>
+        <p:style>
+          <a:lnRef idx="1">
+            <a:schemeClr val="accent1"/>
+          </a:lnRef>
+          <a:fillRef idx="3">
+            <a:schemeClr val="accent1"/>
+          </a:fillRef>
+          <a:effectRef idx="2">
+            <a:schemeClr val="accent1"/>
+          </a:effectRef>
+          <a:fontRef idx="minor">
+            <a:schemeClr val="lt1"/>
+          </a:fontRef>
+        </p:style>
+        <p:txBody>
+          <a:bodyPr rtlCol="0" anchor="ctr"/>
+          <a:lstStyle/>
+          <a:p>
+            <a:pPr algn="ctr"/>
+          </a:p>
+        </p:txBody>
+      </p:sp>
+      <p:sp>
+        <p:nvSpPr>
+          <p:cNvPr id="9" name="Rectangle 8"/>
+          <p:cNvSpPr/>
+          <p:nvPr/>
+        </p:nvSpPr>
+        <p:spPr>
+          <a:xfrm>
+            <a:off x="685800" y="1508760"/>
+            <a:ext cx="109728" cy="1417320"/>
+          </a:xfrm>
+          <a:prstGeom prst="rect">
+            <a:avLst/>
+          </a:prstGeom>
+          <a:solidFill>
+            <a:srgbClr val="3AAA35"/>
+          </a:solidFill>
+          <a:ln>
+            <a:noFill/>
+          </a:ln>
+        </p:spPr>
+        <p:style>
+          <a:lnRef idx="1">
+            <a:schemeClr val="accent1"/>
+          </a:lnRef>
+          <a:fillRef idx="3">
+            <a:schemeClr val="accent1"/>
+          </a:fillRef>
+          <a:effectRef idx="2">
+            <a:schemeClr val="accent1"/>
+          </a:effectRef>
+          <a:fontRef idx="minor">
+            <a:schemeClr val="lt1"/>
+          </a:fontRef>
+        </p:style>
+        <p:txBody>
+          <a:bodyPr rtlCol="0" anchor="ctr"/>
+          <a:lstStyle/>
+          <a:p>
+            <a:pPr algn="ctr"/>
+          </a:p>
+        </p:txBody>
+      </p:sp>
+      <p:sp>
+        <p:nvSpPr>
+          <p:cNvPr id="10" name="TextBox 9"/>
+          <p:cNvSpPr txBox="1"/>
+          <p:nvPr/>
+        </p:nvSpPr>
+        <p:spPr>
+          <a:xfrm>
+            <a:off x="941832" y="1719072"/>
+            <a:ext cx="2971800" cy="320040"/>
+          </a:xfrm>
+          <a:prstGeom prst="rect">
+            <a:avLst/>
+          </a:prstGeom>
+          <a:noFill/>
+        </p:spPr>
+        <p:txBody>
+          <a:bodyPr wrap="square">
+            <a:noAutofit/>
+          </a:bodyPr>
+          <a:lstStyle/>
+          <a:p>
+            <a:pPr algn="l"/>
+            <a:r>
+              <a:rPr sz="1500" b="1">
+                <a:solidFill>
+                  <a:srgbClr val="244128"/>
+                </a:solidFill>
+                <a:latin typeface="Arial"/>
+              </a:rPr>
+              <a:t>Выборка</a:t>
+            </a:r>
+          </a:p>
+        </p:txBody>
+      </p:sp>
+      <p:sp>
+        <p:nvSpPr>
+          <p:cNvPr id="11" name="TextBox 10"/>
+          <p:cNvSpPr txBox="1"/>
+          <p:nvPr/>
+        </p:nvSpPr>
+        <p:spPr>
+          <a:xfrm>
+            <a:off x="941832" y="2167128"/>
+            <a:ext cx="2971800" cy="630936"/>
+          </a:xfrm>
+          <a:prstGeom prst="rect">
+            <a:avLst/>
+          </a:prstGeom>
+          <a:noFill/>
+        </p:spPr>
+        <p:txBody>
+          <a:bodyPr wrap="square">
+            <a:noAutofit/>
+          </a:bodyPr>
+          <a:lstStyle/>
+          <a:p>
+            <a:pPr algn="l"/>
+            <a:r>
+              <a:rPr sz="1700" b="0">
+                <a:solidFill>
+                  <a:srgbClr val="000000"/>
+                </a:solidFill>
+                <a:latin typeface="Arial"/>
+              </a:rPr>
+              <a:t>54 полные анкеты; доминируют респонденты 18–25 лет, в основном молодые жители и приезжие студенты.</a:t>
+            </a:r>
+          </a:p>
+        </p:txBody>
+      </p:sp>
+      <p:sp>
+        <p:nvSpPr>
+          <p:cNvPr id="12" name="Rectangle 11"/>
+          <p:cNvSpPr/>
+          <p:nvPr/>
+        </p:nvSpPr>
+        <p:spPr>
+          <a:xfrm>
+            <a:off x="4389120" y="1508760"/>
+            <a:ext cx="3383280" cy="1417320"/>
+          </a:xfrm>
+          <a:prstGeom prst="rect">
+            <a:avLst/>
+          </a:prstGeom>
+          <a:solidFill>
+            <a:srgbClr val="FFFFFF"/>
+          </a:solidFill>
+          <a:ln>
+            <a:noFill/>
+          </a:ln>
+        </p:spPr>
+        <p:style>
+          <a:lnRef idx="1">
+            <a:schemeClr val="accent1"/>
+          </a:lnRef>
+          <a:fillRef idx="3">
+            <a:schemeClr val="accent1"/>
+          </a:fillRef>
+          <a:effectRef idx="2">
+            <a:schemeClr val="accent1"/>
+          </a:effectRef>
+          <a:fontRef idx="minor">
+            <a:schemeClr val="lt1"/>
+          </a:fontRef>
+        </p:style>
+        <p:txBody>
+          <a:bodyPr rtlCol="0" anchor="ctr"/>
+          <a:lstStyle/>
+          <a:p>
+            <a:pPr algn="ctr"/>
+          </a:p>
+        </p:txBody>
+      </p:sp>
+      <p:sp>
+        <p:nvSpPr>
+          <p:cNvPr id="13" name="Rectangle 12"/>
+          <p:cNvSpPr/>
+          <p:nvPr/>
+        </p:nvSpPr>
+        <p:spPr>
+          <a:xfrm>
+            <a:off x="4389120" y="1508760"/>
+            <a:ext cx="109728" cy="1417320"/>
+          </a:xfrm>
+          <a:prstGeom prst="rect">
+            <a:avLst/>
+          </a:prstGeom>
+          <a:solidFill>
+            <a:srgbClr val="DB4928"/>
+          </a:solidFill>
+          <a:ln>
+            <a:noFill/>
+          </a:ln>
+        </p:spPr>
+        <p:style>
+          <a:lnRef idx="1">
+            <a:schemeClr val="accent1"/>
+          </a:lnRef>
+          <a:fillRef idx="3">
+            <a:schemeClr val="accent1"/>
+          </a:fillRef>
+          <a:effectRef idx="2">
+            <a:schemeClr val="accent1"/>
+          </a:effectRef>
+          <a:fontRef idx="minor">
+            <a:schemeClr val="lt1"/>
+          </a:fontRef>
+        </p:style>
+        <p:txBody>
+          <a:bodyPr rtlCol="0" anchor="ctr"/>
+          <a:lstStyle/>
+          <a:p>
+            <a:pPr algn="ctr"/>
+          </a:p>
+        </p:txBody>
+      </p:sp>
+      <p:sp>
+        <p:nvSpPr>
+          <p:cNvPr id="14" name="TextBox 13"/>
+          <p:cNvSpPr txBox="1"/>
+          <p:nvPr/>
+        </p:nvSpPr>
+        <p:spPr>
+          <a:xfrm>
+            <a:off x="4645152" y="1719072"/>
+            <a:ext cx="2971800" cy="320040"/>
+          </a:xfrm>
+          <a:prstGeom prst="rect">
+            <a:avLst/>
+          </a:prstGeom>
+          <a:noFill/>
+        </p:spPr>
+        <p:txBody>
+          <a:bodyPr wrap="square">
+            <a:noAutofit/>
+          </a:bodyPr>
+          <a:lstStyle/>
+          <a:p>
+            <a:pPr algn="l"/>
+            <a:r>
+              <a:rPr sz="1500" b="1">
+                <a:solidFill>
+                  <a:srgbClr val="244128"/>
+                </a:solidFill>
+                <a:latin typeface="Arial"/>
+              </a:rPr>
+              <a:t>Материал анкеты</a:t>
+            </a:r>
+          </a:p>
+        </p:txBody>
+      </p:sp>
+      <p:sp>
+        <p:nvSpPr>
+          <p:cNvPr id="15" name="TextBox 14"/>
+          <p:cNvSpPr txBox="1"/>
+          <p:nvPr/>
+        </p:nvSpPr>
+        <p:spPr>
+          <a:xfrm>
+            <a:off x="4645152" y="2167128"/>
+            <a:ext cx="2971800" cy="630936"/>
+          </a:xfrm>
+          <a:prstGeom prst="rect">
+            <a:avLst/>
+          </a:prstGeom>
+          <a:noFill/>
+        </p:spPr>
+        <p:txBody>
+          <a:bodyPr wrap="square">
+            <a:noAutofit/>
+          </a:bodyPr>
+          <a:lstStyle/>
+          <a:p>
+            <a:pPr algn="l"/>
+            <a:r>
+              <a:rPr sz="1700" b="0">
+                <a:solidFill>
+                  <a:srgbClr val="000000"/>
+                </a:solidFill>
+                <a:latin typeface="Arial"/>
+              </a:rPr>
+              <a:t>12 топонимов: Эрмитаж, Невский, Купчино, Лиговка, Питер, Ленинград и др.</a:t>
+            </a:r>
+          </a:p>
+        </p:txBody>
+      </p:sp>
+      <p:sp>
+        <p:nvSpPr>
+          <p:cNvPr id="16" name="Rectangle 15"/>
+          <p:cNvSpPr/>
+          <p:nvPr/>
+        </p:nvSpPr>
+        <p:spPr>
+          <a:xfrm>
+            <a:off x="8092440" y="1508760"/>
+            <a:ext cx="3383280" cy="1417320"/>
+          </a:xfrm>
+          <a:prstGeom prst="rect">
+            <a:avLst/>
+          </a:prstGeom>
+          <a:solidFill>
+            <a:srgbClr val="FFFFFF"/>
+          </a:solidFill>
+          <a:ln>
+            <a:noFill/>
+          </a:ln>
+        </p:spPr>
+        <p:style>
+          <a:lnRef idx="1">
+            <a:schemeClr val="accent1"/>
+          </a:lnRef>
+          <a:fillRef idx="3">
+            <a:schemeClr val="accent1"/>
+          </a:fillRef>
+          <a:effectRef idx="2">
+            <a:schemeClr val="accent1"/>
+          </a:effectRef>
+          <a:fontRef idx="minor">
+            <a:schemeClr val="lt1"/>
+          </a:fontRef>
+        </p:style>
+        <p:txBody>
+          <a:bodyPr rtlCol="0" anchor="ctr"/>
+          <a:lstStyle/>
+          <a:p>
+            <a:pPr algn="ctr"/>
+          </a:p>
+        </p:txBody>
+      </p:sp>
+      <p:sp>
+        <p:nvSpPr>
+          <p:cNvPr id="17" name="Rectangle 16"/>
+          <p:cNvSpPr/>
+          <p:nvPr/>
+        </p:nvSpPr>
+        <p:spPr>
+          <a:xfrm>
+            <a:off x="8092440" y="1508760"/>
+            <a:ext cx="109728" cy="1417320"/>
+          </a:xfrm>
+          <a:prstGeom prst="rect">
+            <a:avLst/>
+          </a:prstGeom>
+          <a:solidFill>
+            <a:srgbClr val="3AAA35"/>
+          </a:solidFill>
+          <a:ln>
+            <a:noFill/>
+          </a:ln>
+        </p:spPr>
+        <p:style>
+          <a:lnRef idx="1">
+            <a:schemeClr val="accent1"/>
+          </a:lnRef>
+          <a:fillRef idx="3">
+            <a:schemeClr val="accent1"/>
+          </a:fillRef>
+          <a:effectRef idx="2">
+            <a:schemeClr val="accent1"/>
+          </a:effectRef>
+          <a:fontRef idx="minor">
+            <a:schemeClr val="lt1"/>
+          </a:fontRef>
+        </p:style>
+        <p:txBody>
+          <a:bodyPr rtlCol="0" anchor="ctr"/>
+          <a:lstStyle/>
+          <a:p>
+            <a:pPr algn="ctr"/>
+          </a:p>
+        </p:txBody>
+      </p:sp>
+      <p:sp>
+        <p:nvSpPr>
+          <p:cNvPr id="18" name="TextBox 17"/>
+          <p:cNvSpPr txBox="1"/>
+          <p:nvPr/>
+        </p:nvSpPr>
+        <p:spPr>
+          <a:xfrm>
+            <a:off x="8348472" y="1719072"/>
+            <a:ext cx="2971800" cy="320040"/>
+          </a:xfrm>
+          <a:prstGeom prst="rect">
+            <a:avLst/>
+          </a:prstGeom>
+          <a:noFill/>
+        </p:spPr>
+        <p:txBody>
+          <a:bodyPr wrap="square">
+            <a:noAutofit/>
+          </a:bodyPr>
+          <a:lstStyle/>
+          <a:p>
+            <a:pPr algn="l"/>
+            <a:r>
+              <a:rPr sz="1500" b="1">
+                <a:solidFill>
+                  <a:srgbClr val="244128"/>
+                </a:solidFill>
+                <a:latin typeface="Arial"/>
+              </a:rPr>
+              <a:t>Формат</a:t>
+            </a:r>
+          </a:p>
+        </p:txBody>
+      </p:sp>
+      <p:sp>
+        <p:nvSpPr>
+          <p:cNvPr id="19" name="TextBox 18"/>
+          <p:cNvSpPr txBox="1"/>
+          <p:nvPr/>
+        </p:nvSpPr>
+        <p:spPr>
+          <a:xfrm>
+            <a:off x="8348472" y="2167128"/>
+            <a:ext cx="2971800" cy="630936"/>
+          </a:xfrm>
+          <a:prstGeom prst="rect">
+            <a:avLst/>
+          </a:prstGeom>
+          <a:noFill/>
+        </p:spPr>
+        <p:txBody>
+          <a:bodyPr wrap="square">
+            <a:noAutofit/>
+          </a:bodyPr>
+          <a:lstStyle/>
+          <a:p>
+            <a:pPr algn="l"/>
+            <a:r>
+              <a:rPr sz="1700" b="0">
+                <a:solidFill>
+                  <a:srgbClr val="000000"/>
+                </a:solidFill>
+                <a:latin typeface="Arial"/>
+              </a:rPr>
+              <a:t>Множественный выбор сфер употребления для каждого названия.</a:t>
+            </a:r>
+          </a:p>
+        </p:txBody>
+      </p:sp>
+      <p:sp>
+        <p:nvSpPr>
+          <p:cNvPr id="20" name="Rectangle 19"/>
+          <p:cNvSpPr/>
+          <p:nvPr/>
+        </p:nvSpPr>
+        <p:spPr>
+          <a:xfrm>
+            <a:off x="685800" y="3429000"/>
+            <a:ext cx="10789920" cy="2057400"/>
+          </a:xfrm>
+          <a:prstGeom prst="rect">
+            <a:avLst/>
+          </a:prstGeom>
+          <a:solidFill>
+            <a:srgbClr val="FFFFFF"/>
+          </a:solidFill>
+          <a:ln>
+            <a:noFill/>
+          </a:ln>
+        </p:spPr>
+        <p:style>
+          <a:lnRef idx="1">
+            <a:schemeClr val="accent1"/>
+          </a:lnRef>
+          <a:fillRef idx="3">
+            <a:schemeClr val="accent1"/>
+          </a:fillRef>
+          <a:effectRef idx="2">
+            <a:schemeClr val="accent1"/>
+          </a:effectRef>
+          <a:fontRef idx="minor">
+            <a:schemeClr val="lt1"/>
+          </a:fontRef>
+        </p:style>
+        <p:txBody>
+          <a:bodyPr rtlCol="0" anchor="ctr"/>
+          <a:lstStyle/>
+          <a:p>
+            <a:pPr algn="ctr"/>
+          </a:p>
+        </p:txBody>
+      </p:sp>
+      <p:sp>
+        <p:nvSpPr>
+          <p:cNvPr id="21" name="TextBox 20"/>
+          <p:cNvSpPr txBox="1"/>
+          <p:nvPr/>
+        </p:nvSpPr>
+        <p:spPr>
+          <a:xfrm>
+            <a:off x="960120" y="3657600"/>
+            <a:ext cx="4297680" cy="320040"/>
+          </a:xfrm>
+          <a:prstGeom prst="rect">
+            <a:avLst/>
+          </a:prstGeom>
+          <a:noFill/>
+        </p:spPr>
+        <p:txBody>
+          <a:bodyPr wrap="square">
+            <a:noAutofit/>
+          </a:bodyPr>
+          <a:lstStyle/>
+          <a:p>
+            <a:pPr algn="l"/>
+            <a:r>
+              <a:rPr sz="1800" b="1">
+                <a:solidFill>
+                  <a:srgbClr val="244128"/>
+                </a:solidFill>
+                <a:latin typeface="Arial"/>
+              </a:rPr>
+              <a:t>Контексты употребления</a:t>
+            </a:r>
+          </a:p>
+        </p:txBody>
+      </p:sp>
+      <p:sp>
+        <p:nvSpPr>
+          <p:cNvPr id="22" name="TextBox 21"/>
+          <p:cNvSpPr txBox="1"/>
+          <p:nvPr/>
+        </p:nvSpPr>
+        <p:spPr>
+          <a:xfrm>
+            <a:off x="960120" y="4096512"/>
+            <a:ext cx="4800600" cy="1051560"/>
+          </a:xfrm>
+          <a:prstGeom prst="rect">
+            <a:avLst/>
+          </a:prstGeom>
+          <a:noFill/>
+        </p:spPr>
+        <p:txBody>
+          <a:bodyPr wrap="square">
+            <a:spAutoFit/>
+          </a:bodyPr>
+          <a:lstStyle/>
+          <a:p>
+            <a:pPr>
+              <a:spcAft>
+                <a:spcPts val="900"/>
+              </a:spcAft>
+            </a:pPr>
+            <a:r>
+              <a:rPr sz="1400" b="1">
+                <a:solidFill>
+                  <a:srgbClr val="3AAA35"/>
+                </a:solidFill>
+                <a:latin typeface="Arial"/>
+              </a:rPr>
+              <a:t>■ </a:t>
+            </a:r>
+            <a:r>
+              <a:rPr sz="1400" b="0">
+                <a:solidFill>
+                  <a:srgbClr val="000000"/>
+                </a:solidFill>
+                <a:latin typeface="Arial"/>
+              </a:rPr>
+              <a:t>семья и близкие</a:t>
+            </a:r>
+          </a:p>
+          <a:p>
+            <a:pPr>
+              <a:spcAft>
+                <a:spcPts val="900"/>
+              </a:spcAft>
+            </a:pPr>
+            <a:r>
+              <a:rPr sz="1400" b="1">
+                <a:solidFill>
+                  <a:srgbClr val="3AAA35"/>
+                </a:solidFill>
+                <a:latin typeface="Arial"/>
+              </a:rPr>
+              <a:t>■ </a:t>
+            </a:r>
+            <a:r>
+              <a:rPr sz="1400" b="0">
+                <a:solidFill>
+                  <a:srgbClr val="000000"/>
+                </a:solidFill>
+                <a:latin typeface="Arial"/>
+              </a:rPr>
+              <a:t>друзья / приятели</a:t>
+            </a:r>
+          </a:p>
+          <a:p>
+            <a:pPr>
+              <a:spcAft>
+                <a:spcPts val="900"/>
+              </a:spcAft>
+            </a:pPr>
+            <a:r>
+              <a:rPr sz="1400" b="1">
+                <a:solidFill>
+                  <a:srgbClr val="3AAA35"/>
+                </a:solidFill>
+                <a:latin typeface="Arial"/>
+              </a:rPr>
+              <a:t>■ </a:t>
+            </a:r>
+            <a:r>
+              <a:rPr sz="1400" b="0">
+                <a:solidFill>
+                  <a:srgbClr val="000000"/>
+                </a:solidFill>
+                <a:latin typeface="Arial"/>
+              </a:rPr>
+              <a:t>работа или учёба</a:t>
+            </a:r>
+          </a:p>
+          <a:p>
+            <a:pPr>
+              <a:spcAft>
+                <a:spcPts val="900"/>
+              </a:spcAft>
+            </a:pPr>
+            <a:r>
+              <a:rPr sz="1400" b="1">
+                <a:solidFill>
+                  <a:srgbClr val="3AAA35"/>
+                </a:solidFill>
+                <a:latin typeface="Arial"/>
+              </a:rPr>
+              <a:t>■ </a:t>
+            </a:r>
+            <a:r>
+              <a:rPr sz="1400" b="0">
+                <a:solidFill>
+                  <a:srgbClr val="000000"/>
+                </a:solidFill>
+                <a:latin typeface="Arial"/>
+              </a:rPr>
+              <a:t>соцсети и мессенджеры</a:t>
+            </a:r>
+          </a:p>
+          <a:p>
+            <a:pPr>
+              <a:spcAft>
+                <a:spcPts val="900"/>
+              </a:spcAft>
+            </a:pPr>
+            <a:r>
+              <a:rPr sz="1400" b="1">
+                <a:solidFill>
+                  <a:srgbClr val="3AAA35"/>
+                </a:solidFill>
+                <a:latin typeface="Arial"/>
+              </a:rPr>
+              <a:t>■ </a:t>
+            </a:r>
+            <a:r>
+              <a:rPr sz="1400" b="0">
+                <a:solidFill>
+                  <a:srgbClr val="000000"/>
+                </a:solidFill>
+                <a:latin typeface="Arial"/>
+              </a:rPr>
+              <a:t>пассивное знание / незнание</a:t>
+            </a:r>
+          </a:p>
+        </p:txBody>
+      </p:sp>
+      <p:sp>
+        <p:nvSpPr>
+          <p:cNvPr id="23" name="TextBox 22"/>
+          <p:cNvSpPr txBox="1"/>
+          <p:nvPr/>
+        </p:nvSpPr>
+        <p:spPr>
+          <a:xfrm>
+            <a:off x="6400800" y="3657600"/>
+            <a:ext cx="4389120" cy="320040"/>
+          </a:xfrm>
+          <a:prstGeom prst="rect">
+            <a:avLst/>
+          </a:prstGeom>
+          <a:noFill/>
+        </p:spPr>
+        <p:txBody>
+          <a:bodyPr wrap="square">
+            <a:noAutofit/>
+          </a:bodyPr>
+          <a:lstStyle/>
+          <a:p>
+            <a:pPr algn="l"/>
+            <a:r>
+              <a:rPr sz="1800" b="1">
+                <a:solidFill>
+                  <a:srgbClr val="244128"/>
+                </a:solidFill>
+                <a:latin typeface="Arial"/>
+              </a:rPr>
+              <a:t>Ограничение</a:t>
+            </a:r>
+          </a:p>
+        </p:txBody>
+      </p:sp>
+      <p:sp>
+        <p:nvSpPr>
+          <p:cNvPr id="24" name="TextBox 23"/>
+          <p:cNvSpPr txBox="1"/>
+          <p:nvPr/>
+        </p:nvSpPr>
+        <p:spPr>
+          <a:xfrm>
+            <a:off x="6400800" y="4096512"/>
+            <a:ext cx="4434840" cy="1051560"/>
+          </a:xfrm>
+          <a:prstGeom prst="rect">
+            <a:avLst/>
+          </a:prstGeom>
+          <a:noFill/>
+        </p:spPr>
+        <p:txBody>
+          <a:bodyPr wrap="square">
+            <a:noAutofit/>
+          </a:bodyPr>
+          <a:lstStyle/>
+          <a:p>
+            <a:pPr algn="l"/>
+            <a:r>
+              <a:rPr sz="1600" b="0">
+                <a:solidFill>
+                  <a:srgbClr val="000000"/>
+                </a:solidFill>
+                <a:latin typeface="Arial"/>
+              </a:rPr>
+              <a:t>Выводы не описывают всех петербуржцев, а прежде всего показывают речевую практику молодой городской аудитории.</a:t>
+            </a:r>
+          </a:p>
+        </p:txBody>
+      </p:sp>
+      <p:sp>
+        <p:nvSpPr>
+          <p:cNvPr id="25" name="Rectangle 24"/>
+          <p:cNvSpPr/>
+          <p:nvPr/>
+        </p:nvSpPr>
+        <p:spPr>
+          <a:xfrm>
+            <a:off x="685800" y="5806440"/>
+            <a:ext cx="6583680" cy="164592"/>
+          </a:xfrm>
+          <a:prstGeom prst="rect">
+            <a:avLst/>
+          </a:prstGeom>
+          <a:solidFill>
+            <a:srgbClr val="3AAA35"/>
+          </a:solidFill>
+          <a:ln>
+            <a:noFill/>
+          </a:ln>
+        </p:spPr>
+        <p:style>
+          <a:lnRef idx="1">
+            <a:schemeClr val="accent1"/>
+          </a:lnRef>
+          <a:fillRef idx="3">
+            <a:schemeClr val="accent1"/>
+          </a:fillRef>
+          <a:effectRef idx="2">
+            <a:schemeClr val="accent1"/>
+          </a:effectRef>
+          <a:fontRef idx="minor">
+            <a:schemeClr val="lt1"/>
+          </a:fontRef>
+        </p:style>
+        <p:txBody>
+          <a:bodyPr rtlCol="0" anchor="ctr"/>
+          <a:lstStyle/>
+          <a:p>
+            <a:pPr algn="ctr"/>
+          </a:p>
+        </p:txBody>
+      </p:sp>
+      <p:sp>
+        <p:nvSpPr>
+          <p:cNvPr id="26" name="Rectangle 25"/>
+          <p:cNvSpPr/>
+          <p:nvPr/>
+        </p:nvSpPr>
+        <p:spPr>
+          <a:xfrm>
+            <a:off x="7269480" y="5806440"/>
+            <a:ext cx="4206240" cy="164592"/>
+          </a:xfrm>
+          <a:prstGeom prst="rect">
+            <a:avLst/>
+          </a:prstGeom>
+          <a:solidFill>
+            <a:srgbClr val="DB4928"/>
+          </a:solidFill>
+          <a:ln>
+            <a:noFill/>
+          </a:ln>
+        </p:spPr>
+        <p:style>
+          <a:lnRef idx="1">
+            <a:schemeClr val="accent1"/>
+          </a:lnRef>
+          <a:fillRef idx="3">
+            <a:schemeClr val="accent1"/>
+          </a:fillRef>
+          <a:effectRef idx="2">
+            <a:schemeClr val="accent1"/>
+          </a:effectRef>
+          <a:fontRef idx="minor">
+            <a:schemeClr val="lt1"/>
+          </a:fontRef>
+        </p:style>
+        <p:txBody>
+          <a:bodyPr rtlCol="0" anchor="ctr"/>
+          <a:lstStyle/>
+          <a:p>
+            <a:pPr algn="ctr"/>
+          </a:p>
+        </p:txBody>
+      </p:sp>
+    </p:spTree>
+  </p:cSld>
+  <p:clrMapOvr>
+    <a:masterClrMapping/>
+  </p:clrMapOvr>
+</p:sld>
+</file>
+
+<file path=ppt/slides/slide6.xml><?xml version="1.0" encoding="utf-8"?>
+<p:sld xmlns:a="http://schemas.openxmlformats.org/drawingml/2006/main" xmlns:p="http://schemas.openxmlformats.org/presentationml/2006/main" xmlns:r="http://schemas.openxmlformats.org/officeDocument/2006/relationships">
+  <p:cSld>
+    <p:bg>
+      <p:bgPr>
+        <a:solidFill>
+          <a:srgbClr val="F6F8F4"/>
+        </a:solidFill>
+        <a:effectLst/>
+      </p:bgPr>
+    </p:bg>
+    <p:spTree>
+      <p:nvGrpSpPr>
+        <p:cNvPr id="1" name=""/>
+        <p:cNvGrpSpPr/>
+        <p:nvPr/>
+      </p:nvGrpSpPr>
+      <p:grpSpPr/>
+      <p:pic>
+        <p:nvPicPr>
+          <p:cNvPr id="2" name="Picture 1" descr="spbstu_logo_02.png"/>
+          <p:cNvPicPr>
+            <a:picLocks noChangeAspect="1"/>
+          </p:cNvPicPr>
+          <p:nvPr/>
+        </p:nvPicPr>
+        <p:blipFill>
+          <a:blip r:embed="rId2"/>
+          <a:stretch>
+            <a:fillRect/>
+          </a:stretch>
+        </p:blipFill>
+        <p:spPr>
+          <a:xfrm>
+            <a:off x="502920" y="310896"/>
+            <a:ext cx="1600200" cy="552069"/>
+          </a:xfrm>
+          <a:prstGeom prst="rect">
+            <a:avLst/>
+          </a:prstGeom>
+        </p:spPr>
+      </p:pic>
+      <p:sp>
+        <p:nvSpPr>
+          <p:cNvPr id="3" name="TextBox 2"/>
+          <p:cNvSpPr txBox="1"/>
+          <p:nvPr/>
+        </p:nvSpPr>
+        <p:spPr>
+          <a:xfrm>
+            <a:off x="2743200" y="320040"/>
+            <a:ext cx="6217920" cy="310896"/>
+          </a:xfrm>
+          <a:prstGeom prst="rect">
+            <a:avLst/>
+          </a:prstGeom>
+          <a:noFill/>
+        </p:spPr>
+        <p:txBody>
+          <a:bodyPr wrap="square">
+            <a:noAutofit/>
+          </a:bodyPr>
+          <a:lstStyle/>
+          <a:p>
+            <a:pPr algn="l"/>
+            <a:r>
+              <a:rPr sz="1000" b="0">
+                <a:solidFill>
+                  <a:srgbClr val="5C675F"/>
+                </a:solidFill>
+                <a:latin typeface="Arial"/>
+              </a:rPr>
+              <a:t>N = 54 · проценты от числа респондентов</a:t>
+            </a:r>
+          </a:p>
+        </p:txBody>
+      </p:sp>
+      <p:sp>
+        <p:nvSpPr>
+          <p:cNvPr id="4" name="TextBox 3"/>
+          <p:cNvSpPr txBox="1"/>
+          <p:nvPr/>
+        </p:nvSpPr>
+        <p:spPr>
+          <a:xfrm>
+            <a:off x="2743200" y="630936"/>
+            <a:ext cx="7132320" cy="475488"/>
+          </a:xfrm>
+          <a:prstGeom prst="rect">
+            <a:avLst/>
+          </a:prstGeom>
+          <a:noFill/>
+        </p:spPr>
+        <p:txBody>
+          <a:bodyPr wrap="square">
+            <a:noAutofit/>
+          </a:bodyPr>
+          <a:lstStyle/>
+          <a:p>
+            <a:pPr algn="l"/>
+            <a:r>
+              <a:rPr sz="2400" b="1">
+                <a:solidFill>
+                  <a:srgbClr val="244128"/>
+                </a:solidFill>
+                <a:latin typeface="Arial"/>
+              </a:rPr>
+              <a:t>Результаты: активное ядро</a:t>
+            </a:r>
+          </a:p>
+        </p:txBody>
+      </p:sp>
+      <p:sp>
+        <p:nvSpPr>
+          <p:cNvPr id="5" name="Rectangle 4"/>
+          <p:cNvSpPr/>
+          <p:nvPr/>
+        </p:nvSpPr>
+        <p:spPr>
+          <a:xfrm>
+            <a:off x="502920" y="1170432"/>
+            <a:ext cx="11155680" cy="32004"/>
+          </a:xfrm>
+          <a:prstGeom prst="rect">
+            <a:avLst/>
+          </a:prstGeom>
+          <a:solidFill>
+            <a:srgbClr val="3AAA35"/>
+          </a:solidFill>
+          <a:ln>
+            <a:noFill/>
+          </a:ln>
+        </p:spPr>
+        <p:style>
+          <a:lnRef idx="1">
+            <a:schemeClr val="accent1"/>
+          </a:lnRef>
+          <a:fillRef idx="3">
+            <a:schemeClr val="accent1"/>
+          </a:fillRef>
+          <a:effectRef idx="2">
+            <a:schemeClr val="accent1"/>
+          </a:effectRef>
+          <a:fontRef idx="minor">
+            <a:schemeClr val="lt1"/>
+          </a:fontRef>
+        </p:style>
+        <p:txBody>
+          <a:bodyPr rtlCol="0" anchor="ctr"/>
+          <a:lstStyle/>
+          <a:p>
+            <a:pPr algn="ctr"/>
+          </a:p>
+        </p:txBody>
+      </p:sp>
+      <p:sp>
+        <p:nvSpPr>
+          <p:cNvPr id="6" name="TextBox 5"/>
+          <p:cNvSpPr txBox="1"/>
+          <p:nvPr/>
+        </p:nvSpPr>
+        <p:spPr>
+          <a:xfrm>
+            <a:off x="9464040" y="411480"/>
+            <a:ext cx="2194560" cy="310896"/>
+          </a:xfrm>
+          <a:prstGeom prst="rect">
+            <a:avLst/>
+          </a:prstGeom>
+          <a:noFill/>
+        </p:spPr>
+        <p:txBody>
+          <a:bodyPr wrap="square">
+            <a:noAutofit/>
+          </a:bodyPr>
+          <a:lstStyle/>
+          <a:p>
+            <a:pPr algn="r"/>
+            <a:r>
+              <a:rPr sz="1000" b="0">
+                <a:solidFill>
+                  <a:srgbClr val="5C675F"/>
+                </a:solidFill>
+                <a:latin typeface="Arial"/>
+              </a:rPr>
+              <a:t>3:30–4:30</a:t>
+            </a:r>
+          </a:p>
+        </p:txBody>
+      </p:sp>
+      <p:sp>
+        <p:nvSpPr>
+          <p:cNvPr id="7" name="TextBox 6"/>
+          <p:cNvSpPr txBox="1"/>
+          <p:nvPr/>
+        </p:nvSpPr>
+        <p:spPr>
+          <a:xfrm>
+            <a:off x="11018520" y="6355080"/>
+            <a:ext cx="640080" cy="228600"/>
+          </a:xfrm>
+          <a:prstGeom prst="rect">
+            <a:avLst/>
+          </a:prstGeom>
+          <a:noFill/>
+        </p:spPr>
+        <p:txBody>
+          <a:bodyPr wrap="square">
+            <a:noAutofit/>
+          </a:bodyPr>
+          <a:lstStyle/>
+          <a:p>
+            <a:pPr algn="r"/>
+            <a:r>
+              <a:rPr sz="1000" b="0">
+                <a:solidFill>
+                  <a:srgbClr val="5C675F"/>
+                </a:solidFill>
+                <a:latin typeface="Arial"/>
+              </a:rPr>
+              <a:t>6/10</a:t>
+            </a:r>
+          </a:p>
+        </p:txBody>
+      </p:sp>
+      <p:sp>
+        <p:nvSpPr>
+          <p:cNvPr id="8" name="Rectangle 7"/>
+          <p:cNvSpPr/>
+          <p:nvPr/>
+        </p:nvSpPr>
+        <p:spPr>
+          <a:xfrm>
+            <a:off x="658368" y="1508760"/>
+            <a:ext cx="6400800" cy="4389120"/>
+          </a:xfrm>
+          <a:prstGeom prst="rect">
+            <a:avLst/>
+          </a:prstGeom>
+          <a:solidFill>
+            <a:srgbClr val="FFFFFF"/>
+          </a:solidFill>
+          <a:ln>
+            <a:noFill/>
+          </a:ln>
+        </p:spPr>
+        <p:style>
+          <a:lnRef idx="1">
+            <a:schemeClr val="accent1"/>
+          </a:lnRef>
+          <a:fillRef idx="3">
+            <a:schemeClr val="accent1"/>
+          </a:fillRef>
+          <a:effectRef idx="2">
+            <a:schemeClr val="accent1"/>
+          </a:effectRef>
+          <a:fontRef idx="minor">
+            <a:schemeClr val="lt1"/>
+          </a:fontRef>
+        </p:style>
+        <p:txBody>
+          <a:bodyPr rtlCol="0" anchor="ctr"/>
+          <a:lstStyle/>
+          <a:p>
+            <a:pPr algn="ctr"/>
+          </a:p>
+        </p:txBody>
+      </p:sp>
+      <p:sp>
+        <p:nvSpPr>
+          <p:cNvPr id="9" name="TextBox 8"/>
+          <p:cNvSpPr txBox="1"/>
+          <p:nvPr/>
+        </p:nvSpPr>
+        <p:spPr>
+          <a:xfrm>
+            <a:off x="914400" y="1783080"/>
+            <a:ext cx="5760720" cy="320040"/>
+          </a:xfrm>
+          <a:prstGeom prst="rect">
+            <a:avLst/>
+          </a:prstGeom>
+          <a:noFill/>
+        </p:spPr>
+        <p:txBody>
+          <a:bodyPr wrap="square">
+            <a:noAutofit/>
+          </a:bodyPr>
+          <a:lstStyle/>
+          <a:p>
+            <a:pPr algn="l"/>
+            <a:r>
+              <a:rPr sz="1800" b="1">
+                <a:solidFill>
+                  <a:srgbClr val="244128"/>
+                </a:solidFill>
+                <a:latin typeface="Arial"/>
+              </a:rPr>
+              <a:t>Самые активные названия</a:t>
+            </a:r>
+          </a:p>
+        </p:txBody>
+      </p:sp>
+      <p:sp>
+        <p:nvSpPr>
+          <p:cNvPr id="10" name="TextBox 9"/>
+          <p:cNvSpPr txBox="1"/>
+          <p:nvPr/>
+        </p:nvSpPr>
+        <p:spPr>
+          <a:xfrm>
+            <a:off x="914400" y="2331720"/>
+            <a:ext cx="5303520" cy="228600"/>
+          </a:xfrm>
+          <a:prstGeom prst="rect">
+            <a:avLst/>
+          </a:prstGeom>
+          <a:noFill/>
+        </p:spPr>
+        <p:txBody>
+          <a:bodyPr wrap="square">
+            <a:noAutofit/>
+          </a:bodyPr>
+          <a:lstStyle/>
+          <a:p>
+            <a:pPr algn="l"/>
+            <a:r>
+              <a:rPr sz="1400" b="1">
+                <a:solidFill>
+                  <a:srgbClr val="000000"/>
+                </a:solidFill>
+                <a:latin typeface="Arial"/>
+              </a:rPr>
+              <a:t>Питер · общение с друзьями</a:t>
+            </a:r>
+          </a:p>
+        </p:txBody>
+      </p:sp>
+      <p:sp>
+        <p:nvSpPr>
+          <p:cNvPr id="11" name="Rectangle 10"/>
+          <p:cNvSpPr/>
+          <p:nvPr/>
+        </p:nvSpPr>
+        <p:spPr>
+          <a:xfrm>
+            <a:off x="914400" y="2651760"/>
+            <a:ext cx="5303520" cy="164592"/>
+          </a:xfrm>
+          <a:prstGeom prst="rect">
+            <a:avLst/>
+          </a:prstGeom>
+          <a:solidFill>
+            <a:srgbClr val="DAE2D8"/>
+          </a:solidFill>
+          <a:ln>
+            <a:noFill/>
+          </a:ln>
+        </p:spPr>
+        <p:style>
+          <a:lnRef idx="1">
+            <a:schemeClr val="accent1"/>
+          </a:lnRef>
+          <a:fillRef idx="3">
+            <a:schemeClr val="accent1"/>
+          </a:fillRef>
+          <a:effectRef idx="2">
+            <a:schemeClr val="accent1"/>
+          </a:effectRef>
+          <a:fontRef idx="minor">
+            <a:schemeClr val="lt1"/>
+          </a:fontRef>
+        </p:style>
+        <p:txBody>
+          <a:bodyPr rtlCol="0" anchor="ctr"/>
+          <a:lstStyle/>
+          <a:p>
+            <a:pPr algn="ctr"/>
+          </a:p>
+        </p:txBody>
+      </p:sp>
+      <p:sp>
+        <p:nvSpPr>
+          <p:cNvPr id="12" name="Rectangle 11"/>
+          <p:cNvSpPr/>
+          <p:nvPr/>
+        </p:nvSpPr>
+        <p:spPr>
+          <a:xfrm>
+            <a:off x="914400" y="2651760"/>
+            <a:ext cx="4911059" cy="164592"/>
+          </a:xfrm>
+          <a:prstGeom prst="rect">
+            <a:avLst/>
+          </a:prstGeom>
+          <a:solidFill>
+            <a:srgbClr val="3AAA35"/>
+          </a:solidFill>
+          <a:ln>
+            <a:noFill/>
+          </a:ln>
+        </p:spPr>
+        <p:style>
+          <a:lnRef idx="1">
+            <a:schemeClr val="accent1"/>
+          </a:lnRef>
+          <a:fillRef idx="3">
+            <a:schemeClr val="accent1"/>
+          </a:fillRef>
+          <a:effectRef idx="2">
+            <a:schemeClr val="accent1"/>
+          </a:effectRef>
+          <a:fontRef idx="minor">
+            <a:schemeClr val="lt1"/>
+          </a:fontRef>
+        </p:style>
+        <p:txBody>
+          <a:bodyPr rtlCol="0" anchor="ctr"/>
+          <a:lstStyle/>
+          <a:p>
+            <a:pPr algn="ctr"/>
+          </a:p>
+        </p:txBody>
+      </p:sp>
+      <p:sp>
+        <p:nvSpPr>
+          <p:cNvPr id="13" name="TextBox 12"/>
+          <p:cNvSpPr txBox="1"/>
+          <p:nvPr/>
+        </p:nvSpPr>
+        <p:spPr>
+          <a:xfrm>
+            <a:off x="5532120" y="2514600"/>
+            <a:ext cx="685800" cy="228600"/>
+          </a:xfrm>
+          <a:prstGeom prst="rect">
+            <a:avLst/>
+          </a:prstGeom>
+          <a:noFill/>
+        </p:spPr>
+        <p:txBody>
+          <a:bodyPr wrap="square">
+            <a:noAutofit/>
+          </a:bodyPr>
+          <a:lstStyle/>
+          <a:p>
+            <a:pPr algn="r"/>
+            <a:r>
+              <a:rPr sz="1300" b="1">
+                <a:solidFill>
+                  <a:srgbClr val="3AAA35"/>
+                </a:solidFill>
+                <a:latin typeface="Arial"/>
+              </a:rPr>
+              <a:t>92.6%</a:t>
+            </a:r>
+          </a:p>
+        </p:txBody>
+      </p:sp>
+      <p:sp>
+        <p:nvSpPr>
+          <p:cNvPr id="14" name="TextBox 13"/>
+          <p:cNvSpPr txBox="1"/>
+          <p:nvPr/>
+        </p:nvSpPr>
+        <p:spPr>
+          <a:xfrm>
+            <a:off x="914400" y="2898648"/>
+            <a:ext cx="5303520" cy="256032"/>
+          </a:xfrm>
+          <a:prstGeom prst="rect">
+            <a:avLst/>
+          </a:prstGeom>
+          <a:noFill/>
+        </p:spPr>
+        <p:txBody>
+          <a:bodyPr wrap="square">
+            <a:noAutofit/>
+          </a:bodyPr>
+          <a:lstStyle/>
+          <a:p>
+            <a:pPr algn="l"/>
+            <a:r>
+              <a:rPr sz="1000" b="0">
+                <a:solidFill>
+                  <a:srgbClr val="5C675F"/>
+                </a:solidFill>
+                <a:latin typeface="Arial"/>
+              </a:rPr>
+              <a:t>ядро неформального городского лексикона</a:t>
+            </a:r>
+          </a:p>
+        </p:txBody>
+      </p:sp>
+      <p:sp>
+        <p:nvSpPr>
+          <p:cNvPr id="15" name="TextBox 14"/>
+          <p:cNvSpPr txBox="1"/>
+          <p:nvPr/>
+        </p:nvSpPr>
+        <p:spPr>
+          <a:xfrm>
+            <a:off x="914400" y="3154680"/>
+            <a:ext cx="5303520" cy="228600"/>
+          </a:xfrm>
+          <a:prstGeom prst="rect">
+            <a:avLst/>
+          </a:prstGeom>
+          <a:noFill/>
+        </p:spPr>
+        <p:txBody>
+          <a:bodyPr wrap="square">
+            <a:noAutofit/>
+          </a:bodyPr>
+          <a:lstStyle/>
+          <a:p>
+            <a:pPr algn="l"/>
+            <a:r>
+              <a:rPr sz="1400" b="1">
+                <a:solidFill>
+                  <a:srgbClr val="000000"/>
+                </a:solidFill>
+                <a:latin typeface="Arial"/>
+              </a:rPr>
+              <a:t>Невский · общение с друзьями</a:t>
+            </a:r>
+          </a:p>
+        </p:txBody>
+      </p:sp>
+      <p:sp>
+        <p:nvSpPr>
+          <p:cNvPr id="16" name="Rectangle 15"/>
+          <p:cNvSpPr/>
+          <p:nvPr/>
+        </p:nvSpPr>
+        <p:spPr>
+          <a:xfrm>
+            <a:off x="914400" y="3474720"/>
+            <a:ext cx="5303520" cy="164592"/>
+          </a:xfrm>
+          <a:prstGeom prst="rect">
+            <a:avLst/>
+          </a:prstGeom>
+          <a:solidFill>
+            <a:srgbClr val="DAE2D8"/>
+          </a:solidFill>
+          <a:ln>
+            <a:noFill/>
+          </a:ln>
+        </p:spPr>
+        <p:style>
+          <a:lnRef idx="1">
+            <a:schemeClr val="accent1"/>
+          </a:lnRef>
+          <a:fillRef idx="3">
+            <a:schemeClr val="accent1"/>
+          </a:fillRef>
+          <a:effectRef idx="2">
+            <a:schemeClr val="accent1"/>
+          </a:effectRef>
+          <a:fontRef idx="minor">
+            <a:schemeClr val="lt1"/>
+          </a:fontRef>
+        </p:style>
+        <p:txBody>
+          <a:bodyPr rtlCol="0" anchor="ctr"/>
+          <a:lstStyle/>
+          <a:p>
+            <a:pPr algn="ctr"/>
+          </a:p>
+        </p:txBody>
+      </p:sp>
+      <p:sp>
+        <p:nvSpPr>
+          <p:cNvPr id="17" name="Rectangle 16"/>
+          <p:cNvSpPr/>
+          <p:nvPr/>
+        </p:nvSpPr>
+        <p:spPr>
+          <a:xfrm>
+            <a:off x="914400" y="3474720"/>
+            <a:ext cx="4417832" cy="164592"/>
+          </a:xfrm>
+          <a:prstGeom prst="rect">
+            <a:avLst/>
+          </a:prstGeom>
+          <a:solidFill>
+            <a:srgbClr val="3AAA35"/>
+          </a:solidFill>
+          <a:ln>
+            <a:noFill/>
+          </a:ln>
+        </p:spPr>
+        <p:style>
+          <a:lnRef idx="1">
+            <a:schemeClr val="accent1"/>
+          </a:lnRef>
+          <a:fillRef idx="3">
+            <a:schemeClr val="accent1"/>
+          </a:fillRef>
+          <a:effectRef idx="2">
+            <a:schemeClr val="accent1"/>
+          </a:effectRef>
+          <a:fontRef idx="minor">
+            <a:schemeClr val="lt1"/>
+          </a:fontRef>
+        </p:style>
+        <p:txBody>
+          <a:bodyPr rtlCol="0" anchor="ctr"/>
+          <a:lstStyle/>
+          <a:p>
+            <a:pPr algn="ctr"/>
+          </a:p>
+        </p:txBody>
+      </p:sp>
+      <p:sp>
+        <p:nvSpPr>
+          <p:cNvPr id="18" name="TextBox 17"/>
+          <p:cNvSpPr txBox="1"/>
+          <p:nvPr/>
+        </p:nvSpPr>
+        <p:spPr>
+          <a:xfrm>
+            <a:off x="5532120" y="3337560"/>
+            <a:ext cx="685800" cy="228600"/>
+          </a:xfrm>
+          <a:prstGeom prst="rect">
+            <a:avLst/>
+          </a:prstGeom>
+          <a:noFill/>
+        </p:spPr>
+        <p:txBody>
+          <a:bodyPr wrap="square">
+            <a:noAutofit/>
+          </a:bodyPr>
+          <a:lstStyle/>
+          <a:p>
+            <a:pPr algn="r"/>
+            <a:r>
+              <a:rPr sz="1300" b="1">
+                <a:solidFill>
+                  <a:srgbClr val="3AAA35"/>
+                </a:solidFill>
+                <a:latin typeface="Arial"/>
+              </a:rPr>
+              <a:t>83.3%</a:t>
+            </a:r>
+          </a:p>
+        </p:txBody>
+      </p:sp>
+      <p:sp>
+        <p:nvSpPr>
+          <p:cNvPr id="19" name="TextBox 18"/>
+          <p:cNvSpPr txBox="1"/>
+          <p:nvPr/>
+        </p:nvSpPr>
+        <p:spPr>
+          <a:xfrm>
+            <a:off x="914400" y="3721608"/>
+            <a:ext cx="5303520" cy="256032"/>
+          </a:xfrm>
+          <a:prstGeom prst="rect">
+            <a:avLst/>
+          </a:prstGeom>
+          <a:noFill/>
+        </p:spPr>
+        <p:txBody>
+          <a:bodyPr wrap="square">
+            <a:noAutofit/>
+          </a:bodyPr>
+          <a:lstStyle/>
+          <a:p>
+            <a:pPr algn="l"/>
+            <a:r>
+              <a:rPr sz="1000" b="0">
+                <a:solidFill>
+                  <a:srgbClr val="5C675F"/>
+                </a:solidFill>
+                <a:latin typeface="Arial"/>
+              </a:rPr>
+              <a:t>универсальный центральный навигатор</a:t>
+            </a:r>
+          </a:p>
+        </p:txBody>
+      </p:sp>
+      <p:sp>
+        <p:nvSpPr>
+          <p:cNvPr id="20" name="TextBox 19"/>
+          <p:cNvSpPr txBox="1"/>
+          <p:nvPr/>
+        </p:nvSpPr>
+        <p:spPr>
+          <a:xfrm>
+            <a:off x="914400" y="3977639"/>
+            <a:ext cx="5303520" cy="228600"/>
+          </a:xfrm>
+          <a:prstGeom prst="rect">
+            <a:avLst/>
+          </a:prstGeom>
+          <a:noFill/>
+        </p:spPr>
+        <p:txBody>
+          <a:bodyPr wrap="square">
+            <a:noAutofit/>
+          </a:bodyPr>
+          <a:lstStyle/>
+          <a:p>
+            <a:pPr algn="l"/>
+            <a:r>
+              <a:rPr sz="1400" b="1">
+                <a:solidFill>
+                  <a:srgbClr val="000000"/>
+                </a:solidFill>
+                <a:latin typeface="Arial"/>
+              </a:rPr>
+              <a:t>Питер · соцсети и мессенджеры</a:t>
+            </a:r>
+          </a:p>
+        </p:txBody>
+      </p:sp>
+      <p:sp>
+        <p:nvSpPr>
+          <p:cNvPr id="21" name="Rectangle 20"/>
+          <p:cNvSpPr/>
+          <p:nvPr/>
+        </p:nvSpPr>
+        <p:spPr>
+          <a:xfrm>
+            <a:off x="914400" y="4297679"/>
+            <a:ext cx="5303520" cy="164592"/>
+          </a:xfrm>
+          <a:prstGeom prst="rect">
+            <a:avLst/>
+          </a:prstGeom>
+          <a:solidFill>
+            <a:srgbClr val="DAE2D8"/>
+          </a:solidFill>
+          <a:ln>
+            <a:noFill/>
+          </a:ln>
+        </p:spPr>
+        <p:style>
+          <a:lnRef idx="1">
+            <a:schemeClr val="accent1"/>
+          </a:lnRef>
+          <a:fillRef idx="3">
+            <a:schemeClr val="accent1"/>
+          </a:fillRef>
+          <a:effectRef idx="2">
+            <a:schemeClr val="accent1"/>
+          </a:effectRef>
+          <a:fontRef idx="minor">
+            <a:schemeClr val="lt1"/>
+          </a:fontRef>
+        </p:style>
+        <p:txBody>
+          <a:bodyPr rtlCol="0" anchor="ctr"/>
+          <a:lstStyle/>
+          <a:p>
+            <a:pPr algn="ctr"/>
+          </a:p>
+        </p:txBody>
+      </p:sp>
+      <p:sp>
+        <p:nvSpPr>
+          <p:cNvPr id="22" name="Rectangle 21"/>
+          <p:cNvSpPr/>
+          <p:nvPr/>
+        </p:nvSpPr>
+        <p:spPr>
+          <a:xfrm>
+            <a:off x="914400" y="4297679"/>
+            <a:ext cx="4221601" cy="164592"/>
+          </a:xfrm>
+          <a:prstGeom prst="rect">
+            <a:avLst/>
+          </a:prstGeom>
+          <a:solidFill>
+            <a:srgbClr val="56975B"/>
+          </a:solidFill>
+          <a:ln>
+            <a:noFill/>
+          </a:ln>
+        </p:spPr>
+        <p:style>
+          <a:lnRef idx="1">
+            <a:schemeClr val="accent1"/>
+          </a:lnRef>
+          <a:fillRef idx="3">
+            <a:schemeClr val="accent1"/>
+          </a:fillRef>
+          <a:effectRef idx="2">
+            <a:schemeClr val="accent1"/>
+          </a:effectRef>
+          <a:fontRef idx="minor">
+            <a:schemeClr val="lt1"/>
+          </a:fontRef>
+        </p:style>
+        <p:txBody>
+          <a:bodyPr rtlCol="0" anchor="ctr"/>
+          <a:lstStyle/>
+          <a:p>
+            <a:pPr algn="ctr"/>
+          </a:p>
+        </p:txBody>
+      </p:sp>
+      <p:sp>
+        <p:nvSpPr>
+          <p:cNvPr id="23" name="TextBox 22"/>
+          <p:cNvSpPr txBox="1"/>
+          <p:nvPr/>
+        </p:nvSpPr>
+        <p:spPr>
+          <a:xfrm>
+            <a:off x="5532120" y="4160519"/>
+            <a:ext cx="685800" cy="228600"/>
+          </a:xfrm>
+          <a:prstGeom prst="rect">
+            <a:avLst/>
+          </a:prstGeom>
+          <a:noFill/>
+        </p:spPr>
+        <p:txBody>
+          <a:bodyPr wrap="square">
+            <a:noAutofit/>
+          </a:bodyPr>
+          <a:lstStyle/>
+          <a:p>
+            <a:pPr algn="r"/>
+            <a:r>
+              <a:rPr sz="1300" b="1">
+                <a:solidFill>
+                  <a:srgbClr val="56975B"/>
+                </a:solidFill>
+                <a:latin typeface="Arial"/>
+              </a:rPr>
+              <a:t>79.6%</a:t>
+            </a:r>
+          </a:p>
+        </p:txBody>
+      </p:sp>
+      <p:sp>
+        <p:nvSpPr>
+          <p:cNvPr id="24" name="TextBox 23"/>
+          <p:cNvSpPr txBox="1"/>
+          <p:nvPr/>
+        </p:nvSpPr>
+        <p:spPr>
+          <a:xfrm>
+            <a:off x="914400" y="4544567"/>
+            <a:ext cx="5303520" cy="256032"/>
+          </a:xfrm>
+          <a:prstGeom prst="rect">
+            <a:avLst/>
+          </a:prstGeom>
+          <a:noFill/>
+        </p:spPr>
+        <p:txBody>
+          <a:bodyPr wrap="square">
+            <a:noAutofit/>
+          </a:bodyPr>
+          <a:lstStyle/>
+          <a:p>
+            <a:pPr algn="l"/>
+            <a:r>
+              <a:rPr sz="1000" b="0">
+                <a:solidFill>
+                  <a:srgbClr val="5C675F"/>
+                </a:solidFill>
+                <a:latin typeface="Arial"/>
+              </a:rPr>
+              <a:t>цифровая коммуникация закрепляет разговорную форму</a:t>
+            </a:r>
+          </a:p>
+        </p:txBody>
+      </p:sp>
+      <p:sp>
+        <p:nvSpPr>
+          <p:cNvPr id="25" name="TextBox 24"/>
+          <p:cNvSpPr txBox="1"/>
+          <p:nvPr/>
+        </p:nvSpPr>
+        <p:spPr>
+          <a:xfrm>
+            <a:off x="914400" y="4800600"/>
+            <a:ext cx="5303520" cy="228600"/>
+          </a:xfrm>
+          <a:prstGeom prst="rect">
+            <a:avLst/>
+          </a:prstGeom>
+          <a:noFill/>
+        </p:spPr>
+        <p:txBody>
+          <a:bodyPr wrap="square">
+            <a:noAutofit/>
+          </a:bodyPr>
+          <a:lstStyle/>
+          <a:p>
+            <a:pPr algn="l"/>
+            <a:r>
+              <a:rPr sz="1400" b="1">
+                <a:solidFill>
+                  <a:srgbClr val="000000"/>
+                </a:solidFill>
+                <a:latin typeface="Arial"/>
+              </a:rPr>
+              <a:t>Невский · работа / учёба</a:t>
+            </a:r>
+          </a:p>
+        </p:txBody>
+      </p:sp>
+      <p:sp>
+        <p:nvSpPr>
+          <p:cNvPr id="26" name="Rectangle 25"/>
+          <p:cNvSpPr/>
+          <p:nvPr/>
+        </p:nvSpPr>
+        <p:spPr>
+          <a:xfrm>
+            <a:off x="914400" y="5120640"/>
+            <a:ext cx="5303520" cy="164592"/>
+          </a:xfrm>
+          <a:prstGeom prst="rect">
+            <a:avLst/>
+          </a:prstGeom>
+          <a:solidFill>
+            <a:srgbClr val="DAE2D8"/>
+          </a:solidFill>
+          <a:ln>
+            <a:noFill/>
+          </a:ln>
+        </p:spPr>
+        <p:style>
+          <a:lnRef idx="1">
+            <a:schemeClr val="accent1"/>
+          </a:lnRef>
+          <a:fillRef idx="3">
+            <a:schemeClr val="accent1"/>
+          </a:fillRef>
+          <a:effectRef idx="2">
+            <a:schemeClr val="accent1"/>
+          </a:effectRef>
+          <a:fontRef idx="minor">
+            <a:schemeClr val="lt1"/>
+          </a:fontRef>
+        </p:style>
+        <p:txBody>
+          <a:bodyPr rtlCol="0" anchor="ctr"/>
+          <a:lstStyle/>
+          <a:p>
+            <a:pPr algn="ctr"/>
+          </a:p>
+        </p:txBody>
+      </p:sp>
+      <p:sp>
+        <p:nvSpPr>
+          <p:cNvPr id="27" name="Rectangle 26"/>
+          <p:cNvSpPr/>
+          <p:nvPr/>
+        </p:nvSpPr>
+        <p:spPr>
+          <a:xfrm>
+            <a:off x="914400" y="5120640"/>
+            <a:ext cx="3341217" cy="164592"/>
+          </a:xfrm>
+          <a:prstGeom prst="rect">
+            <a:avLst/>
+          </a:prstGeom>
+          <a:solidFill>
+            <a:srgbClr val="56975B"/>
+          </a:solidFill>
+          <a:ln>
+            <a:noFill/>
+          </a:ln>
+        </p:spPr>
+        <p:style>
+          <a:lnRef idx="1">
+            <a:schemeClr val="accent1"/>
+          </a:lnRef>
+          <a:fillRef idx="3">
+            <a:schemeClr val="accent1"/>
+          </a:fillRef>
+          <a:effectRef idx="2">
+            <a:schemeClr val="accent1"/>
+          </a:effectRef>
+          <a:fontRef idx="minor">
+            <a:schemeClr val="lt1"/>
+          </a:fontRef>
+        </p:style>
+        <p:txBody>
+          <a:bodyPr rtlCol="0" anchor="ctr"/>
+          <a:lstStyle/>
+          <a:p>
+            <a:pPr algn="ctr"/>
+          </a:p>
+        </p:txBody>
+      </p:sp>
+      <p:sp>
+        <p:nvSpPr>
+          <p:cNvPr id="28" name="TextBox 27"/>
+          <p:cNvSpPr txBox="1"/>
+          <p:nvPr/>
+        </p:nvSpPr>
+        <p:spPr>
+          <a:xfrm>
+            <a:off x="5532120" y="4983480"/>
+            <a:ext cx="685800" cy="228600"/>
+          </a:xfrm>
+          <a:prstGeom prst="rect">
+            <a:avLst/>
+          </a:prstGeom>
+          <a:noFill/>
+        </p:spPr>
+        <p:txBody>
+          <a:bodyPr wrap="square">
+            <a:noAutofit/>
+          </a:bodyPr>
+          <a:lstStyle/>
+          <a:p>
+            <a:pPr algn="r"/>
+            <a:r>
+              <a:rPr sz="1300" b="1">
+                <a:solidFill>
+                  <a:srgbClr val="56975B"/>
+                </a:solidFill>
+                <a:latin typeface="Arial"/>
+              </a:rPr>
+              <a:t>63%</a:t>
+            </a:r>
+          </a:p>
+        </p:txBody>
+      </p:sp>
+      <p:sp>
+        <p:nvSpPr>
+          <p:cNvPr id="29" name="TextBox 28"/>
+          <p:cNvSpPr txBox="1"/>
+          <p:nvPr/>
+        </p:nvSpPr>
+        <p:spPr>
+          <a:xfrm>
+            <a:off x="914400" y="5367528"/>
+            <a:ext cx="5303520" cy="256032"/>
+          </a:xfrm>
+          <a:prstGeom prst="rect">
+            <a:avLst/>
+          </a:prstGeom>
+          <a:noFill/>
+        </p:spPr>
+        <p:txBody>
+          <a:bodyPr wrap="square">
+            <a:noAutofit/>
+          </a:bodyPr>
+          <a:lstStyle/>
+          <a:p>
+            <a:pPr algn="l"/>
+            <a:r>
+              <a:rPr sz="1000" b="0">
+                <a:solidFill>
+                  <a:srgbClr val="5C675F"/>
+                </a:solidFill>
+                <a:latin typeface="Arial"/>
+              </a:rPr>
+              <a:t>название проходит и через более формальные сферы</a:t>
+            </a:r>
+          </a:p>
+        </p:txBody>
+      </p:sp>
+      <p:sp>
+        <p:nvSpPr>
+          <p:cNvPr id="30" name="Rectangle 29"/>
+          <p:cNvSpPr/>
+          <p:nvPr/>
+        </p:nvSpPr>
+        <p:spPr>
+          <a:xfrm>
+            <a:off x="7360920" y="1508760"/>
+            <a:ext cx="4160520" cy="4389120"/>
+          </a:xfrm>
+          <a:prstGeom prst="rect">
+            <a:avLst/>
+          </a:prstGeom>
+          <a:solidFill>
+            <a:srgbClr val="244128"/>
+          </a:solidFill>
+          <a:ln>
+            <a:noFill/>
+          </a:ln>
+        </p:spPr>
+        <p:style>
+          <a:lnRef idx="1">
+            <a:schemeClr val="accent1"/>
+          </a:lnRef>
+          <a:fillRef idx="3">
+            <a:schemeClr val="accent1"/>
+          </a:fillRef>
+          <a:effectRef idx="2">
+            <a:schemeClr val="accent1"/>
+          </a:effectRef>
+          <a:fontRef idx="minor">
+            <a:schemeClr val="lt1"/>
+          </a:fontRef>
+        </p:style>
+        <p:txBody>
+          <a:bodyPr rtlCol="0" anchor="ctr"/>
+          <a:lstStyle/>
+          <a:p>
+            <a:pPr algn="ctr"/>
+          </a:p>
+        </p:txBody>
+      </p:sp>
+      <p:sp>
+        <p:nvSpPr>
+          <p:cNvPr id="31" name="TextBox 30"/>
+          <p:cNvSpPr txBox="1"/>
+          <p:nvPr/>
+        </p:nvSpPr>
+        <p:spPr>
+          <a:xfrm>
+            <a:off x="7726679" y="1810512"/>
+            <a:ext cx="3429000" cy="347472"/>
+          </a:xfrm>
+          <a:prstGeom prst="rect">
+            <a:avLst/>
+          </a:prstGeom>
+          <a:noFill/>
+        </p:spPr>
+        <p:txBody>
+          <a:bodyPr wrap="square">
+            <a:noAutofit/>
+          </a:bodyPr>
+          <a:lstStyle/>
+          <a:p>
+            <a:pPr algn="l"/>
+            <a:r>
+              <a:rPr sz="1800" b="1">
+                <a:solidFill>
+                  <a:srgbClr val="FFFFFF"/>
+                </a:solidFill>
+                <a:latin typeface="Arial"/>
+              </a:rPr>
+              <a:t>Что важно проговорить</a:t>
+            </a:r>
+          </a:p>
+        </p:txBody>
+      </p:sp>
+      <p:sp>
+        <p:nvSpPr>
+          <p:cNvPr id="32" name="TextBox 31"/>
+          <p:cNvSpPr txBox="1"/>
+          <p:nvPr/>
+        </p:nvSpPr>
+        <p:spPr>
+          <a:xfrm>
+            <a:off x="7726679" y="2331720"/>
+            <a:ext cx="3429000" cy="2926080"/>
+          </a:xfrm>
+          <a:prstGeom prst="rect">
+            <a:avLst/>
+          </a:prstGeom>
+          <a:noFill/>
+        </p:spPr>
+        <p:txBody>
+          <a:bodyPr wrap="square">
+            <a:spAutoFit/>
+          </a:bodyPr>
+          <a:lstStyle/>
+          <a:p>
+            <a:pPr>
+              <a:spcAft>
+                <a:spcPts val="900"/>
+              </a:spcAft>
+            </a:pPr>
+            <a:r>
+              <a:rPr sz="1500" b="1">
+                <a:solidFill>
+                  <a:srgbClr val="F39869"/>
+                </a:solidFill>
+                <a:latin typeface="Arial"/>
+              </a:rPr>
+              <a:t>■ </a:t>
+            </a:r>
+            <a:r>
+              <a:rPr sz="1500" b="0">
+                <a:solidFill>
+                  <a:srgbClr val="FFFFFF"/>
+                </a:solidFill>
+                <a:latin typeface="Arial"/>
+              </a:rPr>
+              <a:t>«Питер» — не просто сокращение, а эмоционально нейтральное имя «своего» города.</a:t>
+            </a:r>
+          </a:p>
+          <a:p>
+            <a:pPr>
+              <a:spcAft>
+                <a:spcPts val="900"/>
+              </a:spcAft>
+            </a:pPr>
+            <a:r>
+              <a:rPr sz="1500" b="1">
+                <a:solidFill>
+                  <a:srgbClr val="F39869"/>
+                </a:solidFill>
+                <a:latin typeface="Arial"/>
+              </a:rPr>
+              <a:t>■ </a:t>
+            </a:r>
+            <a:r>
+              <a:rPr sz="1500" b="0">
+                <a:solidFill>
+                  <a:srgbClr val="FFFFFF"/>
+                </a:solidFill>
+                <a:latin typeface="Arial"/>
+              </a:rPr>
+              <a:t>«Невский» совмещает разговорность и официальную узнаваемость.</a:t>
+            </a:r>
+          </a:p>
+          <a:p>
+            <a:pPr>
+              <a:spcAft>
+                <a:spcPts val="900"/>
+              </a:spcAft>
+            </a:pPr>
+            <a:r>
+              <a:rPr sz="1500" b="1">
+                <a:solidFill>
+                  <a:srgbClr val="F39869"/>
+                </a:solidFill>
+                <a:latin typeface="Arial"/>
+              </a:rPr>
+              <a:t>■ </a:t>
+            </a:r>
+            <a:r>
+              <a:rPr sz="1500" b="0">
+                <a:solidFill>
+                  <a:srgbClr val="FFFFFF"/>
+                </a:solidFill>
+                <a:latin typeface="Arial"/>
+              </a:rPr>
+              <a:t>Активное ядро связано с ежедневными маршрутами и частой коммуникацией.</a:t>
+            </a:r>
+          </a:p>
+        </p:txBody>
+      </p:sp>
+      <p:sp>
+        <p:nvSpPr>
+          <p:cNvPr id="33" name="Rectangle 32"/>
+          <p:cNvSpPr/>
+          <p:nvPr/>
+        </p:nvSpPr>
+        <p:spPr>
+          <a:xfrm>
+            <a:off x="7360920" y="5577840"/>
+            <a:ext cx="2834640" cy="164592"/>
+          </a:xfrm>
+          <a:prstGeom prst="rect">
+            <a:avLst/>
+          </a:prstGeom>
+          <a:solidFill>
+            <a:srgbClr val="3AAA35"/>
+          </a:solidFill>
+          <a:ln>
+            <a:noFill/>
+          </a:ln>
+        </p:spPr>
+        <p:style>
+          <a:lnRef idx="1">
+            <a:schemeClr val="accent1"/>
+          </a:lnRef>
+          <a:fillRef idx="3">
+            <a:schemeClr val="accent1"/>
+          </a:fillRef>
+          <a:effectRef idx="2">
+            <a:schemeClr val="accent1"/>
+          </a:effectRef>
+          <a:fontRef idx="minor">
+            <a:schemeClr val="lt1"/>
+          </a:fontRef>
+        </p:style>
+        <p:txBody>
+          <a:bodyPr rtlCol="0" anchor="ctr"/>
+          <a:lstStyle/>
+          <a:p>
+            <a:pPr algn="ctr"/>
+          </a:p>
+        </p:txBody>
+      </p:sp>
+      <p:sp>
+        <p:nvSpPr>
+          <p:cNvPr id="34" name="Rectangle 33"/>
+          <p:cNvSpPr/>
+          <p:nvPr/>
+        </p:nvSpPr>
+        <p:spPr>
+          <a:xfrm>
+            <a:off x="10195560" y="5577840"/>
+            <a:ext cx="1325880" cy="164592"/>
+          </a:xfrm>
+          <a:prstGeom prst="rect">
+            <a:avLst/>
+          </a:prstGeom>
+          <a:solidFill>
+            <a:srgbClr val="DB4928"/>
+          </a:solidFill>
+          <a:ln>
+            <a:noFill/>
+          </a:ln>
+        </p:spPr>
+        <p:style>
+          <a:lnRef idx="1">
+            <a:schemeClr val="accent1"/>
+          </a:lnRef>
+          <a:fillRef idx="3">
+            <a:schemeClr val="accent1"/>
+          </a:fillRef>
+          <a:effectRef idx="2">
+            <a:schemeClr val="accent1"/>
+          </a:effectRef>
+          <a:fontRef idx="minor">
+            <a:schemeClr val="lt1"/>
+          </a:fontRef>
+        </p:style>
+        <p:txBody>
+          <a:bodyPr rtlCol="0" anchor="ctr"/>
+          <a:lstStyle/>
+          <a:p>
+            <a:pPr algn="ctr"/>
+          </a:p>
+        </p:txBody>
+      </p:sp>
+    </p:spTree>
+  </p:cSld>
+  <p:clrMapOvr>
+    <a:masterClrMapping/>
+  </p:clrMapOvr>
+</p:sld>
+</file>
+
+<file path=ppt/slides/slide7.xml><?xml version="1.0" encoding="utf-8"?>
+<p:sld xmlns:a="http://schemas.openxmlformats.org/drawingml/2006/main" xmlns:p="http://schemas.openxmlformats.org/presentationml/2006/main" xmlns:r="http://schemas.openxmlformats.org/officeDocument/2006/relationships">
+  <p:cSld>
+    <p:bg>
+      <p:bgPr>
+        <a:solidFill>
+          <a:srgbClr val="F6F8F4"/>
+        </a:solidFill>
+        <a:effectLst/>
+      </p:bgPr>
+    </p:bg>
+    <p:spTree>
+      <p:nvGrpSpPr>
+        <p:cNvPr id="1" name=""/>
+        <p:cNvGrpSpPr/>
+        <p:nvPr/>
+      </p:nvGrpSpPr>
+      <p:grpSpPr/>
+      <p:pic>
+        <p:nvPicPr>
+          <p:cNvPr id="2" name="Picture 1" descr="spbstu_logo_02.png"/>
+          <p:cNvPicPr>
+            <a:picLocks noChangeAspect="1"/>
+          </p:cNvPicPr>
+          <p:nvPr/>
+        </p:nvPicPr>
+        <p:blipFill>
+          <a:blip r:embed="rId2"/>
+          <a:stretch>
+            <a:fillRect/>
+          </a:stretch>
+        </p:blipFill>
+        <p:spPr>
+          <a:xfrm>
+            <a:off x="502920" y="310896"/>
+            <a:ext cx="1600200" cy="552069"/>
+          </a:xfrm>
+          <a:prstGeom prst="rect">
+            <a:avLst/>
+          </a:prstGeom>
+        </p:spPr>
+      </p:pic>
+      <p:sp>
+        <p:nvSpPr>
+          <p:cNvPr id="3" name="TextBox 2"/>
+          <p:cNvSpPr txBox="1"/>
+          <p:nvPr/>
+        </p:nvSpPr>
+        <p:spPr>
+          <a:xfrm>
+            <a:off x="2743200" y="320040"/>
+            <a:ext cx="6217920" cy="310896"/>
+          </a:xfrm>
+          <a:prstGeom prst="rect">
+            <a:avLst/>
+          </a:prstGeom>
+          <a:noFill/>
+        </p:spPr>
+        <p:txBody>
+          <a:bodyPr wrap="square">
+            <a:noAutofit/>
+          </a:bodyPr>
+          <a:lstStyle/>
+          <a:p>
+            <a:pPr algn="l"/>
+            <a:r>
+              <a:rPr sz="1000" b="0">
+                <a:solidFill>
+                  <a:srgbClr val="5C675F"/>
+                </a:solidFill>
+                <a:latin typeface="Arial"/>
+              </a:rPr>
+              <a:t>Что знают, но не всегда используют</a:t>
+            </a:r>
+          </a:p>
+        </p:txBody>
+      </p:sp>
+      <p:sp>
+        <p:nvSpPr>
+          <p:cNvPr id="4" name="TextBox 3"/>
+          <p:cNvSpPr txBox="1"/>
+          <p:nvPr/>
+        </p:nvSpPr>
+        <p:spPr>
+          <a:xfrm>
+            <a:off x="2743200" y="630936"/>
+            <a:ext cx="7132320" cy="475488"/>
+          </a:xfrm>
+          <a:prstGeom prst="rect">
+            <a:avLst/>
+          </a:prstGeom>
+          <a:noFill/>
+        </p:spPr>
+        <p:txBody>
+          <a:bodyPr wrap="square">
+            <a:noAutofit/>
+          </a:bodyPr>
+          <a:lstStyle/>
+          <a:p>
+            <a:pPr algn="l"/>
+            <a:r>
+              <a:rPr sz="2400" b="1">
+                <a:solidFill>
+                  <a:srgbClr val="244128"/>
+                </a:solidFill>
+                <a:latin typeface="Arial"/>
+              </a:rPr>
+              <a:t>Результаты: пассив и различия</a:t>
+            </a:r>
+          </a:p>
+        </p:txBody>
+      </p:sp>
+      <p:sp>
+        <p:nvSpPr>
+          <p:cNvPr id="5" name="Rectangle 4"/>
+          <p:cNvSpPr/>
+          <p:nvPr/>
+        </p:nvSpPr>
+        <p:spPr>
+          <a:xfrm>
+            <a:off x="502920" y="1170432"/>
+            <a:ext cx="11155680" cy="32004"/>
+          </a:xfrm>
+          <a:prstGeom prst="rect">
+            <a:avLst/>
+          </a:prstGeom>
+          <a:solidFill>
+            <a:srgbClr val="3AAA35"/>
+          </a:solidFill>
+          <a:ln>
+            <a:noFill/>
+          </a:ln>
+        </p:spPr>
+        <p:style>
+          <a:lnRef idx="1">
+            <a:schemeClr val="accent1"/>
+          </a:lnRef>
+          <a:fillRef idx="3">
+            <a:schemeClr val="accent1"/>
+          </a:fillRef>
+          <a:effectRef idx="2">
+            <a:schemeClr val="accent1"/>
+          </a:effectRef>
+          <a:fontRef idx="minor">
+            <a:schemeClr val="lt1"/>
+          </a:fontRef>
+        </p:style>
+        <p:txBody>
+          <a:bodyPr rtlCol="0" anchor="ctr"/>
+          <a:lstStyle/>
+          <a:p>
+            <a:pPr algn="ctr"/>
+          </a:p>
+        </p:txBody>
+      </p:sp>
+      <p:sp>
+        <p:nvSpPr>
+          <p:cNvPr id="6" name="TextBox 5"/>
+          <p:cNvSpPr txBox="1"/>
+          <p:nvPr/>
+        </p:nvSpPr>
+        <p:spPr>
+          <a:xfrm>
+            <a:off x="9464040" y="411480"/>
+            <a:ext cx="2194560" cy="310896"/>
+          </a:xfrm>
+          <a:prstGeom prst="rect">
+            <a:avLst/>
+          </a:prstGeom>
+          <a:noFill/>
+        </p:spPr>
+        <p:txBody>
+          <a:bodyPr wrap="square">
+            <a:noAutofit/>
+          </a:bodyPr>
+          <a:lstStyle/>
+          <a:p>
+            <a:pPr algn="r"/>
+            <a:r>
+              <a:rPr sz="1000" b="0">
+                <a:solidFill>
+                  <a:srgbClr val="5C675F"/>
+                </a:solidFill>
+                <a:latin typeface="Arial"/>
+              </a:rPr>
+              <a:t>4:30–5:30</a:t>
+            </a:r>
+          </a:p>
+        </p:txBody>
+      </p:sp>
+      <p:sp>
+        <p:nvSpPr>
+          <p:cNvPr id="7" name="TextBox 6"/>
+          <p:cNvSpPr txBox="1"/>
+          <p:nvPr/>
+        </p:nvSpPr>
+        <p:spPr>
+          <a:xfrm>
+            <a:off x="11018520" y="6355080"/>
+            <a:ext cx="640080" cy="228600"/>
+          </a:xfrm>
+          <a:prstGeom prst="rect">
+            <a:avLst/>
+          </a:prstGeom>
+          <a:noFill/>
+        </p:spPr>
+        <p:txBody>
+          <a:bodyPr wrap="square">
+            <a:noAutofit/>
+          </a:bodyPr>
+          <a:lstStyle/>
+          <a:p>
+            <a:pPr algn="r"/>
+            <a:r>
+              <a:rPr sz="1000" b="0">
+                <a:solidFill>
+                  <a:srgbClr val="5C675F"/>
+                </a:solidFill>
+                <a:latin typeface="Arial"/>
+              </a:rPr>
+              <a:t>7/10</a:t>
+            </a:r>
+          </a:p>
+        </p:txBody>
+      </p:sp>
+      <p:sp>
+        <p:nvSpPr>
+          <p:cNvPr id="8" name="Rectangle 7"/>
+          <p:cNvSpPr/>
+          <p:nvPr/>
+        </p:nvSpPr>
+        <p:spPr>
+          <a:xfrm>
+            <a:off x="658368" y="1508760"/>
+            <a:ext cx="5623560" cy="4297680"/>
+          </a:xfrm>
+          <a:prstGeom prst="rect">
+            <a:avLst/>
+          </a:prstGeom>
+          <a:solidFill>
+            <a:srgbClr val="FFFFFF"/>
+          </a:solidFill>
+          <a:ln>
+            <a:noFill/>
+          </a:ln>
+        </p:spPr>
+        <p:style>
+          <a:lnRef idx="1">
+            <a:schemeClr val="accent1"/>
+          </a:lnRef>
+          <a:fillRef idx="3">
+            <a:schemeClr val="accent1"/>
+          </a:fillRef>
+          <a:effectRef idx="2">
+            <a:schemeClr val="accent1"/>
+          </a:effectRef>
+          <a:fontRef idx="minor">
+            <a:schemeClr val="lt1"/>
+          </a:fontRef>
+        </p:style>
+        <p:txBody>
+          <a:bodyPr rtlCol="0" anchor="ctr"/>
+          <a:lstStyle/>
+          <a:p>
+            <a:pPr algn="ctr"/>
+          </a:p>
+        </p:txBody>
+      </p:sp>
+      <p:sp>
+        <p:nvSpPr>
+          <p:cNvPr id="9" name="TextBox 8"/>
+          <p:cNvSpPr txBox="1"/>
+          <p:nvPr/>
+        </p:nvSpPr>
+        <p:spPr>
+          <a:xfrm>
+            <a:off x="914400" y="1783080"/>
+            <a:ext cx="5074920" cy="320040"/>
+          </a:xfrm>
+          <a:prstGeom prst="rect">
+            <a:avLst/>
+          </a:prstGeom>
+          <a:noFill/>
+        </p:spPr>
+        <p:txBody>
+          <a:bodyPr wrap="square">
+            <a:noAutofit/>
+          </a:bodyPr>
+          <a:lstStyle/>
+          <a:p>
+            <a:pPr algn="l"/>
+            <a:r>
+              <a:rPr sz="1800" b="1">
+                <a:solidFill>
+                  <a:srgbClr val="244128"/>
+                </a:solidFill>
+                <a:latin typeface="Arial"/>
+              </a:rPr>
+              <a:t>Пассивный запас шире активного</a:t>
+            </a:r>
+          </a:p>
+        </p:txBody>
+      </p:sp>
+      <p:sp>
+        <p:nvSpPr>
+          <p:cNvPr id="10" name="TextBox 9"/>
+          <p:cNvSpPr txBox="1"/>
+          <p:nvPr/>
+        </p:nvSpPr>
+        <p:spPr>
+          <a:xfrm>
+            <a:off x="914400" y="2331720"/>
+            <a:ext cx="4754880" cy="228600"/>
+          </a:xfrm>
+          <a:prstGeom prst="rect">
+            <a:avLst/>
+          </a:prstGeom>
+          <a:noFill/>
+        </p:spPr>
+        <p:txBody>
+          <a:bodyPr wrap="square">
+            <a:noAutofit/>
+          </a:bodyPr>
+          <a:lstStyle/>
+          <a:p>
+            <a:pPr algn="l"/>
+            <a:r>
+              <a:rPr sz="1400" b="1">
+                <a:solidFill>
+                  <a:srgbClr val="000000"/>
+                </a:solidFill>
+                <a:latin typeface="Arial"/>
+              </a:rPr>
+              <a:t>Ленинград · «знаю, но не использую»</a:t>
+            </a:r>
+          </a:p>
+        </p:txBody>
+      </p:sp>
+      <p:sp>
+        <p:nvSpPr>
+          <p:cNvPr id="11" name="Rectangle 10"/>
+          <p:cNvSpPr/>
+          <p:nvPr/>
+        </p:nvSpPr>
+        <p:spPr>
+          <a:xfrm>
+            <a:off x="914400" y="2651760"/>
+            <a:ext cx="4754880" cy="164592"/>
+          </a:xfrm>
+          <a:prstGeom prst="rect">
+            <a:avLst/>
+          </a:prstGeom>
+          <a:solidFill>
+            <a:srgbClr val="DAE2D8"/>
+          </a:solidFill>
+          <a:ln>
+            <a:noFill/>
+          </a:ln>
+        </p:spPr>
+        <p:style>
+          <a:lnRef idx="1">
+            <a:schemeClr val="accent1"/>
+          </a:lnRef>
+          <a:fillRef idx="3">
+            <a:schemeClr val="accent1"/>
+          </a:fillRef>
+          <a:effectRef idx="2">
+            <a:schemeClr val="accent1"/>
+          </a:effectRef>
+          <a:fontRef idx="minor">
+            <a:schemeClr val="lt1"/>
+          </a:fontRef>
+        </p:style>
+        <p:txBody>
+          <a:bodyPr rtlCol="0" anchor="ctr"/>
+          <a:lstStyle/>
+          <a:p>
+            <a:pPr algn="ctr"/>
+          </a:p>
+        </p:txBody>
+      </p:sp>
+      <p:sp>
+        <p:nvSpPr>
+          <p:cNvPr id="12" name="Rectangle 11"/>
+          <p:cNvSpPr/>
+          <p:nvPr/>
+        </p:nvSpPr>
+        <p:spPr>
+          <a:xfrm>
+            <a:off x="914400" y="2651760"/>
+            <a:ext cx="2467782" cy="164592"/>
+          </a:xfrm>
+          <a:prstGeom prst="rect">
+            <a:avLst/>
+          </a:prstGeom>
+          <a:solidFill>
+            <a:srgbClr val="DB4928"/>
+          </a:solidFill>
+          <a:ln>
+            <a:noFill/>
+          </a:ln>
+        </p:spPr>
+        <p:style>
+          <a:lnRef idx="1">
+            <a:schemeClr val="accent1"/>
+          </a:lnRef>
+          <a:fillRef idx="3">
+            <a:schemeClr val="accent1"/>
+          </a:fillRef>
+          <a:effectRef idx="2">
+            <a:schemeClr val="accent1"/>
+          </a:effectRef>
+          <a:fontRef idx="minor">
+            <a:schemeClr val="lt1"/>
+          </a:fontRef>
+        </p:style>
+        <p:txBody>
+          <a:bodyPr rtlCol="0" anchor="ctr"/>
+          <a:lstStyle/>
+          <a:p>
+            <a:pPr algn="ctr"/>
+          </a:p>
+        </p:txBody>
+      </p:sp>
+      <p:sp>
+        <p:nvSpPr>
+          <p:cNvPr id="13" name="TextBox 12"/>
+          <p:cNvSpPr txBox="1"/>
+          <p:nvPr/>
+        </p:nvSpPr>
+        <p:spPr>
+          <a:xfrm>
+            <a:off x="4983480" y="2514600"/>
+            <a:ext cx="685800" cy="228600"/>
+          </a:xfrm>
+          <a:prstGeom prst="rect">
+            <a:avLst/>
+          </a:prstGeom>
+          <a:noFill/>
+        </p:spPr>
+        <p:txBody>
+          <a:bodyPr wrap="square">
+            <a:noAutofit/>
+          </a:bodyPr>
+          <a:lstStyle/>
+          <a:p>
+            <a:pPr algn="r"/>
+            <a:r>
+              <a:rPr sz="1300" b="1">
+                <a:solidFill>
+                  <a:srgbClr val="DB4928"/>
+                </a:solidFill>
+                <a:latin typeface="Arial"/>
+              </a:rPr>
+              <a:t>51.9%</a:t>
+            </a:r>
+          </a:p>
+        </p:txBody>
+      </p:sp>
+      <p:sp>
+        <p:nvSpPr>
+          <p:cNvPr id="14" name="TextBox 13"/>
+          <p:cNvSpPr txBox="1"/>
+          <p:nvPr/>
+        </p:nvSpPr>
+        <p:spPr>
+          <a:xfrm>
+            <a:off x="914400" y="2898648"/>
+            <a:ext cx="4754880" cy="256032"/>
+          </a:xfrm>
+          <a:prstGeom prst="rect">
+            <a:avLst/>
+          </a:prstGeom>
+          <a:noFill/>
+        </p:spPr>
+        <p:txBody>
+          <a:bodyPr wrap="square">
+            <a:noAutofit/>
+          </a:bodyPr>
+          <a:lstStyle/>
+          <a:p>
+            <a:pPr algn="l"/>
+            <a:r>
+              <a:rPr sz="1000" b="0">
+                <a:solidFill>
+                  <a:srgbClr val="5C675F"/>
+                </a:solidFill>
+                <a:latin typeface="Arial"/>
+              </a:rPr>
+              <a:t>для молодёжи — исторический и поколенческий маркер</a:t>
+            </a:r>
+          </a:p>
+        </p:txBody>
+      </p:sp>
+      <p:sp>
+        <p:nvSpPr>
+          <p:cNvPr id="15" name="TextBox 14"/>
+          <p:cNvSpPr txBox="1"/>
+          <p:nvPr/>
+        </p:nvSpPr>
+        <p:spPr>
+          <a:xfrm>
+            <a:off x="914400" y="3154680"/>
+            <a:ext cx="4754880" cy="228600"/>
+          </a:xfrm>
+          <a:prstGeom prst="rect">
+            <a:avLst/>
+          </a:prstGeom>
+          <a:noFill/>
+        </p:spPr>
+        <p:txBody>
+          <a:bodyPr wrap="square">
+            <a:noAutofit/>
+          </a:bodyPr>
+          <a:lstStyle/>
+          <a:p>
+            <a:pPr algn="l"/>
+            <a:r>
+              <a:rPr sz="1400" b="1">
+                <a:solidFill>
+                  <a:srgbClr val="000000"/>
+                </a:solidFill>
+                <a:latin typeface="Arial"/>
+              </a:rPr>
+              <a:t>Рыбацкое · «знаю, но не использую»</a:t>
+            </a:r>
+          </a:p>
+        </p:txBody>
+      </p:sp>
+      <p:sp>
+        <p:nvSpPr>
+          <p:cNvPr id="16" name="Rectangle 15"/>
+          <p:cNvSpPr/>
+          <p:nvPr/>
+        </p:nvSpPr>
+        <p:spPr>
+          <a:xfrm>
+            <a:off x="914400" y="3474720"/>
+            <a:ext cx="4754880" cy="164592"/>
+          </a:xfrm>
+          <a:prstGeom prst="rect">
+            <a:avLst/>
+          </a:prstGeom>
+          <a:solidFill>
+            <a:srgbClr val="DAE2D8"/>
+          </a:solidFill>
+          <a:ln>
+            <a:noFill/>
+          </a:ln>
+        </p:spPr>
+        <p:style>
+          <a:lnRef idx="1">
+            <a:schemeClr val="accent1"/>
+          </a:lnRef>
+          <a:fillRef idx="3">
+            <a:schemeClr val="accent1"/>
+          </a:fillRef>
+          <a:effectRef idx="2">
+            <a:schemeClr val="accent1"/>
+          </a:effectRef>
+          <a:fontRef idx="minor">
+            <a:schemeClr val="lt1"/>
+          </a:fontRef>
+        </p:style>
+        <p:txBody>
+          <a:bodyPr rtlCol="0" anchor="ctr"/>
+          <a:lstStyle/>
+          <a:p>
+            <a:pPr algn="ctr"/>
+          </a:p>
+        </p:txBody>
+      </p:sp>
+      <p:sp>
+        <p:nvSpPr>
+          <p:cNvPr id="17" name="Rectangle 16"/>
+          <p:cNvSpPr/>
+          <p:nvPr/>
+        </p:nvSpPr>
+        <p:spPr>
+          <a:xfrm>
+            <a:off x="914400" y="3474720"/>
+            <a:ext cx="2111166" cy="164592"/>
+          </a:xfrm>
+          <a:prstGeom prst="rect">
+            <a:avLst/>
+          </a:prstGeom>
+          <a:solidFill>
+            <a:srgbClr val="DB4928"/>
+          </a:solidFill>
+          <a:ln>
+            <a:noFill/>
+          </a:ln>
+        </p:spPr>
+        <p:style>
+          <a:lnRef idx="1">
+            <a:schemeClr val="accent1"/>
+          </a:lnRef>
+          <a:fillRef idx="3">
+            <a:schemeClr val="accent1"/>
+          </a:fillRef>
+          <a:effectRef idx="2">
+            <a:schemeClr val="accent1"/>
+          </a:effectRef>
+          <a:fontRef idx="minor">
+            <a:schemeClr val="lt1"/>
+          </a:fontRef>
+        </p:style>
+        <p:txBody>
+          <a:bodyPr rtlCol="0" anchor="ctr"/>
+          <a:lstStyle/>
+          <a:p>
+            <a:pPr algn="ctr"/>
+          </a:p>
+        </p:txBody>
+      </p:sp>
+      <p:sp>
+        <p:nvSpPr>
+          <p:cNvPr id="18" name="TextBox 17"/>
+          <p:cNvSpPr txBox="1"/>
+          <p:nvPr/>
+        </p:nvSpPr>
+        <p:spPr>
+          <a:xfrm>
+            <a:off x="4983480" y="3337560"/>
+            <a:ext cx="685800" cy="228600"/>
+          </a:xfrm>
+          <a:prstGeom prst="rect">
+            <a:avLst/>
+          </a:prstGeom>
+          <a:noFill/>
+        </p:spPr>
+        <p:txBody>
+          <a:bodyPr wrap="square">
+            <a:noAutofit/>
+          </a:bodyPr>
+          <a:lstStyle/>
+          <a:p>
+            <a:pPr algn="r"/>
+            <a:r>
+              <a:rPr sz="1300" b="1">
+                <a:solidFill>
+                  <a:srgbClr val="DB4928"/>
+                </a:solidFill>
+                <a:latin typeface="Arial"/>
+              </a:rPr>
+              <a:t>44.4%</a:t>
+            </a:r>
+          </a:p>
+        </p:txBody>
+      </p:sp>
+      <p:sp>
+        <p:nvSpPr>
+          <p:cNvPr id="19" name="TextBox 18"/>
+          <p:cNvSpPr txBox="1"/>
+          <p:nvPr/>
+        </p:nvSpPr>
+        <p:spPr>
+          <a:xfrm>
+            <a:off x="914400" y="3721608"/>
+            <a:ext cx="4754880" cy="256032"/>
+          </a:xfrm>
+          <a:prstGeom prst="rect">
+            <a:avLst/>
+          </a:prstGeom>
+          <a:noFill/>
+        </p:spPr>
+        <p:txBody>
+          <a:bodyPr wrap="square">
+            <a:noAutofit/>
+          </a:bodyPr>
+          <a:lstStyle/>
+          <a:p>
+            <a:pPr algn="l"/>
+            <a:r>
+              <a:rPr sz="1000" b="0">
+                <a:solidFill>
+                  <a:srgbClr val="5C675F"/>
+                </a:solidFill>
+                <a:latin typeface="Arial"/>
+              </a:rPr>
+              <a:t>название известно, но часто не включено в личный маршрут</a:t>
+            </a:r>
+          </a:p>
+        </p:txBody>
+      </p:sp>
+      <p:sp>
+        <p:nvSpPr>
+          <p:cNvPr id="20" name="TextBox 19"/>
+          <p:cNvSpPr txBox="1"/>
+          <p:nvPr/>
+        </p:nvSpPr>
+        <p:spPr>
+          <a:xfrm>
+            <a:off x="914400" y="3977639"/>
+            <a:ext cx="4754880" cy="228600"/>
+          </a:xfrm>
+          <a:prstGeom prst="rect">
+            <a:avLst/>
+          </a:prstGeom>
+          <a:noFill/>
+        </p:spPr>
+        <p:txBody>
+          <a:bodyPr wrap="square">
+            <a:noAutofit/>
+          </a:bodyPr>
+          <a:lstStyle/>
+          <a:p>
+            <a:pPr algn="l"/>
+            <a:r>
+              <a:rPr sz="1400" b="1">
+                <a:solidFill>
+                  <a:srgbClr val="000000"/>
+                </a:solidFill>
+                <a:latin typeface="Arial"/>
+              </a:rPr>
+              <a:t>Пять углов · пассивное знание</a:t>
+            </a:r>
+          </a:p>
+        </p:txBody>
+      </p:sp>
+      <p:sp>
+        <p:nvSpPr>
+          <p:cNvPr id="21" name="Rectangle 20"/>
+          <p:cNvSpPr/>
+          <p:nvPr/>
+        </p:nvSpPr>
+        <p:spPr>
+          <a:xfrm>
+            <a:off x="914400" y="4297679"/>
+            <a:ext cx="4754880" cy="164592"/>
+          </a:xfrm>
+          <a:prstGeom prst="rect">
+            <a:avLst/>
+          </a:prstGeom>
+          <a:solidFill>
+            <a:srgbClr val="DAE2D8"/>
+          </a:solidFill>
+          <a:ln>
+            <a:noFill/>
+          </a:ln>
+        </p:spPr>
+        <p:style>
+          <a:lnRef idx="1">
+            <a:schemeClr val="accent1"/>
+          </a:lnRef>
+          <a:fillRef idx="3">
+            <a:schemeClr val="accent1"/>
+          </a:fillRef>
+          <a:effectRef idx="2">
+            <a:schemeClr val="accent1"/>
+          </a:effectRef>
+          <a:fontRef idx="minor">
+            <a:schemeClr val="lt1"/>
+          </a:fontRef>
+        </p:style>
+        <p:txBody>
+          <a:bodyPr rtlCol="0" anchor="ctr"/>
+          <a:lstStyle/>
+          <a:p>
+            <a:pPr algn="ctr"/>
+          </a:p>
+        </p:txBody>
+      </p:sp>
+      <p:sp>
+        <p:nvSpPr>
+          <p:cNvPr id="22" name="Rectangle 21"/>
+          <p:cNvSpPr/>
+          <p:nvPr/>
+        </p:nvSpPr>
+        <p:spPr>
+          <a:xfrm>
+            <a:off x="914400" y="4297679"/>
+            <a:ext cx="1055583" cy="164592"/>
+          </a:xfrm>
+          <a:prstGeom prst="rect">
+            <a:avLst/>
+          </a:prstGeom>
+          <a:solidFill>
+            <a:srgbClr val="DB4928"/>
+          </a:solidFill>
+          <a:ln>
+            <a:noFill/>
+          </a:ln>
+        </p:spPr>
+        <p:style>
+          <a:lnRef idx="1">
+            <a:schemeClr val="accent1"/>
+          </a:lnRef>
+          <a:fillRef idx="3">
+            <a:schemeClr val="accent1"/>
+          </a:fillRef>
+          <a:effectRef idx="2">
+            <a:schemeClr val="accent1"/>
+          </a:effectRef>
+          <a:fontRef idx="minor">
+            <a:schemeClr val="lt1"/>
+          </a:fontRef>
+        </p:style>
+        <p:txBody>
+          <a:bodyPr rtlCol="0" anchor="ctr"/>
+          <a:lstStyle/>
+          <a:p>
+            <a:pPr algn="ctr"/>
+          </a:p>
+        </p:txBody>
+      </p:sp>
+      <p:sp>
+        <p:nvSpPr>
+          <p:cNvPr id="23" name="TextBox 22"/>
+          <p:cNvSpPr txBox="1"/>
+          <p:nvPr/>
+        </p:nvSpPr>
+        <p:spPr>
+          <a:xfrm>
+            <a:off x="4983480" y="4160519"/>
+            <a:ext cx="685800" cy="228600"/>
+          </a:xfrm>
+          <a:prstGeom prst="rect">
+            <a:avLst/>
+          </a:prstGeom>
+          <a:noFill/>
+        </p:spPr>
+        <p:txBody>
+          <a:bodyPr wrap="square">
+            <a:noAutofit/>
+          </a:bodyPr>
+          <a:lstStyle/>
+          <a:p>
+            <a:pPr algn="r"/>
+            <a:r>
+              <a:rPr sz="1300" b="1">
+                <a:solidFill>
+                  <a:srgbClr val="DB4928"/>
+                </a:solidFill>
+                <a:latin typeface="Arial"/>
+              </a:rPr>
+              <a:t>22.2%</a:t>
+            </a:r>
+          </a:p>
+        </p:txBody>
+      </p:sp>
+      <p:sp>
+        <p:nvSpPr>
+          <p:cNvPr id="24" name="TextBox 23"/>
+          <p:cNvSpPr txBox="1"/>
+          <p:nvPr/>
+        </p:nvSpPr>
+        <p:spPr>
+          <a:xfrm>
+            <a:off x="914400" y="4544567"/>
+            <a:ext cx="4754880" cy="256032"/>
+          </a:xfrm>
+          <a:prstGeom prst="rect">
+            <a:avLst/>
+          </a:prstGeom>
+          <a:noFill/>
+        </p:spPr>
+        <p:txBody>
+          <a:bodyPr wrap="square">
+            <a:noAutofit/>
+          </a:bodyPr>
+          <a:lstStyle/>
+          <a:p>
+            <a:pPr algn="l"/>
+            <a:r>
+              <a:rPr sz="1000" b="0">
+                <a:solidFill>
+                  <a:srgbClr val="5C675F"/>
+                </a:solidFill>
+                <a:latin typeface="Arial"/>
+              </a:rPr>
+              <a:t>локальное название с низкой активностью</a:t>
+            </a:r>
+          </a:p>
+        </p:txBody>
+      </p:sp>
+      <p:sp>
+        <p:nvSpPr>
+          <p:cNvPr id="25" name="TextBox 24"/>
+          <p:cNvSpPr txBox="1"/>
+          <p:nvPr/>
+        </p:nvSpPr>
+        <p:spPr>
+          <a:xfrm>
+            <a:off x="914400" y="4800600"/>
+            <a:ext cx="4754880" cy="228600"/>
+          </a:xfrm>
+          <a:prstGeom prst="rect">
+            <a:avLst/>
+          </a:prstGeom>
+          <a:noFill/>
+        </p:spPr>
+        <p:txBody>
+          <a:bodyPr wrap="square">
+            <a:noAutofit/>
+          </a:bodyPr>
+          <a:lstStyle/>
+          <a:p>
+            <a:pPr algn="l"/>
+            <a:r>
+              <a:rPr sz="1400" b="1">
+                <a:solidFill>
+                  <a:srgbClr val="000000"/>
+                </a:solidFill>
+                <a:latin typeface="Arial"/>
+              </a:rPr>
+              <a:t>Лиговка · незнание</a:t>
+            </a:r>
+          </a:p>
+        </p:txBody>
+      </p:sp>
+      <p:sp>
+        <p:nvSpPr>
+          <p:cNvPr id="26" name="Rectangle 25"/>
+          <p:cNvSpPr/>
+          <p:nvPr/>
+        </p:nvSpPr>
+        <p:spPr>
+          <a:xfrm>
+            <a:off x="914400" y="5120640"/>
+            <a:ext cx="4754880" cy="164592"/>
+          </a:xfrm>
+          <a:prstGeom prst="rect">
+            <a:avLst/>
+          </a:prstGeom>
+          <a:solidFill>
+            <a:srgbClr val="DAE2D8"/>
+          </a:solidFill>
+          <a:ln>
+            <a:noFill/>
+          </a:ln>
+        </p:spPr>
+        <p:style>
+          <a:lnRef idx="1">
+            <a:schemeClr val="accent1"/>
+          </a:lnRef>
+          <a:fillRef idx="3">
+            <a:schemeClr val="accent1"/>
+          </a:fillRef>
+          <a:effectRef idx="2">
+            <a:schemeClr val="accent1"/>
+          </a:effectRef>
+          <a:fontRef idx="minor">
+            <a:schemeClr val="lt1"/>
+          </a:fontRef>
+        </p:style>
+        <p:txBody>
+          <a:bodyPr rtlCol="0" anchor="ctr"/>
+          <a:lstStyle/>
+          <a:p>
+            <a:pPr algn="ctr"/>
+          </a:p>
+        </p:txBody>
+      </p:sp>
+      <p:sp>
+        <p:nvSpPr>
+          <p:cNvPr id="27" name="Rectangle 26"/>
+          <p:cNvSpPr/>
+          <p:nvPr/>
+        </p:nvSpPr>
+        <p:spPr>
+          <a:xfrm>
+            <a:off x="914400" y="5120640"/>
+            <a:ext cx="969995" cy="164592"/>
+          </a:xfrm>
+          <a:prstGeom prst="rect">
+            <a:avLst/>
+          </a:prstGeom>
+          <a:solidFill>
+            <a:srgbClr val="DB4928"/>
+          </a:solidFill>
+          <a:ln>
+            <a:noFill/>
+          </a:ln>
+        </p:spPr>
+        <p:style>
+          <a:lnRef idx="1">
+            <a:schemeClr val="accent1"/>
+          </a:lnRef>
+          <a:fillRef idx="3">
+            <a:schemeClr val="accent1"/>
+          </a:fillRef>
+          <a:effectRef idx="2">
+            <a:schemeClr val="accent1"/>
+          </a:effectRef>
+          <a:fontRef idx="minor">
+            <a:schemeClr val="lt1"/>
+          </a:fontRef>
+        </p:style>
+        <p:txBody>
+          <a:bodyPr rtlCol="0" anchor="ctr"/>
+          <a:lstStyle/>
+          <a:p>
+            <a:pPr algn="ctr"/>
+          </a:p>
+        </p:txBody>
+      </p:sp>
+      <p:sp>
+        <p:nvSpPr>
+          <p:cNvPr id="28" name="TextBox 27"/>
+          <p:cNvSpPr txBox="1"/>
+          <p:nvPr/>
+        </p:nvSpPr>
+        <p:spPr>
+          <a:xfrm>
+            <a:off x="4983480" y="4983480"/>
+            <a:ext cx="685800" cy="228600"/>
+          </a:xfrm>
+          <a:prstGeom prst="rect">
+            <a:avLst/>
+          </a:prstGeom>
+          <a:noFill/>
+        </p:spPr>
+        <p:txBody>
+          <a:bodyPr wrap="square">
+            <a:noAutofit/>
+          </a:bodyPr>
+          <a:lstStyle/>
+          <a:p>
+            <a:pPr algn="r"/>
+            <a:r>
+              <a:rPr sz="1300" b="1">
+                <a:solidFill>
+                  <a:srgbClr val="DB4928"/>
+                </a:solidFill>
+                <a:latin typeface="Arial"/>
+              </a:rPr>
+              <a:t>20.4%</a:t>
+            </a:r>
+          </a:p>
+        </p:txBody>
+      </p:sp>
+      <p:sp>
+        <p:nvSpPr>
+          <p:cNvPr id="29" name="TextBox 28"/>
+          <p:cNvSpPr txBox="1"/>
+          <p:nvPr/>
+        </p:nvSpPr>
+        <p:spPr>
+          <a:xfrm>
+            <a:off x="914400" y="5367528"/>
+            <a:ext cx="4754880" cy="256032"/>
+          </a:xfrm>
+          <a:prstGeom prst="rect">
+            <a:avLst/>
+          </a:prstGeom>
+          <a:noFill/>
+        </p:spPr>
+        <p:txBody>
+          <a:bodyPr wrap="square">
+            <a:noAutofit/>
+          </a:bodyPr>
+          <a:lstStyle/>
+          <a:p>
+            <a:pPr algn="l"/>
+            <a:r>
+              <a:rPr sz="1000" b="0">
+                <a:solidFill>
+                  <a:srgbClr val="5C675F"/>
+                </a:solidFill>
+                <a:latin typeface="Arial"/>
+              </a:rPr>
+              <a:t>показывает зависимость от опыта района</a:t>
+            </a:r>
+          </a:p>
+        </p:txBody>
+      </p:sp>
+      <p:sp>
+        <p:nvSpPr>
+          <p:cNvPr id="30" name="Rectangle 29"/>
+          <p:cNvSpPr/>
+          <p:nvPr/>
+        </p:nvSpPr>
+        <p:spPr>
+          <a:xfrm>
+            <a:off x="6629400" y="1508760"/>
+            <a:ext cx="4709160" cy="4297680"/>
+          </a:xfrm>
+          <a:prstGeom prst="rect">
+            <a:avLst/>
+          </a:prstGeom>
+          <a:solidFill>
+            <a:srgbClr val="244128"/>
+          </a:solidFill>
+          <a:ln>
+            <a:noFill/>
+          </a:ln>
+        </p:spPr>
+        <p:style>
+          <a:lnRef idx="1">
+            <a:schemeClr val="accent1"/>
+          </a:lnRef>
+          <a:fillRef idx="3">
+            <a:schemeClr val="accent1"/>
+          </a:fillRef>
+          <a:effectRef idx="2">
+            <a:schemeClr val="accent1"/>
+          </a:effectRef>
+          <a:fontRef idx="minor">
+            <a:schemeClr val="lt1"/>
+          </a:fontRef>
+        </p:style>
+        <p:txBody>
+          <a:bodyPr rtlCol="0" anchor="ctr"/>
+          <a:lstStyle/>
+          <a:p>
+            <a:pPr algn="ctr"/>
+          </a:p>
+        </p:txBody>
+      </p:sp>
+      <p:sp>
+        <p:nvSpPr>
+          <p:cNvPr id="31" name="TextBox 30"/>
+          <p:cNvSpPr txBox="1"/>
+          <p:nvPr/>
+        </p:nvSpPr>
+        <p:spPr>
+          <a:xfrm>
+            <a:off x="6995160" y="1810512"/>
+            <a:ext cx="3977639" cy="320040"/>
+          </a:xfrm>
+          <a:prstGeom prst="rect">
+            <a:avLst/>
+          </a:prstGeom>
+          <a:noFill/>
+        </p:spPr>
+        <p:txBody>
+          <a:bodyPr wrap="square">
+            <a:noAutofit/>
+          </a:bodyPr>
+          <a:lstStyle/>
+          <a:p>
+            <a:pPr algn="l"/>
+            <a:r>
+              <a:rPr sz="1800" b="1">
+                <a:solidFill>
+                  <a:srgbClr val="FFFFFF"/>
+                </a:solidFill>
+                <a:latin typeface="Arial"/>
+              </a:rPr>
+              <a:t>Интерпретация</a:t>
+            </a:r>
+          </a:p>
+        </p:txBody>
+      </p:sp>
+      <p:sp>
+        <p:nvSpPr>
+          <p:cNvPr id="32" name="TextBox 31"/>
+          <p:cNvSpPr txBox="1"/>
+          <p:nvPr/>
+        </p:nvSpPr>
+        <p:spPr>
+          <a:xfrm>
+            <a:off x="6995160" y="2331720"/>
+            <a:ext cx="3840480" cy="2331720"/>
+          </a:xfrm>
+          <a:prstGeom prst="rect">
+            <a:avLst/>
+          </a:prstGeom>
+          <a:noFill/>
+        </p:spPr>
+        <p:txBody>
+          <a:bodyPr wrap="square">
+            <a:spAutoFit/>
+          </a:bodyPr>
+          <a:lstStyle/>
+          <a:p>
+            <a:pPr>
+              <a:spcAft>
+                <a:spcPts val="900"/>
+              </a:spcAft>
+            </a:pPr>
+            <a:r>
+              <a:rPr sz="1500" b="1">
+                <a:solidFill>
+                  <a:srgbClr val="F39869"/>
+                </a:solidFill>
+                <a:latin typeface="Arial"/>
+              </a:rPr>
+              <a:t>■ </a:t>
+            </a:r>
+            <a:r>
+              <a:rPr sz="1500" b="0">
+                <a:solidFill>
+                  <a:srgbClr val="FFFFFF"/>
+                </a:solidFill>
+                <a:latin typeface="Arial"/>
+              </a:rPr>
+              <a:t>Пассивное знание не равно незнанию: название может быть культурно знакомым, но не речевым.</a:t>
+            </a:r>
+          </a:p>
+          <a:p>
+            <a:pPr>
+              <a:spcAft>
+                <a:spcPts val="900"/>
+              </a:spcAft>
+            </a:pPr>
+            <a:r>
+              <a:rPr sz="1500" b="1">
+                <a:solidFill>
+                  <a:srgbClr val="F39869"/>
+                </a:solidFill>
+                <a:latin typeface="Arial"/>
+              </a:rPr>
+              <a:t>■ </a:t>
+            </a:r>
+            <a:r>
+              <a:rPr sz="1500" b="0">
+                <a:solidFill>
+                  <a:srgbClr val="FFFFFF"/>
+                </a:solidFill>
+                <a:latin typeface="Arial"/>
+              </a:rPr>
+              <a:t>Стаж проживания расширяет активный запас локальных названий.</a:t>
+            </a:r>
+          </a:p>
+          <a:p>
+            <a:pPr>
+              <a:spcAft>
+                <a:spcPts val="900"/>
+              </a:spcAft>
+            </a:pPr>
+            <a:r>
+              <a:rPr sz="1500" b="1">
+                <a:solidFill>
+                  <a:srgbClr val="F39869"/>
+                </a:solidFill>
+                <a:latin typeface="Arial"/>
+              </a:rPr>
+              <a:t>■ </a:t>
+            </a:r>
+            <a:r>
+              <a:rPr sz="1500" b="0">
+                <a:solidFill>
+                  <a:srgbClr val="FFFFFF"/>
+                </a:solidFill>
+                <a:latin typeface="Arial"/>
+              </a:rPr>
+              <a:t>У старших горожан «Ленинград» и районные названия чаще остаются живыми словами.</a:t>
+            </a:r>
+          </a:p>
+        </p:txBody>
+      </p:sp>
+      <p:sp>
+        <p:nvSpPr>
+          <p:cNvPr id="33" name="TextBox 32"/>
+          <p:cNvSpPr txBox="1"/>
+          <p:nvPr/>
+        </p:nvSpPr>
+        <p:spPr>
+          <a:xfrm>
+            <a:off x="6995160" y="5138928"/>
+            <a:ext cx="3840480" cy="384048"/>
+          </a:xfrm>
+          <a:prstGeom prst="rect">
+            <a:avLst/>
+          </a:prstGeom>
+          <a:noFill/>
+        </p:spPr>
+        <p:txBody>
+          <a:bodyPr wrap="square">
+            <a:noAutofit/>
+          </a:bodyPr>
+          <a:lstStyle/>
+          <a:p>
+            <a:pPr algn="l"/>
+            <a:r>
+              <a:rPr sz="1500" b="1">
+                <a:solidFill>
+                  <a:srgbClr val="FFFFFF"/>
+                </a:solidFill>
+                <a:latin typeface="Arial"/>
+              </a:rPr>
+              <a:t>Главный вывод: топонимикон зависит от опыта города.</a:t>
+            </a:r>
+          </a:p>
+        </p:txBody>
+      </p:sp>
+    </p:spTree>
+  </p:cSld>
+  <p:clrMapOvr>
+    <a:masterClrMapping/>
+  </p:clrMapOvr>
+</p:sld>
+</file>
+
+<file path=ppt/slides/slide8.xml><?xml version="1.0" encoding="utf-8"?>
+<p:sld xmlns:a="http://schemas.openxmlformats.org/drawingml/2006/main" xmlns:p="http://schemas.openxmlformats.org/presentationml/2006/main" xmlns:r="http://schemas.openxmlformats.org/officeDocument/2006/relationships">
+  <p:cSld>
+    <p:bg>
+      <p:bgPr>
+        <a:solidFill>
+          <a:srgbClr val="F6F8F4"/>
+        </a:solidFill>
+        <a:effectLst/>
+      </p:bgPr>
+    </p:bg>
+    <p:spTree>
+      <p:nvGrpSpPr>
+        <p:cNvPr id="1" name=""/>
+        <p:cNvGrpSpPr/>
+        <p:nvPr/>
+      </p:nvGrpSpPr>
+      <p:grpSpPr/>
+      <p:pic>
+        <p:nvPicPr>
+          <p:cNvPr id="2" name="Picture 1" descr="spbstu_logo_02.png"/>
+          <p:cNvPicPr>
+            <a:picLocks noChangeAspect="1"/>
+          </p:cNvPicPr>
+          <p:nvPr/>
+        </p:nvPicPr>
+        <p:blipFill>
+          <a:blip r:embed="rId2"/>
+          <a:stretch>
+            <a:fillRect/>
+          </a:stretch>
+        </p:blipFill>
+        <p:spPr>
+          <a:xfrm>
+            <a:off x="502920" y="310896"/>
+            <a:ext cx="1600200" cy="552069"/>
+          </a:xfrm>
+          <a:prstGeom prst="rect">
+            <a:avLst/>
+          </a:prstGeom>
+        </p:spPr>
+      </p:pic>
+      <p:sp>
+        <p:nvSpPr>
+          <p:cNvPr id="3" name="TextBox 2"/>
+          <p:cNvSpPr txBox="1"/>
+          <p:nvPr/>
+        </p:nvSpPr>
+        <p:spPr>
+          <a:xfrm>
+            <a:off x="2743200" y="320040"/>
+            <a:ext cx="6217920" cy="310896"/>
+          </a:xfrm>
+          <a:prstGeom prst="rect">
+            <a:avLst/>
+          </a:prstGeom>
+          <a:noFill/>
+        </p:spPr>
+        <p:txBody>
+          <a:bodyPr wrap="square">
+            <a:noAutofit/>
+          </a:bodyPr>
+          <a:lstStyle/>
+          <a:p>
+            <a:pPr algn="l"/>
+            <a:r>
+              <a:rPr sz="1000" b="0">
+                <a:solidFill>
+                  <a:srgbClr val="5C675F"/>
+                </a:solidFill>
+                <a:latin typeface="Arial"/>
+              </a:rPr>
+              <a:t>Итоги курсовой работы</a:t>
+            </a:r>
+          </a:p>
+        </p:txBody>
+      </p:sp>
+      <p:sp>
+        <p:nvSpPr>
+          <p:cNvPr id="4" name="TextBox 3"/>
+          <p:cNvSpPr txBox="1"/>
+          <p:nvPr/>
+        </p:nvSpPr>
+        <p:spPr>
+          <a:xfrm>
+            <a:off x="2743200" y="630936"/>
+            <a:ext cx="7132320" cy="475488"/>
+          </a:xfrm>
+          <a:prstGeom prst="rect">
+            <a:avLst/>
+          </a:prstGeom>
+          <a:noFill/>
+        </p:spPr>
+        <p:txBody>
+          <a:bodyPr wrap="square">
+            <a:noAutofit/>
+          </a:bodyPr>
+          <a:lstStyle/>
+          <a:p>
+            <a:pPr algn="l"/>
+            <a:r>
+              <a:rPr sz="2400" b="1">
+                <a:solidFill>
+                  <a:srgbClr val="244128"/>
+                </a:solidFill>
+                <a:latin typeface="Arial"/>
+              </a:rPr>
+              <a:t>Заключение</a:t>
+            </a:r>
+          </a:p>
+        </p:txBody>
+      </p:sp>
+      <p:sp>
+        <p:nvSpPr>
+          <p:cNvPr id="5" name="Rectangle 4"/>
+          <p:cNvSpPr/>
+          <p:nvPr/>
+        </p:nvSpPr>
+        <p:spPr>
+          <a:xfrm>
+            <a:off x="502920" y="1170432"/>
+            <a:ext cx="11155680" cy="32004"/>
+          </a:xfrm>
+          <a:prstGeom prst="rect">
+            <a:avLst/>
+          </a:prstGeom>
+          <a:solidFill>
+            <a:srgbClr val="3AAA35"/>
+          </a:solidFill>
+          <a:ln>
+            <a:noFill/>
+          </a:ln>
+        </p:spPr>
+        <p:style>
+          <a:lnRef idx="1">
+            <a:schemeClr val="accent1"/>
+          </a:lnRef>
+          <a:fillRef idx="3">
+            <a:schemeClr val="accent1"/>
+          </a:fillRef>
+          <a:effectRef idx="2">
+            <a:schemeClr val="accent1"/>
+          </a:effectRef>
+          <a:fontRef idx="minor">
+            <a:schemeClr val="lt1"/>
+          </a:fontRef>
+        </p:style>
+        <p:txBody>
+          <a:bodyPr rtlCol="0" anchor="ctr"/>
+          <a:lstStyle/>
+          <a:p>
+            <a:pPr algn="ctr"/>
+          </a:p>
+        </p:txBody>
+      </p:sp>
+      <p:sp>
+        <p:nvSpPr>
+          <p:cNvPr id="6" name="TextBox 5"/>
+          <p:cNvSpPr txBox="1"/>
+          <p:nvPr/>
+        </p:nvSpPr>
+        <p:spPr>
+          <a:xfrm>
+            <a:off x="9464040" y="411480"/>
+            <a:ext cx="2194560" cy="310896"/>
+          </a:xfrm>
+          <a:prstGeom prst="rect">
+            <a:avLst/>
+          </a:prstGeom>
+          <a:noFill/>
+        </p:spPr>
+        <p:txBody>
+          <a:bodyPr wrap="square">
+            <a:noAutofit/>
+          </a:bodyPr>
+          <a:lstStyle/>
+          <a:p>
+            <a:pPr algn="r"/>
+            <a:r>
+              <a:rPr sz="1000" b="0">
+                <a:solidFill>
+                  <a:srgbClr val="5C675F"/>
+                </a:solidFill>
+                <a:latin typeface="Arial"/>
+              </a:rPr>
+              <a:t>5:30–6:20</a:t>
+            </a:r>
+          </a:p>
+        </p:txBody>
+      </p:sp>
+      <p:sp>
+        <p:nvSpPr>
+          <p:cNvPr id="7" name="TextBox 6"/>
+          <p:cNvSpPr txBox="1"/>
+          <p:nvPr/>
+        </p:nvSpPr>
+        <p:spPr>
+          <a:xfrm>
+            <a:off x="11018520" y="6355080"/>
+            <a:ext cx="640080" cy="228600"/>
+          </a:xfrm>
+          <a:prstGeom prst="rect">
+            <a:avLst/>
+          </a:prstGeom>
+          <a:noFill/>
+        </p:spPr>
+        <p:txBody>
+          <a:bodyPr wrap="square">
+            <a:noAutofit/>
+          </a:bodyPr>
+          <a:lstStyle/>
+          <a:p>
+            <a:pPr algn="r"/>
+            <a:r>
+              <a:rPr sz="1000" b="0">
+                <a:solidFill>
+                  <a:srgbClr val="5C675F"/>
+                </a:solidFill>
+                <a:latin typeface="Arial"/>
+              </a:rPr>
+              <a:t>8/10</a:t>
+            </a:r>
+          </a:p>
+        </p:txBody>
+      </p:sp>
+      <p:sp>
+        <p:nvSpPr>
+          <p:cNvPr id="8" name="Rectangle 7"/>
+          <p:cNvSpPr/>
+          <p:nvPr/>
+        </p:nvSpPr>
+        <p:spPr>
+          <a:xfrm>
+            <a:off x="685800" y="1508760"/>
+            <a:ext cx="3246120" cy="2971800"/>
+          </a:xfrm>
+          <a:prstGeom prst="rect">
+            <a:avLst/>
+          </a:prstGeom>
+          <a:solidFill>
+            <a:srgbClr val="3AAA35"/>
+          </a:solidFill>
+          <a:ln>
+            <a:noFill/>
+          </a:ln>
+        </p:spPr>
+        <p:style>
+          <a:lnRef idx="1">
+            <a:schemeClr val="accent1"/>
+          </a:lnRef>
+          <a:fillRef idx="3">
+            <a:schemeClr val="accent1"/>
+          </a:fillRef>
+          <a:effectRef idx="2">
+            <a:schemeClr val="accent1"/>
+          </a:effectRef>
+          <a:fontRef idx="minor">
+            <a:schemeClr val="lt1"/>
+          </a:fontRef>
+        </p:style>
+        <p:txBody>
+          <a:bodyPr rtlCol="0" anchor="ctr"/>
+          <a:lstStyle/>
+          <a:p>
+            <a:pPr algn="ctr"/>
+          </a:p>
+        </p:txBody>
+      </p:sp>
+      <p:sp>
+        <p:nvSpPr>
+          <p:cNvPr id="9" name="Rectangle 8"/>
+          <p:cNvSpPr/>
+          <p:nvPr/>
+        </p:nvSpPr>
+        <p:spPr>
+          <a:xfrm>
+            <a:off x="4160520" y="1508760"/>
+            <a:ext cx="3246120" cy="2971800"/>
+          </a:xfrm>
+          <a:prstGeom prst="rect">
+            <a:avLst/>
+          </a:prstGeom>
+          <a:solidFill>
+            <a:srgbClr val="56975B"/>
+          </a:solidFill>
+          <a:ln>
+            <a:noFill/>
+          </a:ln>
+        </p:spPr>
+        <p:style>
+          <a:lnRef idx="1">
+            <a:schemeClr val="accent1"/>
+          </a:lnRef>
+          <a:fillRef idx="3">
+            <a:schemeClr val="accent1"/>
+          </a:fillRef>
+          <a:effectRef idx="2">
+            <a:schemeClr val="accent1"/>
+          </a:effectRef>
+          <a:fontRef idx="minor">
+            <a:schemeClr val="lt1"/>
+          </a:fontRef>
+        </p:style>
+        <p:txBody>
+          <a:bodyPr rtlCol="0" anchor="ctr"/>
+          <a:lstStyle/>
+          <a:p>
+            <a:pPr algn="ctr"/>
+          </a:p>
+        </p:txBody>
+      </p:sp>
+      <p:sp>
+        <p:nvSpPr>
+          <p:cNvPr id="10" name="Rectangle 9"/>
+          <p:cNvSpPr/>
+          <p:nvPr/>
+        </p:nvSpPr>
+        <p:spPr>
+          <a:xfrm>
+            <a:off x="7635240" y="1508760"/>
+            <a:ext cx="3246120" cy="2971800"/>
+          </a:xfrm>
+          <a:prstGeom prst="rect">
+            <a:avLst/>
+          </a:prstGeom>
+          <a:solidFill>
+            <a:srgbClr val="DB4928"/>
+          </a:solidFill>
+          <a:ln>
+            <a:noFill/>
+          </a:ln>
+        </p:spPr>
+        <p:style>
+          <a:lnRef idx="1">
+            <a:schemeClr val="accent1"/>
+          </a:lnRef>
+          <a:fillRef idx="3">
+            <a:schemeClr val="accent1"/>
+          </a:fillRef>
+          <a:effectRef idx="2">
+            <a:schemeClr val="accent1"/>
+          </a:effectRef>
+          <a:fontRef idx="minor">
+            <a:schemeClr val="lt1"/>
+          </a:fontRef>
+        </p:style>
+        <p:txBody>
+          <a:bodyPr rtlCol="0" anchor="ctr"/>
+          <a:lstStyle/>
+          <a:p>
+            <a:pPr algn="ctr"/>
+          </a:p>
+        </p:txBody>
+      </p:sp>
+      <p:sp>
+        <p:nvSpPr>
+          <p:cNvPr id="11" name="TextBox 10"/>
+          <p:cNvSpPr txBox="1"/>
+          <p:nvPr/>
+        </p:nvSpPr>
+        <p:spPr>
+          <a:xfrm>
+            <a:off x="960120" y="1828800"/>
+            <a:ext cx="2697480" cy="411480"/>
+          </a:xfrm>
+          <a:prstGeom prst="rect">
+            <a:avLst/>
+          </a:prstGeom>
+          <a:noFill/>
+        </p:spPr>
+        <p:txBody>
+          <a:bodyPr wrap="square">
+            <a:noAutofit/>
+          </a:bodyPr>
+          <a:lstStyle/>
+          <a:p>
+            <a:pPr algn="l"/>
+            <a:r>
+              <a:rPr sz="2000" b="1">
+                <a:solidFill>
+                  <a:srgbClr val="FFFFFF"/>
+                </a:solidFill>
+                <a:latin typeface="Arial"/>
+              </a:rPr>
+              <a:t>Официальное</a:t>
+            </a:r>
+          </a:p>
+        </p:txBody>
+      </p:sp>
+      <p:sp>
+        <p:nvSpPr>
+          <p:cNvPr id="12" name="TextBox 11"/>
+          <p:cNvSpPr txBox="1"/>
+          <p:nvPr/>
+        </p:nvSpPr>
+        <p:spPr>
+          <a:xfrm>
+            <a:off x="960120" y="2395728"/>
+            <a:ext cx="2697480" cy="1417320"/>
+          </a:xfrm>
+          <a:prstGeom prst="rect">
+            <a:avLst/>
+          </a:prstGeom>
+          <a:noFill/>
+        </p:spPr>
+        <p:txBody>
+          <a:bodyPr wrap="square">
+            <a:noAutofit/>
+          </a:bodyPr>
+          <a:lstStyle/>
+          <a:p>
+            <a:pPr algn="l"/>
+            <a:r>
+              <a:rPr sz="1600" b="0">
+                <a:solidFill>
+                  <a:srgbClr val="FFFFFF"/>
+                </a:solidFill>
+                <a:latin typeface="Arial"/>
+              </a:rPr>
+              <a:t>Дворцовая площадь, Эрмитаж, Исаакиевский собор: высокая узнаваемость и культурный слой.</a:t>
+            </a:r>
+          </a:p>
+        </p:txBody>
+      </p:sp>
+      <p:sp>
+        <p:nvSpPr>
+          <p:cNvPr id="13" name="TextBox 12"/>
+          <p:cNvSpPr txBox="1"/>
+          <p:nvPr/>
+        </p:nvSpPr>
+        <p:spPr>
+          <a:xfrm>
+            <a:off x="4434840" y="1828800"/>
+            <a:ext cx="2697480" cy="411480"/>
+          </a:xfrm>
+          <a:prstGeom prst="rect">
+            <a:avLst/>
+          </a:prstGeom>
+          <a:noFill/>
+        </p:spPr>
+        <p:txBody>
+          <a:bodyPr wrap="square">
+            <a:noAutofit/>
+          </a:bodyPr>
+          <a:lstStyle/>
+          <a:p>
+            <a:pPr algn="l"/>
+            <a:r>
+              <a:rPr sz="2000" b="1">
+                <a:solidFill>
+                  <a:srgbClr val="FFFFFF"/>
+                </a:solidFill>
+                <a:latin typeface="Arial"/>
+              </a:rPr>
+              <a:t>Разговорное</a:t>
+            </a:r>
+          </a:p>
+        </p:txBody>
+      </p:sp>
+      <p:sp>
+        <p:nvSpPr>
+          <p:cNvPr id="14" name="TextBox 13"/>
+          <p:cNvSpPr txBox="1"/>
+          <p:nvPr/>
+        </p:nvSpPr>
+        <p:spPr>
+          <a:xfrm>
+            <a:off x="4434840" y="2395728"/>
+            <a:ext cx="2697480" cy="1417320"/>
+          </a:xfrm>
+          <a:prstGeom prst="rect">
+            <a:avLst/>
+          </a:prstGeom>
+          <a:noFill/>
+        </p:spPr>
+        <p:txBody>
+          <a:bodyPr wrap="square">
+            <a:noAutofit/>
+          </a:bodyPr>
+          <a:lstStyle/>
+          <a:p>
+            <a:pPr algn="l"/>
+            <a:r>
+              <a:rPr sz="1600" b="0">
+                <a:solidFill>
+                  <a:srgbClr val="FFFFFF"/>
+                </a:solidFill>
+                <a:latin typeface="Arial"/>
+              </a:rPr>
+              <a:t>Питер, Невский, Лиговка: повседневная навигация, друзья, соцсети, маршруты.</a:t>
+            </a:r>
+          </a:p>
+        </p:txBody>
+      </p:sp>
+      <p:sp>
+        <p:nvSpPr>
+          <p:cNvPr id="15" name="TextBox 14"/>
+          <p:cNvSpPr txBox="1"/>
+          <p:nvPr/>
+        </p:nvSpPr>
+        <p:spPr>
+          <a:xfrm>
+            <a:off x="7909560" y="1828800"/>
+            <a:ext cx="2697480" cy="411480"/>
+          </a:xfrm>
+          <a:prstGeom prst="rect">
+            <a:avLst/>
+          </a:prstGeom>
+          <a:noFill/>
+        </p:spPr>
+        <p:txBody>
+          <a:bodyPr wrap="square">
+            <a:noAutofit/>
+          </a:bodyPr>
+          <a:lstStyle/>
+          <a:p>
+            <a:pPr algn="l"/>
+            <a:r>
+              <a:rPr sz="2000" b="1">
+                <a:solidFill>
+                  <a:srgbClr val="FFFFFF"/>
+                </a:solidFill>
+                <a:latin typeface="Arial"/>
+              </a:rPr>
+              <a:t>Историческое</a:t>
+            </a:r>
+          </a:p>
+        </p:txBody>
+      </p:sp>
+      <p:sp>
+        <p:nvSpPr>
+          <p:cNvPr id="16" name="TextBox 15"/>
+          <p:cNvSpPr txBox="1"/>
+          <p:nvPr/>
+        </p:nvSpPr>
+        <p:spPr>
+          <a:xfrm>
+            <a:off x="7909560" y="2395728"/>
+            <a:ext cx="2697480" cy="1417320"/>
+          </a:xfrm>
+          <a:prstGeom prst="rect">
+            <a:avLst/>
+          </a:prstGeom>
+          <a:noFill/>
+        </p:spPr>
+        <p:txBody>
+          <a:bodyPr wrap="square">
+            <a:noAutofit/>
+          </a:bodyPr>
+          <a:lstStyle/>
+          <a:p>
+            <a:pPr algn="l"/>
+            <a:r>
+              <a:rPr sz="1600" b="0">
+                <a:solidFill>
+                  <a:srgbClr val="FFFFFF"/>
+                </a:solidFill>
+                <a:latin typeface="Arial"/>
+              </a:rPr>
+              <a:t>Ленинград: знаком почти всем, но у молодых респондентов чаще находится в пассиве.</a:t>
+            </a:r>
+          </a:p>
+        </p:txBody>
+      </p:sp>
+      <p:sp>
+        <p:nvSpPr>
+          <p:cNvPr id="17" name="Rectangle 16"/>
+          <p:cNvSpPr/>
+          <p:nvPr/>
+        </p:nvSpPr>
+        <p:spPr>
+          <a:xfrm>
+            <a:off x="685800" y="4892040"/>
+            <a:ext cx="10195560" cy="960120"/>
+          </a:xfrm>
+          <a:prstGeom prst="rect">
+            <a:avLst/>
+          </a:prstGeom>
+          <a:solidFill>
+            <a:srgbClr val="FFFFFF"/>
+          </a:solidFill>
+          <a:ln>
+            <a:noFill/>
+          </a:ln>
+        </p:spPr>
+        <p:style>
+          <a:lnRef idx="1">
+            <a:schemeClr val="accent1"/>
+          </a:lnRef>
+          <a:fillRef idx="3">
+            <a:schemeClr val="accent1"/>
+          </a:fillRef>
+          <a:effectRef idx="2">
+            <a:schemeClr val="accent1"/>
+          </a:effectRef>
+          <a:fontRef idx="minor">
+            <a:schemeClr val="lt1"/>
+          </a:fontRef>
+        </p:style>
+        <p:txBody>
+          <a:bodyPr rtlCol="0" anchor="ctr"/>
+          <a:lstStyle/>
+          <a:p>
+            <a:pPr algn="ctr"/>
+          </a:p>
+        </p:txBody>
+      </p:sp>
+      <p:sp>
+        <p:nvSpPr>
+          <p:cNvPr id="18" name="TextBox 17"/>
+          <p:cNvSpPr txBox="1"/>
+          <p:nvPr/>
+        </p:nvSpPr>
+        <p:spPr>
+          <a:xfrm>
+            <a:off x="960120" y="5102352"/>
+            <a:ext cx="1874519" cy="365760"/>
+          </a:xfrm>
+          <a:prstGeom prst="rect">
+            <a:avLst/>
+          </a:prstGeom>
+          <a:noFill/>
+        </p:spPr>
+        <p:txBody>
+          <a:bodyPr wrap="square">
+            <a:noAutofit/>
+          </a:bodyPr>
+          <a:lstStyle/>
+          <a:p>
+            <a:pPr algn="l"/>
+            <a:r>
+              <a:rPr sz="1800" b="1">
+                <a:solidFill>
+                  <a:srgbClr val="244128"/>
+                </a:solidFill>
+                <a:latin typeface="Arial"/>
+              </a:rPr>
+              <a:t>Итог</a:t>
+            </a:r>
+          </a:p>
+        </p:txBody>
+      </p:sp>
+      <p:sp>
+        <p:nvSpPr>
+          <p:cNvPr id="19" name="TextBox 18"/>
+          <p:cNvSpPr txBox="1"/>
+          <p:nvPr/>
+        </p:nvSpPr>
+        <p:spPr>
+          <a:xfrm>
+            <a:off x="1920240" y="5047488"/>
+            <a:ext cx="8641080" cy="502920"/>
+          </a:xfrm>
+          <a:prstGeom prst="rect">
+            <a:avLst/>
+          </a:prstGeom>
+          <a:noFill/>
+        </p:spPr>
+        <p:txBody>
+          <a:bodyPr wrap="square">
+            <a:noAutofit/>
+          </a:bodyPr>
+          <a:lstStyle/>
+          <a:p>
+            <a:pPr algn="l"/>
+            <a:r>
+              <a:rPr sz="1500" b="0">
+                <a:solidFill>
+                  <a:srgbClr val="000000"/>
+                </a:solidFill>
+                <a:latin typeface="Arial"/>
+              </a:rPr>
+              <a:t>Границы между активным и пассивным топонимиконом задаются не грамматикой, а возрастом, опытом города, кругом общения и цифровыми практиками.</a:t>
+            </a:r>
+          </a:p>
+        </p:txBody>
+      </p:sp>
+      <p:sp>
+        <p:nvSpPr>
+          <p:cNvPr id="20" name="TextBox 19"/>
+          <p:cNvSpPr txBox="1"/>
+          <p:nvPr/>
+        </p:nvSpPr>
+        <p:spPr>
+          <a:xfrm>
+            <a:off x="713232" y="6144768"/>
+            <a:ext cx="9144000" cy="256032"/>
+          </a:xfrm>
+          <a:prstGeom prst="rect">
+            <a:avLst/>
+          </a:prstGeom>
+          <a:noFill/>
+        </p:spPr>
+        <p:txBody>
+          <a:bodyPr wrap="square">
+            <a:noAutofit/>
+          </a:bodyPr>
+          <a:lstStyle/>
+          <a:p>
+            <a:pPr algn="l"/>
+            <a:r>
               <a:rPr sz="1100" b="0">
                 <a:solidFill>
                   <a:srgbClr val="5C675F"/>
                 </a:solidFill>
-                <a:latin typeface="Onest"/>
-              </a:rPr>
-              <a:t>Дальше: расширить выборку, добавить старшее поколение и сравнить Петербург с другими миллионниками.</a:t>
+                <a:latin typeface="Arial"/>
+              </a:rPr>
+              <a:t>Перспектива: расширить выборку, добавить старшее поколение и сравнить Петербург с другими миллионниками.</a:t>
+            </a:r>
+          </a:p>
+        </p:txBody>
+      </p:sp>
+    </p:spTree>
+  </p:cSld>
+  <p:clrMapOvr>
+    <a:masterClrMapping/>
+  </p:clrMapOvr>
+</p:sld>
+</file>
+
+<file path=ppt/slides/slide9.xml><?xml version="1.0" encoding="utf-8"?>
+<p:sld xmlns:a="http://schemas.openxmlformats.org/drawingml/2006/main" xmlns:p="http://schemas.openxmlformats.org/presentationml/2006/main" xmlns:r="http://schemas.openxmlformats.org/officeDocument/2006/relationships">
+  <p:cSld>
+    <p:bg>
+      <p:bgPr>
+        <a:solidFill>
+          <a:srgbClr val="F6F8F4"/>
+        </a:solidFill>
+        <a:effectLst/>
+      </p:bgPr>
+    </p:bg>
+    <p:spTree>
+      <p:nvGrpSpPr>
+        <p:cNvPr id="1" name=""/>
+        <p:cNvGrpSpPr/>
+        <p:nvPr/>
+      </p:nvGrpSpPr>
+      <p:grpSpPr/>
+      <p:pic>
+        <p:nvPicPr>
+          <p:cNvPr id="2" name="Picture 1" descr="spbstu_logo_02.png"/>
+          <p:cNvPicPr>
+            <a:picLocks noChangeAspect="1"/>
+          </p:cNvPicPr>
+          <p:nvPr/>
+        </p:nvPicPr>
+        <p:blipFill>
+          <a:blip r:embed="rId2"/>
+          <a:stretch>
+            <a:fillRect/>
+          </a:stretch>
+        </p:blipFill>
+        <p:spPr>
+          <a:xfrm>
+            <a:off x="502920" y="310896"/>
+            <a:ext cx="1600200" cy="552069"/>
+          </a:xfrm>
+          <a:prstGeom prst="rect">
+            <a:avLst/>
+          </a:prstGeom>
+        </p:spPr>
+      </p:pic>
+      <p:sp>
+        <p:nvSpPr>
+          <p:cNvPr id="3" name="TextBox 2"/>
+          <p:cNvSpPr txBox="1"/>
+          <p:nvPr/>
+        </p:nvSpPr>
+        <p:spPr>
+          <a:xfrm>
+            <a:off x="2743200" y="320040"/>
+            <a:ext cx="6217920" cy="310896"/>
+          </a:xfrm>
+          <a:prstGeom prst="rect">
+            <a:avLst/>
+          </a:prstGeom>
+          <a:noFill/>
+        </p:spPr>
+        <p:txBody>
+          <a:bodyPr wrap="square">
+            <a:noAutofit/>
+          </a:bodyPr>
+          <a:lstStyle/>
+          <a:p>
+            <a:pPr algn="l"/>
+            <a:r>
+              <a:rPr sz="1000" b="0">
+                <a:solidFill>
+                  <a:srgbClr val="5C675F"/>
+                </a:solidFill>
+                <a:latin typeface="Arial"/>
+              </a:rPr>
+              <a:t>Основные работы, использованные в курсовой</a:t>
+            </a:r>
+          </a:p>
+        </p:txBody>
+      </p:sp>
+      <p:sp>
+        <p:nvSpPr>
+          <p:cNvPr id="4" name="TextBox 3"/>
+          <p:cNvSpPr txBox="1"/>
+          <p:nvPr/>
+        </p:nvSpPr>
+        <p:spPr>
+          <a:xfrm>
+            <a:off x="2743200" y="630936"/>
+            <a:ext cx="7132320" cy="475488"/>
+          </a:xfrm>
+          <a:prstGeom prst="rect">
+            <a:avLst/>
+          </a:prstGeom>
+          <a:noFill/>
+        </p:spPr>
+        <p:txBody>
+          <a:bodyPr wrap="square">
+            <a:noAutofit/>
+          </a:bodyPr>
+          <a:lstStyle/>
+          <a:p>
+            <a:pPr algn="l"/>
+            <a:r>
+              <a:rPr sz="2400" b="1">
+                <a:solidFill>
+                  <a:srgbClr val="244128"/>
+                </a:solidFill>
+                <a:latin typeface="Arial"/>
+              </a:rPr>
+              <a:t>Источники литературы</a:t>
+            </a:r>
+          </a:p>
+        </p:txBody>
+      </p:sp>
+      <p:sp>
+        <p:nvSpPr>
+          <p:cNvPr id="5" name="Rectangle 4"/>
+          <p:cNvSpPr/>
+          <p:nvPr/>
+        </p:nvSpPr>
+        <p:spPr>
+          <a:xfrm>
+            <a:off x="502920" y="1170432"/>
+            <a:ext cx="11155680" cy="32004"/>
+          </a:xfrm>
+          <a:prstGeom prst="rect">
+            <a:avLst/>
+          </a:prstGeom>
+          <a:solidFill>
+            <a:srgbClr val="3AAA35"/>
+          </a:solidFill>
+          <a:ln>
+            <a:noFill/>
+          </a:ln>
+        </p:spPr>
+        <p:style>
+          <a:lnRef idx="1">
+            <a:schemeClr val="accent1"/>
+          </a:lnRef>
+          <a:fillRef idx="3">
+            <a:schemeClr val="accent1"/>
+          </a:fillRef>
+          <a:effectRef idx="2">
+            <a:schemeClr val="accent1"/>
+          </a:effectRef>
+          <a:fontRef idx="minor">
+            <a:schemeClr val="lt1"/>
+          </a:fontRef>
+        </p:style>
+        <p:txBody>
+          <a:bodyPr rtlCol="0" anchor="ctr"/>
+          <a:lstStyle/>
+          <a:p>
+            <a:pPr algn="ctr"/>
+          </a:p>
+        </p:txBody>
+      </p:sp>
+      <p:sp>
+        <p:nvSpPr>
+          <p:cNvPr id="6" name="TextBox 5"/>
+          <p:cNvSpPr txBox="1"/>
+          <p:nvPr/>
+        </p:nvSpPr>
+        <p:spPr>
+          <a:xfrm>
+            <a:off x="9464040" y="411480"/>
+            <a:ext cx="2194560" cy="310896"/>
+          </a:xfrm>
+          <a:prstGeom prst="rect">
+            <a:avLst/>
+          </a:prstGeom>
+          <a:noFill/>
+        </p:spPr>
+        <p:txBody>
+          <a:bodyPr wrap="square">
+            <a:noAutofit/>
+          </a:bodyPr>
+          <a:lstStyle/>
+          <a:p>
+            <a:pPr algn="r"/>
+            <a:r>
+              <a:rPr sz="1000" b="0">
+                <a:solidFill>
+                  <a:srgbClr val="5C675F"/>
+                </a:solidFill>
+                <a:latin typeface="Arial"/>
+              </a:rPr>
+              <a:t>6:20–6:45</a:t>
+            </a:r>
+          </a:p>
+        </p:txBody>
+      </p:sp>
+      <p:sp>
+        <p:nvSpPr>
+          <p:cNvPr id="7" name="TextBox 6"/>
+          <p:cNvSpPr txBox="1"/>
+          <p:nvPr/>
+        </p:nvSpPr>
+        <p:spPr>
+          <a:xfrm>
+            <a:off x="11018520" y="6355080"/>
+            <a:ext cx="640080" cy="228600"/>
+          </a:xfrm>
+          <a:prstGeom prst="rect">
+            <a:avLst/>
+          </a:prstGeom>
+          <a:noFill/>
+        </p:spPr>
+        <p:txBody>
+          <a:bodyPr wrap="square">
+            <a:noAutofit/>
+          </a:bodyPr>
+          <a:lstStyle/>
+          <a:p>
+            <a:pPr algn="r"/>
+            <a:r>
+              <a:rPr sz="1000" b="0">
+                <a:solidFill>
+                  <a:srgbClr val="5C675F"/>
+                </a:solidFill>
+                <a:latin typeface="Arial"/>
+              </a:rPr>
+              <a:t>9/10</a:t>
+            </a:r>
+          </a:p>
+        </p:txBody>
+      </p:sp>
+      <p:sp>
+        <p:nvSpPr>
+          <p:cNvPr id="8" name="Rectangle 7"/>
+          <p:cNvSpPr/>
+          <p:nvPr/>
+        </p:nvSpPr>
+        <p:spPr>
+          <a:xfrm>
+            <a:off x="685800" y="1508760"/>
+            <a:ext cx="10515600" cy="4480560"/>
+          </a:xfrm>
+          <a:prstGeom prst="rect">
+            <a:avLst/>
+          </a:prstGeom>
+          <a:solidFill>
+            <a:srgbClr val="FFFFFF"/>
+          </a:solidFill>
+          <a:ln>
+            <a:noFill/>
+          </a:ln>
+        </p:spPr>
+        <p:style>
+          <a:lnRef idx="1">
+            <a:schemeClr val="accent1"/>
+          </a:lnRef>
+          <a:fillRef idx="3">
+            <a:schemeClr val="accent1"/>
+          </a:fillRef>
+          <a:effectRef idx="2">
+            <a:schemeClr val="accent1"/>
+          </a:effectRef>
+          <a:fontRef idx="minor">
+            <a:schemeClr val="lt1"/>
+          </a:fontRef>
+        </p:style>
+        <p:txBody>
+          <a:bodyPr rtlCol="0" anchor="ctr"/>
+          <a:lstStyle/>
+          <a:p>
+            <a:pPr algn="ctr"/>
+          </a:p>
+        </p:txBody>
+      </p:sp>
+      <p:sp>
+        <p:nvSpPr>
+          <p:cNvPr id="9" name="TextBox 8"/>
+          <p:cNvSpPr txBox="1"/>
+          <p:nvPr/>
+        </p:nvSpPr>
+        <p:spPr>
+          <a:xfrm>
+            <a:off x="987552" y="1810512"/>
+            <a:ext cx="9921240" cy="3749039"/>
+          </a:xfrm>
+          <a:prstGeom prst="rect">
+            <a:avLst/>
+          </a:prstGeom>
+          <a:noFill/>
+        </p:spPr>
+        <p:txBody>
+          <a:bodyPr wrap="square">
+            <a:spAutoFit/>
+          </a:bodyPr>
+          <a:lstStyle/>
+          <a:p>
+            <a:pPr>
+              <a:spcAft>
+                <a:spcPts val="900"/>
+              </a:spcAft>
+            </a:pPr>
+            <a:r>
+              <a:rPr sz="1200" b="1">
+                <a:solidFill>
+                  <a:srgbClr val="DB4928"/>
+                </a:solidFill>
+                <a:latin typeface="Arial"/>
+              </a:rPr>
+              <a:t>■ </a:t>
+            </a:r>
+            <a:r>
+              <a:rPr sz="1200" b="0">
+                <a:solidFill>
+                  <a:srgbClr val="000000"/>
+                </a:solidFill>
+                <a:latin typeface="Arial"/>
+              </a:rPr>
+              <a:t>Агеева Р.А. Ономастический код культуры. М.: Наука, 1990.</a:t>
+            </a:r>
+          </a:p>
+          <a:p>
+            <a:pPr>
+              <a:spcAft>
+                <a:spcPts val="900"/>
+              </a:spcAft>
+            </a:pPr>
+            <a:r>
+              <a:rPr sz="1200" b="1">
+                <a:solidFill>
+                  <a:srgbClr val="DB4928"/>
+                </a:solidFill>
+                <a:latin typeface="Arial"/>
+              </a:rPr>
+              <a:t>■ </a:t>
+            </a:r>
+            <a:r>
+              <a:rPr sz="1200" b="0">
+                <a:solidFill>
+                  <a:srgbClr val="000000"/>
+                </a:solidFill>
+                <a:latin typeface="Arial"/>
+              </a:rPr>
+              <a:t>Иванцова Е.В. Топонимия в идиолексиконе диалектоносителя // Вестник ЧелГУ. 2007. № 17.</a:t>
+            </a:r>
+          </a:p>
+          <a:p>
+            <a:pPr>
+              <a:spcAft>
+                <a:spcPts val="900"/>
+              </a:spcAft>
+            </a:pPr>
+            <a:r>
+              <a:rPr sz="1200" b="1">
+                <a:solidFill>
+                  <a:srgbClr val="DB4928"/>
+                </a:solidFill>
+                <a:latin typeface="Arial"/>
+              </a:rPr>
+              <a:t>■ </a:t>
+            </a:r>
+            <a:r>
+              <a:rPr sz="1200" b="0">
+                <a:solidFill>
+                  <a:srgbClr val="000000"/>
+                </a:solidFill>
+                <a:latin typeface="Arial"/>
+              </a:rPr>
+              <a:t>Кузнецова А.В., Петрулевич И.А. Топонимика как инструмент конструирования городской идентичности // Социолингвистика. 2021. № 2.</a:t>
+            </a:r>
+          </a:p>
+          <a:p>
+            <a:pPr>
+              <a:spcAft>
+                <a:spcPts val="900"/>
+              </a:spcAft>
+            </a:pPr>
+            <a:r>
+              <a:rPr sz="1200" b="1">
+                <a:solidFill>
+                  <a:srgbClr val="DB4928"/>
+                </a:solidFill>
+                <a:latin typeface="Arial"/>
+              </a:rPr>
+              <a:t>■ </a:t>
+            </a:r>
+            <a:r>
+              <a:rPr sz="1200" b="0">
+                <a:solidFill>
+                  <a:srgbClr val="000000"/>
+                </a:solidFill>
+                <a:latin typeface="Arial"/>
+              </a:rPr>
+              <a:t>Минюшова О.Н. Топонимы-логоэпистемы в русской ономастике. Казань, 2006.</a:t>
+            </a:r>
+          </a:p>
+          <a:p>
+            <a:pPr>
+              <a:spcAft>
+                <a:spcPts val="900"/>
+              </a:spcAft>
+            </a:pPr>
+            <a:r>
+              <a:rPr sz="1200" b="1">
+                <a:solidFill>
+                  <a:srgbClr val="DB4928"/>
+                </a:solidFill>
+                <a:latin typeface="Arial"/>
+              </a:rPr>
+              <a:t>■ </a:t>
+            </a:r>
+            <a:r>
+              <a:rPr sz="1200" b="0">
+                <a:solidFill>
+                  <a:srgbClr val="000000"/>
+                </a:solidFill>
+                <a:latin typeface="Arial"/>
+              </a:rPr>
+              <a:t>Никонов В.А. Введение в топонимику. М.: Наука, 1965.</a:t>
+            </a:r>
+          </a:p>
+          <a:p>
+            <a:pPr>
+              <a:spcAft>
+                <a:spcPts val="900"/>
+              </a:spcAft>
+            </a:pPr>
+            <a:r>
+              <a:rPr sz="1200" b="1">
+                <a:solidFill>
+                  <a:srgbClr val="DB4928"/>
+                </a:solidFill>
+                <a:latin typeface="Arial"/>
+              </a:rPr>
+              <a:t>■ </a:t>
+            </a:r>
+            <a:r>
+              <a:rPr sz="1200" b="0">
+                <a:solidFill>
+                  <a:srgbClr val="000000"/>
+                </a:solidFill>
+                <a:latin typeface="Arial"/>
+              </a:rPr>
+              <a:t>Суперанская А.В. Общая теория имён собственных. М.: Наука, 1973.</a:t>
+            </a:r>
+          </a:p>
+          <a:p>
+            <a:pPr>
+              <a:spcAft>
+                <a:spcPts val="900"/>
+              </a:spcAft>
+            </a:pPr>
+            <a:r>
+              <a:rPr sz="1200" b="1">
+                <a:solidFill>
+                  <a:srgbClr val="DB4928"/>
+                </a:solidFill>
+                <a:latin typeface="Arial"/>
+              </a:rPr>
+              <a:t>■ </a:t>
+            </a:r>
+            <a:r>
+              <a:rPr sz="1200" b="0">
+                <a:solidFill>
+                  <a:srgbClr val="000000"/>
+                </a:solidFill>
+                <a:latin typeface="Arial"/>
+              </a:rPr>
+              <a:t>Зыкова И.В. Полевой принцип описания значения топонима // Вопросы лингвистики. 2022. № 4.</a:t>
+            </a:r>
+          </a:p>
+          <a:p>
+            <a:pPr>
+              <a:spcAft>
+                <a:spcPts val="900"/>
+              </a:spcAft>
+            </a:pPr>
+            <a:r>
+              <a:rPr sz="1200" b="1">
+                <a:solidFill>
+                  <a:srgbClr val="DB4928"/>
+                </a:solidFill>
+                <a:latin typeface="Arial"/>
+              </a:rPr>
+              <a:t>■ </a:t>
+            </a:r>
+            <a:r>
+              <a:rPr sz="1200" b="0">
+                <a:solidFill>
+                  <a:srgbClr val="000000"/>
+                </a:solidFill>
+                <a:latin typeface="Arial"/>
+              </a:rPr>
+              <a:t>Анкета «Топонимы Санкт-Петербурга в лексиконе носителя русского языка», 2026.</a:t>
             </a:r>
           </a:p>
         </p:txBody>

--- a/my_project.pptx
+++ b/my_project.pptx
@@ -3093,7 +3093,7 @@
     <p:bg>
       <p:bgPr>
         <a:solidFill>
-          <a:srgbClr val="F6F8F4"/>
+          <a:srgbClr val="FAF8F4"/>
         </a:solidFill>
         <a:effectLst/>
       </p:bgPr>
@@ -3113,14 +3113,14 @@
         </p:nvSpPr>
         <p:spPr>
           <a:xfrm>
-            <a:off x="7498079" y="0"/>
-            <a:ext cx="4690872" cy="6858000"/>
+            <a:off x="0" y="0"/>
+            <a:ext cx="12191695" cy="201168"/>
           </a:xfrm>
           <a:prstGeom prst="rect">
             <a:avLst/>
           </a:prstGeom>
           <a:solidFill>
-            <a:srgbClr val="244128"/>
+            <a:srgbClr val="F8DCC6"/>
           </a:solidFill>
           <a:ln>
             <a:noFill/>
@@ -3156,14 +3156,14 @@
         </p:nvSpPr>
         <p:spPr>
           <a:xfrm>
-            <a:off x="7498079" y="0"/>
-            <a:ext cx="4690872" cy="1920240"/>
+            <a:off x="0" y="201168"/>
+            <a:ext cx="2834640" cy="109728"/>
           </a:xfrm>
           <a:prstGeom prst="rect">
             <a:avLst/>
           </a:prstGeom>
           <a:solidFill>
-            <a:srgbClr val="3AAA35"/>
+            <a:srgbClr val="60A678"/>
           </a:solidFill>
           <a:ln>
             <a:noFill/>
@@ -3199,14 +3199,14 @@
         </p:nvSpPr>
         <p:spPr>
           <a:xfrm>
-            <a:off x="7498079" y="1920240"/>
-            <a:ext cx="3063240" cy="1097280"/>
+            <a:off x="8732520" y="914400"/>
+            <a:ext cx="2377440" cy="2377440"/>
           </a:xfrm>
           <a:prstGeom prst="rect">
             <a:avLst/>
           </a:prstGeom>
           <a:solidFill>
-            <a:srgbClr val="56975B"/>
+            <a:srgbClr val="BEDEC7"/>
           </a:solidFill>
           <a:ln>
             <a:noFill/>
@@ -3242,14 +3242,14 @@
         </p:nvSpPr>
         <p:spPr>
           <a:xfrm>
-            <a:off x="10561320" y="1920240"/>
-            <a:ext cx="1627632" cy="1097280"/>
+            <a:off x="9601200" y="4160520"/>
+            <a:ext cx="1463040" cy="1463040"/>
           </a:xfrm>
           <a:prstGeom prst="rect">
             <a:avLst/>
           </a:prstGeom>
           <a:solidFill>
-            <a:srgbClr val="F39869"/>
+            <a:srgbClr val="F8DCC6"/>
           </a:solidFill>
           <a:ln>
             <a:noFill/>
@@ -3279,114 +3279,113 @@
       </p:sp>
       <p:sp>
         <p:nvSpPr>
-          <p:cNvPr id="6" name="Rectangle 5"/>
-          <p:cNvSpPr/>
-          <p:nvPr/>
-        </p:nvSpPr>
-        <p:spPr>
-          <a:xfrm>
-            <a:off x="7498079" y="3017520"/>
-            <a:ext cx="2011680" cy="3840480"/>
-          </a:xfrm>
-          <a:prstGeom prst="rect">
-            <a:avLst/>
-          </a:prstGeom>
-          <a:solidFill>
-            <a:srgbClr val="DB4928"/>
-          </a:solidFill>
-          <a:ln>
-            <a:noFill/>
-          </a:ln>
-        </p:spPr>
-        <p:style>
-          <a:lnRef idx="1">
-            <a:schemeClr val="accent1"/>
-          </a:lnRef>
-          <a:fillRef idx="3">
-            <a:schemeClr val="accent1"/>
-          </a:fillRef>
-          <a:effectRef idx="2">
-            <a:schemeClr val="accent1"/>
-          </a:effectRef>
-          <a:fontRef idx="minor">
-            <a:schemeClr val="lt1"/>
-          </a:fontRef>
-        </p:style>
-        <p:txBody>
-          <a:bodyPr rtlCol="0" anchor="ctr"/>
-          <a:lstStyle/>
-          <a:p>
-            <a:pPr algn="ctr"/>
-          </a:p>
-        </p:txBody>
-      </p:sp>
-      <p:sp>
-        <p:nvSpPr>
-          <p:cNvPr id="7" name="Rectangle 6"/>
-          <p:cNvSpPr/>
-          <p:nvPr/>
-        </p:nvSpPr>
-        <p:spPr>
-          <a:xfrm>
-            <a:off x="9509760" y="3017520"/>
-            <a:ext cx="2679192" cy="3840480"/>
-          </a:xfrm>
-          <a:prstGeom prst="rect">
-            <a:avLst/>
-          </a:prstGeom>
-          <a:solidFill>
-            <a:srgbClr val="244128"/>
-          </a:solidFill>
-          <a:ln>
-            <a:noFill/>
-          </a:ln>
-        </p:spPr>
-        <p:style>
-          <a:lnRef idx="1">
-            <a:schemeClr val="accent1"/>
-          </a:lnRef>
-          <a:fillRef idx="3">
-            <a:schemeClr val="accent1"/>
-          </a:fillRef>
-          <a:effectRef idx="2">
-            <a:schemeClr val="accent1"/>
-          </a:effectRef>
-          <a:fontRef idx="minor">
-            <a:schemeClr val="lt1"/>
-          </a:fontRef>
-        </p:style>
-        <p:txBody>
-          <a:bodyPr rtlCol="0" anchor="ctr"/>
-          <a:lstStyle/>
-          <a:p>
-            <a:pPr algn="ctr"/>
-          </a:p>
-        </p:txBody>
-      </p:sp>
-      <p:pic>
-        <p:nvPicPr>
-          <p:cNvPr id="8" name="Picture 7" descr="spbstu_logo_02.png"/>
-          <p:cNvPicPr>
-            <a:picLocks noChangeAspect="1"/>
-          </p:cNvPicPr>
-          <p:nvPr/>
-        </p:nvPicPr>
-        <p:blipFill>
-          <a:blip r:embed="rId2"/>
-          <a:stretch>
-            <a:fillRect/>
-          </a:stretch>
-        </p:blipFill>
-        <p:spPr>
-          <a:xfrm>
-            <a:off x="502920" y="310896"/>
-            <a:ext cx="1600200" cy="552069"/>
-          </a:xfrm>
-          <a:prstGeom prst="rect">
-            <a:avLst/>
-          </a:prstGeom>
-        </p:spPr>
-      </p:pic>
+          <p:cNvPr id="6" name="TextBox 5"/>
+          <p:cNvSpPr txBox="1"/>
+          <p:nvPr/>
+        </p:nvSpPr>
+        <p:spPr>
+          <a:xfrm>
+            <a:off x="685800" y="1097280"/>
+            <a:ext cx="6172200" cy="320040"/>
+          </a:xfrm>
+          <a:prstGeom prst="rect">
+            <a:avLst/>
+          </a:prstGeom>
+          <a:noFill/>
+        </p:spPr>
+        <p:txBody>
+          <a:bodyPr wrap="square">
+            <a:noAutofit/>
+          </a:bodyPr>
+          <a:lstStyle/>
+          <a:p>
+            <a:pPr algn="l"/>
+            <a:r>
+              <a:rPr sz="1400" b="0">
+                <a:solidFill>
+                  <a:srgbClr val="626262"/>
+                </a:solidFill>
+                <a:latin typeface="Arial"/>
+              </a:rPr>
+              <a:t>Курсовая работа · выступление 5–7 минут</a:t>
+            </a:r>
+          </a:p>
+        </p:txBody>
+      </p:sp>
+      <p:sp>
+        <p:nvSpPr>
+          <p:cNvPr id="7" name="TextBox 6"/>
+          <p:cNvSpPr txBox="1"/>
+          <p:nvPr/>
+        </p:nvSpPr>
+        <p:spPr>
+          <a:xfrm>
+            <a:off x="658368" y="1664208"/>
+            <a:ext cx="7360920" cy="1508760"/>
+          </a:xfrm>
+          <a:prstGeom prst="rect">
+            <a:avLst/>
+          </a:prstGeom>
+          <a:noFill/>
+        </p:spPr>
+        <p:txBody>
+          <a:bodyPr wrap="square">
+            <a:noAutofit/>
+          </a:bodyPr>
+          <a:lstStyle/>
+          <a:p>
+            <a:pPr algn="l"/>
+            <a:r>
+              <a:rPr sz="3400" b="1">
+                <a:solidFill>
+                  <a:srgbClr val="2D5644"/>
+                </a:solidFill>
+                <a:latin typeface="Arial"/>
+              </a:rPr>
+              <a:t>Топонимы Санкт-Петербурга</a:t>
+            </a:r>
+            <a:br/>
+            <a:r>
+              <a:t>в лексиконе носителя русского языка</a:t>
+            </a:r>
+          </a:p>
+        </p:txBody>
+      </p:sp>
+      <p:sp>
+        <p:nvSpPr>
+          <p:cNvPr id="8" name="TextBox 7"/>
+          <p:cNvSpPr txBox="1"/>
+          <p:nvPr/>
+        </p:nvSpPr>
+        <p:spPr>
+          <a:xfrm>
+            <a:off x="685800" y="3566160"/>
+            <a:ext cx="6903720" cy="594360"/>
+          </a:xfrm>
+          <a:prstGeom prst="rect">
+            <a:avLst/>
+          </a:prstGeom>
+          <a:noFill/>
+        </p:spPr>
+        <p:txBody>
+          <a:bodyPr wrap="square">
+            <a:noAutofit/>
+          </a:bodyPr>
+          <a:lstStyle/>
+          <a:p>
+            <a:pPr algn="l"/>
+            <a:r>
+              <a:rPr sz="1800" b="0">
+                <a:solidFill>
+                  <a:srgbClr val="000000"/>
+                </a:solidFill>
+                <a:latin typeface="Arial"/>
+              </a:rPr>
+              <a:t>Как официальные, разговорные и исторические названия распределяются между активным и пассивным запасом речи</a:t>
+            </a:r>
+          </a:p>
+        </p:txBody>
+      </p:sp>
       <p:sp>
         <p:nvSpPr>
           <p:cNvPr id="9" name="TextBox 8"/>
@@ -3395,117 +3394,8 @@
         </p:nvSpPr>
         <p:spPr>
           <a:xfrm>
-            <a:off x="566928" y="1225296"/>
-            <a:ext cx="6172200" cy="320040"/>
-          </a:xfrm>
-          <a:prstGeom prst="rect">
-            <a:avLst/>
-          </a:prstGeom>
-          <a:noFill/>
-        </p:spPr>
-        <p:txBody>
-          <a:bodyPr wrap="square">
-            <a:noAutofit/>
-          </a:bodyPr>
-          <a:lstStyle/>
-          <a:p>
-            <a:pPr algn="l"/>
-            <a:r>
-              <a:rPr sz="1400" b="0">
-                <a:solidFill>
-                  <a:srgbClr val="5C675F"/>
-                </a:solidFill>
-                <a:latin typeface="Arial"/>
-              </a:rPr>
-              <a:t>Курсовая работа · выступление 5–7 минут</a:t>
-            </a:r>
-          </a:p>
-        </p:txBody>
-      </p:sp>
-      <p:sp>
-        <p:nvSpPr>
-          <p:cNvPr id="10" name="TextBox 9"/>
-          <p:cNvSpPr txBox="1"/>
-          <p:nvPr/>
-        </p:nvSpPr>
-        <p:spPr>
-          <a:xfrm>
-            <a:off x="530352" y="1737360"/>
-            <a:ext cx="6629400" cy="1508760"/>
-          </a:xfrm>
-          <a:prstGeom prst="rect">
-            <a:avLst/>
-          </a:prstGeom>
-          <a:noFill/>
-        </p:spPr>
-        <p:txBody>
-          <a:bodyPr wrap="square">
-            <a:noAutofit/>
-          </a:bodyPr>
-          <a:lstStyle/>
-          <a:p>
-            <a:pPr algn="l"/>
-            <a:r>
-              <a:rPr sz="3400" b="1">
-                <a:solidFill>
-                  <a:srgbClr val="244128"/>
-                </a:solidFill>
-                <a:latin typeface="Arial"/>
-              </a:rPr>
-              <a:t>Топонимы Санкт-Петербурга</a:t>
-            </a:r>
-            <a:br/>
-            <a:r>
-              <a:t>в лексиконе носителя русского языка</a:t>
-            </a:r>
-          </a:p>
-        </p:txBody>
-      </p:sp>
-      <p:sp>
-        <p:nvSpPr>
-          <p:cNvPr id="11" name="TextBox 10"/>
-          <p:cNvSpPr txBox="1"/>
-          <p:nvPr/>
-        </p:nvSpPr>
-        <p:spPr>
-          <a:xfrm>
-            <a:off x="566928" y="3566160"/>
-            <a:ext cx="6217920" cy="594360"/>
-          </a:xfrm>
-          <a:prstGeom prst="rect">
-            <a:avLst/>
-          </a:prstGeom>
-          <a:noFill/>
-        </p:spPr>
-        <p:txBody>
-          <a:bodyPr wrap="square">
-            <a:noAutofit/>
-          </a:bodyPr>
-          <a:lstStyle/>
-          <a:p>
-            <a:pPr algn="l"/>
-            <a:r>
-              <a:rPr sz="1800" b="0">
-                <a:solidFill>
-                  <a:srgbClr val="000000"/>
-                </a:solidFill>
-                <a:latin typeface="Arial"/>
-              </a:rPr>
-              <a:t>Как официальные, разговорные и исторические названия распределяются между активным и пассивным запасом речи</a:t>
-            </a:r>
-          </a:p>
-        </p:txBody>
-      </p:sp>
-      <p:sp>
-        <p:nvSpPr>
-          <p:cNvPr id="12" name="TextBox 11"/>
-          <p:cNvSpPr txBox="1"/>
-          <p:nvPr/>
-        </p:nvSpPr>
-        <p:spPr>
-          <a:xfrm>
-            <a:off x="566928" y="4983480"/>
-            <a:ext cx="5852160" cy="1005840"/>
+            <a:off x="685800" y="4983480"/>
+            <a:ext cx="6583680" cy="1005840"/>
           </a:xfrm>
           <a:prstGeom prst="rect">
             <a:avLst/>
@@ -3526,7 +3416,7 @@
             <a:r>
               <a:rPr sz="1200" b="0">
                 <a:solidFill>
-                  <a:srgbClr val="5C675F"/>
+                  <a:srgbClr val="626262"/>
                 </a:solidFill>
                 <a:latin typeface="Arial"/>
               </a:rPr>
@@ -3542,7 +3432,7 @@
             <a:r>
               <a:rPr sz="1200" b="0">
                 <a:solidFill>
-                  <a:srgbClr val="5C675F"/>
+                  <a:srgbClr val="626262"/>
                 </a:solidFill>
                 <a:latin typeface="Arial"/>
               </a:rPr>
@@ -3558,7 +3448,7 @@
             <a:r>
               <a:rPr sz="1200" b="0">
                 <a:solidFill>
-                  <a:srgbClr val="5C675F"/>
+                  <a:srgbClr val="626262"/>
                 </a:solidFill>
                 <a:latin typeface="Arial"/>
               </a:rPr>
@@ -3569,7 +3459,7 @@
       </p:sp>
       <p:sp>
         <p:nvSpPr>
-          <p:cNvPr id="13" name="TextBox 12"/>
+          <p:cNvPr id="10" name="TextBox 9"/>
           <p:cNvSpPr txBox="1"/>
           <p:nvPr/>
         </p:nvSpPr>
@@ -3593,7 +3483,7 @@
             <a:r>
               <a:rPr sz="1000" b="0">
                 <a:solidFill>
-                  <a:srgbClr val="FFFFFF"/>
+                  <a:srgbClr val="626262"/>
                 </a:solidFill>
                 <a:latin typeface="Arial"/>
               </a:rPr>
@@ -3616,7 +3506,7 @@
     <p:bg>
       <p:bgPr>
         <a:solidFill>
-          <a:srgbClr val="F6F8F4"/>
+          <a:srgbClr val="FAF8F4"/>
         </a:solidFill>
         <a:effectLst/>
       </p:bgPr>
@@ -3637,13 +3527,13 @@
         <p:spPr>
           <a:xfrm>
             <a:off x="0" y="0"/>
-            <a:ext cx="12191695" cy="6858000"/>
+            <a:ext cx="12191695" cy="201168"/>
           </a:xfrm>
           <a:prstGeom prst="rect">
             <a:avLst/>
           </a:prstGeom>
           <a:solidFill>
-            <a:srgbClr val="244128"/>
+            <a:srgbClr val="F8DCC6"/>
           </a:solidFill>
           <a:ln>
             <a:noFill/>
@@ -3679,14 +3569,14 @@
         </p:nvSpPr>
         <p:spPr>
           <a:xfrm>
-            <a:off x="0" y="0"/>
-            <a:ext cx="3794760" cy="6858000"/>
+            <a:off x="0" y="201168"/>
+            <a:ext cx="2834640" cy="109728"/>
           </a:xfrm>
           <a:prstGeom prst="rect">
             <a:avLst/>
           </a:prstGeom>
           <a:solidFill>
-            <a:srgbClr val="3AAA35"/>
+            <a:srgbClr val="60A678"/>
           </a:solidFill>
           <a:ln>
             <a:noFill/>
@@ -3722,14 +3612,14 @@
         </p:nvSpPr>
         <p:spPr>
           <a:xfrm>
-            <a:off x="3794760" y="0"/>
-            <a:ext cx="1874519" cy="3429000"/>
+            <a:off x="8641080" y="1051560"/>
+            <a:ext cx="1920240" cy="1920240"/>
           </a:xfrm>
           <a:prstGeom prst="rect">
             <a:avLst/>
           </a:prstGeom>
           <a:solidFill>
-            <a:srgbClr val="56975B"/>
+            <a:srgbClr val="BEDEC7"/>
           </a:solidFill>
           <a:ln>
             <a:noFill/>
@@ -3765,14 +3655,14 @@
         </p:nvSpPr>
         <p:spPr>
           <a:xfrm>
-            <a:off x="3794760" y="3429000"/>
-            <a:ext cx="1874519" cy="3429000"/>
+            <a:off x="9646920" y="4023360"/>
+            <a:ext cx="1417320" cy="1417320"/>
           </a:xfrm>
           <a:prstGeom prst="rect">
             <a:avLst/>
           </a:prstGeom>
           <a:solidFill>
-            <a:srgbClr val="DB4928"/>
+            <a:srgbClr val="F8DCC6"/>
           </a:solidFill>
           <a:ln>
             <a:noFill/>
@@ -3800,30 +3690,41 @@
           </a:p>
         </p:txBody>
       </p:sp>
-      <p:pic>
-        <p:nvPicPr>
-          <p:cNvPr id="6" name="Picture 5" descr="spbstu_logo_02.png"/>
-          <p:cNvPicPr>
-            <a:picLocks noChangeAspect="1"/>
-          </p:cNvPicPr>
-          <p:nvPr/>
-        </p:nvPicPr>
-        <p:blipFill>
-          <a:blip r:embed="rId2"/>
-          <a:stretch>
-            <a:fillRect/>
-          </a:stretch>
-        </p:blipFill>
-        <p:spPr>
-          <a:xfrm>
-            <a:off x="502920" y="310896"/>
-            <a:ext cx="1600200" cy="552069"/>
-          </a:xfrm>
-          <a:prstGeom prst="rect">
-            <a:avLst/>
-          </a:prstGeom>
-        </p:spPr>
-      </p:pic>
+      <p:sp>
+        <p:nvSpPr>
+          <p:cNvPr id="6" name="TextBox 5"/>
+          <p:cNvSpPr txBox="1"/>
+          <p:nvPr/>
+        </p:nvSpPr>
+        <p:spPr>
+          <a:xfrm>
+            <a:off x="914400" y="2240280"/>
+            <a:ext cx="7680960" cy="777240"/>
+          </a:xfrm>
+          <a:prstGeom prst="rect">
+            <a:avLst/>
+          </a:prstGeom>
+          <a:noFill/>
+        </p:spPr>
+        <p:txBody>
+          <a:bodyPr wrap="square">
+            <a:noAutofit/>
+          </a:bodyPr>
+          <a:lstStyle/>
+          <a:p>
+            <a:pPr algn="l"/>
+            <a:r>
+              <a:rPr sz="3800" b="1">
+                <a:solidFill>
+                  <a:srgbClr val="2D5644"/>
+                </a:solidFill>
+                <a:latin typeface="Arial"/>
+              </a:rPr>
+              <a:t>Спасибо за внимание!</a:t>
+            </a:r>
+          </a:p>
+        </p:txBody>
+      </p:sp>
       <p:sp>
         <p:nvSpPr>
           <p:cNvPr id="7" name="TextBox 6"/>
@@ -3832,8 +3733,8 @@
         </p:nvSpPr>
         <p:spPr>
           <a:xfrm>
-            <a:off x="6217920" y="2148840"/>
-            <a:ext cx="4846320" cy="777240"/>
+            <a:off x="960120" y="3154680"/>
+            <a:ext cx="6583680" cy="502920"/>
           </a:xfrm>
           <a:prstGeom prst="rect">
             <a:avLst/>
@@ -3848,13 +3749,13 @@
           <a:p>
             <a:pPr algn="l"/>
             <a:r>
-              <a:rPr sz="3800" b="1">
-                <a:solidFill>
-                  <a:srgbClr val="FFFFFF"/>
-                </a:solidFill>
-                <a:latin typeface="Arial"/>
-              </a:rPr>
-              <a:t>Спасибо за внимание!</a:t>
+              <a:rPr sz="2200" b="0">
+                <a:solidFill>
+                  <a:srgbClr val="000000"/>
+                </a:solidFill>
+                <a:latin typeface="Arial"/>
+              </a:rPr>
+              <a:t>Готов ответить на вопросы</a:t>
             </a:r>
           </a:p>
         </p:txBody>
@@ -3867,8 +3768,8 @@
         </p:nvSpPr>
         <p:spPr>
           <a:xfrm>
-            <a:off x="6263640" y="3063240"/>
-            <a:ext cx="4526280" cy="502920"/>
+            <a:off x="960120" y="5074920"/>
+            <a:ext cx="6766560" cy="320040"/>
           </a:xfrm>
           <a:prstGeom prst="rect">
             <a:avLst/>
@@ -3883,13 +3784,13 @@
           <a:p>
             <a:pPr algn="l"/>
             <a:r>
-              <a:rPr sz="2200" b="0">
-                <a:solidFill>
-                  <a:srgbClr val="FFFFFF"/>
-                </a:solidFill>
-                <a:latin typeface="Arial"/>
-              </a:rPr>
-              <a:t>Готов ответить на вопросы</a:t>
+              <a:rPr sz="1200" b="0">
+                <a:solidFill>
+                  <a:srgbClr val="626262"/>
+                </a:solidFill>
+                <a:latin typeface="Arial"/>
+              </a:rPr>
+              <a:t>Курсовая работа · Топонимы Санкт-Петербурга</a:t>
             </a:r>
           </a:p>
         </p:txBody>
@@ -3902,8 +3803,8 @@
         </p:nvSpPr>
         <p:spPr>
           <a:xfrm>
-            <a:off x="6263640" y="5074920"/>
-            <a:ext cx="4754880" cy="320040"/>
+            <a:off x="10744200" y="6355080"/>
+            <a:ext cx="822960" cy="228600"/>
           </a:xfrm>
           <a:prstGeom prst="rect">
             <a:avLst/>
@@ -3916,46 +3817,11 @@
           </a:bodyPr>
           <a:lstStyle/>
           <a:p>
-            <a:pPr algn="l"/>
-            <a:r>
-              <a:rPr sz="1200" b="0">
-                <a:solidFill>
-                  <a:srgbClr val="DFEDDE"/>
-                </a:solidFill>
-                <a:latin typeface="Arial"/>
-              </a:rPr>
-              <a:t>Курсовая работа · Топонимы Санкт-Петербурга</a:t>
-            </a:r>
-          </a:p>
-        </p:txBody>
-      </p:sp>
-      <p:sp>
-        <p:nvSpPr>
-          <p:cNvPr id="10" name="TextBox 9"/>
-          <p:cNvSpPr txBox="1"/>
-          <p:nvPr/>
-        </p:nvSpPr>
-        <p:spPr>
-          <a:xfrm>
-            <a:off x="10744200" y="6355080"/>
-            <a:ext cx="822960" cy="228600"/>
-          </a:xfrm>
-          <a:prstGeom prst="rect">
-            <a:avLst/>
-          </a:prstGeom>
-          <a:noFill/>
-        </p:spPr>
-        <p:txBody>
-          <a:bodyPr wrap="square">
-            <a:noAutofit/>
-          </a:bodyPr>
-          <a:lstStyle/>
-          <a:p>
             <a:pPr algn="r"/>
             <a:r>
               <a:rPr sz="1000" b="0">
                 <a:solidFill>
-                  <a:srgbClr val="FFFFFF"/>
+                  <a:srgbClr val="626262"/>
                 </a:solidFill>
                 <a:latin typeface="Arial"/>
               </a:rPr>
@@ -3978,7 +3844,7 @@
     <p:bg>
       <p:bgPr>
         <a:solidFill>
-          <a:srgbClr val="F6F8F4"/>
+          <a:srgbClr val="FAF8F4"/>
         </a:solidFill>
         <a:effectLst/>
       </p:bgPr>
@@ -3990,30 +3856,41 @@
         <p:nvPr/>
       </p:nvGrpSpPr>
       <p:grpSpPr/>
-      <p:pic>
-        <p:nvPicPr>
-          <p:cNvPr id="2" name="Picture 1" descr="spbstu_logo_02.png"/>
-          <p:cNvPicPr>
-            <a:picLocks noChangeAspect="1"/>
-          </p:cNvPicPr>
-          <p:nvPr/>
-        </p:nvPicPr>
-        <p:blipFill>
-          <a:blip r:embed="rId2"/>
-          <a:stretch>
-            <a:fillRect/>
-          </a:stretch>
-        </p:blipFill>
-        <p:spPr>
-          <a:xfrm>
-            <a:off x="502920" y="310896"/>
-            <a:ext cx="1600200" cy="552069"/>
-          </a:xfrm>
-          <a:prstGeom prst="rect">
-            <a:avLst/>
-          </a:prstGeom>
-        </p:spPr>
-      </p:pic>
+      <p:sp>
+        <p:nvSpPr>
+          <p:cNvPr id="2" name="TextBox 1"/>
+          <p:cNvSpPr txBox="1"/>
+          <p:nvPr/>
+        </p:nvSpPr>
+        <p:spPr>
+          <a:xfrm>
+            <a:off x="685800" y="320040"/>
+            <a:ext cx="6949440" cy="310896"/>
+          </a:xfrm>
+          <a:prstGeom prst="rect">
+            <a:avLst/>
+          </a:prstGeom>
+          <a:noFill/>
+        </p:spPr>
+        <p:txBody>
+          <a:bodyPr wrap="square">
+            <a:noAutofit/>
+          </a:bodyPr>
+          <a:lstStyle/>
+          <a:p>
+            <a:pPr algn="l"/>
+            <a:r>
+              <a:rPr sz="1000" b="0">
+                <a:solidFill>
+                  <a:srgbClr val="626262"/>
+                </a:solidFill>
+                <a:latin typeface="Arial"/>
+              </a:rPr>
+              <a:t>Актуальность и объект исследования</a:t>
+            </a:r>
+          </a:p>
+        </p:txBody>
+      </p:sp>
       <p:sp>
         <p:nvSpPr>
           <p:cNvPr id="3" name="TextBox 2"/>
@@ -4022,8 +3899,8 @@
         </p:nvSpPr>
         <p:spPr>
           <a:xfrm>
-            <a:off x="2743200" y="320040"/>
-            <a:ext cx="6217920" cy="310896"/>
+            <a:off x="685800" y="630936"/>
+            <a:ext cx="8001000" cy="475488"/>
           </a:xfrm>
           <a:prstGeom prst="rect">
             <a:avLst/>
@@ -4038,44 +3915,9 @@
           <a:p>
             <a:pPr algn="l"/>
             <a:r>
-              <a:rPr sz="1000" b="0">
-                <a:solidFill>
-                  <a:srgbClr val="5C675F"/>
-                </a:solidFill>
-                <a:latin typeface="Arial"/>
-              </a:rPr>
-              <a:t>Актуальность и объект исследования</a:t>
-            </a:r>
-          </a:p>
-        </p:txBody>
-      </p:sp>
-      <p:sp>
-        <p:nvSpPr>
-          <p:cNvPr id="4" name="TextBox 3"/>
-          <p:cNvSpPr txBox="1"/>
-          <p:nvPr/>
-        </p:nvSpPr>
-        <p:spPr>
-          <a:xfrm>
-            <a:off x="2743200" y="630936"/>
-            <a:ext cx="7132320" cy="475488"/>
-          </a:xfrm>
-          <a:prstGeom prst="rect">
-            <a:avLst/>
-          </a:prstGeom>
-          <a:noFill/>
-        </p:spPr>
-        <p:txBody>
-          <a:bodyPr wrap="square">
-            <a:noAutofit/>
-          </a:bodyPr>
-          <a:lstStyle/>
-          <a:p>
-            <a:pPr algn="l"/>
-            <a:r>
               <a:rPr sz="2400" b="1">
                 <a:solidFill>
-                  <a:srgbClr val="244128"/>
+                  <a:srgbClr val="2D5644"/>
                 </a:solidFill>
                 <a:latin typeface="Arial"/>
               </a:rPr>
@@ -4086,20 +3928,20 @@
       </p:sp>
       <p:sp>
         <p:nvSpPr>
-          <p:cNvPr id="5" name="Rectangle 4"/>
+          <p:cNvPr id="4" name="Rectangle 3"/>
           <p:cNvSpPr/>
           <p:nvPr/>
         </p:nvSpPr>
         <p:spPr>
           <a:xfrm>
-            <a:off x="502920" y="1170432"/>
-            <a:ext cx="11155680" cy="32004"/>
+            <a:off x="685800" y="1170432"/>
+            <a:ext cx="10515600" cy="22860"/>
           </a:xfrm>
           <a:prstGeom prst="rect">
             <a:avLst/>
           </a:prstGeom>
           <a:solidFill>
-            <a:srgbClr val="3AAA35"/>
+            <a:srgbClr val="F8DCC6"/>
           </a:solidFill>
           <a:ln>
             <a:noFill/>
@@ -4129,14 +3971,49 @@
       </p:sp>
       <p:sp>
         <p:nvSpPr>
+          <p:cNvPr id="5" name="TextBox 4"/>
+          <p:cNvSpPr txBox="1"/>
+          <p:nvPr/>
+        </p:nvSpPr>
+        <p:spPr>
+          <a:xfrm>
+            <a:off x="9464040" y="411480"/>
+            <a:ext cx="2194560" cy="310896"/>
+          </a:xfrm>
+          <a:prstGeom prst="rect">
+            <a:avLst/>
+          </a:prstGeom>
+          <a:noFill/>
+        </p:spPr>
+        <p:txBody>
+          <a:bodyPr wrap="square">
+            <a:noAutofit/>
+          </a:bodyPr>
+          <a:lstStyle/>
+          <a:p>
+            <a:pPr algn="r"/>
+            <a:r>
+              <a:rPr sz="1000" b="0">
+                <a:solidFill>
+                  <a:srgbClr val="626262"/>
+                </a:solidFill>
+                <a:latin typeface="Arial"/>
+              </a:rPr>
+              <a:t>0:30–1:15</a:t>
+            </a:r>
+          </a:p>
+        </p:txBody>
+      </p:sp>
+      <p:sp>
+        <p:nvSpPr>
           <p:cNvPr id="6" name="TextBox 5"/>
           <p:cNvSpPr txBox="1"/>
           <p:nvPr/>
         </p:nvSpPr>
         <p:spPr>
           <a:xfrm>
-            <a:off x="9464040" y="411480"/>
-            <a:ext cx="2194560" cy="310896"/>
+            <a:off x="11018520" y="6355080"/>
+            <a:ext cx="640080" cy="228600"/>
           </a:xfrm>
           <a:prstGeom prst="rect">
             <a:avLst/>
@@ -4153,42 +4030,7 @@
             <a:r>
               <a:rPr sz="1000" b="0">
                 <a:solidFill>
-                  <a:srgbClr val="5C675F"/>
-                </a:solidFill>
-                <a:latin typeface="Arial"/>
-              </a:rPr>
-              <a:t>0:30–1:15</a:t>
-            </a:r>
-          </a:p>
-        </p:txBody>
-      </p:sp>
-      <p:sp>
-        <p:nvSpPr>
-          <p:cNvPr id="7" name="TextBox 6"/>
-          <p:cNvSpPr txBox="1"/>
-          <p:nvPr/>
-        </p:nvSpPr>
-        <p:spPr>
-          <a:xfrm>
-            <a:off x="11018520" y="6355080"/>
-            <a:ext cx="640080" cy="228600"/>
-          </a:xfrm>
-          <a:prstGeom prst="rect">
-            <a:avLst/>
-          </a:prstGeom>
-          <a:noFill/>
-        </p:spPr>
-        <p:txBody>
-          <a:bodyPr wrap="square">
-            <a:noAutofit/>
-          </a:bodyPr>
-          <a:lstStyle/>
-          <a:p>
-            <a:pPr algn="r"/>
-            <a:r>
-              <a:rPr sz="1000" b="0">
-                <a:solidFill>
-                  <a:srgbClr val="5C675F"/>
+                  <a:srgbClr val="626262"/>
                 </a:solidFill>
                 <a:latin typeface="Arial"/>
               </a:rPr>
@@ -4199,7 +4041,7 @@
       </p:sp>
       <p:sp>
         <p:nvSpPr>
-          <p:cNvPr id="8" name="Rectangle 7"/>
+          <p:cNvPr id="7" name="Rectangle 6"/>
           <p:cNvSpPr/>
           <p:nvPr/>
         </p:nvSpPr>
@@ -4242,7 +4084,7 @@
       </p:sp>
       <p:sp>
         <p:nvSpPr>
-          <p:cNvPr id="9" name="TextBox 8"/>
+          <p:cNvPr id="8" name="TextBox 7"/>
           <p:cNvSpPr txBox="1"/>
           <p:nvPr/>
         </p:nvSpPr>
@@ -4266,7 +4108,7 @@
             <a:r>
               <a:rPr sz="2000" b="1">
                 <a:solidFill>
-                  <a:srgbClr val="244128"/>
+                  <a:srgbClr val="2D5644"/>
                 </a:solidFill>
                 <a:latin typeface="Arial"/>
               </a:rPr>
@@ -4277,7 +4119,7 @@
       </p:sp>
       <p:sp>
         <p:nvSpPr>
-          <p:cNvPr id="10" name="TextBox 9"/>
+          <p:cNvPr id="9" name="TextBox 8"/>
           <p:cNvSpPr txBox="1"/>
           <p:nvPr/>
         </p:nvSpPr>
@@ -4305,11 +4147,11 @@
             <a:r>
               <a:rPr sz="1700" b="1">
                 <a:solidFill>
-                  <a:srgbClr val="3AAA35"/>
-                </a:solidFill>
-                <a:latin typeface="Arial"/>
-              </a:rPr>
-              <a:t>■ </a:t>
+                  <a:srgbClr val="60A678"/>
+                </a:solidFill>
+                <a:latin typeface="Arial"/>
+              </a:rPr>
+              <a:t>• </a:t>
             </a:r>
             <a:r>
               <a:rPr sz="1700" b="0">
@@ -4330,11 +4172,11 @@
             <a:r>
               <a:rPr sz="1700" b="1">
                 <a:solidFill>
-                  <a:srgbClr val="3AAA35"/>
-                </a:solidFill>
-                <a:latin typeface="Arial"/>
-              </a:rPr>
-              <a:t>■ </a:t>
+                  <a:srgbClr val="60A678"/>
+                </a:solidFill>
+                <a:latin typeface="Arial"/>
+              </a:rPr>
+              <a:t>• </a:t>
             </a:r>
             <a:r>
               <a:rPr sz="1700" b="0">
@@ -4355,11 +4197,11 @@
             <a:r>
               <a:rPr sz="1700" b="1">
                 <a:solidFill>
-                  <a:srgbClr val="3AAA35"/>
-                </a:solidFill>
-                <a:latin typeface="Arial"/>
-              </a:rPr>
-              <a:t>■ </a:t>
+                  <a:srgbClr val="60A678"/>
+                </a:solidFill>
+                <a:latin typeface="Arial"/>
+              </a:rPr>
+              <a:t>• </a:t>
             </a:r>
             <a:r>
               <a:rPr sz="1700" b="0">
@@ -4369,6 +4211,41 @@
                 <a:latin typeface="Arial"/>
               </a:rPr>
               <a:t>Для лингвистики важно понять, какие названия реально живут в речи, а какие остаются культурной отсылкой.</a:t>
+            </a:r>
+          </a:p>
+        </p:txBody>
+      </p:sp>
+      <p:sp>
+        <p:nvSpPr>
+          <p:cNvPr id="10" name="TextBox 9"/>
+          <p:cNvSpPr txBox="1"/>
+          <p:nvPr/>
+        </p:nvSpPr>
+        <p:spPr>
+          <a:xfrm>
+            <a:off x="1005840" y="5166360"/>
+            <a:ext cx="5806440" cy="320040"/>
+          </a:xfrm>
+          <a:prstGeom prst="rect">
+            <a:avLst/>
+          </a:prstGeom>
+          <a:noFill/>
+        </p:spPr>
+        <p:txBody>
+          <a:bodyPr wrap="square">
+            <a:noAutofit/>
+          </a:bodyPr>
+          <a:lstStyle/>
+          <a:p>
+            <a:pPr algn="l"/>
+            <a:r>
+              <a:rPr sz="1600" b="1">
+                <a:solidFill>
+                  <a:srgbClr val="E6915F"/>
+                </a:solidFill>
+                <a:latin typeface="Arial"/>
+              </a:rPr>
+              <a:t>Проблемный вопрос</a:t>
             </a:r>
           </a:p>
         </p:txBody>
@@ -4381,7 +4258,7 @@
         </p:nvSpPr>
         <p:spPr>
           <a:xfrm>
-            <a:off x="1005840" y="5166360"/>
+            <a:off x="1005840" y="5468112"/>
             <a:ext cx="5806440" cy="320040"/>
           </a:xfrm>
           <a:prstGeom prst="rect">
@@ -4397,41 +4274,6 @@
           <a:p>
             <a:pPr algn="l"/>
             <a:r>
-              <a:rPr sz="1600" b="1">
-                <a:solidFill>
-                  <a:srgbClr val="DB4928"/>
-                </a:solidFill>
-                <a:latin typeface="Arial"/>
-              </a:rPr>
-              <a:t>Проблемный вопрос</a:t>
-            </a:r>
-          </a:p>
-        </p:txBody>
-      </p:sp>
-      <p:sp>
-        <p:nvSpPr>
-          <p:cNvPr id="12" name="TextBox 11"/>
-          <p:cNvSpPr txBox="1"/>
-          <p:nvPr/>
-        </p:nvSpPr>
-        <p:spPr>
-          <a:xfrm>
-            <a:off x="1005840" y="5468112"/>
-            <a:ext cx="5806440" cy="320040"/>
-          </a:xfrm>
-          <a:prstGeom prst="rect">
-            <a:avLst/>
-          </a:prstGeom>
-          <a:noFill/>
-        </p:spPr>
-        <p:txBody>
-          <a:bodyPr wrap="square">
-            <a:noAutofit/>
-          </a:bodyPr>
-          <a:lstStyle/>
-          <a:p>
-            <a:pPr algn="l"/>
-            <a:r>
               <a:rPr sz="1400" b="0">
                 <a:solidFill>
                   <a:srgbClr val="000000"/>
@@ -4445,7 +4287,7 @@
       </p:sp>
       <p:sp>
         <p:nvSpPr>
-          <p:cNvPr id="13" name="Rectangle 12"/>
+          <p:cNvPr id="12" name="Rectangle 11"/>
           <p:cNvSpPr/>
           <p:nvPr/>
         </p:nvSpPr>
@@ -4458,7 +4300,7 @@
             <a:avLst/>
           </a:prstGeom>
           <a:solidFill>
-            <a:srgbClr val="244128"/>
+            <a:srgbClr val="FFFFFF"/>
           </a:solidFill>
           <a:ln>
             <a:noFill/>
@@ -4488,90 +4330,20 @@
       </p:sp>
       <p:sp>
         <p:nvSpPr>
-          <p:cNvPr id="14" name="TextBox 13"/>
-          <p:cNvSpPr txBox="1"/>
-          <p:nvPr/>
-        </p:nvSpPr>
-        <p:spPr>
-          <a:xfrm>
-            <a:off x="7909560" y="1828800"/>
-            <a:ext cx="3154680" cy="320040"/>
-          </a:xfrm>
-          <a:prstGeom prst="rect">
-            <a:avLst/>
-          </a:prstGeom>
-          <a:noFill/>
-        </p:spPr>
-        <p:txBody>
-          <a:bodyPr wrap="square">
-            <a:noAutofit/>
-          </a:bodyPr>
-          <a:lstStyle/>
-          <a:p>
-            <a:pPr algn="l"/>
-            <a:r>
-              <a:rPr sz="1800" b="1">
-                <a:solidFill>
-                  <a:srgbClr val="FFFFFF"/>
-                </a:solidFill>
-                <a:latin typeface="Arial"/>
-              </a:rPr>
-              <a:t>Объект</a:t>
-            </a:r>
-          </a:p>
-        </p:txBody>
-      </p:sp>
-      <p:sp>
-        <p:nvSpPr>
-          <p:cNvPr id="15" name="TextBox 14"/>
-          <p:cNvSpPr txBox="1"/>
-          <p:nvPr/>
-        </p:nvSpPr>
-        <p:spPr>
-          <a:xfrm>
-            <a:off x="7909560" y="2240280"/>
-            <a:ext cx="3154680" cy="777240"/>
-          </a:xfrm>
-          <a:prstGeom prst="rect">
-            <a:avLst/>
-          </a:prstGeom>
-          <a:noFill/>
-        </p:spPr>
-        <p:txBody>
-          <a:bodyPr wrap="square">
-            <a:noAutofit/>
-          </a:bodyPr>
-          <a:lstStyle/>
-          <a:p>
-            <a:pPr algn="l"/>
-            <a:r>
-              <a:rPr sz="1600" b="0">
-                <a:solidFill>
-                  <a:srgbClr val="FFFFFF"/>
-                </a:solidFill>
-                <a:latin typeface="Arial"/>
-              </a:rPr>
-              <a:t>топонимическая лексика в речи носителей русского языка</a:t>
-            </a:r>
-          </a:p>
-        </p:txBody>
-      </p:sp>
-      <p:sp>
-        <p:nvSpPr>
-          <p:cNvPr id="16" name="Rectangle 15"/>
+          <p:cNvPr id="13" name="Rectangle 12"/>
           <p:cNvSpPr/>
           <p:nvPr/>
         </p:nvSpPr>
         <p:spPr>
           <a:xfrm>
-            <a:off x="7909560" y="3246120"/>
-            <a:ext cx="3063240" cy="45720"/>
+            <a:off x="7543800" y="1508760"/>
+            <a:ext cx="3886200" cy="128016"/>
           </a:xfrm>
           <a:prstGeom prst="rect">
             <a:avLst/>
           </a:prstGeom>
           <a:solidFill>
-            <a:srgbClr val="F39869"/>
+            <a:srgbClr val="F8DCC6"/>
           </a:solidFill>
           <a:ln>
             <a:noFill/>
@@ -4601,6 +4373,119 @@
       </p:sp>
       <p:sp>
         <p:nvSpPr>
+          <p:cNvPr id="14" name="TextBox 13"/>
+          <p:cNvSpPr txBox="1"/>
+          <p:nvPr/>
+        </p:nvSpPr>
+        <p:spPr>
+          <a:xfrm>
+            <a:off x="7909560" y="1828800"/>
+            <a:ext cx="3154680" cy="320040"/>
+          </a:xfrm>
+          <a:prstGeom prst="rect">
+            <a:avLst/>
+          </a:prstGeom>
+          <a:noFill/>
+        </p:spPr>
+        <p:txBody>
+          <a:bodyPr wrap="square">
+            <a:noAutofit/>
+          </a:bodyPr>
+          <a:lstStyle/>
+          <a:p>
+            <a:pPr algn="l"/>
+            <a:r>
+              <a:rPr sz="1800" b="1">
+                <a:solidFill>
+                  <a:srgbClr val="2D5644"/>
+                </a:solidFill>
+                <a:latin typeface="Arial"/>
+              </a:rPr>
+              <a:t>Объект</a:t>
+            </a:r>
+          </a:p>
+        </p:txBody>
+      </p:sp>
+      <p:sp>
+        <p:nvSpPr>
+          <p:cNvPr id="15" name="TextBox 14"/>
+          <p:cNvSpPr txBox="1"/>
+          <p:nvPr/>
+        </p:nvSpPr>
+        <p:spPr>
+          <a:xfrm>
+            <a:off x="7909560" y="2240280"/>
+            <a:ext cx="3154680" cy="777240"/>
+          </a:xfrm>
+          <a:prstGeom prst="rect">
+            <a:avLst/>
+          </a:prstGeom>
+          <a:noFill/>
+        </p:spPr>
+        <p:txBody>
+          <a:bodyPr wrap="square">
+            <a:noAutofit/>
+          </a:bodyPr>
+          <a:lstStyle/>
+          <a:p>
+            <a:pPr algn="l"/>
+            <a:r>
+              <a:rPr sz="1600" b="0">
+                <a:solidFill>
+                  <a:srgbClr val="000000"/>
+                </a:solidFill>
+                <a:latin typeface="Arial"/>
+              </a:rPr>
+              <a:t>топонимическая лексика в речи носителей русского языка</a:t>
+            </a:r>
+          </a:p>
+        </p:txBody>
+      </p:sp>
+      <p:sp>
+        <p:nvSpPr>
+          <p:cNvPr id="16" name="Rectangle 15"/>
+          <p:cNvSpPr/>
+          <p:nvPr/>
+        </p:nvSpPr>
+        <p:spPr>
+          <a:xfrm>
+            <a:off x="7909560" y="3246120"/>
+            <a:ext cx="3063240" cy="27432"/>
+          </a:xfrm>
+          <a:prstGeom prst="rect">
+            <a:avLst/>
+          </a:prstGeom>
+          <a:solidFill>
+            <a:srgbClr val="BEDEC7"/>
+          </a:solidFill>
+          <a:ln>
+            <a:noFill/>
+          </a:ln>
+        </p:spPr>
+        <p:style>
+          <a:lnRef idx="1">
+            <a:schemeClr val="accent1"/>
+          </a:lnRef>
+          <a:fillRef idx="3">
+            <a:schemeClr val="accent1"/>
+          </a:fillRef>
+          <a:effectRef idx="2">
+            <a:schemeClr val="accent1"/>
+          </a:effectRef>
+          <a:fontRef idx="minor">
+            <a:schemeClr val="lt1"/>
+          </a:fontRef>
+        </p:style>
+        <p:txBody>
+          <a:bodyPr rtlCol="0" anchor="ctr"/>
+          <a:lstStyle/>
+          <a:p>
+            <a:pPr algn="ctr"/>
+          </a:p>
+        </p:txBody>
+      </p:sp>
+      <p:sp>
+        <p:nvSpPr>
           <p:cNvPr id="17" name="TextBox 16"/>
           <p:cNvSpPr txBox="1"/>
           <p:nvPr/>
@@ -4625,7 +4510,7 @@
             <a:r>
               <a:rPr sz="1800" b="1">
                 <a:solidFill>
-                  <a:srgbClr val="FFFFFF"/>
+                  <a:srgbClr val="2D5644"/>
                 </a:solidFill>
                 <a:latin typeface="Arial"/>
               </a:rPr>
@@ -4660,7 +4545,7 @@
             <a:r>
               <a:rPr sz="1600" b="0">
                 <a:solidFill>
-                  <a:srgbClr val="FFFFFF"/>
+                  <a:srgbClr val="000000"/>
                 </a:solidFill>
                 <a:latin typeface="Arial"/>
               </a:rPr>
@@ -4683,7 +4568,7 @@
     <p:bg>
       <p:bgPr>
         <a:solidFill>
-          <a:srgbClr val="F6F8F4"/>
+          <a:srgbClr val="FAF8F4"/>
         </a:solidFill>
         <a:effectLst/>
       </p:bgPr>
@@ -4695,30 +4580,41 @@
         <p:nvPr/>
       </p:nvGrpSpPr>
       <p:grpSpPr/>
-      <p:pic>
-        <p:nvPicPr>
-          <p:cNvPr id="2" name="Picture 1" descr="spbstu_logo_02.png"/>
-          <p:cNvPicPr>
-            <a:picLocks noChangeAspect="1"/>
-          </p:cNvPicPr>
-          <p:nvPr/>
-        </p:nvPicPr>
-        <p:blipFill>
-          <a:blip r:embed="rId2"/>
-          <a:stretch>
-            <a:fillRect/>
-          </a:stretch>
-        </p:blipFill>
-        <p:spPr>
-          <a:xfrm>
-            <a:off x="502920" y="310896"/>
-            <a:ext cx="1600200" cy="552069"/>
-          </a:xfrm>
-          <a:prstGeom prst="rect">
-            <a:avLst/>
-          </a:prstGeom>
-        </p:spPr>
-      </p:pic>
+      <p:sp>
+        <p:nvSpPr>
+          <p:cNvPr id="2" name="TextBox 1"/>
+          <p:cNvSpPr txBox="1"/>
+          <p:nvPr/>
+        </p:nvSpPr>
+        <p:spPr>
+          <a:xfrm>
+            <a:off x="685800" y="320040"/>
+            <a:ext cx="6949440" cy="310896"/>
+          </a:xfrm>
+          <a:prstGeom prst="rect">
+            <a:avLst/>
+          </a:prstGeom>
+          <a:noFill/>
+        </p:spPr>
+        <p:txBody>
+          <a:bodyPr wrap="square">
+            <a:noAutofit/>
+          </a:bodyPr>
+          <a:lstStyle/>
+          <a:p>
+            <a:pPr algn="l"/>
+            <a:r>
+              <a:rPr sz="1000" b="0">
+                <a:solidFill>
+                  <a:srgbClr val="626262"/>
+                </a:solidFill>
+                <a:latin typeface="Arial"/>
+              </a:rPr>
+              <a:t>Логика исследования</a:t>
+            </a:r>
+          </a:p>
+        </p:txBody>
+      </p:sp>
       <p:sp>
         <p:nvSpPr>
           <p:cNvPr id="3" name="TextBox 2"/>
@@ -4727,8 +4623,8 @@
         </p:nvSpPr>
         <p:spPr>
           <a:xfrm>
-            <a:off x="2743200" y="320040"/>
-            <a:ext cx="6217920" cy="310896"/>
+            <a:off x="685800" y="630936"/>
+            <a:ext cx="8001000" cy="475488"/>
           </a:xfrm>
           <a:prstGeom prst="rect">
             <a:avLst/>
@@ -4743,44 +4639,9 @@
           <a:p>
             <a:pPr algn="l"/>
             <a:r>
-              <a:rPr sz="1000" b="0">
-                <a:solidFill>
-                  <a:srgbClr val="5C675F"/>
-                </a:solidFill>
-                <a:latin typeface="Arial"/>
-              </a:rPr>
-              <a:t>Логика исследования</a:t>
-            </a:r>
-          </a:p>
-        </p:txBody>
-      </p:sp>
-      <p:sp>
-        <p:nvSpPr>
-          <p:cNvPr id="4" name="TextBox 3"/>
-          <p:cNvSpPr txBox="1"/>
-          <p:nvPr/>
-        </p:nvSpPr>
-        <p:spPr>
-          <a:xfrm>
-            <a:off x="2743200" y="630936"/>
-            <a:ext cx="7132320" cy="475488"/>
-          </a:xfrm>
-          <a:prstGeom prst="rect">
-            <a:avLst/>
-          </a:prstGeom>
-          <a:noFill/>
-        </p:spPr>
-        <p:txBody>
-          <a:bodyPr wrap="square">
-            <a:noAutofit/>
-          </a:bodyPr>
-          <a:lstStyle/>
-          <a:p>
-            <a:pPr algn="l"/>
-            <a:r>
               <a:rPr sz="2400" b="1">
                 <a:solidFill>
-                  <a:srgbClr val="244128"/>
+                  <a:srgbClr val="2D5644"/>
                 </a:solidFill>
                 <a:latin typeface="Arial"/>
               </a:rPr>
@@ -4791,20 +4652,20 @@
       </p:sp>
       <p:sp>
         <p:nvSpPr>
-          <p:cNvPr id="5" name="Rectangle 4"/>
+          <p:cNvPr id="4" name="Rectangle 3"/>
           <p:cNvSpPr/>
           <p:nvPr/>
         </p:nvSpPr>
         <p:spPr>
           <a:xfrm>
-            <a:off x="502920" y="1170432"/>
-            <a:ext cx="11155680" cy="32004"/>
+            <a:off x="685800" y="1170432"/>
+            <a:ext cx="10515600" cy="22860"/>
           </a:xfrm>
           <a:prstGeom prst="rect">
             <a:avLst/>
           </a:prstGeom>
           <a:solidFill>
-            <a:srgbClr val="3AAA35"/>
+            <a:srgbClr val="F8DCC6"/>
           </a:solidFill>
           <a:ln>
             <a:noFill/>
@@ -4834,14 +4695,49 @@
       </p:sp>
       <p:sp>
         <p:nvSpPr>
+          <p:cNvPr id="5" name="TextBox 4"/>
+          <p:cNvSpPr txBox="1"/>
+          <p:nvPr/>
+        </p:nvSpPr>
+        <p:spPr>
+          <a:xfrm>
+            <a:off x="9464040" y="411480"/>
+            <a:ext cx="2194560" cy="310896"/>
+          </a:xfrm>
+          <a:prstGeom prst="rect">
+            <a:avLst/>
+          </a:prstGeom>
+          <a:noFill/>
+        </p:spPr>
+        <p:txBody>
+          <a:bodyPr wrap="square">
+            <a:noAutofit/>
+          </a:bodyPr>
+          <a:lstStyle/>
+          <a:p>
+            <a:pPr algn="r"/>
+            <a:r>
+              <a:rPr sz="1000" b="0">
+                <a:solidFill>
+                  <a:srgbClr val="626262"/>
+                </a:solidFill>
+                <a:latin typeface="Arial"/>
+              </a:rPr>
+              <a:t>1:15–2:00</a:t>
+            </a:r>
+          </a:p>
+        </p:txBody>
+      </p:sp>
+      <p:sp>
+        <p:nvSpPr>
           <p:cNvPr id="6" name="TextBox 5"/>
           <p:cNvSpPr txBox="1"/>
           <p:nvPr/>
         </p:nvSpPr>
         <p:spPr>
           <a:xfrm>
-            <a:off x="9464040" y="411480"/>
-            <a:ext cx="2194560" cy="310896"/>
+            <a:off x="11018520" y="6355080"/>
+            <a:ext cx="640080" cy="228600"/>
           </a:xfrm>
           <a:prstGeom prst="rect">
             <a:avLst/>
@@ -4858,42 +4754,7 @@
             <a:r>
               <a:rPr sz="1000" b="0">
                 <a:solidFill>
-                  <a:srgbClr val="5C675F"/>
-                </a:solidFill>
-                <a:latin typeface="Arial"/>
-              </a:rPr>
-              <a:t>1:15–2:00</a:t>
-            </a:r>
-          </a:p>
-        </p:txBody>
-      </p:sp>
-      <p:sp>
-        <p:nvSpPr>
-          <p:cNvPr id="7" name="TextBox 6"/>
-          <p:cNvSpPr txBox="1"/>
-          <p:nvPr/>
-        </p:nvSpPr>
-        <p:spPr>
-          <a:xfrm>
-            <a:off x="11018520" y="6355080"/>
-            <a:ext cx="640080" cy="228600"/>
-          </a:xfrm>
-          <a:prstGeom prst="rect">
-            <a:avLst/>
-          </a:prstGeom>
-          <a:noFill/>
-        </p:spPr>
-        <p:txBody>
-          <a:bodyPr wrap="square">
-            <a:noAutofit/>
-          </a:bodyPr>
-          <a:lstStyle/>
-          <a:p>
-            <a:pPr algn="r"/>
-            <a:r>
-              <a:rPr sz="1000" b="0">
-                <a:solidFill>
-                  <a:srgbClr val="5C675F"/>
+                  <a:srgbClr val="626262"/>
                 </a:solidFill>
                 <a:latin typeface="Arial"/>
               </a:rPr>
@@ -4904,7 +4765,7 @@
       </p:sp>
       <p:sp>
         <p:nvSpPr>
-          <p:cNvPr id="8" name="Rectangle 7"/>
+          <p:cNvPr id="7" name="Rectangle 6"/>
           <p:cNvSpPr/>
           <p:nvPr/>
         </p:nvSpPr>
@@ -4947,7 +4808,7 @@
       </p:sp>
       <p:sp>
         <p:nvSpPr>
-          <p:cNvPr id="9" name="Rectangle 8"/>
+          <p:cNvPr id="8" name="Rectangle 7"/>
           <p:cNvSpPr/>
           <p:nvPr/>
         </p:nvSpPr>
@@ -4960,7 +4821,7 @@
             <a:avLst/>
           </a:prstGeom>
           <a:solidFill>
-            <a:srgbClr val="3AAA35"/>
+            <a:srgbClr val="60A678"/>
           </a:solidFill>
           <a:ln>
             <a:noFill/>
@@ -4990,14 +4851,49 @@
       </p:sp>
       <p:sp>
         <p:nvSpPr>
+          <p:cNvPr id="9" name="TextBox 8"/>
+          <p:cNvSpPr txBox="1"/>
+          <p:nvPr/>
+        </p:nvSpPr>
+        <p:spPr>
+          <a:xfrm>
+            <a:off x="941832" y="1719072"/>
+            <a:ext cx="4480560" cy="320040"/>
+          </a:xfrm>
+          <a:prstGeom prst="rect">
+            <a:avLst/>
+          </a:prstGeom>
+          <a:noFill/>
+        </p:spPr>
+        <p:txBody>
+          <a:bodyPr wrap="square">
+            <a:noAutofit/>
+          </a:bodyPr>
+          <a:lstStyle/>
+          <a:p>
+            <a:pPr algn="l"/>
+            <a:r>
+              <a:rPr sz="1500" b="1">
+                <a:solidFill>
+                  <a:srgbClr val="2D5644"/>
+                </a:solidFill>
+                <a:latin typeface="Arial"/>
+              </a:rPr>
+              <a:t>Цель</a:t>
+            </a:r>
+          </a:p>
+        </p:txBody>
+      </p:sp>
+      <p:sp>
+        <p:nvSpPr>
           <p:cNvPr id="10" name="TextBox 9"/>
           <p:cNvSpPr txBox="1"/>
           <p:nvPr/>
         </p:nvSpPr>
         <p:spPr>
           <a:xfrm>
-            <a:off x="941832" y="1719072"/>
-            <a:ext cx="4480560" cy="320040"/>
+            <a:off x="941832" y="2167128"/>
+            <a:ext cx="4480560" cy="265176"/>
           </a:xfrm>
           <a:prstGeom prst="rect">
             <a:avLst/>
@@ -5012,41 +4908,6 @@
           <a:p>
             <a:pPr algn="l"/>
             <a:r>
-              <a:rPr sz="1500" b="1">
-                <a:solidFill>
-                  <a:srgbClr val="244128"/>
-                </a:solidFill>
-                <a:latin typeface="Arial"/>
-              </a:rPr>
-              <a:t>Цель</a:t>
-            </a:r>
-          </a:p>
-        </p:txBody>
-      </p:sp>
-      <p:sp>
-        <p:nvSpPr>
-          <p:cNvPr id="11" name="TextBox 10"/>
-          <p:cNvSpPr txBox="1"/>
-          <p:nvPr/>
-        </p:nvSpPr>
-        <p:spPr>
-          <a:xfrm>
-            <a:off x="941832" y="2167128"/>
-            <a:ext cx="4480560" cy="265176"/>
-          </a:xfrm>
-          <a:prstGeom prst="rect">
-            <a:avLst/>
-          </a:prstGeom>
-          <a:noFill/>
-        </p:spPr>
-        <p:txBody>
-          <a:bodyPr wrap="square">
-            <a:noAutofit/>
-          </a:bodyPr>
-          <a:lstStyle/>
-          <a:p>
-            <a:pPr algn="l"/>
-            <a:r>
               <a:rPr sz="1700" b="0">
                 <a:solidFill>
                   <a:srgbClr val="000000"/>
@@ -5060,7 +4921,7 @@
       </p:sp>
       <p:sp>
         <p:nvSpPr>
-          <p:cNvPr id="12" name="Rectangle 11"/>
+          <p:cNvPr id="11" name="Rectangle 10"/>
           <p:cNvSpPr/>
           <p:nvPr/>
         </p:nvSpPr>
@@ -5103,7 +4964,7 @@
       </p:sp>
       <p:sp>
         <p:nvSpPr>
-          <p:cNvPr id="13" name="Rectangle 12"/>
+          <p:cNvPr id="12" name="Rectangle 11"/>
           <p:cNvSpPr/>
           <p:nvPr/>
         </p:nvSpPr>
@@ -5116,7 +4977,7 @@
             <a:avLst/>
           </a:prstGeom>
           <a:solidFill>
-            <a:srgbClr val="DB4928"/>
+            <a:srgbClr val="E6915F"/>
           </a:solidFill>
           <a:ln>
             <a:noFill/>
@@ -5146,14 +5007,49 @@
       </p:sp>
       <p:sp>
         <p:nvSpPr>
+          <p:cNvPr id="13" name="TextBox 12"/>
+          <p:cNvSpPr txBox="1"/>
+          <p:nvPr/>
+        </p:nvSpPr>
+        <p:spPr>
+          <a:xfrm>
+            <a:off x="6153912" y="1719072"/>
+            <a:ext cx="4480560" cy="320040"/>
+          </a:xfrm>
+          <a:prstGeom prst="rect">
+            <a:avLst/>
+          </a:prstGeom>
+          <a:noFill/>
+        </p:spPr>
+        <p:txBody>
+          <a:bodyPr wrap="square">
+            <a:noAutofit/>
+          </a:bodyPr>
+          <a:lstStyle/>
+          <a:p>
+            <a:pPr algn="l"/>
+            <a:r>
+              <a:rPr sz="1500" b="1">
+                <a:solidFill>
+                  <a:srgbClr val="2D5644"/>
+                </a:solidFill>
+                <a:latin typeface="Arial"/>
+              </a:rPr>
+              <a:t>Гипотеза</a:t>
+            </a:r>
+          </a:p>
+        </p:txBody>
+      </p:sp>
+      <p:sp>
+        <p:nvSpPr>
           <p:cNvPr id="14" name="TextBox 13"/>
           <p:cNvSpPr txBox="1"/>
           <p:nvPr/>
         </p:nvSpPr>
         <p:spPr>
           <a:xfrm>
-            <a:off x="6153912" y="1719072"/>
-            <a:ext cx="4480560" cy="320040"/>
+            <a:off x="6153912" y="2167128"/>
+            <a:ext cx="4480560" cy="265176"/>
           </a:xfrm>
           <a:prstGeom prst="rect">
             <a:avLst/>
@@ -5168,41 +5064,6 @@
           <a:p>
             <a:pPr algn="l"/>
             <a:r>
-              <a:rPr sz="1500" b="1">
-                <a:solidFill>
-                  <a:srgbClr val="244128"/>
-                </a:solidFill>
-                <a:latin typeface="Arial"/>
-              </a:rPr>
-              <a:t>Гипотеза</a:t>
-            </a:r>
-          </a:p>
-        </p:txBody>
-      </p:sp>
-      <p:sp>
-        <p:nvSpPr>
-          <p:cNvPr id="15" name="TextBox 14"/>
-          <p:cNvSpPr txBox="1"/>
-          <p:nvPr/>
-        </p:nvSpPr>
-        <p:spPr>
-          <a:xfrm>
-            <a:off x="6153912" y="2167128"/>
-            <a:ext cx="4480560" cy="265176"/>
-          </a:xfrm>
-          <a:prstGeom prst="rect">
-            <a:avLst/>
-          </a:prstGeom>
-          <a:noFill/>
-        </p:spPr>
-        <p:txBody>
-          <a:bodyPr wrap="square">
-            <a:noAutofit/>
-          </a:bodyPr>
-          <a:lstStyle/>
-          <a:p>
-            <a:pPr algn="l"/>
-            <a:r>
               <a:rPr sz="1700" b="0">
                 <a:solidFill>
                   <a:srgbClr val="000000"/>
@@ -5216,7 +5077,7 @@
       </p:sp>
       <p:sp>
         <p:nvSpPr>
-          <p:cNvPr id="16" name="Rectangle 15"/>
+          <p:cNvPr id="15" name="Rectangle 14"/>
           <p:cNvSpPr/>
           <p:nvPr/>
         </p:nvSpPr>
@@ -5259,7 +5120,7 @@
       </p:sp>
       <p:sp>
         <p:nvSpPr>
-          <p:cNvPr id="17" name="TextBox 16"/>
+          <p:cNvPr id="16" name="TextBox 15"/>
           <p:cNvSpPr txBox="1"/>
           <p:nvPr/>
         </p:nvSpPr>
@@ -5283,7 +5144,7 @@
             <a:r>
               <a:rPr sz="1900" b="1">
                 <a:solidFill>
-                  <a:srgbClr val="244128"/>
+                  <a:srgbClr val="2D5644"/>
                 </a:solidFill>
                 <a:latin typeface="Arial"/>
               </a:rPr>
@@ -5294,7 +5155,7 @@
       </p:sp>
       <p:sp>
         <p:nvSpPr>
-          <p:cNvPr id="18" name="TextBox 17"/>
+          <p:cNvPr id="17" name="TextBox 16"/>
           <p:cNvSpPr txBox="1"/>
           <p:nvPr/>
         </p:nvSpPr>
@@ -5322,11 +5183,11 @@
             <a:r>
               <a:rPr sz="1500" b="1">
                 <a:solidFill>
-                  <a:srgbClr val="3AAA35"/>
-                </a:solidFill>
-                <a:latin typeface="Arial"/>
-              </a:rPr>
-              <a:t>■ </a:t>
+                  <a:srgbClr val="60A678"/>
+                </a:solidFill>
+                <a:latin typeface="Arial"/>
+              </a:rPr>
+              <a:t>• </a:t>
             </a:r>
             <a:r>
               <a:rPr sz="1500" b="0">
@@ -5347,11 +5208,11 @@
             <a:r>
               <a:rPr sz="1500" b="1">
                 <a:solidFill>
-                  <a:srgbClr val="3AAA35"/>
-                </a:solidFill>
-                <a:latin typeface="Arial"/>
-              </a:rPr>
-              <a:t>■ </a:t>
+                  <a:srgbClr val="60A678"/>
+                </a:solidFill>
+                <a:latin typeface="Arial"/>
+              </a:rPr>
+              <a:t>• </a:t>
             </a:r>
             <a:r>
               <a:rPr sz="1500" b="0">
@@ -5372,11 +5233,11 @@
             <a:r>
               <a:rPr sz="1500" b="1">
                 <a:solidFill>
-                  <a:srgbClr val="3AAA35"/>
-                </a:solidFill>
-                <a:latin typeface="Arial"/>
-              </a:rPr>
-              <a:t>■ </a:t>
+                  <a:srgbClr val="60A678"/>
+                </a:solidFill>
+                <a:latin typeface="Arial"/>
+              </a:rPr>
+              <a:t>• </a:t>
             </a:r>
             <a:r>
               <a:rPr sz="1500" b="0">
@@ -5397,11 +5258,11 @@
             <a:r>
               <a:rPr sz="1500" b="1">
                 <a:solidFill>
-                  <a:srgbClr val="3AAA35"/>
-                </a:solidFill>
-                <a:latin typeface="Arial"/>
-              </a:rPr>
-              <a:t>■ </a:t>
+                  <a:srgbClr val="60A678"/>
+                </a:solidFill>
+                <a:latin typeface="Arial"/>
+              </a:rPr>
+              <a:t>• </a:t>
             </a:r>
             <a:r>
               <a:rPr sz="1500" b="0">
@@ -5429,7 +5290,7 @@
     <p:bg>
       <p:bgPr>
         <a:solidFill>
-          <a:srgbClr val="F6F8F4"/>
+          <a:srgbClr val="FAF8F4"/>
         </a:solidFill>
         <a:effectLst/>
       </p:bgPr>
@@ -5441,30 +5302,41 @@
         <p:nvPr/>
       </p:nvGrpSpPr>
       <p:grpSpPr/>
-      <p:pic>
-        <p:nvPicPr>
-          <p:cNvPr id="2" name="Picture 1" descr="spbstu_logo_02.png"/>
-          <p:cNvPicPr>
-            <a:picLocks noChangeAspect="1"/>
-          </p:cNvPicPr>
-          <p:nvPr/>
-        </p:nvPicPr>
-        <p:blipFill>
-          <a:blip r:embed="rId2"/>
-          <a:stretch>
-            <a:fillRect/>
-          </a:stretch>
-        </p:blipFill>
-        <p:spPr>
-          <a:xfrm>
-            <a:off x="502920" y="310896"/>
-            <a:ext cx="1600200" cy="552069"/>
-          </a:xfrm>
-          <a:prstGeom prst="rect">
-            <a:avLst/>
-          </a:prstGeom>
-        </p:spPr>
-      </p:pic>
+      <p:sp>
+        <p:nvSpPr>
+          <p:cNvPr id="2" name="TextBox 1"/>
+          <p:cNvSpPr txBox="1"/>
+          <p:nvPr/>
+        </p:nvSpPr>
+        <p:spPr>
+          <a:xfrm>
+            <a:off x="685800" y="320040"/>
+            <a:ext cx="6949440" cy="310896"/>
+          </a:xfrm>
+          <a:prstGeom prst="rect">
+            <a:avLst/>
+          </a:prstGeom>
+          <a:noFill/>
+        </p:spPr>
+        <p:txBody>
+          <a:bodyPr wrap="square">
+            <a:noAutofit/>
+          </a:bodyPr>
+          <a:lstStyle/>
+          <a:p>
+            <a:pPr algn="l"/>
+            <a:r>
+              <a:rPr sz="1000" b="0">
+                <a:solidFill>
+                  <a:srgbClr val="626262"/>
+                </a:solidFill>
+                <a:latin typeface="Arial"/>
+              </a:rPr>
+              <a:t>Ключевые понятия</a:t>
+            </a:r>
+          </a:p>
+        </p:txBody>
+      </p:sp>
       <p:sp>
         <p:nvSpPr>
           <p:cNvPr id="3" name="TextBox 2"/>
@@ -5473,8 +5345,8 @@
         </p:nvSpPr>
         <p:spPr>
           <a:xfrm>
-            <a:off x="2743200" y="320040"/>
-            <a:ext cx="6217920" cy="310896"/>
+            <a:off x="685800" y="630936"/>
+            <a:ext cx="8001000" cy="475488"/>
           </a:xfrm>
           <a:prstGeom prst="rect">
             <a:avLst/>
@@ -5489,44 +5361,9 @@
           <a:p>
             <a:pPr algn="l"/>
             <a:r>
-              <a:rPr sz="1000" b="0">
-                <a:solidFill>
-                  <a:srgbClr val="5C675F"/>
-                </a:solidFill>
-                <a:latin typeface="Arial"/>
-              </a:rPr>
-              <a:t>Ключевые понятия</a:t>
-            </a:r>
-          </a:p>
-        </p:txBody>
-      </p:sp>
-      <p:sp>
-        <p:nvSpPr>
-          <p:cNvPr id="4" name="TextBox 3"/>
-          <p:cNvSpPr txBox="1"/>
-          <p:nvPr/>
-        </p:nvSpPr>
-        <p:spPr>
-          <a:xfrm>
-            <a:off x="2743200" y="630936"/>
-            <a:ext cx="7132320" cy="475488"/>
-          </a:xfrm>
-          <a:prstGeom prst="rect">
-            <a:avLst/>
-          </a:prstGeom>
-          <a:noFill/>
-        </p:spPr>
-        <p:txBody>
-          <a:bodyPr wrap="square">
-            <a:noAutofit/>
-          </a:bodyPr>
-          <a:lstStyle/>
-          <a:p>
-            <a:pPr algn="l"/>
-            <a:r>
               <a:rPr sz="2400" b="1">
                 <a:solidFill>
-                  <a:srgbClr val="244128"/>
+                  <a:srgbClr val="2D5644"/>
                 </a:solidFill>
                 <a:latin typeface="Arial"/>
               </a:rPr>
@@ -5537,20 +5374,20 @@
       </p:sp>
       <p:sp>
         <p:nvSpPr>
-          <p:cNvPr id="5" name="Rectangle 4"/>
+          <p:cNvPr id="4" name="Rectangle 3"/>
           <p:cNvSpPr/>
           <p:nvPr/>
         </p:nvSpPr>
         <p:spPr>
           <a:xfrm>
-            <a:off x="502920" y="1170432"/>
-            <a:ext cx="11155680" cy="32004"/>
+            <a:off x="685800" y="1170432"/>
+            <a:ext cx="10515600" cy="22860"/>
           </a:xfrm>
           <a:prstGeom prst="rect">
             <a:avLst/>
           </a:prstGeom>
           <a:solidFill>
-            <a:srgbClr val="3AAA35"/>
+            <a:srgbClr val="F8DCC6"/>
           </a:solidFill>
           <a:ln>
             <a:noFill/>
@@ -5580,14 +5417,49 @@
       </p:sp>
       <p:sp>
         <p:nvSpPr>
+          <p:cNvPr id="5" name="TextBox 4"/>
+          <p:cNvSpPr txBox="1"/>
+          <p:nvPr/>
+        </p:nvSpPr>
+        <p:spPr>
+          <a:xfrm>
+            <a:off x="9464040" y="411480"/>
+            <a:ext cx="2194560" cy="310896"/>
+          </a:xfrm>
+          <a:prstGeom prst="rect">
+            <a:avLst/>
+          </a:prstGeom>
+          <a:noFill/>
+        </p:spPr>
+        <p:txBody>
+          <a:bodyPr wrap="square">
+            <a:noAutofit/>
+          </a:bodyPr>
+          <a:lstStyle/>
+          <a:p>
+            <a:pPr algn="r"/>
+            <a:r>
+              <a:rPr sz="1000" b="0">
+                <a:solidFill>
+                  <a:srgbClr val="626262"/>
+                </a:solidFill>
+                <a:latin typeface="Arial"/>
+              </a:rPr>
+              <a:t>2:00–2:45</a:t>
+            </a:r>
+          </a:p>
+        </p:txBody>
+      </p:sp>
+      <p:sp>
+        <p:nvSpPr>
           <p:cNvPr id="6" name="TextBox 5"/>
           <p:cNvSpPr txBox="1"/>
           <p:nvPr/>
         </p:nvSpPr>
         <p:spPr>
           <a:xfrm>
-            <a:off x="9464040" y="411480"/>
-            <a:ext cx="2194560" cy="310896"/>
+            <a:off x="11018520" y="6355080"/>
+            <a:ext cx="640080" cy="228600"/>
           </a:xfrm>
           <a:prstGeom prst="rect">
             <a:avLst/>
@@ -5604,42 +5476,7 @@
             <a:r>
               <a:rPr sz="1000" b="0">
                 <a:solidFill>
-                  <a:srgbClr val="5C675F"/>
-                </a:solidFill>
-                <a:latin typeface="Arial"/>
-              </a:rPr>
-              <a:t>2:00–2:45</a:t>
-            </a:r>
-          </a:p>
-        </p:txBody>
-      </p:sp>
-      <p:sp>
-        <p:nvSpPr>
-          <p:cNvPr id="7" name="TextBox 6"/>
-          <p:cNvSpPr txBox="1"/>
-          <p:nvPr/>
-        </p:nvSpPr>
-        <p:spPr>
-          <a:xfrm>
-            <a:off x="11018520" y="6355080"/>
-            <a:ext cx="640080" cy="228600"/>
-          </a:xfrm>
-          <a:prstGeom prst="rect">
-            <a:avLst/>
-          </a:prstGeom>
-          <a:noFill/>
-        </p:spPr>
-        <p:txBody>
-          <a:bodyPr wrap="square">
-            <a:noAutofit/>
-          </a:bodyPr>
-          <a:lstStyle/>
-          <a:p>
-            <a:pPr algn="r"/>
-            <a:r>
-              <a:rPr sz="1000" b="0">
-                <a:solidFill>
-                  <a:srgbClr val="5C675F"/>
+                  <a:srgbClr val="626262"/>
                 </a:solidFill>
                 <a:latin typeface="Arial"/>
               </a:rPr>
@@ -5650,7 +5487,7 @@
       </p:sp>
       <p:sp>
         <p:nvSpPr>
-          <p:cNvPr id="8" name="Rectangle 7"/>
+          <p:cNvPr id="7" name="Rectangle 6"/>
           <p:cNvSpPr/>
           <p:nvPr/>
         </p:nvSpPr>
@@ -5693,7 +5530,7 @@
       </p:sp>
       <p:sp>
         <p:nvSpPr>
-          <p:cNvPr id="9" name="Rectangle 8"/>
+          <p:cNvPr id="8" name="Rectangle 7"/>
           <p:cNvSpPr/>
           <p:nvPr/>
         </p:nvSpPr>
@@ -5706,7 +5543,7 @@
             <a:avLst/>
           </a:prstGeom>
           <a:solidFill>
-            <a:srgbClr val="3AAA35"/>
+            <a:srgbClr val="60A678"/>
           </a:solidFill>
           <a:ln>
             <a:noFill/>
@@ -5736,14 +5573,49 @@
       </p:sp>
       <p:sp>
         <p:nvSpPr>
+          <p:cNvPr id="9" name="TextBox 8"/>
+          <p:cNvSpPr txBox="1"/>
+          <p:nvPr/>
+        </p:nvSpPr>
+        <p:spPr>
+          <a:xfrm>
+            <a:off x="941832" y="1719072"/>
+            <a:ext cx="2926080" cy="320040"/>
+          </a:xfrm>
+          <a:prstGeom prst="rect">
+            <a:avLst/>
+          </a:prstGeom>
+          <a:noFill/>
+        </p:spPr>
+        <p:txBody>
+          <a:bodyPr wrap="square">
+            <a:noAutofit/>
+          </a:bodyPr>
+          <a:lstStyle/>
+          <a:p>
+            <a:pPr algn="l"/>
+            <a:r>
+              <a:rPr sz="1500" b="1">
+                <a:solidFill>
+                  <a:srgbClr val="2D5644"/>
+                </a:solidFill>
+                <a:latin typeface="Arial"/>
+              </a:rPr>
+              <a:t>Урбаноним</a:t>
+            </a:r>
+          </a:p>
+        </p:txBody>
+      </p:sp>
+      <p:sp>
+        <p:nvSpPr>
           <p:cNvPr id="10" name="TextBox 9"/>
           <p:cNvSpPr txBox="1"/>
           <p:nvPr/>
         </p:nvSpPr>
         <p:spPr>
           <a:xfrm>
-            <a:off x="941832" y="1719072"/>
-            <a:ext cx="2926080" cy="320040"/>
+            <a:off x="941832" y="2167128"/>
+            <a:ext cx="2926080" cy="1042416"/>
           </a:xfrm>
           <a:prstGeom prst="rect">
             <a:avLst/>
@@ -5758,41 +5630,6 @@
           <a:p>
             <a:pPr algn="l"/>
             <a:r>
-              <a:rPr sz="1500" b="1">
-                <a:solidFill>
-                  <a:srgbClr val="244128"/>
-                </a:solidFill>
-                <a:latin typeface="Arial"/>
-              </a:rPr>
-              <a:t>Урбаноним</a:t>
-            </a:r>
-          </a:p>
-        </p:txBody>
-      </p:sp>
-      <p:sp>
-        <p:nvSpPr>
-          <p:cNvPr id="11" name="TextBox 10"/>
-          <p:cNvSpPr txBox="1"/>
-          <p:nvPr/>
-        </p:nvSpPr>
-        <p:spPr>
-          <a:xfrm>
-            <a:off x="941832" y="2167128"/>
-            <a:ext cx="2926080" cy="1042416"/>
-          </a:xfrm>
-          <a:prstGeom prst="rect">
-            <a:avLst/>
-          </a:prstGeom>
-          <a:noFill/>
-        </p:spPr>
-        <p:txBody>
-          <a:bodyPr wrap="square">
-            <a:noAutofit/>
-          </a:bodyPr>
-          <a:lstStyle/>
-          <a:p>
-            <a:pPr algn="l"/>
-            <a:r>
               <a:rPr sz="1700" b="0">
                 <a:solidFill>
                   <a:srgbClr val="000000"/>
@@ -5806,7 +5643,7 @@
       </p:sp>
       <p:sp>
         <p:nvSpPr>
-          <p:cNvPr id="12" name="Rectangle 11"/>
+          <p:cNvPr id="11" name="Rectangle 10"/>
           <p:cNvSpPr/>
           <p:nvPr/>
         </p:nvSpPr>
@@ -5849,7 +5686,7 @@
       </p:sp>
       <p:sp>
         <p:nvSpPr>
-          <p:cNvPr id="13" name="Rectangle 12"/>
+          <p:cNvPr id="12" name="Rectangle 11"/>
           <p:cNvSpPr/>
           <p:nvPr/>
         </p:nvSpPr>
@@ -5862,7 +5699,7 @@
             <a:avLst/>
           </a:prstGeom>
           <a:solidFill>
-            <a:srgbClr val="56975B"/>
+            <a:srgbClr val="BEDEC7"/>
           </a:solidFill>
           <a:ln>
             <a:noFill/>
@@ -5892,14 +5729,49 @@
       </p:sp>
       <p:sp>
         <p:nvSpPr>
+          <p:cNvPr id="13" name="TextBox 12"/>
+          <p:cNvSpPr txBox="1"/>
+          <p:nvPr/>
+        </p:nvSpPr>
+        <p:spPr>
+          <a:xfrm>
+            <a:off x="4690872" y="1719072"/>
+            <a:ext cx="2926080" cy="320040"/>
+          </a:xfrm>
+          <a:prstGeom prst="rect">
+            <a:avLst/>
+          </a:prstGeom>
+          <a:noFill/>
+        </p:spPr>
+        <p:txBody>
+          <a:bodyPr wrap="square">
+            <a:noAutofit/>
+          </a:bodyPr>
+          <a:lstStyle/>
+          <a:p>
+            <a:pPr algn="l"/>
+            <a:r>
+              <a:rPr sz="1500" b="1">
+                <a:solidFill>
+                  <a:srgbClr val="2D5644"/>
+                </a:solidFill>
+                <a:latin typeface="Arial"/>
+              </a:rPr>
+              <a:t>Активный топонимикон</a:t>
+            </a:r>
+          </a:p>
+        </p:txBody>
+      </p:sp>
+      <p:sp>
+        <p:nvSpPr>
           <p:cNvPr id="14" name="TextBox 13"/>
           <p:cNvSpPr txBox="1"/>
           <p:nvPr/>
         </p:nvSpPr>
         <p:spPr>
           <a:xfrm>
-            <a:off x="4690872" y="1719072"/>
-            <a:ext cx="2926080" cy="320040"/>
+            <a:off x="4690872" y="2167128"/>
+            <a:ext cx="2926080" cy="1042416"/>
           </a:xfrm>
           <a:prstGeom prst="rect">
             <a:avLst/>
@@ -5914,41 +5786,6 @@
           <a:p>
             <a:pPr algn="l"/>
             <a:r>
-              <a:rPr sz="1500" b="1">
-                <a:solidFill>
-                  <a:srgbClr val="244128"/>
-                </a:solidFill>
-                <a:latin typeface="Arial"/>
-              </a:rPr>
-              <a:t>Активный топонимикон</a:t>
-            </a:r>
-          </a:p>
-        </p:txBody>
-      </p:sp>
-      <p:sp>
-        <p:nvSpPr>
-          <p:cNvPr id="15" name="TextBox 14"/>
-          <p:cNvSpPr txBox="1"/>
-          <p:nvPr/>
-        </p:nvSpPr>
-        <p:spPr>
-          <a:xfrm>
-            <a:off x="4690872" y="2167128"/>
-            <a:ext cx="2926080" cy="1042416"/>
-          </a:xfrm>
-          <a:prstGeom prst="rect">
-            <a:avLst/>
-          </a:prstGeom>
-          <a:noFill/>
-        </p:spPr>
-        <p:txBody>
-          <a:bodyPr wrap="square">
-            <a:noAutofit/>
-          </a:bodyPr>
-          <a:lstStyle/>
-          <a:p>
-            <a:pPr algn="l"/>
-            <a:r>
               <a:rPr sz="1700" b="0">
                 <a:solidFill>
                   <a:srgbClr val="000000"/>
@@ -5962,7 +5799,7 @@
       </p:sp>
       <p:sp>
         <p:nvSpPr>
-          <p:cNvPr id="16" name="Rectangle 15"/>
+          <p:cNvPr id="15" name="Rectangle 14"/>
           <p:cNvSpPr/>
           <p:nvPr/>
         </p:nvSpPr>
@@ -6005,7 +5842,7 @@
       </p:sp>
       <p:sp>
         <p:nvSpPr>
-          <p:cNvPr id="17" name="Rectangle 16"/>
+          <p:cNvPr id="16" name="Rectangle 15"/>
           <p:cNvSpPr/>
           <p:nvPr/>
         </p:nvSpPr>
@@ -6018,7 +5855,7 @@
             <a:avLst/>
           </a:prstGeom>
           <a:solidFill>
-            <a:srgbClr val="DB4928"/>
+            <a:srgbClr val="E6915F"/>
           </a:solidFill>
           <a:ln>
             <a:noFill/>
@@ -6048,14 +5885,49 @@
       </p:sp>
       <p:sp>
         <p:nvSpPr>
+          <p:cNvPr id="17" name="TextBox 16"/>
+          <p:cNvSpPr txBox="1"/>
+          <p:nvPr/>
+        </p:nvSpPr>
+        <p:spPr>
+          <a:xfrm>
+            <a:off x="8439911" y="1719072"/>
+            <a:ext cx="2926080" cy="320040"/>
+          </a:xfrm>
+          <a:prstGeom prst="rect">
+            <a:avLst/>
+          </a:prstGeom>
+          <a:noFill/>
+        </p:spPr>
+        <p:txBody>
+          <a:bodyPr wrap="square">
+            <a:noAutofit/>
+          </a:bodyPr>
+          <a:lstStyle/>
+          <a:p>
+            <a:pPr algn="l"/>
+            <a:r>
+              <a:rPr sz="1500" b="1">
+                <a:solidFill>
+                  <a:srgbClr val="2D5644"/>
+                </a:solidFill>
+                <a:latin typeface="Arial"/>
+              </a:rPr>
+              <a:t>Пассивный топонимикон</a:t>
+            </a:r>
+          </a:p>
+        </p:txBody>
+      </p:sp>
+      <p:sp>
+        <p:nvSpPr>
           <p:cNvPr id="18" name="TextBox 17"/>
           <p:cNvSpPr txBox="1"/>
           <p:nvPr/>
         </p:nvSpPr>
         <p:spPr>
           <a:xfrm>
-            <a:off x="8439911" y="1719072"/>
-            <a:ext cx="2926080" cy="320040"/>
+            <a:off x="8439911" y="2167128"/>
+            <a:ext cx="2926080" cy="1042416"/>
           </a:xfrm>
           <a:prstGeom prst="rect">
             <a:avLst/>
@@ -6070,41 +5942,6 @@
           <a:p>
             <a:pPr algn="l"/>
             <a:r>
-              <a:rPr sz="1500" b="1">
-                <a:solidFill>
-                  <a:srgbClr val="244128"/>
-                </a:solidFill>
-                <a:latin typeface="Arial"/>
-              </a:rPr>
-              <a:t>Пассивный топонимикон</a:t>
-            </a:r>
-          </a:p>
-        </p:txBody>
-      </p:sp>
-      <p:sp>
-        <p:nvSpPr>
-          <p:cNvPr id="19" name="TextBox 18"/>
-          <p:cNvSpPr txBox="1"/>
-          <p:nvPr/>
-        </p:nvSpPr>
-        <p:spPr>
-          <a:xfrm>
-            <a:off x="8439911" y="2167128"/>
-            <a:ext cx="2926080" cy="1042416"/>
-          </a:xfrm>
-          <a:prstGeom prst="rect">
-            <a:avLst/>
-          </a:prstGeom>
-          <a:noFill/>
-        </p:spPr>
-        <p:txBody>
-          <a:bodyPr wrap="square">
-            <a:noAutofit/>
-          </a:bodyPr>
-          <a:lstStyle/>
-          <a:p>
-            <a:pPr algn="l"/>
-            <a:r>
               <a:rPr sz="1700" b="0">
                 <a:solidFill>
                   <a:srgbClr val="000000"/>
@@ -6118,7 +5955,7 @@
       </p:sp>
       <p:sp>
         <p:nvSpPr>
-          <p:cNvPr id="20" name="Rectangle 19"/>
+          <p:cNvPr id="19" name="Rectangle 18"/>
           <p:cNvSpPr/>
           <p:nvPr/>
         </p:nvSpPr>
@@ -6161,7 +5998,7 @@
       </p:sp>
       <p:sp>
         <p:nvSpPr>
-          <p:cNvPr id="21" name="TextBox 20"/>
+          <p:cNvPr id="20" name="TextBox 19"/>
           <p:cNvSpPr txBox="1"/>
           <p:nvPr/>
         </p:nvSpPr>
@@ -6185,7 +6022,7 @@
             <a:r>
               <a:rPr sz="1800" b="1">
                 <a:solidFill>
-                  <a:srgbClr val="244128"/>
+                  <a:srgbClr val="2D5644"/>
                 </a:solidFill>
                 <a:latin typeface="Arial"/>
               </a:rPr>
@@ -6196,7 +6033,7 @@
       </p:sp>
       <p:sp>
         <p:nvSpPr>
-          <p:cNvPr id="22" name="TextBox 21"/>
+          <p:cNvPr id="21" name="TextBox 20"/>
           <p:cNvSpPr txBox="1"/>
           <p:nvPr/>
         </p:nvSpPr>
@@ -6224,11 +6061,11 @@
             <a:r>
               <a:rPr sz="1300" b="1">
                 <a:solidFill>
-                  <a:srgbClr val="3AAA35"/>
-                </a:solidFill>
-                <a:latin typeface="Arial"/>
-              </a:rPr>
-              <a:t>■ </a:t>
+                  <a:srgbClr val="60A678"/>
+                </a:solidFill>
+                <a:latin typeface="Arial"/>
+              </a:rPr>
+              <a:t>• </a:t>
             </a:r>
             <a:r>
               <a:rPr sz="1300" b="0">
@@ -6249,11 +6086,11 @@
             <a:r>
               <a:rPr sz="1300" b="1">
                 <a:solidFill>
-                  <a:srgbClr val="3AAA35"/>
-                </a:solidFill>
-                <a:latin typeface="Arial"/>
-              </a:rPr>
-              <a:t>■ </a:t>
+                  <a:srgbClr val="60A678"/>
+                </a:solidFill>
+                <a:latin typeface="Arial"/>
+              </a:rPr>
+              <a:t>• </a:t>
             </a:r>
             <a:r>
               <a:rPr sz="1300" b="0">
@@ -6274,11 +6111,11 @@
             <a:r>
               <a:rPr sz="1300" b="1">
                 <a:solidFill>
-                  <a:srgbClr val="3AAA35"/>
-                </a:solidFill>
-                <a:latin typeface="Arial"/>
-              </a:rPr>
-              <a:t>■ </a:t>
+                  <a:srgbClr val="60A678"/>
+                </a:solidFill>
+                <a:latin typeface="Arial"/>
+              </a:rPr>
+              <a:t>• </a:t>
             </a:r>
             <a:r>
               <a:rPr sz="1300" b="0">
@@ -6306,7 +6143,7 @@
     <p:bg>
       <p:bgPr>
         <a:solidFill>
-          <a:srgbClr val="F6F8F4"/>
+          <a:srgbClr val="FAF8F4"/>
         </a:solidFill>
         <a:effectLst/>
       </p:bgPr>
@@ -6318,30 +6155,41 @@
         <p:nvPr/>
       </p:nvGrpSpPr>
       <p:grpSpPr/>
-      <p:pic>
-        <p:nvPicPr>
-          <p:cNvPr id="2" name="Picture 1" descr="spbstu_logo_02.png"/>
-          <p:cNvPicPr>
-            <a:picLocks noChangeAspect="1"/>
-          </p:cNvPicPr>
-          <p:nvPr/>
-        </p:nvPicPr>
-        <p:blipFill>
-          <a:blip r:embed="rId2"/>
-          <a:stretch>
-            <a:fillRect/>
-          </a:stretch>
-        </p:blipFill>
-        <p:spPr>
-          <a:xfrm>
-            <a:off x="502920" y="310896"/>
-            <a:ext cx="1600200" cy="552069"/>
-          </a:xfrm>
-          <a:prstGeom prst="rect">
-            <a:avLst/>
-          </a:prstGeom>
-        </p:spPr>
-      </p:pic>
+      <p:sp>
+        <p:nvSpPr>
+          <p:cNvPr id="2" name="TextBox 1"/>
+          <p:cNvSpPr txBox="1"/>
+          <p:nvPr/>
+        </p:nvSpPr>
+        <p:spPr>
+          <a:xfrm>
+            <a:off x="685800" y="320040"/>
+            <a:ext cx="6949440" cy="310896"/>
+          </a:xfrm>
+          <a:prstGeom prst="rect">
+            <a:avLst/>
+          </a:prstGeom>
+          <a:noFill/>
+        </p:spPr>
+        <p:txBody>
+          <a:bodyPr wrap="square">
+            <a:noAutofit/>
+          </a:bodyPr>
+          <a:lstStyle/>
+          <a:p>
+            <a:pPr algn="l"/>
+            <a:r>
+              <a:rPr sz="1000" b="0">
+                <a:solidFill>
+                  <a:srgbClr val="626262"/>
+                </a:solidFill>
+                <a:latin typeface="Arial"/>
+              </a:rPr>
+              <a:t>Как собирались данные</a:t>
+            </a:r>
+          </a:p>
+        </p:txBody>
+      </p:sp>
       <p:sp>
         <p:nvSpPr>
           <p:cNvPr id="3" name="TextBox 2"/>
@@ -6350,8 +6198,8 @@
         </p:nvSpPr>
         <p:spPr>
           <a:xfrm>
-            <a:off x="2743200" y="320040"/>
-            <a:ext cx="6217920" cy="310896"/>
+            <a:off x="685800" y="630936"/>
+            <a:ext cx="8001000" cy="475488"/>
           </a:xfrm>
           <a:prstGeom prst="rect">
             <a:avLst/>
@@ -6366,44 +6214,9 @@
           <a:p>
             <a:pPr algn="l"/>
             <a:r>
-              <a:rPr sz="1000" b="0">
-                <a:solidFill>
-                  <a:srgbClr val="5C675F"/>
-                </a:solidFill>
-                <a:latin typeface="Arial"/>
-              </a:rPr>
-              <a:t>Как собирались данные</a:t>
-            </a:r>
-          </a:p>
-        </p:txBody>
-      </p:sp>
-      <p:sp>
-        <p:nvSpPr>
-          <p:cNvPr id="4" name="TextBox 3"/>
-          <p:cNvSpPr txBox="1"/>
-          <p:nvPr/>
-        </p:nvSpPr>
-        <p:spPr>
-          <a:xfrm>
-            <a:off x="2743200" y="630936"/>
-            <a:ext cx="7132320" cy="475488"/>
-          </a:xfrm>
-          <a:prstGeom prst="rect">
-            <a:avLst/>
-          </a:prstGeom>
-          <a:noFill/>
-        </p:spPr>
-        <p:txBody>
-          <a:bodyPr wrap="square">
-            <a:noAutofit/>
-          </a:bodyPr>
-          <a:lstStyle/>
-          <a:p>
-            <a:pPr algn="l"/>
-            <a:r>
               <a:rPr sz="2400" b="1">
                 <a:solidFill>
-                  <a:srgbClr val="244128"/>
+                  <a:srgbClr val="2D5644"/>
                 </a:solidFill>
                 <a:latin typeface="Arial"/>
               </a:rPr>
@@ -6414,20 +6227,20 @@
       </p:sp>
       <p:sp>
         <p:nvSpPr>
-          <p:cNvPr id="5" name="Rectangle 4"/>
+          <p:cNvPr id="4" name="Rectangle 3"/>
           <p:cNvSpPr/>
           <p:nvPr/>
         </p:nvSpPr>
         <p:spPr>
           <a:xfrm>
-            <a:off x="502920" y="1170432"/>
-            <a:ext cx="11155680" cy="32004"/>
+            <a:off x="685800" y="1170432"/>
+            <a:ext cx="10515600" cy="22860"/>
           </a:xfrm>
           <a:prstGeom prst="rect">
             <a:avLst/>
           </a:prstGeom>
           <a:solidFill>
-            <a:srgbClr val="3AAA35"/>
+            <a:srgbClr val="F8DCC6"/>
           </a:solidFill>
           <a:ln>
             <a:noFill/>
@@ -6457,14 +6270,49 @@
       </p:sp>
       <p:sp>
         <p:nvSpPr>
+          <p:cNvPr id="5" name="TextBox 4"/>
+          <p:cNvSpPr txBox="1"/>
+          <p:nvPr/>
+        </p:nvSpPr>
+        <p:spPr>
+          <a:xfrm>
+            <a:off x="9464040" y="411480"/>
+            <a:ext cx="2194560" cy="310896"/>
+          </a:xfrm>
+          <a:prstGeom prst="rect">
+            <a:avLst/>
+          </a:prstGeom>
+          <a:noFill/>
+        </p:spPr>
+        <p:txBody>
+          <a:bodyPr wrap="square">
+            <a:noAutofit/>
+          </a:bodyPr>
+          <a:lstStyle/>
+          <a:p>
+            <a:pPr algn="r"/>
+            <a:r>
+              <a:rPr sz="1000" b="0">
+                <a:solidFill>
+                  <a:srgbClr val="626262"/>
+                </a:solidFill>
+                <a:latin typeface="Arial"/>
+              </a:rPr>
+              <a:t>2:45–3:30</a:t>
+            </a:r>
+          </a:p>
+        </p:txBody>
+      </p:sp>
+      <p:sp>
+        <p:nvSpPr>
           <p:cNvPr id="6" name="TextBox 5"/>
           <p:cNvSpPr txBox="1"/>
           <p:nvPr/>
         </p:nvSpPr>
         <p:spPr>
           <a:xfrm>
-            <a:off x="9464040" y="411480"/>
-            <a:ext cx="2194560" cy="310896"/>
+            <a:off x="11018520" y="6355080"/>
+            <a:ext cx="640080" cy="228600"/>
           </a:xfrm>
           <a:prstGeom prst="rect">
             <a:avLst/>
@@ -6481,42 +6329,7 @@
             <a:r>
               <a:rPr sz="1000" b="0">
                 <a:solidFill>
-                  <a:srgbClr val="5C675F"/>
-                </a:solidFill>
-                <a:latin typeface="Arial"/>
-              </a:rPr>
-              <a:t>2:45–3:30</a:t>
-            </a:r>
-          </a:p>
-        </p:txBody>
-      </p:sp>
-      <p:sp>
-        <p:nvSpPr>
-          <p:cNvPr id="7" name="TextBox 6"/>
-          <p:cNvSpPr txBox="1"/>
-          <p:nvPr/>
-        </p:nvSpPr>
-        <p:spPr>
-          <a:xfrm>
-            <a:off x="11018520" y="6355080"/>
-            <a:ext cx="640080" cy="228600"/>
-          </a:xfrm>
-          <a:prstGeom prst="rect">
-            <a:avLst/>
-          </a:prstGeom>
-          <a:noFill/>
-        </p:spPr>
-        <p:txBody>
-          <a:bodyPr wrap="square">
-            <a:noAutofit/>
-          </a:bodyPr>
-          <a:lstStyle/>
-          <a:p>
-            <a:pPr algn="r"/>
-            <a:r>
-              <a:rPr sz="1000" b="0">
-                <a:solidFill>
-                  <a:srgbClr val="5C675F"/>
+                  <a:srgbClr val="626262"/>
                 </a:solidFill>
                 <a:latin typeface="Arial"/>
               </a:rPr>
@@ -6527,7 +6340,7 @@
       </p:sp>
       <p:sp>
         <p:nvSpPr>
-          <p:cNvPr id="8" name="Rectangle 7"/>
+          <p:cNvPr id="7" name="Rectangle 6"/>
           <p:cNvSpPr/>
           <p:nvPr/>
         </p:nvSpPr>
@@ -6570,7 +6383,7 @@
       </p:sp>
       <p:sp>
         <p:nvSpPr>
-          <p:cNvPr id="9" name="Rectangle 8"/>
+          <p:cNvPr id="8" name="Rectangle 7"/>
           <p:cNvSpPr/>
           <p:nvPr/>
         </p:nvSpPr>
@@ -6583,7 +6396,7 @@
             <a:avLst/>
           </a:prstGeom>
           <a:solidFill>
-            <a:srgbClr val="3AAA35"/>
+            <a:srgbClr val="60A678"/>
           </a:solidFill>
           <a:ln>
             <a:noFill/>
@@ -6613,14 +6426,49 @@
       </p:sp>
       <p:sp>
         <p:nvSpPr>
+          <p:cNvPr id="9" name="TextBox 8"/>
+          <p:cNvSpPr txBox="1"/>
+          <p:nvPr/>
+        </p:nvSpPr>
+        <p:spPr>
+          <a:xfrm>
+            <a:off x="941832" y="1719072"/>
+            <a:ext cx="2971800" cy="320040"/>
+          </a:xfrm>
+          <a:prstGeom prst="rect">
+            <a:avLst/>
+          </a:prstGeom>
+          <a:noFill/>
+        </p:spPr>
+        <p:txBody>
+          <a:bodyPr wrap="square">
+            <a:noAutofit/>
+          </a:bodyPr>
+          <a:lstStyle/>
+          <a:p>
+            <a:pPr algn="l"/>
+            <a:r>
+              <a:rPr sz="1500" b="1">
+                <a:solidFill>
+                  <a:srgbClr val="2D5644"/>
+                </a:solidFill>
+                <a:latin typeface="Arial"/>
+              </a:rPr>
+              <a:t>Выборка</a:t>
+            </a:r>
+          </a:p>
+        </p:txBody>
+      </p:sp>
+      <p:sp>
+        <p:nvSpPr>
           <p:cNvPr id="10" name="TextBox 9"/>
           <p:cNvSpPr txBox="1"/>
           <p:nvPr/>
         </p:nvSpPr>
         <p:spPr>
           <a:xfrm>
-            <a:off x="941832" y="1719072"/>
-            <a:ext cx="2971800" cy="320040"/>
+            <a:off x="941832" y="2167128"/>
+            <a:ext cx="2971800" cy="630936"/>
           </a:xfrm>
           <a:prstGeom prst="rect">
             <a:avLst/>
@@ -6635,41 +6483,6 @@
           <a:p>
             <a:pPr algn="l"/>
             <a:r>
-              <a:rPr sz="1500" b="1">
-                <a:solidFill>
-                  <a:srgbClr val="244128"/>
-                </a:solidFill>
-                <a:latin typeface="Arial"/>
-              </a:rPr>
-              <a:t>Выборка</a:t>
-            </a:r>
-          </a:p>
-        </p:txBody>
-      </p:sp>
-      <p:sp>
-        <p:nvSpPr>
-          <p:cNvPr id="11" name="TextBox 10"/>
-          <p:cNvSpPr txBox="1"/>
-          <p:nvPr/>
-        </p:nvSpPr>
-        <p:spPr>
-          <a:xfrm>
-            <a:off x="941832" y="2167128"/>
-            <a:ext cx="2971800" cy="630936"/>
-          </a:xfrm>
-          <a:prstGeom prst="rect">
-            <a:avLst/>
-          </a:prstGeom>
-          <a:noFill/>
-        </p:spPr>
-        <p:txBody>
-          <a:bodyPr wrap="square">
-            <a:noAutofit/>
-          </a:bodyPr>
-          <a:lstStyle/>
-          <a:p>
-            <a:pPr algn="l"/>
-            <a:r>
               <a:rPr sz="1700" b="0">
                 <a:solidFill>
                   <a:srgbClr val="000000"/>
@@ -6683,7 +6496,7 @@
       </p:sp>
       <p:sp>
         <p:nvSpPr>
-          <p:cNvPr id="12" name="Rectangle 11"/>
+          <p:cNvPr id="11" name="Rectangle 10"/>
           <p:cNvSpPr/>
           <p:nvPr/>
         </p:nvSpPr>
@@ -6726,7 +6539,7 @@
       </p:sp>
       <p:sp>
         <p:nvSpPr>
-          <p:cNvPr id="13" name="Rectangle 12"/>
+          <p:cNvPr id="12" name="Rectangle 11"/>
           <p:cNvSpPr/>
           <p:nvPr/>
         </p:nvSpPr>
@@ -6739,7 +6552,7 @@
             <a:avLst/>
           </a:prstGeom>
           <a:solidFill>
-            <a:srgbClr val="DB4928"/>
+            <a:srgbClr val="E6915F"/>
           </a:solidFill>
           <a:ln>
             <a:noFill/>
@@ -6769,14 +6582,49 @@
       </p:sp>
       <p:sp>
         <p:nvSpPr>
+          <p:cNvPr id="13" name="TextBox 12"/>
+          <p:cNvSpPr txBox="1"/>
+          <p:nvPr/>
+        </p:nvSpPr>
+        <p:spPr>
+          <a:xfrm>
+            <a:off x="4645152" y="1719072"/>
+            <a:ext cx="2971800" cy="320040"/>
+          </a:xfrm>
+          <a:prstGeom prst="rect">
+            <a:avLst/>
+          </a:prstGeom>
+          <a:noFill/>
+        </p:spPr>
+        <p:txBody>
+          <a:bodyPr wrap="square">
+            <a:noAutofit/>
+          </a:bodyPr>
+          <a:lstStyle/>
+          <a:p>
+            <a:pPr algn="l"/>
+            <a:r>
+              <a:rPr sz="1500" b="1">
+                <a:solidFill>
+                  <a:srgbClr val="2D5644"/>
+                </a:solidFill>
+                <a:latin typeface="Arial"/>
+              </a:rPr>
+              <a:t>Материал анкеты</a:t>
+            </a:r>
+          </a:p>
+        </p:txBody>
+      </p:sp>
+      <p:sp>
+        <p:nvSpPr>
           <p:cNvPr id="14" name="TextBox 13"/>
           <p:cNvSpPr txBox="1"/>
           <p:nvPr/>
         </p:nvSpPr>
         <p:spPr>
           <a:xfrm>
-            <a:off x="4645152" y="1719072"/>
-            <a:ext cx="2971800" cy="320040"/>
+            <a:off x="4645152" y="2167128"/>
+            <a:ext cx="2971800" cy="630936"/>
           </a:xfrm>
           <a:prstGeom prst="rect">
             <a:avLst/>
@@ -6791,41 +6639,6 @@
           <a:p>
             <a:pPr algn="l"/>
             <a:r>
-              <a:rPr sz="1500" b="1">
-                <a:solidFill>
-                  <a:srgbClr val="244128"/>
-                </a:solidFill>
-                <a:latin typeface="Arial"/>
-              </a:rPr>
-              <a:t>Материал анкеты</a:t>
-            </a:r>
-          </a:p>
-        </p:txBody>
-      </p:sp>
-      <p:sp>
-        <p:nvSpPr>
-          <p:cNvPr id="15" name="TextBox 14"/>
-          <p:cNvSpPr txBox="1"/>
-          <p:nvPr/>
-        </p:nvSpPr>
-        <p:spPr>
-          <a:xfrm>
-            <a:off x="4645152" y="2167128"/>
-            <a:ext cx="2971800" cy="630936"/>
-          </a:xfrm>
-          <a:prstGeom prst="rect">
-            <a:avLst/>
-          </a:prstGeom>
-          <a:noFill/>
-        </p:spPr>
-        <p:txBody>
-          <a:bodyPr wrap="square">
-            <a:noAutofit/>
-          </a:bodyPr>
-          <a:lstStyle/>
-          <a:p>
-            <a:pPr algn="l"/>
-            <a:r>
               <a:rPr sz="1700" b="0">
                 <a:solidFill>
                   <a:srgbClr val="000000"/>
@@ -6839,7 +6652,7 @@
       </p:sp>
       <p:sp>
         <p:nvSpPr>
-          <p:cNvPr id="16" name="Rectangle 15"/>
+          <p:cNvPr id="15" name="Rectangle 14"/>
           <p:cNvSpPr/>
           <p:nvPr/>
         </p:nvSpPr>
@@ -6882,7 +6695,7 @@
       </p:sp>
       <p:sp>
         <p:nvSpPr>
-          <p:cNvPr id="17" name="Rectangle 16"/>
+          <p:cNvPr id="16" name="Rectangle 15"/>
           <p:cNvSpPr/>
           <p:nvPr/>
         </p:nvSpPr>
@@ -6895,7 +6708,7 @@
             <a:avLst/>
           </a:prstGeom>
           <a:solidFill>
-            <a:srgbClr val="3AAA35"/>
+            <a:srgbClr val="60A678"/>
           </a:solidFill>
           <a:ln>
             <a:noFill/>
@@ -6925,14 +6738,49 @@
       </p:sp>
       <p:sp>
         <p:nvSpPr>
+          <p:cNvPr id="17" name="TextBox 16"/>
+          <p:cNvSpPr txBox="1"/>
+          <p:nvPr/>
+        </p:nvSpPr>
+        <p:spPr>
+          <a:xfrm>
+            <a:off x="8348472" y="1719072"/>
+            <a:ext cx="2971800" cy="320040"/>
+          </a:xfrm>
+          <a:prstGeom prst="rect">
+            <a:avLst/>
+          </a:prstGeom>
+          <a:noFill/>
+        </p:spPr>
+        <p:txBody>
+          <a:bodyPr wrap="square">
+            <a:noAutofit/>
+          </a:bodyPr>
+          <a:lstStyle/>
+          <a:p>
+            <a:pPr algn="l"/>
+            <a:r>
+              <a:rPr sz="1500" b="1">
+                <a:solidFill>
+                  <a:srgbClr val="2D5644"/>
+                </a:solidFill>
+                <a:latin typeface="Arial"/>
+              </a:rPr>
+              <a:t>Формат</a:t>
+            </a:r>
+          </a:p>
+        </p:txBody>
+      </p:sp>
+      <p:sp>
+        <p:nvSpPr>
           <p:cNvPr id="18" name="TextBox 17"/>
           <p:cNvSpPr txBox="1"/>
           <p:nvPr/>
         </p:nvSpPr>
         <p:spPr>
           <a:xfrm>
-            <a:off x="8348472" y="1719072"/>
-            <a:ext cx="2971800" cy="320040"/>
+            <a:off x="8348472" y="2167128"/>
+            <a:ext cx="2971800" cy="630936"/>
           </a:xfrm>
           <a:prstGeom prst="rect">
             <a:avLst/>
@@ -6947,41 +6795,6 @@
           <a:p>
             <a:pPr algn="l"/>
             <a:r>
-              <a:rPr sz="1500" b="1">
-                <a:solidFill>
-                  <a:srgbClr val="244128"/>
-                </a:solidFill>
-                <a:latin typeface="Arial"/>
-              </a:rPr>
-              <a:t>Формат</a:t>
-            </a:r>
-          </a:p>
-        </p:txBody>
-      </p:sp>
-      <p:sp>
-        <p:nvSpPr>
-          <p:cNvPr id="19" name="TextBox 18"/>
-          <p:cNvSpPr txBox="1"/>
-          <p:nvPr/>
-        </p:nvSpPr>
-        <p:spPr>
-          <a:xfrm>
-            <a:off x="8348472" y="2167128"/>
-            <a:ext cx="2971800" cy="630936"/>
-          </a:xfrm>
-          <a:prstGeom prst="rect">
-            <a:avLst/>
-          </a:prstGeom>
-          <a:noFill/>
-        </p:spPr>
-        <p:txBody>
-          <a:bodyPr wrap="square">
-            <a:noAutofit/>
-          </a:bodyPr>
-          <a:lstStyle/>
-          <a:p>
-            <a:pPr algn="l"/>
-            <a:r>
               <a:rPr sz="1700" b="0">
                 <a:solidFill>
                   <a:srgbClr val="000000"/>
@@ -6995,7 +6808,7 @@
       </p:sp>
       <p:sp>
         <p:nvSpPr>
-          <p:cNvPr id="20" name="Rectangle 19"/>
+          <p:cNvPr id="19" name="Rectangle 18"/>
           <p:cNvSpPr/>
           <p:nvPr/>
         </p:nvSpPr>
@@ -7038,7 +6851,7 @@
       </p:sp>
       <p:sp>
         <p:nvSpPr>
-          <p:cNvPr id="21" name="TextBox 20"/>
+          <p:cNvPr id="20" name="TextBox 19"/>
           <p:cNvSpPr txBox="1"/>
           <p:nvPr/>
         </p:nvSpPr>
@@ -7062,7 +6875,7 @@
             <a:r>
               <a:rPr sz="1800" b="1">
                 <a:solidFill>
-                  <a:srgbClr val="244128"/>
+                  <a:srgbClr val="2D5644"/>
                 </a:solidFill>
                 <a:latin typeface="Arial"/>
               </a:rPr>
@@ -7073,7 +6886,7 @@
       </p:sp>
       <p:sp>
         <p:nvSpPr>
-          <p:cNvPr id="22" name="TextBox 21"/>
+          <p:cNvPr id="21" name="TextBox 20"/>
           <p:cNvSpPr txBox="1"/>
           <p:nvPr/>
         </p:nvSpPr>
@@ -7101,11 +6914,11 @@
             <a:r>
               <a:rPr sz="1400" b="1">
                 <a:solidFill>
-                  <a:srgbClr val="3AAA35"/>
-                </a:solidFill>
-                <a:latin typeface="Arial"/>
-              </a:rPr>
-              <a:t>■ </a:t>
+                  <a:srgbClr val="60A678"/>
+                </a:solidFill>
+                <a:latin typeface="Arial"/>
+              </a:rPr>
+              <a:t>• </a:t>
             </a:r>
             <a:r>
               <a:rPr sz="1400" b="0">
@@ -7126,11 +6939,11 @@
             <a:r>
               <a:rPr sz="1400" b="1">
                 <a:solidFill>
-                  <a:srgbClr val="3AAA35"/>
-                </a:solidFill>
-                <a:latin typeface="Arial"/>
-              </a:rPr>
-              <a:t>■ </a:t>
+                  <a:srgbClr val="60A678"/>
+                </a:solidFill>
+                <a:latin typeface="Arial"/>
+              </a:rPr>
+              <a:t>• </a:t>
             </a:r>
             <a:r>
               <a:rPr sz="1400" b="0">
@@ -7151,11 +6964,11 @@
             <a:r>
               <a:rPr sz="1400" b="1">
                 <a:solidFill>
-                  <a:srgbClr val="3AAA35"/>
-                </a:solidFill>
-                <a:latin typeface="Arial"/>
-              </a:rPr>
-              <a:t>■ </a:t>
+                  <a:srgbClr val="60A678"/>
+                </a:solidFill>
+                <a:latin typeface="Arial"/>
+              </a:rPr>
+              <a:t>• </a:t>
             </a:r>
             <a:r>
               <a:rPr sz="1400" b="0">
@@ -7176,11 +6989,11 @@
             <a:r>
               <a:rPr sz="1400" b="1">
                 <a:solidFill>
-                  <a:srgbClr val="3AAA35"/>
-                </a:solidFill>
-                <a:latin typeface="Arial"/>
-              </a:rPr>
-              <a:t>■ </a:t>
+                  <a:srgbClr val="60A678"/>
+                </a:solidFill>
+                <a:latin typeface="Arial"/>
+              </a:rPr>
+              <a:t>• </a:t>
             </a:r>
             <a:r>
               <a:rPr sz="1400" b="0">
@@ -7201,11 +7014,11 @@
             <a:r>
               <a:rPr sz="1400" b="1">
                 <a:solidFill>
-                  <a:srgbClr val="3AAA35"/>
-                </a:solidFill>
-                <a:latin typeface="Arial"/>
-              </a:rPr>
-              <a:t>■ </a:t>
+                  <a:srgbClr val="60A678"/>
+                </a:solidFill>
+                <a:latin typeface="Arial"/>
+              </a:rPr>
+              <a:t>• </a:t>
             </a:r>
             <a:r>
               <a:rPr sz="1400" b="0">
@@ -7215,6 +7028,41 @@
                 <a:latin typeface="Arial"/>
               </a:rPr>
               <a:t>пассивное знание / незнание</a:t>
+            </a:r>
+          </a:p>
+        </p:txBody>
+      </p:sp>
+      <p:sp>
+        <p:nvSpPr>
+          <p:cNvPr id="22" name="TextBox 21"/>
+          <p:cNvSpPr txBox="1"/>
+          <p:nvPr/>
+        </p:nvSpPr>
+        <p:spPr>
+          <a:xfrm>
+            <a:off x="6400800" y="3657600"/>
+            <a:ext cx="4389120" cy="320040"/>
+          </a:xfrm>
+          <a:prstGeom prst="rect">
+            <a:avLst/>
+          </a:prstGeom>
+          <a:noFill/>
+        </p:spPr>
+        <p:txBody>
+          <a:bodyPr wrap="square">
+            <a:noAutofit/>
+          </a:bodyPr>
+          <a:lstStyle/>
+          <a:p>
+            <a:pPr algn="l"/>
+            <a:r>
+              <a:rPr sz="1800" b="1">
+                <a:solidFill>
+                  <a:srgbClr val="2D5644"/>
+                </a:solidFill>
+                <a:latin typeface="Arial"/>
+              </a:rPr>
+              <a:t>Ограничение</a:t>
             </a:r>
           </a:p>
         </p:txBody>
@@ -7227,8 +7075,8 @@
         </p:nvSpPr>
         <p:spPr>
           <a:xfrm>
-            <a:off x="6400800" y="3657600"/>
-            <a:ext cx="4389120" cy="320040"/>
+            <a:off x="6400800" y="4096512"/>
+            <a:ext cx="4434840" cy="1051560"/>
           </a:xfrm>
           <a:prstGeom prst="rect">
             <a:avLst/>
@@ -7243,41 +7091,6 @@
           <a:p>
             <a:pPr algn="l"/>
             <a:r>
-              <a:rPr sz="1800" b="1">
-                <a:solidFill>
-                  <a:srgbClr val="244128"/>
-                </a:solidFill>
-                <a:latin typeface="Arial"/>
-              </a:rPr>
-              <a:t>Ограничение</a:t>
-            </a:r>
-          </a:p>
-        </p:txBody>
-      </p:sp>
-      <p:sp>
-        <p:nvSpPr>
-          <p:cNvPr id="24" name="TextBox 23"/>
-          <p:cNvSpPr txBox="1"/>
-          <p:nvPr/>
-        </p:nvSpPr>
-        <p:spPr>
-          <a:xfrm>
-            <a:off x="6400800" y="4096512"/>
-            <a:ext cx="4434840" cy="1051560"/>
-          </a:xfrm>
-          <a:prstGeom prst="rect">
-            <a:avLst/>
-          </a:prstGeom>
-          <a:noFill/>
-        </p:spPr>
-        <p:txBody>
-          <a:bodyPr wrap="square">
-            <a:noAutofit/>
-          </a:bodyPr>
-          <a:lstStyle/>
-          <a:p>
-            <a:pPr algn="l"/>
-            <a:r>
               <a:rPr sz="1600" b="0">
                 <a:solidFill>
                   <a:srgbClr val="000000"/>
@@ -7291,7 +7104,7 @@
       </p:sp>
       <p:sp>
         <p:nvSpPr>
-          <p:cNvPr id="25" name="Rectangle 24"/>
+          <p:cNvPr id="24" name="Rectangle 23"/>
           <p:cNvSpPr/>
           <p:nvPr/>
         </p:nvSpPr>
@@ -7304,7 +7117,7 @@
             <a:avLst/>
           </a:prstGeom>
           <a:solidFill>
-            <a:srgbClr val="3AAA35"/>
+            <a:srgbClr val="60A678"/>
           </a:solidFill>
           <a:ln>
             <a:noFill/>
@@ -7334,7 +7147,7 @@
       </p:sp>
       <p:sp>
         <p:nvSpPr>
-          <p:cNvPr id="26" name="Rectangle 25"/>
+          <p:cNvPr id="25" name="Rectangle 24"/>
           <p:cNvSpPr/>
           <p:nvPr/>
         </p:nvSpPr>
@@ -7347,7 +7160,7 @@
             <a:avLst/>
           </a:prstGeom>
           <a:solidFill>
-            <a:srgbClr val="DB4928"/>
+            <a:srgbClr val="E6915F"/>
           </a:solidFill>
           <a:ln>
             <a:noFill/>
@@ -7389,7 +7202,7 @@
     <p:bg>
       <p:bgPr>
         <a:solidFill>
-          <a:srgbClr val="F6F8F4"/>
+          <a:srgbClr val="FAF8F4"/>
         </a:solidFill>
         <a:effectLst/>
       </p:bgPr>
@@ -7401,30 +7214,41 @@
         <p:nvPr/>
       </p:nvGrpSpPr>
       <p:grpSpPr/>
-      <p:pic>
-        <p:nvPicPr>
-          <p:cNvPr id="2" name="Picture 1" descr="spbstu_logo_02.png"/>
-          <p:cNvPicPr>
-            <a:picLocks noChangeAspect="1"/>
-          </p:cNvPicPr>
-          <p:nvPr/>
-        </p:nvPicPr>
-        <p:blipFill>
-          <a:blip r:embed="rId2"/>
-          <a:stretch>
-            <a:fillRect/>
-          </a:stretch>
-        </p:blipFill>
-        <p:spPr>
-          <a:xfrm>
-            <a:off x="502920" y="310896"/>
-            <a:ext cx="1600200" cy="552069"/>
-          </a:xfrm>
-          <a:prstGeom prst="rect">
-            <a:avLst/>
-          </a:prstGeom>
-        </p:spPr>
-      </p:pic>
+      <p:sp>
+        <p:nvSpPr>
+          <p:cNvPr id="2" name="TextBox 1"/>
+          <p:cNvSpPr txBox="1"/>
+          <p:nvPr/>
+        </p:nvSpPr>
+        <p:spPr>
+          <a:xfrm>
+            <a:off x="685800" y="320040"/>
+            <a:ext cx="6949440" cy="310896"/>
+          </a:xfrm>
+          <a:prstGeom prst="rect">
+            <a:avLst/>
+          </a:prstGeom>
+          <a:noFill/>
+        </p:spPr>
+        <p:txBody>
+          <a:bodyPr wrap="square">
+            <a:noAutofit/>
+          </a:bodyPr>
+          <a:lstStyle/>
+          <a:p>
+            <a:pPr algn="l"/>
+            <a:r>
+              <a:rPr sz="1000" b="0">
+                <a:solidFill>
+                  <a:srgbClr val="626262"/>
+                </a:solidFill>
+                <a:latin typeface="Arial"/>
+              </a:rPr>
+              <a:t>N = 54 · проценты от числа респондентов</a:t>
+            </a:r>
+          </a:p>
+        </p:txBody>
+      </p:sp>
       <p:sp>
         <p:nvSpPr>
           <p:cNvPr id="3" name="TextBox 2"/>
@@ -7433,8 +7257,8 @@
         </p:nvSpPr>
         <p:spPr>
           <a:xfrm>
-            <a:off x="2743200" y="320040"/>
-            <a:ext cx="6217920" cy="310896"/>
+            <a:off x="685800" y="630936"/>
+            <a:ext cx="8001000" cy="475488"/>
           </a:xfrm>
           <a:prstGeom prst="rect">
             <a:avLst/>
@@ -7449,44 +7273,9 @@
           <a:p>
             <a:pPr algn="l"/>
             <a:r>
-              <a:rPr sz="1000" b="0">
-                <a:solidFill>
-                  <a:srgbClr val="5C675F"/>
-                </a:solidFill>
-                <a:latin typeface="Arial"/>
-              </a:rPr>
-              <a:t>N = 54 · проценты от числа респондентов</a:t>
-            </a:r>
-          </a:p>
-        </p:txBody>
-      </p:sp>
-      <p:sp>
-        <p:nvSpPr>
-          <p:cNvPr id="4" name="TextBox 3"/>
-          <p:cNvSpPr txBox="1"/>
-          <p:nvPr/>
-        </p:nvSpPr>
-        <p:spPr>
-          <a:xfrm>
-            <a:off x="2743200" y="630936"/>
-            <a:ext cx="7132320" cy="475488"/>
-          </a:xfrm>
-          <a:prstGeom prst="rect">
-            <a:avLst/>
-          </a:prstGeom>
-          <a:noFill/>
-        </p:spPr>
-        <p:txBody>
-          <a:bodyPr wrap="square">
-            <a:noAutofit/>
-          </a:bodyPr>
-          <a:lstStyle/>
-          <a:p>
-            <a:pPr algn="l"/>
-            <a:r>
               <a:rPr sz="2400" b="1">
                 <a:solidFill>
-                  <a:srgbClr val="244128"/>
+                  <a:srgbClr val="2D5644"/>
                 </a:solidFill>
                 <a:latin typeface="Arial"/>
               </a:rPr>
@@ -7497,20 +7286,20 @@
       </p:sp>
       <p:sp>
         <p:nvSpPr>
-          <p:cNvPr id="5" name="Rectangle 4"/>
+          <p:cNvPr id="4" name="Rectangle 3"/>
           <p:cNvSpPr/>
           <p:nvPr/>
         </p:nvSpPr>
         <p:spPr>
           <a:xfrm>
-            <a:off x="502920" y="1170432"/>
-            <a:ext cx="11155680" cy="32004"/>
+            <a:off x="685800" y="1170432"/>
+            <a:ext cx="10515600" cy="22860"/>
           </a:xfrm>
           <a:prstGeom prst="rect">
             <a:avLst/>
           </a:prstGeom>
           <a:solidFill>
-            <a:srgbClr val="3AAA35"/>
+            <a:srgbClr val="F8DCC6"/>
           </a:solidFill>
           <a:ln>
             <a:noFill/>
@@ -7540,14 +7329,49 @@
       </p:sp>
       <p:sp>
         <p:nvSpPr>
+          <p:cNvPr id="5" name="TextBox 4"/>
+          <p:cNvSpPr txBox="1"/>
+          <p:nvPr/>
+        </p:nvSpPr>
+        <p:spPr>
+          <a:xfrm>
+            <a:off x="9464040" y="411480"/>
+            <a:ext cx="2194560" cy="310896"/>
+          </a:xfrm>
+          <a:prstGeom prst="rect">
+            <a:avLst/>
+          </a:prstGeom>
+          <a:noFill/>
+        </p:spPr>
+        <p:txBody>
+          <a:bodyPr wrap="square">
+            <a:noAutofit/>
+          </a:bodyPr>
+          <a:lstStyle/>
+          <a:p>
+            <a:pPr algn="r"/>
+            <a:r>
+              <a:rPr sz="1000" b="0">
+                <a:solidFill>
+                  <a:srgbClr val="626262"/>
+                </a:solidFill>
+                <a:latin typeface="Arial"/>
+              </a:rPr>
+              <a:t>3:30–4:30</a:t>
+            </a:r>
+          </a:p>
+        </p:txBody>
+      </p:sp>
+      <p:sp>
+        <p:nvSpPr>
           <p:cNvPr id="6" name="TextBox 5"/>
           <p:cNvSpPr txBox="1"/>
           <p:nvPr/>
         </p:nvSpPr>
         <p:spPr>
           <a:xfrm>
-            <a:off x="9464040" y="411480"/>
-            <a:ext cx="2194560" cy="310896"/>
+            <a:off x="11018520" y="6355080"/>
+            <a:ext cx="640080" cy="228600"/>
           </a:xfrm>
           <a:prstGeom prst="rect">
             <a:avLst/>
@@ -7564,42 +7388,7 @@
             <a:r>
               <a:rPr sz="1000" b="0">
                 <a:solidFill>
-                  <a:srgbClr val="5C675F"/>
-                </a:solidFill>
-                <a:latin typeface="Arial"/>
-              </a:rPr>
-              <a:t>3:30–4:30</a:t>
-            </a:r>
-          </a:p>
-        </p:txBody>
-      </p:sp>
-      <p:sp>
-        <p:nvSpPr>
-          <p:cNvPr id="7" name="TextBox 6"/>
-          <p:cNvSpPr txBox="1"/>
-          <p:nvPr/>
-        </p:nvSpPr>
-        <p:spPr>
-          <a:xfrm>
-            <a:off x="11018520" y="6355080"/>
-            <a:ext cx="640080" cy="228600"/>
-          </a:xfrm>
-          <a:prstGeom prst="rect">
-            <a:avLst/>
-          </a:prstGeom>
-          <a:noFill/>
-        </p:spPr>
-        <p:txBody>
-          <a:bodyPr wrap="square">
-            <a:noAutofit/>
-          </a:bodyPr>
-          <a:lstStyle/>
-          <a:p>
-            <a:pPr algn="r"/>
-            <a:r>
-              <a:rPr sz="1000" b="0">
-                <a:solidFill>
-                  <a:srgbClr val="5C675F"/>
+                  <a:srgbClr val="626262"/>
                 </a:solidFill>
                 <a:latin typeface="Arial"/>
               </a:rPr>
@@ -7610,7 +7399,7 @@
       </p:sp>
       <p:sp>
         <p:nvSpPr>
-          <p:cNvPr id="8" name="Rectangle 7"/>
+          <p:cNvPr id="7" name="Rectangle 6"/>
           <p:cNvSpPr/>
           <p:nvPr/>
         </p:nvSpPr>
@@ -7653,14 +7442,49 @@
       </p:sp>
       <p:sp>
         <p:nvSpPr>
+          <p:cNvPr id="8" name="TextBox 7"/>
+          <p:cNvSpPr txBox="1"/>
+          <p:nvPr/>
+        </p:nvSpPr>
+        <p:spPr>
+          <a:xfrm>
+            <a:off x="914400" y="1783080"/>
+            <a:ext cx="5760720" cy="320040"/>
+          </a:xfrm>
+          <a:prstGeom prst="rect">
+            <a:avLst/>
+          </a:prstGeom>
+          <a:noFill/>
+        </p:spPr>
+        <p:txBody>
+          <a:bodyPr wrap="square">
+            <a:noAutofit/>
+          </a:bodyPr>
+          <a:lstStyle/>
+          <a:p>
+            <a:pPr algn="l"/>
+            <a:r>
+              <a:rPr sz="1800" b="1">
+                <a:solidFill>
+                  <a:srgbClr val="2D5644"/>
+                </a:solidFill>
+                <a:latin typeface="Arial"/>
+              </a:rPr>
+              <a:t>Самые активные названия</a:t>
+            </a:r>
+          </a:p>
+        </p:txBody>
+      </p:sp>
+      <p:sp>
+        <p:nvSpPr>
           <p:cNvPr id="9" name="TextBox 8"/>
           <p:cNvSpPr txBox="1"/>
           <p:nvPr/>
         </p:nvSpPr>
         <p:spPr>
           <a:xfrm>
-            <a:off x="914400" y="1783080"/>
-            <a:ext cx="5760720" cy="320040"/>
+            <a:off x="914400" y="2331720"/>
+            <a:ext cx="5303520" cy="228600"/>
           </a:xfrm>
           <a:prstGeom prst="rect">
             <a:avLst/>
@@ -7675,41 +7499,6 @@
           <a:p>
             <a:pPr algn="l"/>
             <a:r>
-              <a:rPr sz="1800" b="1">
-                <a:solidFill>
-                  <a:srgbClr val="244128"/>
-                </a:solidFill>
-                <a:latin typeface="Arial"/>
-              </a:rPr>
-              <a:t>Самые активные названия</a:t>
-            </a:r>
-          </a:p>
-        </p:txBody>
-      </p:sp>
-      <p:sp>
-        <p:nvSpPr>
-          <p:cNvPr id="10" name="TextBox 9"/>
-          <p:cNvSpPr txBox="1"/>
-          <p:nvPr/>
-        </p:nvSpPr>
-        <p:spPr>
-          <a:xfrm>
-            <a:off x="914400" y="2331720"/>
-            <a:ext cx="5303520" cy="228600"/>
-          </a:xfrm>
-          <a:prstGeom prst="rect">
-            <a:avLst/>
-          </a:prstGeom>
-          <a:noFill/>
-        </p:spPr>
-        <p:txBody>
-          <a:bodyPr wrap="square">
-            <a:noAutofit/>
-          </a:bodyPr>
-          <a:lstStyle/>
-          <a:p>
-            <a:pPr algn="l"/>
-            <a:r>
               <a:rPr sz="1400" b="1">
                 <a:solidFill>
                   <a:srgbClr val="000000"/>
@@ -7723,7 +7512,7 @@
       </p:sp>
       <p:sp>
         <p:nvSpPr>
-          <p:cNvPr id="11" name="Rectangle 10"/>
+          <p:cNvPr id="10" name="Rectangle 9"/>
           <p:cNvSpPr/>
           <p:nvPr/>
         </p:nvSpPr>
@@ -7766,7 +7555,7 @@
       </p:sp>
       <p:sp>
         <p:nvSpPr>
-          <p:cNvPr id="12" name="Rectangle 11"/>
+          <p:cNvPr id="11" name="Rectangle 10"/>
           <p:cNvSpPr/>
           <p:nvPr/>
         </p:nvSpPr>
@@ -7779,7 +7568,7 @@
             <a:avLst/>
           </a:prstGeom>
           <a:solidFill>
-            <a:srgbClr val="3AAA35"/>
+            <a:srgbClr val="60A678"/>
           </a:solidFill>
           <a:ln>
             <a:noFill/>
@@ -7809,14 +7598,49 @@
       </p:sp>
       <p:sp>
         <p:nvSpPr>
+          <p:cNvPr id="12" name="TextBox 11"/>
+          <p:cNvSpPr txBox="1"/>
+          <p:nvPr/>
+        </p:nvSpPr>
+        <p:spPr>
+          <a:xfrm>
+            <a:off x="5532120" y="2514600"/>
+            <a:ext cx="685800" cy="228600"/>
+          </a:xfrm>
+          <a:prstGeom prst="rect">
+            <a:avLst/>
+          </a:prstGeom>
+          <a:noFill/>
+        </p:spPr>
+        <p:txBody>
+          <a:bodyPr wrap="square">
+            <a:noAutofit/>
+          </a:bodyPr>
+          <a:lstStyle/>
+          <a:p>
+            <a:pPr algn="r"/>
+            <a:r>
+              <a:rPr sz="1300" b="1">
+                <a:solidFill>
+                  <a:srgbClr val="60A678"/>
+                </a:solidFill>
+                <a:latin typeface="Arial"/>
+              </a:rPr>
+              <a:t>92.6%</a:t>
+            </a:r>
+          </a:p>
+        </p:txBody>
+      </p:sp>
+      <p:sp>
+        <p:nvSpPr>
           <p:cNvPr id="13" name="TextBox 12"/>
           <p:cNvSpPr txBox="1"/>
           <p:nvPr/>
         </p:nvSpPr>
         <p:spPr>
           <a:xfrm>
-            <a:off x="5532120" y="2514600"/>
-            <a:ext cx="685800" cy="228600"/>
+            <a:off x="914400" y="2898648"/>
+            <a:ext cx="5303520" cy="256032"/>
           </a:xfrm>
           <a:prstGeom prst="rect">
             <a:avLst/>
@@ -7829,15 +7653,15 @@
           </a:bodyPr>
           <a:lstStyle/>
           <a:p>
-            <a:pPr algn="r"/>
-            <a:r>
-              <a:rPr sz="1300" b="1">
-                <a:solidFill>
-                  <a:srgbClr val="3AAA35"/>
-                </a:solidFill>
-                <a:latin typeface="Arial"/>
-              </a:rPr>
-              <a:t>92.6%</a:t>
+            <a:pPr algn="l"/>
+            <a:r>
+              <a:rPr sz="1000" b="0">
+                <a:solidFill>
+                  <a:srgbClr val="626262"/>
+                </a:solidFill>
+                <a:latin typeface="Arial"/>
+              </a:rPr>
+              <a:t>ядро неформального городского лексикона</a:t>
             </a:r>
           </a:p>
         </p:txBody>
@@ -7850,8 +7674,8 @@
         </p:nvSpPr>
         <p:spPr>
           <a:xfrm>
-            <a:off x="914400" y="2898648"/>
-            <a:ext cx="5303520" cy="256032"/>
+            <a:off x="914400" y="3154680"/>
+            <a:ext cx="5303520" cy="228600"/>
           </a:xfrm>
           <a:prstGeom prst="rect">
             <a:avLst/>
@@ -7866,41 +7690,6 @@
           <a:p>
             <a:pPr algn="l"/>
             <a:r>
-              <a:rPr sz="1000" b="0">
-                <a:solidFill>
-                  <a:srgbClr val="5C675F"/>
-                </a:solidFill>
-                <a:latin typeface="Arial"/>
-              </a:rPr>
-              <a:t>ядро неформального городского лексикона</a:t>
-            </a:r>
-          </a:p>
-        </p:txBody>
-      </p:sp>
-      <p:sp>
-        <p:nvSpPr>
-          <p:cNvPr id="15" name="TextBox 14"/>
-          <p:cNvSpPr txBox="1"/>
-          <p:nvPr/>
-        </p:nvSpPr>
-        <p:spPr>
-          <a:xfrm>
-            <a:off x="914400" y="3154680"/>
-            <a:ext cx="5303520" cy="228600"/>
-          </a:xfrm>
-          <a:prstGeom prst="rect">
-            <a:avLst/>
-          </a:prstGeom>
-          <a:noFill/>
-        </p:spPr>
-        <p:txBody>
-          <a:bodyPr wrap="square">
-            <a:noAutofit/>
-          </a:bodyPr>
-          <a:lstStyle/>
-          <a:p>
-            <a:pPr algn="l"/>
-            <a:r>
               <a:rPr sz="1400" b="1">
                 <a:solidFill>
                   <a:srgbClr val="000000"/>
@@ -7914,7 +7703,7 @@
       </p:sp>
       <p:sp>
         <p:nvSpPr>
-          <p:cNvPr id="16" name="Rectangle 15"/>
+          <p:cNvPr id="15" name="Rectangle 14"/>
           <p:cNvSpPr/>
           <p:nvPr/>
         </p:nvSpPr>
@@ -7957,7 +7746,7 @@
       </p:sp>
       <p:sp>
         <p:nvSpPr>
-          <p:cNvPr id="17" name="Rectangle 16"/>
+          <p:cNvPr id="16" name="Rectangle 15"/>
           <p:cNvSpPr/>
           <p:nvPr/>
         </p:nvSpPr>
@@ -7970,7 +7759,7 @@
             <a:avLst/>
           </a:prstGeom>
           <a:solidFill>
-            <a:srgbClr val="3AAA35"/>
+            <a:srgbClr val="60A678"/>
           </a:solidFill>
           <a:ln>
             <a:noFill/>
@@ -8000,14 +7789,49 @@
       </p:sp>
       <p:sp>
         <p:nvSpPr>
+          <p:cNvPr id="17" name="TextBox 16"/>
+          <p:cNvSpPr txBox="1"/>
+          <p:nvPr/>
+        </p:nvSpPr>
+        <p:spPr>
+          <a:xfrm>
+            <a:off x="5532120" y="3337560"/>
+            <a:ext cx="685800" cy="228600"/>
+          </a:xfrm>
+          <a:prstGeom prst="rect">
+            <a:avLst/>
+          </a:prstGeom>
+          <a:noFill/>
+        </p:spPr>
+        <p:txBody>
+          <a:bodyPr wrap="square">
+            <a:noAutofit/>
+          </a:bodyPr>
+          <a:lstStyle/>
+          <a:p>
+            <a:pPr algn="r"/>
+            <a:r>
+              <a:rPr sz="1300" b="1">
+                <a:solidFill>
+                  <a:srgbClr val="60A678"/>
+                </a:solidFill>
+                <a:latin typeface="Arial"/>
+              </a:rPr>
+              <a:t>83.3%</a:t>
+            </a:r>
+          </a:p>
+        </p:txBody>
+      </p:sp>
+      <p:sp>
+        <p:nvSpPr>
           <p:cNvPr id="18" name="TextBox 17"/>
           <p:cNvSpPr txBox="1"/>
           <p:nvPr/>
         </p:nvSpPr>
         <p:spPr>
           <a:xfrm>
-            <a:off x="5532120" y="3337560"/>
-            <a:ext cx="685800" cy="228600"/>
+            <a:off x="914400" y="3721608"/>
+            <a:ext cx="5303520" cy="256032"/>
           </a:xfrm>
           <a:prstGeom prst="rect">
             <a:avLst/>
@@ -8020,15 +7844,15 @@
           </a:bodyPr>
           <a:lstStyle/>
           <a:p>
-            <a:pPr algn="r"/>
-            <a:r>
-              <a:rPr sz="1300" b="1">
-                <a:solidFill>
-                  <a:srgbClr val="3AAA35"/>
-                </a:solidFill>
-                <a:latin typeface="Arial"/>
-              </a:rPr>
-              <a:t>83.3%</a:t>
+            <a:pPr algn="l"/>
+            <a:r>
+              <a:rPr sz="1000" b="0">
+                <a:solidFill>
+                  <a:srgbClr val="626262"/>
+                </a:solidFill>
+                <a:latin typeface="Arial"/>
+              </a:rPr>
+              <a:t>универсальный центральный навигатор</a:t>
             </a:r>
           </a:p>
         </p:txBody>
@@ -8041,8 +7865,8 @@
         </p:nvSpPr>
         <p:spPr>
           <a:xfrm>
-            <a:off x="914400" y="3721608"/>
-            <a:ext cx="5303520" cy="256032"/>
+            <a:off x="914400" y="3977639"/>
+            <a:ext cx="5303520" cy="228600"/>
           </a:xfrm>
           <a:prstGeom prst="rect">
             <a:avLst/>
@@ -8057,41 +7881,6 @@
           <a:p>
             <a:pPr algn="l"/>
             <a:r>
-              <a:rPr sz="1000" b="0">
-                <a:solidFill>
-                  <a:srgbClr val="5C675F"/>
-                </a:solidFill>
-                <a:latin typeface="Arial"/>
-              </a:rPr>
-              <a:t>универсальный центральный навигатор</a:t>
-            </a:r>
-          </a:p>
-        </p:txBody>
-      </p:sp>
-      <p:sp>
-        <p:nvSpPr>
-          <p:cNvPr id="20" name="TextBox 19"/>
-          <p:cNvSpPr txBox="1"/>
-          <p:nvPr/>
-        </p:nvSpPr>
-        <p:spPr>
-          <a:xfrm>
-            <a:off x="914400" y="3977639"/>
-            <a:ext cx="5303520" cy="228600"/>
-          </a:xfrm>
-          <a:prstGeom prst="rect">
-            <a:avLst/>
-          </a:prstGeom>
-          <a:noFill/>
-        </p:spPr>
-        <p:txBody>
-          <a:bodyPr wrap="square">
-            <a:noAutofit/>
-          </a:bodyPr>
-          <a:lstStyle/>
-          <a:p>
-            <a:pPr algn="l"/>
-            <a:r>
               <a:rPr sz="1400" b="1">
                 <a:solidFill>
                   <a:srgbClr val="000000"/>
@@ -8105,7 +7894,7 @@
       </p:sp>
       <p:sp>
         <p:nvSpPr>
-          <p:cNvPr id="21" name="Rectangle 20"/>
+          <p:cNvPr id="20" name="Rectangle 19"/>
           <p:cNvSpPr/>
           <p:nvPr/>
         </p:nvSpPr>
@@ -8148,7 +7937,7 @@
       </p:sp>
       <p:sp>
         <p:nvSpPr>
-          <p:cNvPr id="22" name="Rectangle 21"/>
+          <p:cNvPr id="21" name="Rectangle 20"/>
           <p:cNvSpPr/>
           <p:nvPr/>
         </p:nvSpPr>
@@ -8161,7 +7950,7 @@
             <a:avLst/>
           </a:prstGeom>
           <a:solidFill>
-            <a:srgbClr val="56975B"/>
+            <a:srgbClr val="BEDEC7"/>
           </a:solidFill>
           <a:ln>
             <a:noFill/>
@@ -8191,14 +7980,49 @@
       </p:sp>
       <p:sp>
         <p:nvSpPr>
+          <p:cNvPr id="22" name="TextBox 21"/>
+          <p:cNvSpPr txBox="1"/>
+          <p:nvPr/>
+        </p:nvSpPr>
+        <p:spPr>
+          <a:xfrm>
+            <a:off x="5532120" y="4160519"/>
+            <a:ext cx="685800" cy="228600"/>
+          </a:xfrm>
+          <a:prstGeom prst="rect">
+            <a:avLst/>
+          </a:prstGeom>
+          <a:noFill/>
+        </p:spPr>
+        <p:txBody>
+          <a:bodyPr wrap="square">
+            <a:noAutofit/>
+          </a:bodyPr>
+          <a:lstStyle/>
+          <a:p>
+            <a:pPr algn="r"/>
+            <a:r>
+              <a:rPr sz="1300" b="1">
+                <a:solidFill>
+                  <a:srgbClr val="BEDEC7"/>
+                </a:solidFill>
+                <a:latin typeface="Arial"/>
+              </a:rPr>
+              <a:t>79.6%</a:t>
+            </a:r>
+          </a:p>
+        </p:txBody>
+      </p:sp>
+      <p:sp>
+        <p:nvSpPr>
           <p:cNvPr id="23" name="TextBox 22"/>
           <p:cNvSpPr txBox="1"/>
           <p:nvPr/>
         </p:nvSpPr>
         <p:spPr>
           <a:xfrm>
-            <a:off x="5532120" y="4160519"/>
-            <a:ext cx="685800" cy="228600"/>
+            <a:off x="914400" y="4544567"/>
+            <a:ext cx="5303520" cy="256032"/>
           </a:xfrm>
           <a:prstGeom prst="rect">
             <a:avLst/>
@@ -8211,15 +8035,15 @@
           </a:bodyPr>
           <a:lstStyle/>
           <a:p>
-            <a:pPr algn="r"/>
-            <a:r>
-              <a:rPr sz="1300" b="1">
-                <a:solidFill>
-                  <a:srgbClr val="56975B"/>
-                </a:solidFill>
-                <a:latin typeface="Arial"/>
-              </a:rPr>
-              <a:t>79.6%</a:t>
+            <a:pPr algn="l"/>
+            <a:r>
+              <a:rPr sz="1000" b="0">
+                <a:solidFill>
+                  <a:srgbClr val="626262"/>
+                </a:solidFill>
+                <a:latin typeface="Arial"/>
+              </a:rPr>
+              <a:t>цифровая коммуникация закрепляет разговорную форму</a:t>
             </a:r>
           </a:p>
         </p:txBody>
@@ -8232,8 +8056,8 @@
         </p:nvSpPr>
         <p:spPr>
           <a:xfrm>
-            <a:off x="914400" y="4544567"/>
-            <a:ext cx="5303520" cy="256032"/>
+            <a:off x="914400" y="4800600"/>
+            <a:ext cx="5303520" cy="228600"/>
           </a:xfrm>
           <a:prstGeom prst="rect">
             <a:avLst/>
@@ -8248,41 +8072,6 @@
           <a:p>
             <a:pPr algn="l"/>
             <a:r>
-              <a:rPr sz="1000" b="0">
-                <a:solidFill>
-                  <a:srgbClr val="5C675F"/>
-                </a:solidFill>
-                <a:latin typeface="Arial"/>
-              </a:rPr>
-              <a:t>цифровая коммуникация закрепляет разговорную форму</a:t>
-            </a:r>
-          </a:p>
-        </p:txBody>
-      </p:sp>
-      <p:sp>
-        <p:nvSpPr>
-          <p:cNvPr id="25" name="TextBox 24"/>
-          <p:cNvSpPr txBox="1"/>
-          <p:nvPr/>
-        </p:nvSpPr>
-        <p:spPr>
-          <a:xfrm>
-            <a:off x="914400" y="4800600"/>
-            <a:ext cx="5303520" cy="228600"/>
-          </a:xfrm>
-          <a:prstGeom prst="rect">
-            <a:avLst/>
-          </a:prstGeom>
-          <a:noFill/>
-        </p:spPr>
-        <p:txBody>
-          <a:bodyPr wrap="square">
-            <a:noAutofit/>
-          </a:bodyPr>
-          <a:lstStyle/>
-          <a:p>
-            <a:pPr algn="l"/>
-            <a:r>
               <a:rPr sz="1400" b="1">
                 <a:solidFill>
                   <a:srgbClr val="000000"/>
@@ -8296,7 +8085,7 @@
       </p:sp>
       <p:sp>
         <p:nvSpPr>
-          <p:cNvPr id="26" name="Rectangle 25"/>
+          <p:cNvPr id="25" name="Rectangle 24"/>
           <p:cNvSpPr/>
           <p:nvPr/>
         </p:nvSpPr>
@@ -8339,7 +8128,7 @@
       </p:sp>
       <p:sp>
         <p:nvSpPr>
-          <p:cNvPr id="27" name="Rectangle 26"/>
+          <p:cNvPr id="26" name="Rectangle 25"/>
           <p:cNvSpPr/>
           <p:nvPr/>
         </p:nvSpPr>
@@ -8352,7 +8141,7 @@
             <a:avLst/>
           </a:prstGeom>
           <a:solidFill>
-            <a:srgbClr val="56975B"/>
+            <a:srgbClr val="BEDEC7"/>
           </a:solidFill>
           <a:ln>
             <a:noFill/>
@@ -8382,14 +8171,49 @@
       </p:sp>
       <p:sp>
         <p:nvSpPr>
+          <p:cNvPr id="27" name="TextBox 26"/>
+          <p:cNvSpPr txBox="1"/>
+          <p:nvPr/>
+        </p:nvSpPr>
+        <p:spPr>
+          <a:xfrm>
+            <a:off x="5532120" y="4983480"/>
+            <a:ext cx="685800" cy="228600"/>
+          </a:xfrm>
+          <a:prstGeom prst="rect">
+            <a:avLst/>
+          </a:prstGeom>
+          <a:noFill/>
+        </p:spPr>
+        <p:txBody>
+          <a:bodyPr wrap="square">
+            <a:noAutofit/>
+          </a:bodyPr>
+          <a:lstStyle/>
+          <a:p>
+            <a:pPr algn="r"/>
+            <a:r>
+              <a:rPr sz="1300" b="1">
+                <a:solidFill>
+                  <a:srgbClr val="BEDEC7"/>
+                </a:solidFill>
+                <a:latin typeface="Arial"/>
+              </a:rPr>
+              <a:t>63%</a:t>
+            </a:r>
+          </a:p>
+        </p:txBody>
+      </p:sp>
+      <p:sp>
+        <p:nvSpPr>
           <p:cNvPr id="28" name="TextBox 27"/>
           <p:cNvSpPr txBox="1"/>
           <p:nvPr/>
         </p:nvSpPr>
         <p:spPr>
           <a:xfrm>
-            <a:off x="5532120" y="4983480"/>
-            <a:ext cx="685800" cy="228600"/>
+            <a:off x="914400" y="5367528"/>
+            <a:ext cx="5303520" cy="256032"/>
           </a:xfrm>
           <a:prstGeom prst="rect">
             <a:avLst/>
@@ -8402,46 +8226,11 @@
           </a:bodyPr>
           <a:lstStyle/>
           <a:p>
-            <a:pPr algn="r"/>
-            <a:r>
-              <a:rPr sz="1300" b="1">
-                <a:solidFill>
-                  <a:srgbClr val="56975B"/>
-                </a:solidFill>
-                <a:latin typeface="Arial"/>
-              </a:rPr>
-              <a:t>63%</a:t>
-            </a:r>
-          </a:p>
-        </p:txBody>
-      </p:sp>
-      <p:sp>
-        <p:nvSpPr>
-          <p:cNvPr id="29" name="TextBox 28"/>
-          <p:cNvSpPr txBox="1"/>
-          <p:nvPr/>
-        </p:nvSpPr>
-        <p:spPr>
-          <a:xfrm>
-            <a:off x="914400" y="5367528"/>
-            <a:ext cx="5303520" cy="256032"/>
-          </a:xfrm>
-          <a:prstGeom prst="rect">
-            <a:avLst/>
-          </a:prstGeom>
-          <a:noFill/>
-        </p:spPr>
-        <p:txBody>
-          <a:bodyPr wrap="square">
-            <a:noAutofit/>
-          </a:bodyPr>
-          <a:lstStyle/>
-          <a:p>
             <a:pPr algn="l"/>
             <a:r>
               <a:rPr sz="1000" b="0">
                 <a:solidFill>
-                  <a:srgbClr val="5C675F"/>
+                  <a:srgbClr val="626262"/>
                 </a:solidFill>
                 <a:latin typeface="Arial"/>
               </a:rPr>
@@ -8452,7 +8241,7 @@
       </p:sp>
       <p:sp>
         <p:nvSpPr>
-          <p:cNvPr id="30" name="Rectangle 29"/>
+          <p:cNvPr id="29" name="Rectangle 28"/>
           <p:cNvSpPr/>
           <p:nvPr/>
         </p:nvSpPr>
@@ -8465,7 +8254,7 @@
             <a:avLst/>
           </a:prstGeom>
           <a:solidFill>
-            <a:srgbClr val="244128"/>
+            <a:srgbClr val="FFFFFF"/>
           </a:solidFill>
           <a:ln>
             <a:noFill/>
@@ -8495,6 +8284,49 @@
       </p:sp>
       <p:sp>
         <p:nvSpPr>
+          <p:cNvPr id="30" name="Rectangle 29"/>
+          <p:cNvSpPr/>
+          <p:nvPr/>
+        </p:nvSpPr>
+        <p:spPr>
+          <a:xfrm>
+            <a:off x="7360920" y="1508760"/>
+            <a:ext cx="4160520" cy="128016"/>
+          </a:xfrm>
+          <a:prstGeom prst="rect">
+            <a:avLst/>
+          </a:prstGeom>
+          <a:solidFill>
+            <a:srgbClr val="BEDEC7"/>
+          </a:solidFill>
+          <a:ln>
+            <a:noFill/>
+          </a:ln>
+        </p:spPr>
+        <p:style>
+          <a:lnRef idx="1">
+            <a:schemeClr val="accent1"/>
+          </a:lnRef>
+          <a:fillRef idx="3">
+            <a:schemeClr val="accent1"/>
+          </a:fillRef>
+          <a:effectRef idx="2">
+            <a:schemeClr val="accent1"/>
+          </a:effectRef>
+          <a:fontRef idx="minor">
+            <a:schemeClr val="lt1"/>
+          </a:fontRef>
+        </p:style>
+        <p:txBody>
+          <a:bodyPr rtlCol="0" anchor="ctr"/>
+          <a:lstStyle/>
+          <a:p>
+            <a:pPr algn="ctr"/>
+          </a:p>
+        </p:txBody>
+      </p:sp>
+      <p:sp>
+        <p:nvSpPr>
           <p:cNvPr id="31" name="TextBox 30"/>
           <p:cNvSpPr txBox="1"/>
           <p:nvPr/>
@@ -8519,7 +8351,7 @@
             <a:r>
               <a:rPr sz="1800" b="1">
                 <a:solidFill>
-                  <a:srgbClr val="FFFFFF"/>
+                  <a:srgbClr val="2D5644"/>
                 </a:solidFill>
                 <a:latin typeface="Arial"/>
               </a:rPr>
@@ -8558,16 +8390,16 @@
             <a:r>
               <a:rPr sz="1500" b="1">
                 <a:solidFill>
-                  <a:srgbClr val="F39869"/>
-                </a:solidFill>
-                <a:latin typeface="Arial"/>
-              </a:rPr>
-              <a:t>■ </a:t>
+                  <a:srgbClr val="E6915F"/>
+                </a:solidFill>
+                <a:latin typeface="Arial"/>
+              </a:rPr>
+              <a:t>• </a:t>
             </a:r>
             <a:r>
               <a:rPr sz="1500" b="0">
                 <a:solidFill>
-                  <a:srgbClr val="FFFFFF"/>
+                  <a:srgbClr val="000000"/>
                 </a:solidFill>
                 <a:latin typeface="Arial"/>
               </a:rPr>
@@ -8583,16 +8415,16 @@
             <a:r>
               <a:rPr sz="1500" b="1">
                 <a:solidFill>
-                  <a:srgbClr val="F39869"/>
-                </a:solidFill>
-                <a:latin typeface="Arial"/>
-              </a:rPr>
-              <a:t>■ </a:t>
+                  <a:srgbClr val="E6915F"/>
+                </a:solidFill>
+                <a:latin typeface="Arial"/>
+              </a:rPr>
+              <a:t>• </a:t>
             </a:r>
             <a:r>
               <a:rPr sz="1500" b="0">
                 <a:solidFill>
-                  <a:srgbClr val="FFFFFF"/>
+                  <a:srgbClr val="000000"/>
                 </a:solidFill>
                 <a:latin typeface="Arial"/>
               </a:rPr>
@@ -8608,16 +8440,16 @@
             <a:r>
               <a:rPr sz="1500" b="1">
                 <a:solidFill>
-                  <a:srgbClr val="F39869"/>
-                </a:solidFill>
-                <a:latin typeface="Arial"/>
-              </a:rPr>
-              <a:t>■ </a:t>
+                  <a:srgbClr val="E6915F"/>
+                </a:solidFill>
+                <a:latin typeface="Arial"/>
+              </a:rPr>
+              <a:t>• </a:t>
             </a:r>
             <a:r>
               <a:rPr sz="1500" b="0">
                 <a:solidFill>
-                  <a:srgbClr val="FFFFFF"/>
+                  <a:srgbClr val="000000"/>
                 </a:solidFill>
                 <a:latin typeface="Arial"/>
               </a:rPr>
@@ -8635,56 +8467,13 @@
         <p:spPr>
           <a:xfrm>
             <a:off x="7360920" y="5577840"/>
-            <a:ext cx="2834640" cy="164592"/>
+            <a:ext cx="4160520" cy="73152"/>
           </a:xfrm>
           <a:prstGeom prst="rect">
             <a:avLst/>
           </a:prstGeom>
           <a:solidFill>
-            <a:srgbClr val="3AAA35"/>
-          </a:solidFill>
-          <a:ln>
-            <a:noFill/>
-          </a:ln>
-        </p:spPr>
-        <p:style>
-          <a:lnRef idx="1">
-            <a:schemeClr val="accent1"/>
-          </a:lnRef>
-          <a:fillRef idx="3">
-            <a:schemeClr val="accent1"/>
-          </a:fillRef>
-          <a:effectRef idx="2">
-            <a:schemeClr val="accent1"/>
-          </a:effectRef>
-          <a:fontRef idx="minor">
-            <a:schemeClr val="lt1"/>
-          </a:fontRef>
-        </p:style>
-        <p:txBody>
-          <a:bodyPr rtlCol="0" anchor="ctr"/>
-          <a:lstStyle/>
-          <a:p>
-            <a:pPr algn="ctr"/>
-          </a:p>
-        </p:txBody>
-      </p:sp>
-      <p:sp>
-        <p:nvSpPr>
-          <p:cNvPr id="34" name="Rectangle 33"/>
-          <p:cNvSpPr/>
-          <p:nvPr/>
-        </p:nvSpPr>
-        <p:spPr>
-          <a:xfrm>
-            <a:off x="10195560" y="5577840"/>
-            <a:ext cx="1325880" cy="164592"/>
-          </a:xfrm>
-          <a:prstGeom prst="rect">
-            <a:avLst/>
-          </a:prstGeom>
-          <a:solidFill>
-            <a:srgbClr val="DB4928"/>
+            <a:srgbClr val="F8DCC6"/>
           </a:solidFill>
           <a:ln>
             <a:noFill/>
@@ -8726,7 +8515,7 @@
     <p:bg>
       <p:bgPr>
         <a:solidFill>
-          <a:srgbClr val="F6F8F4"/>
+          <a:srgbClr val="FAF8F4"/>
         </a:solidFill>
         <a:effectLst/>
       </p:bgPr>
@@ -8738,30 +8527,41 @@
         <p:nvPr/>
       </p:nvGrpSpPr>
       <p:grpSpPr/>
-      <p:pic>
-        <p:nvPicPr>
-          <p:cNvPr id="2" name="Picture 1" descr="spbstu_logo_02.png"/>
-          <p:cNvPicPr>
-            <a:picLocks noChangeAspect="1"/>
-          </p:cNvPicPr>
-          <p:nvPr/>
-        </p:nvPicPr>
-        <p:blipFill>
-          <a:blip r:embed="rId2"/>
-          <a:stretch>
-            <a:fillRect/>
-          </a:stretch>
-        </p:blipFill>
-        <p:spPr>
-          <a:xfrm>
-            <a:off x="502920" y="310896"/>
-            <a:ext cx="1600200" cy="552069"/>
-          </a:xfrm>
-          <a:prstGeom prst="rect">
-            <a:avLst/>
-          </a:prstGeom>
-        </p:spPr>
-      </p:pic>
+      <p:sp>
+        <p:nvSpPr>
+          <p:cNvPr id="2" name="TextBox 1"/>
+          <p:cNvSpPr txBox="1"/>
+          <p:nvPr/>
+        </p:nvSpPr>
+        <p:spPr>
+          <a:xfrm>
+            <a:off x="685800" y="320040"/>
+            <a:ext cx="6949440" cy="310896"/>
+          </a:xfrm>
+          <a:prstGeom prst="rect">
+            <a:avLst/>
+          </a:prstGeom>
+          <a:noFill/>
+        </p:spPr>
+        <p:txBody>
+          <a:bodyPr wrap="square">
+            <a:noAutofit/>
+          </a:bodyPr>
+          <a:lstStyle/>
+          <a:p>
+            <a:pPr algn="l"/>
+            <a:r>
+              <a:rPr sz="1000" b="0">
+                <a:solidFill>
+                  <a:srgbClr val="626262"/>
+                </a:solidFill>
+                <a:latin typeface="Arial"/>
+              </a:rPr>
+              <a:t>Что знают, но не всегда используют</a:t>
+            </a:r>
+          </a:p>
+        </p:txBody>
+      </p:sp>
       <p:sp>
         <p:nvSpPr>
           <p:cNvPr id="3" name="TextBox 2"/>
@@ -8770,8 +8570,8 @@
         </p:nvSpPr>
         <p:spPr>
           <a:xfrm>
-            <a:off x="2743200" y="320040"/>
-            <a:ext cx="6217920" cy="310896"/>
+            <a:off x="685800" y="630936"/>
+            <a:ext cx="8001000" cy="475488"/>
           </a:xfrm>
           <a:prstGeom prst="rect">
             <a:avLst/>
@@ -8786,44 +8586,9 @@
           <a:p>
             <a:pPr algn="l"/>
             <a:r>
-              <a:rPr sz="1000" b="0">
-                <a:solidFill>
-                  <a:srgbClr val="5C675F"/>
-                </a:solidFill>
-                <a:latin typeface="Arial"/>
-              </a:rPr>
-              <a:t>Что знают, но не всегда используют</a:t>
-            </a:r>
-          </a:p>
-        </p:txBody>
-      </p:sp>
-      <p:sp>
-        <p:nvSpPr>
-          <p:cNvPr id="4" name="TextBox 3"/>
-          <p:cNvSpPr txBox="1"/>
-          <p:nvPr/>
-        </p:nvSpPr>
-        <p:spPr>
-          <a:xfrm>
-            <a:off x="2743200" y="630936"/>
-            <a:ext cx="7132320" cy="475488"/>
-          </a:xfrm>
-          <a:prstGeom prst="rect">
-            <a:avLst/>
-          </a:prstGeom>
-          <a:noFill/>
-        </p:spPr>
-        <p:txBody>
-          <a:bodyPr wrap="square">
-            <a:noAutofit/>
-          </a:bodyPr>
-          <a:lstStyle/>
-          <a:p>
-            <a:pPr algn="l"/>
-            <a:r>
               <a:rPr sz="2400" b="1">
                 <a:solidFill>
-                  <a:srgbClr val="244128"/>
+                  <a:srgbClr val="2D5644"/>
                 </a:solidFill>
                 <a:latin typeface="Arial"/>
               </a:rPr>
@@ -8834,20 +8599,20 @@
       </p:sp>
       <p:sp>
         <p:nvSpPr>
-          <p:cNvPr id="5" name="Rectangle 4"/>
+          <p:cNvPr id="4" name="Rectangle 3"/>
           <p:cNvSpPr/>
           <p:nvPr/>
         </p:nvSpPr>
         <p:spPr>
           <a:xfrm>
-            <a:off x="502920" y="1170432"/>
-            <a:ext cx="11155680" cy="32004"/>
+            <a:off x="685800" y="1170432"/>
+            <a:ext cx="10515600" cy="22860"/>
           </a:xfrm>
           <a:prstGeom prst="rect">
             <a:avLst/>
           </a:prstGeom>
           <a:solidFill>
-            <a:srgbClr val="3AAA35"/>
+            <a:srgbClr val="F8DCC6"/>
           </a:solidFill>
           <a:ln>
             <a:noFill/>
@@ -8877,14 +8642,49 @@
       </p:sp>
       <p:sp>
         <p:nvSpPr>
+          <p:cNvPr id="5" name="TextBox 4"/>
+          <p:cNvSpPr txBox="1"/>
+          <p:nvPr/>
+        </p:nvSpPr>
+        <p:spPr>
+          <a:xfrm>
+            <a:off x="9464040" y="411480"/>
+            <a:ext cx="2194560" cy="310896"/>
+          </a:xfrm>
+          <a:prstGeom prst="rect">
+            <a:avLst/>
+          </a:prstGeom>
+          <a:noFill/>
+        </p:spPr>
+        <p:txBody>
+          <a:bodyPr wrap="square">
+            <a:noAutofit/>
+          </a:bodyPr>
+          <a:lstStyle/>
+          <a:p>
+            <a:pPr algn="r"/>
+            <a:r>
+              <a:rPr sz="1000" b="0">
+                <a:solidFill>
+                  <a:srgbClr val="626262"/>
+                </a:solidFill>
+                <a:latin typeface="Arial"/>
+              </a:rPr>
+              <a:t>4:30–5:30</a:t>
+            </a:r>
+          </a:p>
+        </p:txBody>
+      </p:sp>
+      <p:sp>
+        <p:nvSpPr>
           <p:cNvPr id="6" name="TextBox 5"/>
           <p:cNvSpPr txBox="1"/>
           <p:nvPr/>
         </p:nvSpPr>
         <p:spPr>
           <a:xfrm>
-            <a:off x="9464040" y="411480"/>
-            <a:ext cx="2194560" cy="310896"/>
+            <a:off x="11018520" y="6355080"/>
+            <a:ext cx="640080" cy="228600"/>
           </a:xfrm>
           <a:prstGeom prst="rect">
             <a:avLst/>
@@ -8901,42 +8701,7 @@
             <a:r>
               <a:rPr sz="1000" b="0">
                 <a:solidFill>
-                  <a:srgbClr val="5C675F"/>
-                </a:solidFill>
-                <a:latin typeface="Arial"/>
-              </a:rPr>
-              <a:t>4:30–5:30</a:t>
-            </a:r>
-          </a:p>
-        </p:txBody>
-      </p:sp>
-      <p:sp>
-        <p:nvSpPr>
-          <p:cNvPr id="7" name="TextBox 6"/>
-          <p:cNvSpPr txBox="1"/>
-          <p:nvPr/>
-        </p:nvSpPr>
-        <p:spPr>
-          <a:xfrm>
-            <a:off x="11018520" y="6355080"/>
-            <a:ext cx="640080" cy="228600"/>
-          </a:xfrm>
-          <a:prstGeom prst="rect">
-            <a:avLst/>
-          </a:prstGeom>
-          <a:noFill/>
-        </p:spPr>
-        <p:txBody>
-          <a:bodyPr wrap="square">
-            <a:noAutofit/>
-          </a:bodyPr>
-          <a:lstStyle/>
-          <a:p>
-            <a:pPr algn="r"/>
-            <a:r>
-              <a:rPr sz="1000" b="0">
-                <a:solidFill>
-                  <a:srgbClr val="5C675F"/>
+                  <a:srgbClr val="626262"/>
                 </a:solidFill>
                 <a:latin typeface="Arial"/>
               </a:rPr>
@@ -8947,7 +8712,7 @@
       </p:sp>
       <p:sp>
         <p:nvSpPr>
-          <p:cNvPr id="8" name="Rectangle 7"/>
+          <p:cNvPr id="7" name="Rectangle 6"/>
           <p:cNvSpPr/>
           <p:nvPr/>
         </p:nvSpPr>
@@ -8990,14 +8755,49 @@
       </p:sp>
       <p:sp>
         <p:nvSpPr>
+          <p:cNvPr id="8" name="TextBox 7"/>
+          <p:cNvSpPr txBox="1"/>
+          <p:nvPr/>
+        </p:nvSpPr>
+        <p:spPr>
+          <a:xfrm>
+            <a:off x="914400" y="1783080"/>
+            <a:ext cx="5074920" cy="320040"/>
+          </a:xfrm>
+          <a:prstGeom prst="rect">
+            <a:avLst/>
+          </a:prstGeom>
+          <a:noFill/>
+        </p:spPr>
+        <p:txBody>
+          <a:bodyPr wrap="square">
+            <a:noAutofit/>
+          </a:bodyPr>
+          <a:lstStyle/>
+          <a:p>
+            <a:pPr algn="l"/>
+            <a:r>
+              <a:rPr sz="1800" b="1">
+                <a:solidFill>
+                  <a:srgbClr val="2D5644"/>
+                </a:solidFill>
+                <a:latin typeface="Arial"/>
+              </a:rPr>
+              <a:t>Пассивный запас шире активного</a:t>
+            </a:r>
+          </a:p>
+        </p:txBody>
+      </p:sp>
+      <p:sp>
+        <p:nvSpPr>
           <p:cNvPr id="9" name="TextBox 8"/>
           <p:cNvSpPr txBox="1"/>
           <p:nvPr/>
         </p:nvSpPr>
         <p:spPr>
           <a:xfrm>
-            <a:off x="914400" y="1783080"/>
-            <a:ext cx="5074920" cy="320040"/>
+            <a:off x="914400" y="2331720"/>
+            <a:ext cx="4754880" cy="228600"/>
           </a:xfrm>
           <a:prstGeom prst="rect">
             <a:avLst/>
@@ -9012,41 +8812,6 @@
           <a:p>
             <a:pPr algn="l"/>
             <a:r>
-              <a:rPr sz="1800" b="1">
-                <a:solidFill>
-                  <a:srgbClr val="244128"/>
-                </a:solidFill>
-                <a:latin typeface="Arial"/>
-              </a:rPr>
-              <a:t>Пассивный запас шире активного</a:t>
-            </a:r>
-          </a:p>
-        </p:txBody>
-      </p:sp>
-      <p:sp>
-        <p:nvSpPr>
-          <p:cNvPr id="10" name="TextBox 9"/>
-          <p:cNvSpPr txBox="1"/>
-          <p:nvPr/>
-        </p:nvSpPr>
-        <p:spPr>
-          <a:xfrm>
-            <a:off x="914400" y="2331720"/>
-            <a:ext cx="4754880" cy="228600"/>
-          </a:xfrm>
-          <a:prstGeom prst="rect">
-            <a:avLst/>
-          </a:prstGeom>
-          <a:noFill/>
-        </p:spPr>
-        <p:txBody>
-          <a:bodyPr wrap="square">
-            <a:noAutofit/>
-          </a:bodyPr>
-          <a:lstStyle/>
-          <a:p>
-            <a:pPr algn="l"/>
-            <a:r>
               <a:rPr sz="1400" b="1">
                 <a:solidFill>
                   <a:srgbClr val="000000"/>
@@ -9060,7 +8825,7 @@
       </p:sp>
       <p:sp>
         <p:nvSpPr>
-          <p:cNvPr id="11" name="Rectangle 10"/>
+          <p:cNvPr id="10" name="Rectangle 9"/>
           <p:cNvSpPr/>
           <p:nvPr/>
         </p:nvSpPr>
@@ -9103,7 +8868,7 @@
       </p:sp>
       <p:sp>
         <p:nvSpPr>
-          <p:cNvPr id="12" name="Rectangle 11"/>
+          <p:cNvPr id="11" name="Rectangle 10"/>
           <p:cNvSpPr/>
           <p:nvPr/>
         </p:nvSpPr>
@@ -9116,7 +8881,7 @@
             <a:avLst/>
           </a:prstGeom>
           <a:solidFill>
-            <a:srgbClr val="DB4928"/>
+            <a:srgbClr val="E6915F"/>
           </a:solidFill>
           <a:ln>
             <a:noFill/>
@@ -9146,14 +8911,49 @@
       </p:sp>
       <p:sp>
         <p:nvSpPr>
+          <p:cNvPr id="12" name="TextBox 11"/>
+          <p:cNvSpPr txBox="1"/>
+          <p:nvPr/>
+        </p:nvSpPr>
+        <p:spPr>
+          <a:xfrm>
+            <a:off x="4983480" y="2514600"/>
+            <a:ext cx="685800" cy="228600"/>
+          </a:xfrm>
+          <a:prstGeom prst="rect">
+            <a:avLst/>
+          </a:prstGeom>
+          <a:noFill/>
+        </p:spPr>
+        <p:txBody>
+          <a:bodyPr wrap="square">
+            <a:noAutofit/>
+          </a:bodyPr>
+          <a:lstStyle/>
+          <a:p>
+            <a:pPr algn="r"/>
+            <a:r>
+              <a:rPr sz="1300" b="1">
+                <a:solidFill>
+                  <a:srgbClr val="E6915F"/>
+                </a:solidFill>
+                <a:latin typeface="Arial"/>
+              </a:rPr>
+              <a:t>51.9%</a:t>
+            </a:r>
+          </a:p>
+        </p:txBody>
+      </p:sp>
+      <p:sp>
+        <p:nvSpPr>
           <p:cNvPr id="13" name="TextBox 12"/>
           <p:cNvSpPr txBox="1"/>
           <p:nvPr/>
         </p:nvSpPr>
         <p:spPr>
           <a:xfrm>
-            <a:off x="4983480" y="2514600"/>
-            <a:ext cx="685800" cy="228600"/>
+            <a:off x="914400" y="2898648"/>
+            <a:ext cx="4754880" cy="256032"/>
           </a:xfrm>
           <a:prstGeom prst="rect">
             <a:avLst/>
@@ -9166,15 +8966,15 @@
           </a:bodyPr>
           <a:lstStyle/>
           <a:p>
-            <a:pPr algn="r"/>
-            <a:r>
-              <a:rPr sz="1300" b="1">
-                <a:solidFill>
-                  <a:srgbClr val="DB4928"/>
-                </a:solidFill>
-                <a:latin typeface="Arial"/>
-              </a:rPr>
-              <a:t>51.9%</a:t>
+            <a:pPr algn="l"/>
+            <a:r>
+              <a:rPr sz="1000" b="0">
+                <a:solidFill>
+                  <a:srgbClr val="626262"/>
+                </a:solidFill>
+                <a:latin typeface="Arial"/>
+              </a:rPr>
+              <a:t>для молодёжи — исторический и поколенческий маркер</a:t>
             </a:r>
           </a:p>
         </p:txBody>
@@ -9187,8 +8987,8 @@
         </p:nvSpPr>
         <p:spPr>
           <a:xfrm>
-            <a:off x="914400" y="2898648"/>
-            <a:ext cx="4754880" cy="256032"/>
+            <a:off x="914400" y="3154680"/>
+            <a:ext cx="4754880" cy="228600"/>
           </a:xfrm>
           <a:prstGeom prst="rect">
             <a:avLst/>
@@ -9203,41 +9003,6 @@
           <a:p>
             <a:pPr algn="l"/>
             <a:r>
-              <a:rPr sz="1000" b="0">
-                <a:solidFill>
-                  <a:srgbClr val="5C675F"/>
-                </a:solidFill>
-                <a:latin typeface="Arial"/>
-              </a:rPr>
-              <a:t>для молодёжи — исторический и поколенческий маркер</a:t>
-            </a:r>
-          </a:p>
-        </p:txBody>
-      </p:sp>
-      <p:sp>
-        <p:nvSpPr>
-          <p:cNvPr id="15" name="TextBox 14"/>
-          <p:cNvSpPr txBox="1"/>
-          <p:nvPr/>
-        </p:nvSpPr>
-        <p:spPr>
-          <a:xfrm>
-            <a:off x="914400" y="3154680"/>
-            <a:ext cx="4754880" cy="228600"/>
-          </a:xfrm>
-          <a:prstGeom prst="rect">
-            <a:avLst/>
-          </a:prstGeom>
-          <a:noFill/>
-        </p:spPr>
-        <p:txBody>
-          <a:bodyPr wrap="square">
-            <a:noAutofit/>
-          </a:bodyPr>
-          <a:lstStyle/>
-          <a:p>
-            <a:pPr algn="l"/>
-            <a:r>
               <a:rPr sz="1400" b="1">
                 <a:solidFill>
                   <a:srgbClr val="000000"/>
@@ -9251,7 +9016,7 @@
       </p:sp>
       <p:sp>
         <p:nvSpPr>
-          <p:cNvPr id="16" name="Rectangle 15"/>
+          <p:cNvPr id="15" name="Rectangle 14"/>
           <p:cNvSpPr/>
           <p:nvPr/>
         </p:nvSpPr>
@@ -9294,7 +9059,7 @@
       </p:sp>
       <p:sp>
         <p:nvSpPr>
-          <p:cNvPr id="17" name="Rectangle 16"/>
+          <p:cNvPr id="16" name="Rectangle 15"/>
           <p:cNvSpPr/>
           <p:nvPr/>
         </p:nvSpPr>
@@ -9307,7 +9072,7 @@
             <a:avLst/>
           </a:prstGeom>
           <a:solidFill>
-            <a:srgbClr val="DB4928"/>
+            <a:srgbClr val="E6915F"/>
           </a:solidFill>
           <a:ln>
             <a:noFill/>
@@ -9337,14 +9102,49 @@
       </p:sp>
       <p:sp>
         <p:nvSpPr>
+          <p:cNvPr id="17" name="TextBox 16"/>
+          <p:cNvSpPr txBox="1"/>
+          <p:nvPr/>
+        </p:nvSpPr>
+        <p:spPr>
+          <a:xfrm>
+            <a:off x="4983480" y="3337560"/>
+            <a:ext cx="685800" cy="228600"/>
+          </a:xfrm>
+          <a:prstGeom prst="rect">
+            <a:avLst/>
+          </a:prstGeom>
+          <a:noFill/>
+        </p:spPr>
+        <p:txBody>
+          <a:bodyPr wrap="square">
+            <a:noAutofit/>
+          </a:bodyPr>
+          <a:lstStyle/>
+          <a:p>
+            <a:pPr algn="r"/>
+            <a:r>
+              <a:rPr sz="1300" b="1">
+                <a:solidFill>
+                  <a:srgbClr val="E6915F"/>
+                </a:solidFill>
+                <a:latin typeface="Arial"/>
+              </a:rPr>
+              <a:t>44.4%</a:t>
+            </a:r>
+          </a:p>
+        </p:txBody>
+      </p:sp>
+      <p:sp>
+        <p:nvSpPr>
           <p:cNvPr id="18" name="TextBox 17"/>
           <p:cNvSpPr txBox="1"/>
           <p:nvPr/>
         </p:nvSpPr>
         <p:spPr>
           <a:xfrm>
-            <a:off x="4983480" y="3337560"/>
-            <a:ext cx="685800" cy="228600"/>
+            <a:off x="914400" y="3721608"/>
+            <a:ext cx="4754880" cy="256032"/>
           </a:xfrm>
           <a:prstGeom prst="rect">
             <a:avLst/>
@@ -9357,15 +9157,15 @@
           </a:bodyPr>
           <a:lstStyle/>
           <a:p>
-            <a:pPr algn="r"/>
-            <a:r>
-              <a:rPr sz="1300" b="1">
-                <a:solidFill>
-                  <a:srgbClr val="DB4928"/>
-                </a:solidFill>
-                <a:latin typeface="Arial"/>
-              </a:rPr>
-              <a:t>44.4%</a:t>
+            <a:pPr algn="l"/>
+            <a:r>
+              <a:rPr sz="1000" b="0">
+                <a:solidFill>
+                  <a:srgbClr val="626262"/>
+                </a:solidFill>
+                <a:latin typeface="Arial"/>
+              </a:rPr>
+              <a:t>название известно, но часто не включено в личный маршрут</a:t>
             </a:r>
           </a:p>
         </p:txBody>
@@ -9378,8 +9178,8 @@
         </p:nvSpPr>
         <p:spPr>
           <a:xfrm>
-            <a:off x="914400" y="3721608"/>
-            <a:ext cx="4754880" cy="256032"/>
+            <a:off x="914400" y="3977639"/>
+            <a:ext cx="4754880" cy="228600"/>
           </a:xfrm>
           <a:prstGeom prst="rect">
             <a:avLst/>
@@ -9394,41 +9194,6 @@
           <a:p>
             <a:pPr algn="l"/>
             <a:r>
-              <a:rPr sz="1000" b="0">
-                <a:solidFill>
-                  <a:srgbClr val="5C675F"/>
-                </a:solidFill>
-                <a:latin typeface="Arial"/>
-              </a:rPr>
-              <a:t>название известно, но часто не включено в личный маршрут</a:t>
-            </a:r>
-          </a:p>
-        </p:txBody>
-      </p:sp>
-      <p:sp>
-        <p:nvSpPr>
-          <p:cNvPr id="20" name="TextBox 19"/>
-          <p:cNvSpPr txBox="1"/>
-          <p:nvPr/>
-        </p:nvSpPr>
-        <p:spPr>
-          <a:xfrm>
-            <a:off x="914400" y="3977639"/>
-            <a:ext cx="4754880" cy="228600"/>
-          </a:xfrm>
-          <a:prstGeom prst="rect">
-            <a:avLst/>
-          </a:prstGeom>
-          <a:noFill/>
-        </p:spPr>
-        <p:txBody>
-          <a:bodyPr wrap="square">
-            <a:noAutofit/>
-          </a:bodyPr>
-          <a:lstStyle/>
-          <a:p>
-            <a:pPr algn="l"/>
-            <a:r>
               <a:rPr sz="1400" b="1">
                 <a:solidFill>
                   <a:srgbClr val="000000"/>
@@ -9442,7 +9207,7 @@
       </p:sp>
       <p:sp>
         <p:nvSpPr>
-          <p:cNvPr id="21" name="Rectangle 20"/>
+          <p:cNvPr id="20" name="Rectangle 19"/>
           <p:cNvSpPr/>
           <p:nvPr/>
         </p:nvSpPr>
@@ -9485,7 +9250,7 @@
       </p:sp>
       <p:sp>
         <p:nvSpPr>
-          <p:cNvPr id="22" name="Rectangle 21"/>
+          <p:cNvPr id="21" name="Rectangle 20"/>
           <p:cNvSpPr/>
           <p:nvPr/>
         </p:nvSpPr>
@@ -9498,7 +9263,7 @@
             <a:avLst/>
           </a:prstGeom>
           <a:solidFill>
-            <a:srgbClr val="DB4928"/>
+            <a:srgbClr val="E6915F"/>
           </a:solidFill>
           <a:ln>
             <a:noFill/>
@@ -9528,14 +9293,49 @@
       </p:sp>
       <p:sp>
         <p:nvSpPr>
+          <p:cNvPr id="22" name="TextBox 21"/>
+          <p:cNvSpPr txBox="1"/>
+          <p:nvPr/>
+        </p:nvSpPr>
+        <p:spPr>
+          <a:xfrm>
+            <a:off x="4983480" y="4160519"/>
+            <a:ext cx="685800" cy="228600"/>
+          </a:xfrm>
+          <a:prstGeom prst="rect">
+            <a:avLst/>
+          </a:prstGeom>
+          <a:noFill/>
+        </p:spPr>
+        <p:txBody>
+          <a:bodyPr wrap="square">
+            <a:noAutofit/>
+          </a:bodyPr>
+          <a:lstStyle/>
+          <a:p>
+            <a:pPr algn="r"/>
+            <a:r>
+              <a:rPr sz="1300" b="1">
+                <a:solidFill>
+                  <a:srgbClr val="E6915F"/>
+                </a:solidFill>
+                <a:latin typeface="Arial"/>
+              </a:rPr>
+              <a:t>22.2%</a:t>
+            </a:r>
+          </a:p>
+        </p:txBody>
+      </p:sp>
+      <p:sp>
+        <p:nvSpPr>
           <p:cNvPr id="23" name="TextBox 22"/>
           <p:cNvSpPr txBox="1"/>
           <p:nvPr/>
         </p:nvSpPr>
         <p:spPr>
           <a:xfrm>
-            <a:off x="4983480" y="4160519"/>
-            <a:ext cx="685800" cy="228600"/>
+            <a:off x="914400" y="4544567"/>
+            <a:ext cx="4754880" cy="256032"/>
           </a:xfrm>
           <a:prstGeom prst="rect">
             <a:avLst/>
@@ -9548,15 +9348,15 @@
           </a:bodyPr>
           <a:lstStyle/>
           <a:p>
-            <a:pPr algn="r"/>
-            <a:r>
-              <a:rPr sz="1300" b="1">
-                <a:solidFill>
-                  <a:srgbClr val="DB4928"/>
-                </a:solidFill>
-                <a:latin typeface="Arial"/>
-              </a:rPr>
-              <a:t>22.2%</a:t>
+            <a:pPr algn="l"/>
+            <a:r>
+              <a:rPr sz="1000" b="0">
+                <a:solidFill>
+                  <a:srgbClr val="626262"/>
+                </a:solidFill>
+                <a:latin typeface="Arial"/>
+              </a:rPr>
+              <a:t>локальное название с низкой активностью</a:t>
             </a:r>
           </a:p>
         </p:txBody>
@@ -9569,8 +9369,8 @@
         </p:nvSpPr>
         <p:spPr>
           <a:xfrm>
-            <a:off x="914400" y="4544567"/>
-            <a:ext cx="4754880" cy="256032"/>
+            <a:off x="914400" y="4800600"/>
+            <a:ext cx="4754880" cy="228600"/>
           </a:xfrm>
           <a:prstGeom prst="rect">
             <a:avLst/>
@@ -9585,41 +9385,6 @@
           <a:p>
             <a:pPr algn="l"/>
             <a:r>
-              <a:rPr sz="1000" b="0">
-                <a:solidFill>
-                  <a:srgbClr val="5C675F"/>
-                </a:solidFill>
-                <a:latin typeface="Arial"/>
-              </a:rPr>
-              <a:t>локальное название с низкой активностью</a:t>
-            </a:r>
-          </a:p>
-        </p:txBody>
-      </p:sp>
-      <p:sp>
-        <p:nvSpPr>
-          <p:cNvPr id="25" name="TextBox 24"/>
-          <p:cNvSpPr txBox="1"/>
-          <p:nvPr/>
-        </p:nvSpPr>
-        <p:spPr>
-          <a:xfrm>
-            <a:off x="914400" y="4800600"/>
-            <a:ext cx="4754880" cy="228600"/>
-          </a:xfrm>
-          <a:prstGeom prst="rect">
-            <a:avLst/>
-          </a:prstGeom>
-          <a:noFill/>
-        </p:spPr>
-        <p:txBody>
-          <a:bodyPr wrap="square">
-            <a:noAutofit/>
-          </a:bodyPr>
-          <a:lstStyle/>
-          <a:p>
-            <a:pPr algn="l"/>
-            <a:r>
               <a:rPr sz="1400" b="1">
                 <a:solidFill>
                   <a:srgbClr val="000000"/>
@@ -9633,7 +9398,7 @@
       </p:sp>
       <p:sp>
         <p:nvSpPr>
-          <p:cNvPr id="26" name="Rectangle 25"/>
+          <p:cNvPr id="25" name="Rectangle 24"/>
           <p:cNvSpPr/>
           <p:nvPr/>
         </p:nvSpPr>
@@ -9676,7 +9441,7 @@
       </p:sp>
       <p:sp>
         <p:nvSpPr>
-          <p:cNvPr id="27" name="Rectangle 26"/>
+          <p:cNvPr id="26" name="Rectangle 25"/>
           <p:cNvSpPr/>
           <p:nvPr/>
         </p:nvSpPr>
@@ -9689,7 +9454,7 @@
             <a:avLst/>
           </a:prstGeom>
           <a:solidFill>
-            <a:srgbClr val="DB4928"/>
+            <a:srgbClr val="E6915F"/>
           </a:solidFill>
           <a:ln>
             <a:noFill/>
@@ -9719,14 +9484,49 @@
       </p:sp>
       <p:sp>
         <p:nvSpPr>
+          <p:cNvPr id="27" name="TextBox 26"/>
+          <p:cNvSpPr txBox="1"/>
+          <p:nvPr/>
+        </p:nvSpPr>
+        <p:spPr>
+          <a:xfrm>
+            <a:off x="4983480" y="4983480"/>
+            <a:ext cx="685800" cy="228600"/>
+          </a:xfrm>
+          <a:prstGeom prst="rect">
+            <a:avLst/>
+          </a:prstGeom>
+          <a:noFill/>
+        </p:spPr>
+        <p:txBody>
+          <a:bodyPr wrap="square">
+            <a:noAutofit/>
+          </a:bodyPr>
+          <a:lstStyle/>
+          <a:p>
+            <a:pPr algn="r"/>
+            <a:r>
+              <a:rPr sz="1300" b="1">
+                <a:solidFill>
+                  <a:srgbClr val="E6915F"/>
+                </a:solidFill>
+                <a:latin typeface="Arial"/>
+              </a:rPr>
+              <a:t>20.4%</a:t>
+            </a:r>
+          </a:p>
+        </p:txBody>
+      </p:sp>
+      <p:sp>
+        <p:nvSpPr>
           <p:cNvPr id="28" name="TextBox 27"/>
           <p:cNvSpPr txBox="1"/>
           <p:nvPr/>
         </p:nvSpPr>
         <p:spPr>
           <a:xfrm>
-            <a:off x="4983480" y="4983480"/>
-            <a:ext cx="685800" cy="228600"/>
+            <a:off x="914400" y="5367528"/>
+            <a:ext cx="4754880" cy="256032"/>
           </a:xfrm>
           <a:prstGeom prst="rect">
             <a:avLst/>
@@ -9739,46 +9539,11 @@
           </a:bodyPr>
           <a:lstStyle/>
           <a:p>
-            <a:pPr algn="r"/>
-            <a:r>
-              <a:rPr sz="1300" b="1">
-                <a:solidFill>
-                  <a:srgbClr val="DB4928"/>
-                </a:solidFill>
-                <a:latin typeface="Arial"/>
-              </a:rPr>
-              <a:t>20.4%</a:t>
-            </a:r>
-          </a:p>
-        </p:txBody>
-      </p:sp>
-      <p:sp>
-        <p:nvSpPr>
-          <p:cNvPr id="29" name="TextBox 28"/>
-          <p:cNvSpPr txBox="1"/>
-          <p:nvPr/>
-        </p:nvSpPr>
-        <p:spPr>
-          <a:xfrm>
-            <a:off x="914400" y="5367528"/>
-            <a:ext cx="4754880" cy="256032"/>
-          </a:xfrm>
-          <a:prstGeom prst="rect">
-            <a:avLst/>
-          </a:prstGeom>
-          <a:noFill/>
-        </p:spPr>
-        <p:txBody>
-          <a:bodyPr wrap="square">
-            <a:noAutofit/>
-          </a:bodyPr>
-          <a:lstStyle/>
-          <a:p>
             <a:pPr algn="l"/>
             <a:r>
               <a:rPr sz="1000" b="0">
                 <a:solidFill>
-                  <a:srgbClr val="5C675F"/>
+                  <a:srgbClr val="626262"/>
                 </a:solidFill>
                 <a:latin typeface="Arial"/>
               </a:rPr>
@@ -9789,7 +9554,7 @@
       </p:sp>
       <p:sp>
         <p:nvSpPr>
-          <p:cNvPr id="30" name="Rectangle 29"/>
+          <p:cNvPr id="29" name="Rectangle 28"/>
           <p:cNvSpPr/>
           <p:nvPr/>
         </p:nvSpPr>
@@ -9802,7 +9567,7 @@
             <a:avLst/>
           </a:prstGeom>
           <a:solidFill>
-            <a:srgbClr val="244128"/>
+            <a:srgbClr val="FFFFFF"/>
           </a:solidFill>
           <a:ln>
             <a:noFill/>
@@ -9832,6 +9597,49 @@
       </p:sp>
       <p:sp>
         <p:nvSpPr>
+          <p:cNvPr id="30" name="Rectangle 29"/>
+          <p:cNvSpPr/>
+          <p:nvPr/>
+        </p:nvSpPr>
+        <p:spPr>
+          <a:xfrm>
+            <a:off x="6629400" y="1508760"/>
+            <a:ext cx="4709160" cy="128016"/>
+          </a:xfrm>
+          <a:prstGeom prst="rect">
+            <a:avLst/>
+          </a:prstGeom>
+          <a:solidFill>
+            <a:srgbClr val="F8DCC6"/>
+          </a:solidFill>
+          <a:ln>
+            <a:noFill/>
+          </a:ln>
+        </p:spPr>
+        <p:style>
+          <a:lnRef idx="1">
+            <a:schemeClr val="accent1"/>
+          </a:lnRef>
+          <a:fillRef idx="3">
+            <a:schemeClr val="accent1"/>
+          </a:fillRef>
+          <a:effectRef idx="2">
+            <a:schemeClr val="accent1"/>
+          </a:effectRef>
+          <a:fontRef idx="minor">
+            <a:schemeClr val="lt1"/>
+          </a:fontRef>
+        </p:style>
+        <p:txBody>
+          <a:bodyPr rtlCol="0" anchor="ctr"/>
+          <a:lstStyle/>
+          <a:p>
+            <a:pPr algn="ctr"/>
+          </a:p>
+        </p:txBody>
+      </p:sp>
+      <p:sp>
+        <p:nvSpPr>
           <p:cNvPr id="31" name="TextBox 30"/>
           <p:cNvSpPr txBox="1"/>
           <p:nvPr/>
@@ -9856,7 +9664,7 @@
             <a:r>
               <a:rPr sz="1800" b="1">
                 <a:solidFill>
-                  <a:srgbClr val="FFFFFF"/>
+                  <a:srgbClr val="2D5644"/>
                 </a:solidFill>
                 <a:latin typeface="Arial"/>
               </a:rPr>
@@ -9895,16 +9703,16 @@
             <a:r>
               <a:rPr sz="1500" b="1">
                 <a:solidFill>
-                  <a:srgbClr val="F39869"/>
-                </a:solidFill>
-                <a:latin typeface="Arial"/>
-              </a:rPr>
-              <a:t>■ </a:t>
+                  <a:srgbClr val="E6915F"/>
+                </a:solidFill>
+                <a:latin typeface="Arial"/>
+              </a:rPr>
+              <a:t>• </a:t>
             </a:r>
             <a:r>
               <a:rPr sz="1500" b="0">
                 <a:solidFill>
-                  <a:srgbClr val="FFFFFF"/>
+                  <a:srgbClr val="000000"/>
                 </a:solidFill>
                 <a:latin typeface="Arial"/>
               </a:rPr>
@@ -9920,16 +9728,16 @@
             <a:r>
               <a:rPr sz="1500" b="1">
                 <a:solidFill>
-                  <a:srgbClr val="F39869"/>
-                </a:solidFill>
-                <a:latin typeface="Arial"/>
-              </a:rPr>
-              <a:t>■ </a:t>
+                  <a:srgbClr val="E6915F"/>
+                </a:solidFill>
+                <a:latin typeface="Arial"/>
+              </a:rPr>
+              <a:t>• </a:t>
             </a:r>
             <a:r>
               <a:rPr sz="1500" b="0">
                 <a:solidFill>
-                  <a:srgbClr val="FFFFFF"/>
+                  <a:srgbClr val="000000"/>
                 </a:solidFill>
                 <a:latin typeface="Arial"/>
               </a:rPr>
@@ -9945,16 +9753,16 @@
             <a:r>
               <a:rPr sz="1500" b="1">
                 <a:solidFill>
-                  <a:srgbClr val="F39869"/>
-                </a:solidFill>
-                <a:latin typeface="Arial"/>
-              </a:rPr>
-              <a:t>■ </a:t>
+                  <a:srgbClr val="E6915F"/>
+                </a:solidFill>
+                <a:latin typeface="Arial"/>
+              </a:rPr>
+              <a:t>• </a:t>
             </a:r>
             <a:r>
               <a:rPr sz="1500" b="0">
                 <a:solidFill>
-                  <a:srgbClr val="FFFFFF"/>
+                  <a:srgbClr val="000000"/>
                 </a:solidFill>
                 <a:latin typeface="Arial"/>
               </a:rPr>
@@ -9989,7 +9797,7 @@
             <a:r>
               <a:rPr sz="1500" b="1">
                 <a:solidFill>
-                  <a:srgbClr val="FFFFFF"/>
+                  <a:srgbClr val="2D5644"/>
                 </a:solidFill>
                 <a:latin typeface="Arial"/>
               </a:rPr>
@@ -10012,7 +9820,7 @@
     <p:bg>
       <p:bgPr>
         <a:solidFill>
-          <a:srgbClr val="F6F8F4"/>
+          <a:srgbClr val="FAF8F4"/>
         </a:solidFill>
         <a:effectLst/>
       </p:bgPr>
@@ -10024,30 +9832,41 @@
         <p:nvPr/>
       </p:nvGrpSpPr>
       <p:grpSpPr/>
-      <p:pic>
-        <p:nvPicPr>
-          <p:cNvPr id="2" name="Picture 1" descr="spbstu_logo_02.png"/>
-          <p:cNvPicPr>
-            <a:picLocks noChangeAspect="1"/>
-          </p:cNvPicPr>
-          <p:nvPr/>
-        </p:nvPicPr>
-        <p:blipFill>
-          <a:blip r:embed="rId2"/>
-          <a:stretch>
-            <a:fillRect/>
-          </a:stretch>
-        </p:blipFill>
-        <p:spPr>
-          <a:xfrm>
-            <a:off x="502920" y="310896"/>
-            <a:ext cx="1600200" cy="552069"/>
-          </a:xfrm>
-          <a:prstGeom prst="rect">
-            <a:avLst/>
-          </a:prstGeom>
-        </p:spPr>
-      </p:pic>
+      <p:sp>
+        <p:nvSpPr>
+          <p:cNvPr id="2" name="TextBox 1"/>
+          <p:cNvSpPr txBox="1"/>
+          <p:nvPr/>
+        </p:nvSpPr>
+        <p:spPr>
+          <a:xfrm>
+            <a:off x="685800" y="320040"/>
+            <a:ext cx="6949440" cy="310896"/>
+          </a:xfrm>
+          <a:prstGeom prst="rect">
+            <a:avLst/>
+          </a:prstGeom>
+          <a:noFill/>
+        </p:spPr>
+        <p:txBody>
+          <a:bodyPr wrap="square">
+            <a:noAutofit/>
+          </a:bodyPr>
+          <a:lstStyle/>
+          <a:p>
+            <a:pPr algn="l"/>
+            <a:r>
+              <a:rPr sz="1000" b="0">
+                <a:solidFill>
+                  <a:srgbClr val="626262"/>
+                </a:solidFill>
+                <a:latin typeface="Arial"/>
+              </a:rPr>
+              <a:t>Итоги курсовой работы</a:t>
+            </a:r>
+          </a:p>
+        </p:txBody>
+      </p:sp>
       <p:sp>
         <p:nvSpPr>
           <p:cNvPr id="3" name="TextBox 2"/>
@@ -10056,8 +9875,8 @@
         </p:nvSpPr>
         <p:spPr>
           <a:xfrm>
-            <a:off x="2743200" y="320040"/>
-            <a:ext cx="6217920" cy="310896"/>
+            <a:off x="685800" y="630936"/>
+            <a:ext cx="8001000" cy="475488"/>
           </a:xfrm>
           <a:prstGeom prst="rect">
             <a:avLst/>
@@ -10072,44 +9891,9 @@
           <a:p>
             <a:pPr algn="l"/>
             <a:r>
-              <a:rPr sz="1000" b="0">
-                <a:solidFill>
-                  <a:srgbClr val="5C675F"/>
-                </a:solidFill>
-                <a:latin typeface="Arial"/>
-              </a:rPr>
-              <a:t>Итоги курсовой работы</a:t>
-            </a:r>
-          </a:p>
-        </p:txBody>
-      </p:sp>
-      <p:sp>
-        <p:nvSpPr>
-          <p:cNvPr id="4" name="TextBox 3"/>
-          <p:cNvSpPr txBox="1"/>
-          <p:nvPr/>
-        </p:nvSpPr>
-        <p:spPr>
-          <a:xfrm>
-            <a:off x="2743200" y="630936"/>
-            <a:ext cx="7132320" cy="475488"/>
-          </a:xfrm>
-          <a:prstGeom prst="rect">
-            <a:avLst/>
-          </a:prstGeom>
-          <a:noFill/>
-        </p:spPr>
-        <p:txBody>
-          <a:bodyPr wrap="square">
-            <a:noAutofit/>
-          </a:bodyPr>
-          <a:lstStyle/>
-          <a:p>
-            <a:pPr algn="l"/>
-            <a:r>
               <a:rPr sz="2400" b="1">
                 <a:solidFill>
-                  <a:srgbClr val="244128"/>
+                  <a:srgbClr val="2D5644"/>
                 </a:solidFill>
                 <a:latin typeface="Arial"/>
               </a:rPr>
@@ -10120,20 +9904,20 @@
       </p:sp>
       <p:sp>
         <p:nvSpPr>
-          <p:cNvPr id="5" name="Rectangle 4"/>
+          <p:cNvPr id="4" name="Rectangle 3"/>
           <p:cNvSpPr/>
           <p:nvPr/>
         </p:nvSpPr>
         <p:spPr>
           <a:xfrm>
-            <a:off x="502920" y="1170432"/>
-            <a:ext cx="11155680" cy="32004"/>
+            <a:off x="685800" y="1170432"/>
+            <a:ext cx="10515600" cy="22860"/>
           </a:xfrm>
           <a:prstGeom prst="rect">
             <a:avLst/>
           </a:prstGeom>
           <a:solidFill>
-            <a:srgbClr val="3AAA35"/>
+            <a:srgbClr val="F8DCC6"/>
           </a:solidFill>
           <a:ln>
             <a:noFill/>
@@ -10163,14 +9947,49 @@
       </p:sp>
       <p:sp>
         <p:nvSpPr>
+          <p:cNvPr id="5" name="TextBox 4"/>
+          <p:cNvSpPr txBox="1"/>
+          <p:nvPr/>
+        </p:nvSpPr>
+        <p:spPr>
+          <a:xfrm>
+            <a:off x="9464040" y="411480"/>
+            <a:ext cx="2194560" cy="310896"/>
+          </a:xfrm>
+          <a:prstGeom prst="rect">
+            <a:avLst/>
+          </a:prstGeom>
+          <a:noFill/>
+        </p:spPr>
+        <p:txBody>
+          <a:bodyPr wrap="square">
+            <a:noAutofit/>
+          </a:bodyPr>
+          <a:lstStyle/>
+          <a:p>
+            <a:pPr algn="r"/>
+            <a:r>
+              <a:rPr sz="1000" b="0">
+                <a:solidFill>
+                  <a:srgbClr val="626262"/>
+                </a:solidFill>
+                <a:latin typeface="Arial"/>
+              </a:rPr>
+              <a:t>5:30–6:20</a:t>
+            </a:r>
+          </a:p>
+        </p:txBody>
+      </p:sp>
+      <p:sp>
+        <p:nvSpPr>
           <p:cNvPr id="6" name="TextBox 5"/>
           <p:cNvSpPr txBox="1"/>
           <p:nvPr/>
         </p:nvSpPr>
         <p:spPr>
           <a:xfrm>
-            <a:off x="9464040" y="411480"/>
-            <a:ext cx="2194560" cy="310896"/>
+            <a:off x="11018520" y="6355080"/>
+            <a:ext cx="640080" cy="228600"/>
           </a:xfrm>
           <a:prstGeom prst="rect">
             <a:avLst/>
@@ -10187,42 +10006,7 @@
             <a:r>
               <a:rPr sz="1000" b="0">
                 <a:solidFill>
-                  <a:srgbClr val="5C675F"/>
-                </a:solidFill>
-                <a:latin typeface="Arial"/>
-              </a:rPr>
-              <a:t>5:30–6:20</a:t>
-            </a:r>
-          </a:p>
-        </p:txBody>
-      </p:sp>
-      <p:sp>
-        <p:nvSpPr>
-          <p:cNvPr id="7" name="TextBox 6"/>
-          <p:cNvSpPr txBox="1"/>
-          <p:nvPr/>
-        </p:nvSpPr>
-        <p:spPr>
-          <a:xfrm>
-            <a:off x="11018520" y="6355080"/>
-            <a:ext cx="640080" cy="228600"/>
-          </a:xfrm>
-          <a:prstGeom prst="rect">
-            <a:avLst/>
-          </a:prstGeom>
-          <a:noFill/>
-        </p:spPr>
-        <p:txBody>
-          <a:bodyPr wrap="square">
-            <a:noAutofit/>
-          </a:bodyPr>
-          <a:lstStyle/>
-          <a:p>
-            <a:pPr algn="r"/>
-            <a:r>
-              <a:rPr sz="1000" b="0">
-                <a:solidFill>
-                  <a:srgbClr val="5C675F"/>
+                  <a:srgbClr val="626262"/>
                 </a:solidFill>
                 <a:latin typeface="Arial"/>
               </a:rPr>
@@ -10233,7 +10017,7 @@
       </p:sp>
       <p:sp>
         <p:nvSpPr>
-          <p:cNvPr id="8" name="Rectangle 7"/>
+          <p:cNvPr id="7" name="Rectangle 6"/>
           <p:cNvSpPr/>
           <p:nvPr/>
         </p:nvSpPr>
@@ -10241,345 +10025,6 @@
           <a:xfrm>
             <a:off x="685800" y="1508760"/>
             <a:ext cx="3246120" cy="2971800"/>
-          </a:xfrm>
-          <a:prstGeom prst="rect">
-            <a:avLst/>
-          </a:prstGeom>
-          <a:solidFill>
-            <a:srgbClr val="3AAA35"/>
-          </a:solidFill>
-          <a:ln>
-            <a:noFill/>
-          </a:ln>
-        </p:spPr>
-        <p:style>
-          <a:lnRef idx="1">
-            <a:schemeClr val="accent1"/>
-          </a:lnRef>
-          <a:fillRef idx="3">
-            <a:schemeClr val="accent1"/>
-          </a:fillRef>
-          <a:effectRef idx="2">
-            <a:schemeClr val="accent1"/>
-          </a:effectRef>
-          <a:fontRef idx="minor">
-            <a:schemeClr val="lt1"/>
-          </a:fontRef>
-        </p:style>
-        <p:txBody>
-          <a:bodyPr rtlCol="0" anchor="ctr"/>
-          <a:lstStyle/>
-          <a:p>
-            <a:pPr algn="ctr"/>
-          </a:p>
-        </p:txBody>
-      </p:sp>
-      <p:sp>
-        <p:nvSpPr>
-          <p:cNvPr id="9" name="Rectangle 8"/>
-          <p:cNvSpPr/>
-          <p:nvPr/>
-        </p:nvSpPr>
-        <p:spPr>
-          <a:xfrm>
-            <a:off x="4160520" y="1508760"/>
-            <a:ext cx="3246120" cy="2971800"/>
-          </a:xfrm>
-          <a:prstGeom prst="rect">
-            <a:avLst/>
-          </a:prstGeom>
-          <a:solidFill>
-            <a:srgbClr val="56975B"/>
-          </a:solidFill>
-          <a:ln>
-            <a:noFill/>
-          </a:ln>
-        </p:spPr>
-        <p:style>
-          <a:lnRef idx="1">
-            <a:schemeClr val="accent1"/>
-          </a:lnRef>
-          <a:fillRef idx="3">
-            <a:schemeClr val="accent1"/>
-          </a:fillRef>
-          <a:effectRef idx="2">
-            <a:schemeClr val="accent1"/>
-          </a:effectRef>
-          <a:fontRef idx="minor">
-            <a:schemeClr val="lt1"/>
-          </a:fontRef>
-        </p:style>
-        <p:txBody>
-          <a:bodyPr rtlCol="0" anchor="ctr"/>
-          <a:lstStyle/>
-          <a:p>
-            <a:pPr algn="ctr"/>
-          </a:p>
-        </p:txBody>
-      </p:sp>
-      <p:sp>
-        <p:nvSpPr>
-          <p:cNvPr id="10" name="Rectangle 9"/>
-          <p:cNvSpPr/>
-          <p:nvPr/>
-        </p:nvSpPr>
-        <p:spPr>
-          <a:xfrm>
-            <a:off x="7635240" y="1508760"/>
-            <a:ext cx="3246120" cy="2971800"/>
-          </a:xfrm>
-          <a:prstGeom prst="rect">
-            <a:avLst/>
-          </a:prstGeom>
-          <a:solidFill>
-            <a:srgbClr val="DB4928"/>
-          </a:solidFill>
-          <a:ln>
-            <a:noFill/>
-          </a:ln>
-        </p:spPr>
-        <p:style>
-          <a:lnRef idx="1">
-            <a:schemeClr val="accent1"/>
-          </a:lnRef>
-          <a:fillRef idx="3">
-            <a:schemeClr val="accent1"/>
-          </a:fillRef>
-          <a:effectRef idx="2">
-            <a:schemeClr val="accent1"/>
-          </a:effectRef>
-          <a:fontRef idx="minor">
-            <a:schemeClr val="lt1"/>
-          </a:fontRef>
-        </p:style>
-        <p:txBody>
-          <a:bodyPr rtlCol="0" anchor="ctr"/>
-          <a:lstStyle/>
-          <a:p>
-            <a:pPr algn="ctr"/>
-          </a:p>
-        </p:txBody>
-      </p:sp>
-      <p:sp>
-        <p:nvSpPr>
-          <p:cNvPr id="11" name="TextBox 10"/>
-          <p:cNvSpPr txBox="1"/>
-          <p:nvPr/>
-        </p:nvSpPr>
-        <p:spPr>
-          <a:xfrm>
-            <a:off x="960120" y="1828800"/>
-            <a:ext cx="2697480" cy="411480"/>
-          </a:xfrm>
-          <a:prstGeom prst="rect">
-            <a:avLst/>
-          </a:prstGeom>
-          <a:noFill/>
-        </p:spPr>
-        <p:txBody>
-          <a:bodyPr wrap="square">
-            <a:noAutofit/>
-          </a:bodyPr>
-          <a:lstStyle/>
-          <a:p>
-            <a:pPr algn="l"/>
-            <a:r>
-              <a:rPr sz="2000" b="1">
-                <a:solidFill>
-                  <a:srgbClr val="FFFFFF"/>
-                </a:solidFill>
-                <a:latin typeface="Arial"/>
-              </a:rPr>
-              <a:t>Официальное</a:t>
-            </a:r>
-          </a:p>
-        </p:txBody>
-      </p:sp>
-      <p:sp>
-        <p:nvSpPr>
-          <p:cNvPr id="12" name="TextBox 11"/>
-          <p:cNvSpPr txBox="1"/>
-          <p:nvPr/>
-        </p:nvSpPr>
-        <p:spPr>
-          <a:xfrm>
-            <a:off x="960120" y="2395728"/>
-            <a:ext cx="2697480" cy="1417320"/>
-          </a:xfrm>
-          <a:prstGeom prst="rect">
-            <a:avLst/>
-          </a:prstGeom>
-          <a:noFill/>
-        </p:spPr>
-        <p:txBody>
-          <a:bodyPr wrap="square">
-            <a:noAutofit/>
-          </a:bodyPr>
-          <a:lstStyle/>
-          <a:p>
-            <a:pPr algn="l"/>
-            <a:r>
-              <a:rPr sz="1600" b="0">
-                <a:solidFill>
-                  <a:srgbClr val="FFFFFF"/>
-                </a:solidFill>
-                <a:latin typeface="Arial"/>
-              </a:rPr>
-              <a:t>Дворцовая площадь, Эрмитаж, Исаакиевский собор: высокая узнаваемость и культурный слой.</a:t>
-            </a:r>
-          </a:p>
-        </p:txBody>
-      </p:sp>
-      <p:sp>
-        <p:nvSpPr>
-          <p:cNvPr id="13" name="TextBox 12"/>
-          <p:cNvSpPr txBox="1"/>
-          <p:nvPr/>
-        </p:nvSpPr>
-        <p:spPr>
-          <a:xfrm>
-            <a:off x="4434840" y="1828800"/>
-            <a:ext cx="2697480" cy="411480"/>
-          </a:xfrm>
-          <a:prstGeom prst="rect">
-            <a:avLst/>
-          </a:prstGeom>
-          <a:noFill/>
-        </p:spPr>
-        <p:txBody>
-          <a:bodyPr wrap="square">
-            <a:noAutofit/>
-          </a:bodyPr>
-          <a:lstStyle/>
-          <a:p>
-            <a:pPr algn="l"/>
-            <a:r>
-              <a:rPr sz="2000" b="1">
-                <a:solidFill>
-                  <a:srgbClr val="FFFFFF"/>
-                </a:solidFill>
-                <a:latin typeface="Arial"/>
-              </a:rPr>
-              <a:t>Разговорное</a:t>
-            </a:r>
-          </a:p>
-        </p:txBody>
-      </p:sp>
-      <p:sp>
-        <p:nvSpPr>
-          <p:cNvPr id="14" name="TextBox 13"/>
-          <p:cNvSpPr txBox="1"/>
-          <p:nvPr/>
-        </p:nvSpPr>
-        <p:spPr>
-          <a:xfrm>
-            <a:off x="4434840" y="2395728"/>
-            <a:ext cx="2697480" cy="1417320"/>
-          </a:xfrm>
-          <a:prstGeom prst="rect">
-            <a:avLst/>
-          </a:prstGeom>
-          <a:noFill/>
-        </p:spPr>
-        <p:txBody>
-          <a:bodyPr wrap="square">
-            <a:noAutofit/>
-          </a:bodyPr>
-          <a:lstStyle/>
-          <a:p>
-            <a:pPr algn="l"/>
-            <a:r>
-              <a:rPr sz="1600" b="0">
-                <a:solidFill>
-                  <a:srgbClr val="FFFFFF"/>
-                </a:solidFill>
-                <a:latin typeface="Arial"/>
-              </a:rPr>
-              <a:t>Питер, Невский, Лиговка: повседневная навигация, друзья, соцсети, маршруты.</a:t>
-            </a:r>
-          </a:p>
-        </p:txBody>
-      </p:sp>
-      <p:sp>
-        <p:nvSpPr>
-          <p:cNvPr id="15" name="TextBox 14"/>
-          <p:cNvSpPr txBox="1"/>
-          <p:nvPr/>
-        </p:nvSpPr>
-        <p:spPr>
-          <a:xfrm>
-            <a:off x="7909560" y="1828800"/>
-            <a:ext cx="2697480" cy="411480"/>
-          </a:xfrm>
-          <a:prstGeom prst="rect">
-            <a:avLst/>
-          </a:prstGeom>
-          <a:noFill/>
-        </p:spPr>
-        <p:txBody>
-          <a:bodyPr wrap="square">
-            <a:noAutofit/>
-          </a:bodyPr>
-          <a:lstStyle/>
-          <a:p>
-            <a:pPr algn="l"/>
-            <a:r>
-              <a:rPr sz="2000" b="1">
-                <a:solidFill>
-                  <a:srgbClr val="FFFFFF"/>
-                </a:solidFill>
-                <a:latin typeface="Arial"/>
-              </a:rPr>
-              <a:t>Историческое</a:t>
-            </a:r>
-          </a:p>
-        </p:txBody>
-      </p:sp>
-      <p:sp>
-        <p:nvSpPr>
-          <p:cNvPr id="16" name="TextBox 15"/>
-          <p:cNvSpPr txBox="1"/>
-          <p:nvPr/>
-        </p:nvSpPr>
-        <p:spPr>
-          <a:xfrm>
-            <a:off x="7909560" y="2395728"/>
-            <a:ext cx="2697480" cy="1417320"/>
-          </a:xfrm>
-          <a:prstGeom prst="rect">
-            <a:avLst/>
-          </a:prstGeom>
-          <a:noFill/>
-        </p:spPr>
-        <p:txBody>
-          <a:bodyPr wrap="square">
-            <a:noAutofit/>
-          </a:bodyPr>
-          <a:lstStyle/>
-          <a:p>
-            <a:pPr algn="l"/>
-            <a:r>
-              <a:rPr sz="1600" b="0">
-                <a:solidFill>
-                  <a:srgbClr val="FFFFFF"/>
-                </a:solidFill>
-                <a:latin typeface="Arial"/>
-              </a:rPr>
-              <a:t>Ленинград: знаком почти всем, но у молодых респондентов чаще находится в пассиве.</a:t>
-            </a:r>
-          </a:p>
-        </p:txBody>
-      </p:sp>
-      <p:sp>
-        <p:nvSpPr>
-          <p:cNvPr id="17" name="Rectangle 16"/>
-          <p:cNvSpPr/>
-          <p:nvPr/>
-        </p:nvSpPr>
-        <p:spPr>
-          <a:xfrm>
-            <a:off x="685800" y="4892040"/>
-            <a:ext cx="10195560" cy="960120"/>
           </a:xfrm>
           <a:prstGeom prst="rect">
             <a:avLst/>
@@ -10615,12 +10060,480 @@
       </p:sp>
       <p:sp>
         <p:nvSpPr>
+          <p:cNvPr id="8" name="Rectangle 7"/>
+          <p:cNvSpPr/>
+          <p:nvPr/>
+        </p:nvSpPr>
+        <p:spPr>
+          <a:xfrm>
+            <a:off x="4160520" y="1508760"/>
+            <a:ext cx="3246120" cy="2971800"/>
+          </a:xfrm>
+          <a:prstGeom prst="rect">
+            <a:avLst/>
+          </a:prstGeom>
+          <a:solidFill>
+            <a:srgbClr val="FFFFFF"/>
+          </a:solidFill>
+          <a:ln>
+            <a:noFill/>
+          </a:ln>
+        </p:spPr>
+        <p:style>
+          <a:lnRef idx="1">
+            <a:schemeClr val="accent1"/>
+          </a:lnRef>
+          <a:fillRef idx="3">
+            <a:schemeClr val="accent1"/>
+          </a:fillRef>
+          <a:effectRef idx="2">
+            <a:schemeClr val="accent1"/>
+          </a:effectRef>
+          <a:fontRef idx="minor">
+            <a:schemeClr val="lt1"/>
+          </a:fontRef>
+        </p:style>
+        <p:txBody>
+          <a:bodyPr rtlCol="0" anchor="ctr"/>
+          <a:lstStyle/>
+          <a:p>
+            <a:pPr algn="ctr"/>
+          </a:p>
+        </p:txBody>
+      </p:sp>
+      <p:sp>
+        <p:nvSpPr>
+          <p:cNvPr id="9" name="Rectangle 8"/>
+          <p:cNvSpPr/>
+          <p:nvPr/>
+        </p:nvSpPr>
+        <p:spPr>
+          <a:xfrm>
+            <a:off x="7635240" y="1508760"/>
+            <a:ext cx="3246120" cy="2971800"/>
+          </a:xfrm>
+          <a:prstGeom prst="rect">
+            <a:avLst/>
+          </a:prstGeom>
+          <a:solidFill>
+            <a:srgbClr val="FFFFFF"/>
+          </a:solidFill>
+          <a:ln>
+            <a:noFill/>
+          </a:ln>
+        </p:spPr>
+        <p:style>
+          <a:lnRef idx="1">
+            <a:schemeClr val="accent1"/>
+          </a:lnRef>
+          <a:fillRef idx="3">
+            <a:schemeClr val="accent1"/>
+          </a:fillRef>
+          <a:effectRef idx="2">
+            <a:schemeClr val="accent1"/>
+          </a:effectRef>
+          <a:fontRef idx="minor">
+            <a:schemeClr val="lt1"/>
+          </a:fontRef>
+        </p:style>
+        <p:txBody>
+          <a:bodyPr rtlCol="0" anchor="ctr"/>
+          <a:lstStyle/>
+          <a:p>
+            <a:pPr algn="ctr"/>
+          </a:p>
+        </p:txBody>
+      </p:sp>
+      <p:sp>
+        <p:nvSpPr>
+          <p:cNvPr id="10" name="Rectangle 9"/>
+          <p:cNvSpPr/>
+          <p:nvPr/>
+        </p:nvSpPr>
+        <p:spPr>
+          <a:xfrm>
+            <a:off x="685800" y="1508760"/>
+            <a:ext cx="3246120" cy="128016"/>
+          </a:xfrm>
+          <a:prstGeom prst="rect">
+            <a:avLst/>
+          </a:prstGeom>
+          <a:solidFill>
+            <a:srgbClr val="BEDEC7"/>
+          </a:solidFill>
+          <a:ln>
+            <a:noFill/>
+          </a:ln>
+        </p:spPr>
+        <p:style>
+          <a:lnRef idx="1">
+            <a:schemeClr val="accent1"/>
+          </a:lnRef>
+          <a:fillRef idx="3">
+            <a:schemeClr val="accent1"/>
+          </a:fillRef>
+          <a:effectRef idx="2">
+            <a:schemeClr val="accent1"/>
+          </a:effectRef>
+          <a:fontRef idx="minor">
+            <a:schemeClr val="lt1"/>
+          </a:fontRef>
+        </p:style>
+        <p:txBody>
+          <a:bodyPr rtlCol="0" anchor="ctr"/>
+          <a:lstStyle/>
+          <a:p>
+            <a:pPr algn="ctr"/>
+          </a:p>
+        </p:txBody>
+      </p:sp>
+      <p:sp>
+        <p:nvSpPr>
+          <p:cNvPr id="11" name="Rectangle 10"/>
+          <p:cNvSpPr/>
+          <p:nvPr/>
+        </p:nvSpPr>
+        <p:spPr>
+          <a:xfrm>
+            <a:off x="4160520" y="1508760"/>
+            <a:ext cx="3246120" cy="128016"/>
+          </a:xfrm>
+          <a:prstGeom prst="rect">
+            <a:avLst/>
+          </a:prstGeom>
+          <a:solidFill>
+            <a:srgbClr val="60A678"/>
+          </a:solidFill>
+          <a:ln>
+            <a:noFill/>
+          </a:ln>
+        </p:spPr>
+        <p:style>
+          <a:lnRef idx="1">
+            <a:schemeClr val="accent1"/>
+          </a:lnRef>
+          <a:fillRef idx="3">
+            <a:schemeClr val="accent1"/>
+          </a:fillRef>
+          <a:effectRef idx="2">
+            <a:schemeClr val="accent1"/>
+          </a:effectRef>
+          <a:fontRef idx="minor">
+            <a:schemeClr val="lt1"/>
+          </a:fontRef>
+        </p:style>
+        <p:txBody>
+          <a:bodyPr rtlCol="0" anchor="ctr"/>
+          <a:lstStyle/>
+          <a:p>
+            <a:pPr algn="ctr"/>
+          </a:p>
+        </p:txBody>
+      </p:sp>
+      <p:sp>
+        <p:nvSpPr>
+          <p:cNvPr id="12" name="Rectangle 11"/>
+          <p:cNvSpPr/>
+          <p:nvPr/>
+        </p:nvSpPr>
+        <p:spPr>
+          <a:xfrm>
+            <a:off x="7635240" y="1508760"/>
+            <a:ext cx="3246120" cy="128016"/>
+          </a:xfrm>
+          <a:prstGeom prst="rect">
+            <a:avLst/>
+          </a:prstGeom>
+          <a:solidFill>
+            <a:srgbClr val="F8DCC6"/>
+          </a:solidFill>
+          <a:ln>
+            <a:noFill/>
+          </a:ln>
+        </p:spPr>
+        <p:style>
+          <a:lnRef idx="1">
+            <a:schemeClr val="accent1"/>
+          </a:lnRef>
+          <a:fillRef idx="3">
+            <a:schemeClr val="accent1"/>
+          </a:fillRef>
+          <a:effectRef idx="2">
+            <a:schemeClr val="accent1"/>
+          </a:effectRef>
+          <a:fontRef idx="minor">
+            <a:schemeClr val="lt1"/>
+          </a:fontRef>
+        </p:style>
+        <p:txBody>
+          <a:bodyPr rtlCol="0" anchor="ctr"/>
+          <a:lstStyle/>
+          <a:p>
+            <a:pPr algn="ctr"/>
+          </a:p>
+        </p:txBody>
+      </p:sp>
+      <p:sp>
+        <p:nvSpPr>
+          <p:cNvPr id="13" name="TextBox 12"/>
+          <p:cNvSpPr txBox="1"/>
+          <p:nvPr/>
+        </p:nvSpPr>
+        <p:spPr>
+          <a:xfrm>
+            <a:off x="960120" y="1828800"/>
+            <a:ext cx="2697480" cy="411480"/>
+          </a:xfrm>
+          <a:prstGeom prst="rect">
+            <a:avLst/>
+          </a:prstGeom>
+          <a:noFill/>
+        </p:spPr>
+        <p:txBody>
+          <a:bodyPr wrap="square">
+            <a:noAutofit/>
+          </a:bodyPr>
+          <a:lstStyle/>
+          <a:p>
+            <a:pPr algn="l"/>
+            <a:r>
+              <a:rPr sz="2000" b="1">
+                <a:solidFill>
+                  <a:srgbClr val="2D5644"/>
+                </a:solidFill>
+                <a:latin typeface="Arial"/>
+              </a:rPr>
+              <a:t>Официальное</a:t>
+            </a:r>
+          </a:p>
+        </p:txBody>
+      </p:sp>
+      <p:sp>
+        <p:nvSpPr>
+          <p:cNvPr id="14" name="TextBox 13"/>
+          <p:cNvSpPr txBox="1"/>
+          <p:nvPr/>
+        </p:nvSpPr>
+        <p:spPr>
+          <a:xfrm>
+            <a:off x="960120" y="2395728"/>
+            <a:ext cx="2697480" cy="1417320"/>
+          </a:xfrm>
+          <a:prstGeom prst="rect">
+            <a:avLst/>
+          </a:prstGeom>
+          <a:noFill/>
+        </p:spPr>
+        <p:txBody>
+          <a:bodyPr wrap="square">
+            <a:noAutofit/>
+          </a:bodyPr>
+          <a:lstStyle/>
+          <a:p>
+            <a:pPr algn="l"/>
+            <a:r>
+              <a:rPr sz="1600" b="0">
+                <a:solidFill>
+                  <a:srgbClr val="000000"/>
+                </a:solidFill>
+                <a:latin typeface="Arial"/>
+              </a:rPr>
+              <a:t>Дворцовая площадь, Эрмитаж, Исаакиевский собор: высокая узнаваемость и культурный слой.</a:t>
+            </a:r>
+          </a:p>
+        </p:txBody>
+      </p:sp>
+      <p:sp>
+        <p:nvSpPr>
+          <p:cNvPr id="15" name="TextBox 14"/>
+          <p:cNvSpPr txBox="1"/>
+          <p:nvPr/>
+        </p:nvSpPr>
+        <p:spPr>
+          <a:xfrm>
+            <a:off x="4434840" y="1828800"/>
+            <a:ext cx="2697480" cy="411480"/>
+          </a:xfrm>
+          <a:prstGeom prst="rect">
+            <a:avLst/>
+          </a:prstGeom>
+          <a:noFill/>
+        </p:spPr>
+        <p:txBody>
+          <a:bodyPr wrap="square">
+            <a:noAutofit/>
+          </a:bodyPr>
+          <a:lstStyle/>
+          <a:p>
+            <a:pPr algn="l"/>
+            <a:r>
+              <a:rPr sz="2000" b="1">
+                <a:solidFill>
+                  <a:srgbClr val="2D5644"/>
+                </a:solidFill>
+                <a:latin typeface="Arial"/>
+              </a:rPr>
+              <a:t>Разговорное</a:t>
+            </a:r>
+          </a:p>
+        </p:txBody>
+      </p:sp>
+      <p:sp>
+        <p:nvSpPr>
+          <p:cNvPr id="16" name="TextBox 15"/>
+          <p:cNvSpPr txBox="1"/>
+          <p:nvPr/>
+        </p:nvSpPr>
+        <p:spPr>
+          <a:xfrm>
+            <a:off x="4434840" y="2395728"/>
+            <a:ext cx="2697480" cy="1417320"/>
+          </a:xfrm>
+          <a:prstGeom prst="rect">
+            <a:avLst/>
+          </a:prstGeom>
+          <a:noFill/>
+        </p:spPr>
+        <p:txBody>
+          <a:bodyPr wrap="square">
+            <a:noAutofit/>
+          </a:bodyPr>
+          <a:lstStyle/>
+          <a:p>
+            <a:pPr algn="l"/>
+            <a:r>
+              <a:rPr sz="1600" b="0">
+                <a:solidFill>
+                  <a:srgbClr val="000000"/>
+                </a:solidFill>
+                <a:latin typeface="Arial"/>
+              </a:rPr>
+              <a:t>Питер, Невский, Лиговка: повседневная навигация, друзья, соцсети, маршруты.</a:t>
+            </a:r>
+          </a:p>
+        </p:txBody>
+      </p:sp>
+      <p:sp>
+        <p:nvSpPr>
+          <p:cNvPr id="17" name="TextBox 16"/>
+          <p:cNvSpPr txBox="1"/>
+          <p:nvPr/>
+        </p:nvSpPr>
+        <p:spPr>
+          <a:xfrm>
+            <a:off x="7909560" y="1828800"/>
+            <a:ext cx="2697480" cy="411480"/>
+          </a:xfrm>
+          <a:prstGeom prst="rect">
+            <a:avLst/>
+          </a:prstGeom>
+          <a:noFill/>
+        </p:spPr>
+        <p:txBody>
+          <a:bodyPr wrap="square">
+            <a:noAutofit/>
+          </a:bodyPr>
+          <a:lstStyle/>
+          <a:p>
+            <a:pPr algn="l"/>
+            <a:r>
+              <a:rPr sz="2000" b="1">
+                <a:solidFill>
+                  <a:srgbClr val="2D5644"/>
+                </a:solidFill>
+                <a:latin typeface="Arial"/>
+              </a:rPr>
+              <a:t>Историческое</a:t>
+            </a:r>
+          </a:p>
+        </p:txBody>
+      </p:sp>
+      <p:sp>
+        <p:nvSpPr>
           <p:cNvPr id="18" name="TextBox 17"/>
           <p:cNvSpPr txBox="1"/>
           <p:nvPr/>
         </p:nvSpPr>
         <p:spPr>
           <a:xfrm>
+            <a:off x="7909560" y="2395728"/>
+            <a:ext cx="2697480" cy="1417320"/>
+          </a:xfrm>
+          <a:prstGeom prst="rect">
+            <a:avLst/>
+          </a:prstGeom>
+          <a:noFill/>
+        </p:spPr>
+        <p:txBody>
+          <a:bodyPr wrap="square">
+            <a:noAutofit/>
+          </a:bodyPr>
+          <a:lstStyle/>
+          <a:p>
+            <a:pPr algn="l"/>
+            <a:r>
+              <a:rPr sz="1600" b="0">
+                <a:solidFill>
+                  <a:srgbClr val="000000"/>
+                </a:solidFill>
+                <a:latin typeface="Arial"/>
+              </a:rPr>
+              <a:t>Ленинград: знаком почти всем, но у молодых респондентов чаще находится в пассиве.</a:t>
+            </a:r>
+          </a:p>
+        </p:txBody>
+      </p:sp>
+      <p:sp>
+        <p:nvSpPr>
+          <p:cNvPr id="19" name="Rectangle 18"/>
+          <p:cNvSpPr/>
+          <p:nvPr/>
+        </p:nvSpPr>
+        <p:spPr>
+          <a:xfrm>
+            <a:off x="685800" y="4892040"/>
+            <a:ext cx="10195560" cy="960120"/>
+          </a:xfrm>
+          <a:prstGeom prst="rect">
+            <a:avLst/>
+          </a:prstGeom>
+          <a:solidFill>
+            <a:srgbClr val="FFFFFF"/>
+          </a:solidFill>
+          <a:ln>
+            <a:noFill/>
+          </a:ln>
+        </p:spPr>
+        <p:style>
+          <a:lnRef idx="1">
+            <a:schemeClr val="accent1"/>
+          </a:lnRef>
+          <a:fillRef idx="3">
+            <a:schemeClr val="accent1"/>
+          </a:fillRef>
+          <a:effectRef idx="2">
+            <a:schemeClr val="accent1"/>
+          </a:effectRef>
+          <a:fontRef idx="minor">
+            <a:schemeClr val="lt1"/>
+          </a:fontRef>
+        </p:style>
+        <p:txBody>
+          <a:bodyPr rtlCol="0" anchor="ctr"/>
+          <a:lstStyle/>
+          <a:p>
+            <a:pPr algn="ctr"/>
+          </a:p>
+        </p:txBody>
+      </p:sp>
+      <p:sp>
+        <p:nvSpPr>
+          <p:cNvPr id="20" name="TextBox 19"/>
+          <p:cNvSpPr txBox="1"/>
+          <p:nvPr/>
+        </p:nvSpPr>
+        <p:spPr>
+          <a:xfrm>
             <a:off x="960120" y="5102352"/>
             <a:ext cx="1874519" cy="365760"/>
           </a:xfrm>
@@ -10639,7 +10552,7 @@
             <a:r>
               <a:rPr sz="1800" b="1">
                 <a:solidFill>
-                  <a:srgbClr val="244128"/>
+                  <a:srgbClr val="2D5644"/>
                 </a:solidFill>
                 <a:latin typeface="Arial"/>
               </a:rPr>
@@ -10650,7 +10563,7 @@
       </p:sp>
       <p:sp>
         <p:nvSpPr>
-          <p:cNvPr id="19" name="TextBox 18"/>
+          <p:cNvPr id="21" name="TextBox 20"/>
           <p:cNvSpPr txBox="1"/>
           <p:nvPr/>
         </p:nvSpPr>
@@ -10685,7 +10598,7 @@
       </p:sp>
       <p:sp>
         <p:nvSpPr>
-          <p:cNvPr id="20" name="TextBox 19"/>
+          <p:cNvPr id="22" name="TextBox 21"/>
           <p:cNvSpPr txBox="1"/>
           <p:nvPr/>
         </p:nvSpPr>
@@ -10709,7 +10622,7 @@
             <a:r>
               <a:rPr sz="1100" b="0">
                 <a:solidFill>
-                  <a:srgbClr val="5C675F"/>
+                  <a:srgbClr val="626262"/>
                 </a:solidFill>
                 <a:latin typeface="Arial"/>
               </a:rPr>
@@ -10732,7 +10645,7 @@
     <p:bg>
       <p:bgPr>
         <a:solidFill>
-          <a:srgbClr val="F6F8F4"/>
+          <a:srgbClr val="FAF8F4"/>
         </a:solidFill>
         <a:effectLst/>
       </p:bgPr>
@@ -10744,30 +10657,41 @@
         <p:nvPr/>
       </p:nvGrpSpPr>
       <p:grpSpPr/>
-      <p:pic>
-        <p:nvPicPr>
-          <p:cNvPr id="2" name="Picture 1" descr="spbstu_logo_02.png"/>
-          <p:cNvPicPr>
-            <a:picLocks noChangeAspect="1"/>
-          </p:cNvPicPr>
-          <p:nvPr/>
-        </p:nvPicPr>
-        <p:blipFill>
-          <a:blip r:embed="rId2"/>
-          <a:stretch>
-            <a:fillRect/>
-          </a:stretch>
-        </p:blipFill>
-        <p:spPr>
-          <a:xfrm>
-            <a:off x="502920" y="310896"/>
-            <a:ext cx="1600200" cy="552069"/>
-          </a:xfrm>
-          <a:prstGeom prst="rect">
-            <a:avLst/>
-          </a:prstGeom>
-        </p:spPr>
-      </p:pic>
+      <p:sp>
+        <p:nvSpPr>
+          <p:cNvPr id="2" name="TextBox 1"/>
+          <p:cNvSpPr txBox="1"/>
+          <p:nvPr/>
+        </p:nvSpPr>
+        <p:spPr>
+          <a:xfrm>
+            <a:off x="685800" y="320040"/>
+            <a:ext cx="6949440" cy="310896"/>
+          </a:xfrm>
+          <a:prstGeom prst="rect">
+            <a:avLst/>
+          </a:prstGeom>
+          <a:noFill/>
+        </p:spPr>
+        <p:txBody>
+          <a:bodyPr wrap="square">
+            <a:noAutofit/>
+          </a:bodyPr>
+          <a:lstStyle/>
+          <a:p>
+            <a:pPr algn="l"/>
+            <a:r>
+              <a:rPr sz="1000" b="0">
+                <a:solidFill>
+                  <a:srgbClr val="626262"/>
+                </a:solidFill>
+                <a:latin typeface="Arial"/>
+              </a:rPr>
+              <a:t>Основные работы, использованные в курсовой</a:t>
+            </a:r>
+          </a:p>
+        </p:txBody>
+      </p:sp>
       <p:sp>
         <p:nvSpPr>
           <p:cNvPr id="3" name="TextBox 2"/>
@@ -10776,8 +10700,8 @@
         </p:nvSpPr>
         <p:spPr>
           <a:xfrm>
-            <a:off x="2743200" y="320040"/>
-            <a:ext cx="6217920" cy="310896"/>
+            <a:off x="685800" y="630936"/>
+            <a:ext cx="8001000" cy="475488"/>
           </a:xfrm>
           <a:prstGeom prst="rect">
             <a:avLst/>
@@ -10792,44 +10716,9 @@
           <a:p>
             <a:pPr algn="l"/>
             <a:r>
-              <a:rPr sz="1000" b="0">
-                <a:solidFill>
-                  <a:srgbClr val="5C675F"/>
-                </a:solidFill>
-                <a:latin typeface="Arial"/>
-              </a:rPr>
-              <a:t>Основные работы, использованные в курсовой</a:t>
-            </a:r>
-          </a:p>
-        </p:txBody>
-      </p:sp>
-      <p:sp>
-        <p:nvSpPr>
-          <p:cNvPr id="4" name="TextBox 3"/>
-          <p:cNvSpPr txBox="1"/>
-          <p:nvPr/>
-        </p:nvSpPr>
-        <p:spPr>
-          <a:xfrm>
-            <a:off x="2743200" y="630936"/>
-            <a:ext cx="7132320" cy="475488"/>
-          </a:xfrm>
-          <a:prstGeom prst="rect">
-            <a:avLst/>
-          </a:prstGeom>
-          <a:noFill/>
-        </p:spPr>
-        <p:txBody>
-          <a:bodyPr wrap="square">
-            <a:noAutofit/>
-          </a:bodyPr>
-          <a:lstStyle/>
-          <a:p>
-            <a:pPr algn="l"/>
-            <a:r>
               <a:rPr sz="2400" b="1">
                 <a:solidFill>
-                  <a:srgbClr val="244128"/>
+                  <a:srgbClr val="2D5644"/>
                 </a:solidFill>
                 <a:latin typeface="Arial"/>
               </a:rPr>
@@ -10840,20 +10729,20 @@
       </p:sp>
       <p:sp>
         <p:nvSpPr>
-          <p:cNvPr id="5" name="Rectangle 4"/>
+          <p:cNvPr id="4" name="Rectangle 3"/>
           <p:cNvSpPr/>
           <p:nvPr/>
         </p:nvSpPr>
         <p:spPr>
           <a:xfrm>
-            <a:off x="502920" y="1170432"/>
-            <a:ext cx="11155680" cy="32004"/>
+            <a:off x="685800" y="1170432"/>
+            <a:ext cx="10515600" cy="22860"/>
           </a:xfrm>
           <a:prstGeom prst="rect">
             <a:avLst/>
           </a:prstGeom>
           <a:solidFill>
-            <a:srgbClr val="3AAA35"/>
+            <a:srgbClr val="F8DCC6"/>
           </a:solidFill>
           <a:ln>
             <a:noFill/>
@@ -10883,14 +10772,49 @@
       </p:sp>
       <p:sp>
         <p:nvSpPr>
+          <p:cNvPr id="5" name="TextBox 4"/>
+          <p:cNvSpPr txBox="1"/>
+          <p:nvPr/>
+        </p:nvSpPr>
+        <p:spPr>
+          <a:xfrm>
+            <a:off x="9464040" y="411480"/>
+            <a:ext cx="2194560" cy="310896"/>
+          </a:xfrm>
+          <a:prstGeom prst="rect">
+            <a:avLst/>
+          </a:prstGeom>
+          <a:noFill/>
+        </p:spPr>
+        <p:txBody>
+          <a:bodyPr wrap="square">
+            <a:noAutofit/>
+          </a:bodyPr>
+          <a:lstStyle/>
+          <a:p>
+            <a:pPr algn="r"/>
+            <a:r>
+              <a:rPr sz="1000" b="0">
+                <a:solidFill>
+                  <a:srgbClr val="626262"/>
+                </a:solidFill>
+                <a:latin typeface="Arial"/>
+              </a:rPr>
+              <a:t>6:20–6:45</a:t>
+            </a:r>
+          </a:p>
+        </p:txBody>
+      </p:sp>
+      <p:sp>
+        <p:nvSpPr>
           <p:cNvPr id="6" name="TextBox 5"/>
           <p:cNvSpPr txBox="1"/>
           <p:nvPr/>
         </p:nvSpPr>
         <p:spPr>
           <a:xfrm>
-            <a:off x="9464040" y="411480"/>
-            <a:ext cx="2194560" cy="310896"/>
+            <a:off x="11018520" y="6355080"/>
+            <a:ext cx="640080" cy="228600"/>
           </a:xfrm>
           <a:prstGeom prst="rect">
             <a:avLst/>
@@ -10907,42 +10831,7 @@
             <a:r>
               <a:rPr sz="1000" b="0">
                 <a:solidFill>
-                  <a:srgbClr val="5C675F"/>
-                </a:solidFill>
-                <a:latin typeface="Arial"/>
-              </a:rPr>
-              <a:t>6:20–6:45</a:t>
-            </a:r>
-          </a:p>
-        </p:txBody>
-      </p:sp>
-      <p:sp>
-        <p:nvSpPr>
-          <p:cNvPr id="7" name="TextBox 6"/>
-          <p:cNvSpPr txBox="1"/>
-          <p:nvPr/>
-        </p:nvSpPr>
-        <p:spPr>
-          <a:xfrm>
-            <a:off x="11018520" y="6355080"/>
-            <a:ext cx="640080" cy="228600"/>
-          </a:xfrm>
-          <a:prstGeom prst="rect">
-            <a:avLst/>
-          </a:prstGeom>
-          <a:noFill/>
-        </p:spPr>
-        <p:txBody>
-          <a:bodyPr wrap="square">
-            <a:noAutofit/>
-          </a:bodyPr>
-          <a:lstStyle/>
-          <a:p>
-            <a:pPr algn="r"/>
-            <a:r>
-              <a:rPr sz="1000" b="0">
-                <a:solidFill>
-                  <a:srgbClr val="5C675F"/>
+                  <a:srgbClr val="626262"/>
                 </a:solidFill>
                 <a:latin typeface="Arial"/>
               </a:rPr>
@@ -10953,7 +10842,7 @@
       </p:sp>
       <p:sp>
         <p:nvSpPr>
-          <p:cNvPr id="8" name="Rectangle 7"/>
+          <p:cNvPr id="7" name="Rectangle 6"/>
           <p:cNvSpPr/>
           <p:nvPr/>
         </p:nvSpPr>
@@ -10996,7 +10885,7 @@
       </p:sp>
       <p:sp>
         <p:nvSpPr>
-          <p:cNvPr id="9" name="TextBox 8"/>
+          <p:cNvPr id="8" name="TextBox 7"/>
           <p:cNvSpPr txBox="1"/>
           <p:nvPr/>
         </p:nvSpPr>
@@ -11024,11 +10913,11 @@
             <a:r>
               <a:rPr sz="1200" b="1">
                 <a:solidFill>
-                  <a:srgbClr val="DB4928"/>
-                </a:solidFill>
-                <a:latin typeface="Arial"/>
-              </a:rPr>
-              <a:t>■ </a:t>
+                  <a:srgbClr val="E6915F"/>
+                </a:solidFill>
+                <a:latin typeface="Arial"/>
+              </a:rPr>
+              <a:t>• </a:t>
             </a:r>
             <a:r>
               <a:rPr sz="1200" b="0">
@@ -11049,11 +10938,11 @@
             <a:r>
               <a:rPr sz="1200" b="1">
                 <a:solidFill>
-                  <a:srgbClr val="DB4928"/>
-                </a:solidFill>
-                <a:latin typeface="Arial"/>
-              </a:rPr>
-              <a:t>■ </a:t>
+                  <a:srgbClr val="E6915F"/>
+                </a:solidFill>
+                <a:latin typeface="Arial"/>
+              </a:rPr>
+              <a:t>• </a:t>
             </a:r>
             <a:r>
               <a:rPr sz="1200" b="0">
@@ -11074,11 +10963,11 @@
             <a:r>
               <a:rPr sz="1200" b="1">
                 <a:solidFill>
-                  <a:srgbClr val="DB4928"/>
-                </a:solidFill>
-                <a:latin typeface="Arial"/>
-              </a:rPr>
-              <a:t>■ </a:t>
+                  <a:srgbClr val="E6915F"/>
+                </a:solidFill>
+                <a:latin typeface="Arial"/>
+              </a:rPr>
+              <a:t>• </a:t>
             </a:r>
             <a:r>
               <a:rPr sz="1200" b="0">
@@ -11099,11 +10988,11 @@
             <a:r>
               <a:rPr sz="1200" b="1">
                 <a:solidFill>
-                  <a:srgbClr val="DB4928"/>
-                </a:solidFill>
-                <a:latin typeface="Arial"/>
-              </a:rPr>
-              <a:t>■ </a:t>
+                  <a:srgbClr val="E6915F"/>
+                </a:solidFill>
+                <a:latin typeface="Arial"/>
+              </a:rPr>
+              <a:t>• </a:t>
             </a:r>
             <a:r>
               <a:rPr sz="1200" b="0">
@@ -11124,11 +11013,11 @@
             <a:r>
               <a:rPr sz="1200" b="1">
                 <a:solidFill>
-                  <a:srgbClr val="DB4928"/>
-                </a:solidFill>
-                <a:latin typeface="Arial"/>
-              </a:rPr>
-              <a:t>■ </a:t>
+                  <a:srgbClr val="E6915F"/>
+                </a:solidFill>
+                <a:latin typeface="Arial"/>
+              </a:rPr>
+              <a:t>• </a:t>
             </a:r>
             <a:r>
               <a:rPr sz="1200" b="0">
@@ -11149,11 +11038,11 @@
             <a:r>
               <a:rPr sz="1200" b="1">
                 <a:solidFill>
-                  <a:srgbClr val="DB4928"/>
-                </a:solidFill>
-                <a:latin typeface="Arial"/>
-              </a:rPr>
-              <a:t>■ </a:t>
+                  <a:srgbClr val="E6915F"/>
+                </a:solidFill>
+                <a:latin typeface="Arial"/>
+              </a:rPr>
+              <a:t>• </a:t>
             </a:r>
             <a:r>
               <a:rPr sz="1200" b="0">
@@ -11174,11 +11063,11 @@
             <a:r>
               <a:rPr sz="1200" b="1">
                 <a:solidFill>
-                  <a:srgbClr val="DB4928"/>
-                </a:solidFill>
-                <a:latin typeface="Arial"/>
-              </a:rPr>
-              <a:t>■ </a:t>
+                  <a:srgbClr val="E6915F"/>
+                </a:solidFill>
+                <a:latin typeface="Arial"/>
+              </a:rPr>
+              <a:t>• </a:t>
             </a:r>
             <a:r>
               <a:rPr sz="1200" b="0">
@@ -11199,11 +11088,11 @@
             <a:r>
               <a:rPr sz="1200" b="1">
                 <a:solidFill>
-                  <a:srgbClr val="DB4928"/>
-                </a:solidFill>
-                <a:latin typeface="Arial"/>
-              </a:rPr>
-              <a:t>■ </a:t>
+                  <a:srgbClr val="E6915F"/>
+                </a:solidFill>
+                <a:latin typeface="Arial"/>
+              </a:rPr>
+              <a:t>• </a:t>
             </a:r>
             <a:r>
               <a:rPr sz="1200" b="0">
